--- a/docs/ecostats_lectures/lecture_03/03_01_lecture_powerpoint.pptx
+++ b/docs/ecostats_lectures/lecture_03/03_01_lecture_powerpoint.pptx
@@ -54,7 +54,6 @@
     <p:sldId id="302" r:id="rId48"/>
     <p:sldId id="303" r:id="rId49"/>
     <p:sldId id="304" r:id="rId50"/>
-    <p:sldId id="305" r:id="rId51"/>
   </p:sldIdLst>
   <p:sldSz cx="9144000" cy="5143500" type="screen16x9"/>
   <p:notesSz cx="6858000" cy="9144000"/>
@@ -4148,404 +4147,23 @@
               <a:t>Mean length of all fish: 324.5 mm</a:t>
             </a:r>
           </a:p>
+          <a:p>
+            <a:pPr lvl="0" indent="0">
+              <a:buNone/>
+            </a:pPr>
+            <a:r>
+              <a:rPr>
+                <a:latin typeface="Courier"/>
+              </a:rPr>
+              <a:t># A tibble: 2 × 2
+  lake  mean_length
+  &lt;chr&gt;       &lt;dbl&gt;
+1 I3           266.
+2 I8           363.</a:t>
+            </a:r>
+          </a:p>
         </p:txBody>
       </p:sp>
-      <p:graphicFrame xmlns:a="http://schemas.openxmlformats.org/drawingml/2006/main" xmlns:r="http://schemas.openxmlformats.org/officeDocument/2006/relationships" xmlns:p="http://schemas.openxmlformats.org/presentationml/2006/main">
-        <p:nvGraphicFramePr>
-          <p:cNvPr id="865498621" name=""/>
-          <p:cNvGraphicFramePr>
-            <a:graphicFrameLocks noGrp="true"/>
-          </p:cNvGraphicFramePr>
-          <p:nvPr/>
-        </p:nvGraphicFramePr>
-        <p:xfrm rot="0">
-          <a:off x="914400" y="1828800"/>
-          <a:ext cx="9144000" cy="5486400"/>
-        </p:xfrm>
-        <a:graphic>
-          <a:graphicData uri="http://schemas.openxmlformats.org/drawingml/2006/table">
-            <a:tbl>
-              <a:tblPr/>
-              <a:tblGrid>
-                <a:gridCol w="685800"/>
-                <a:gridCol w="685800"/>
-              </a:tblGrid>
-              <a:tr h="228600">
-                <a:tc>
-                  <a:txBody>
-                    <a:bodyPr/>
-                    <a:lstStyle/>
-                    <a:p>
-                      <a:pPr algn="l" marL="63500" marR="63500">
-                        <a:lnSpc>
-                          <a:spcPct val="100000"/>
-                        </a:lnSpc>
-                        <a:spcBef>
-                          <a:spcPts val="500"/>
-                        </a:spcBef>
-                        <a:spcAft>
-                          <a:spcPts val="500"/>
-                        </a:spcAft>
-                        <a:buNone/>
-                      </a:pPr>
-                      <a:r>
-                        <a:rPr cap="none" sz="1100" i="0" b="0" u="none">
-                          <a:solidFill>
-                            <a:srgbClr val="000000">
-                              <a:alpha val="100000"/>
-                            </a:srgbClr>
-                          </a:solidFill>
-                          <a:latin typeface="Helvetica"/>
-                          <a:cs typeface="Helvetica"/>
-                          <a:ea typeface="Helvetica"/>
-                          <a:sym typeface="Helvetica"/>
-                        </a:rPr>
-                        <a:t>lake</a:t>
-                      </a:r>
-                    </a:p>
-                  </a:txBody>
-                  <a:tcPr anchor="ctr" marB="63500" marT="63500" marR="0" marL="0">
-                    <a:lnL algn="ctr" cmpd="sng" cap="flat" w="0">
-                      <a:noFill/>
-                      <a:prstDash val="solid"/>
-                    </a:lnL>
-                    <a:lnR algn="ctr" cmpd="sng" cap="flat" w="0">
-                      <a:noFill/>
-                      <a:prstDash val="solid"/>
-                    </a:lnR>
-                    <a:lnT algn="ctr" cmpd="sng" cap="flat" w="19050">
-                      <a:solidFill>
-                        <a:srgbClr val="666666">
-                          <a:alpha val="100000"/>
-                        </a:srgbClr>
-                      </a:solidFill>
-                      <a:prstDash val="solid"/>
-                    </a:lnT>
-                    <a:lnB algn="ctr" cmpd="sng" cap="flat" w="19050">
-                      <a:solidFill>
-                        <a:srgbClr val="666666">
-                          <a:alpha val="100000"/>
-                        </a:srgbClr>
-                      </a:solidFill>
-                      <a:prstDash val="solid"/>
-                    </a:lnB>
-                    <a:solidFill>
-                      <a:srgbClr val="FFFFFF">
-                        <a:alpha val="0"/>
-                      </a:srgbClr>
-                    </a:solidFill>
-                  </a:tcPr>
-                </a:tc>
-                <a:tc>
-                  <a:txBody>
-                    <a:bodyPr/>
-                    <a:lstStyle/>
-                    <a:p>
-                      <a:pPr algn="r" marL="63500" marR="63500">
-                        <a:lnSpc>
-                          <a:spcPct val="100000"/>
-                        </a:lnSpc>
-                        <a:spcBef>
-                          <a:spcPts val="500"/>
-                        </a:spcBef>
-                        <a:spcAft>
-                          <a:spcPts val="500"/>
-                        </a:spcAft>
-                        <a:buNone/>
-                      </a:pPr>
-                      <a:r>
-                        <a:rPr cap="none" sz="1100" i="0" b="0" u="none">
-                          <a:solidFill>
-                            <a:srgbClr val="000000">
-                              <a:alpha val="100000"/>
-                            </a:srgbClr>
-                          </a:solidFill>
-                          <a:latin typeface="Helvetica"/>
-                          <a:cs typeface="Helvetica"/>
-                          <a:ea typeface="Helvetica"/>
-                          <a:sym typeface="Helvetica"/>
-                        </a:rPr>
-                        <a:t>mean_length</a:t>
-                      </a:r>
-                    </a:p>
-                  </a:txBody>
-                  <a:tcPr anchor="ctr" marB="63500" marT="63500" marR="0" marL="0">
-                    <a:lnL algn="ctr" cmpd="sng" cap="flat" w="0">
-                      <a:noFill/>
-                      <a:prstDash val="solid"/>
-                    </a:lnL>
-                    <a:lnR algn="ctr" cmpd="sng" cap="flat" w="0">
-                      <a:noFill/>
-                      <a:prstDash val="solid"/>
-                    </a:lnR>
-                    <a:lnT algn="ctr" cmpd="sng" cap="flat" w="19050">
-                      <a:solidFill>
-                        <a:srgbClr val="666666">
-                          <a:alpha val="100000"/>
-                        </a:srgbClr>
-                      </a:solidFill>
-                      <a:prstDash val="solid"/>
-                    </a:lnT>
-                    <a:lnB algn="ctr" cmpd="sng" cap="flat" w="19050">
-                      <a:solidFill>
-                        <a:srgbClr val="666666">
-                          <a:alpha val="100000"/>
-                        </a:srgbClr>
-                      </a:solidFill>
-                      <a:prstDash val="solid"/>
-                    </a:lnB>
-                    <a:solidFill>
-                      <a:srgbClr val="FFFFFF">
-                        <a:alpha val="0"/>
-                      </a:srgbClr>
-                    </a:solidFill>
-                  </a:tcPr>
-                </a:tc>
-              </a:tr>
-              <a:tr h="228600">
-                <a:tc>
-                  <a:txBody>
-                    <a:bodyPr/>
-                    <a:lstStyle/>
-                    <a:p>
-                      <a:pPr algn="l" marL="63500" marR="63500">
-                        <a:lnSpc>
-                          <a:spcPct val="100000"/>
-                        </a:lnSpc>
-                        <a:spcBef>
-                          <a:spcPts val="500"/>
-                        </a:spcBef>
-                        <a:spcAft>
-                          <a:spcPts val="500"/>
-                        </a:spcAft>
-                        <a:buNone/>
-                      </a:pPr>
-                      <a:r>
-                        <a:rPr cap="none" sz="1100" i="0" b="0" u="none">
-                          <a:solidFill>
-                            <a:srgbClr val="000000">
-                              <a:alpha val="100000"/>
-                            </a:srgbClr>
-                          </a:solidFill>
-                          <a:latin typeface="Helvetica"/>
-                          <a:cs typeface="Helvetica"/>
-                          <a:ea typeface="Helvetica"/>
-                          <a:sym typeface="Helvetica"/>
-                        </a:rPr>
-                        <a:t>I3</a:t>
-                      </a:r>
-                    </a:p>
-                  </a:txBody>
-                  <a:tcPr anchor="ctr" marB="63500" marT="63500" marR="0" marL="0">
-                    <a:lnL algn="ctr" cmpd="sng" cap="flat" w="0">
-                      <a:noFill/>
-                      <a:prstDash val="solid"/>
-                    </a:lnL>
-                    <a:lnR algn="ctr" cmpd="sng" cap="flat" w="0">
-                      <a:noFill/>
-                      <a:prstDash val="solid"/>
-                    </a:lnR>
-                    <a:lnT algn="ctr" cmpd="sng" cap="flat" w="0">
-                      <a:noFill/>
-                      <a:prstDash val="solid"/>
-                    </a:lnT>
-                    <a:lnB algn="ctr" cmpd="sng" cap="flat" w="0">
-                      <a:noFill/>
-                      <a:prstDash val="solid"/>
-                    </a:lnB>
-                    <a:solidFill>
-                      <a:srgbClr val="FFFFFF">
-                        <a:alpha val="0"/>
-                      </a:srgbClr>
-                    </a:solidFill>
-                  </a:tcPr>
-                </a:tc>
-                <a:tc>
-                  <a:txBody>
-                    <a:bodyPr/>
-                    <a:lstStyle/>
-                    <a:p>
-                      <a:pPr algn="r" marL="63500" marR="63500">
-                        <a:lnSpc>
-                          <a:spcPct val="100000"/>
-                        </a:lnSpc>
-                        <a:spcBef>
-                          <a:spcPts val="500"/>
-                        </a:spcBef>
-                        <a:spcAft>
-                          <a:spcPts val="500"/>
-                        </a:spcAft>
-                        <a:buNone/>
-                      </a:pPr>
-                      <a:r>
-                        <a:rPr cap="none" sz="1100" i="0" b="0" u="none">
-                          <a:solidFill>
-                            <a:srgbClr val="000000">
-                              <a:alpha val="100000"/>
-                            </a:srgbClr>
-                          </a:solidFill>
-                          <a:latin typeface="Helvetica"/>
-                          <a:cs typeface="Helvetica"/>
-                          <a:ea typeface="Helvetica"/>
-                          <a:sym typeface="Helvetica"/>
-                        </a:rPr>
-                        <a:t>265.6061</a:t>
-                      </a:r>
-                    </a:p>
-                  </a:txBody>
-                  <a:tcPr anchor="ctr" marB="63500" marT="63500" marR="0" marL="0">
-                    <a:lnL algn="ctr" cmpd="sng" cap="flat" w="0">
-                      <a:noFill/>
-                      <a:prstDash val="solid"/>
-                    </a:lnL>
-                    <a:lnR algn="ctr" cmpd="sng" cap="flat" w="0">
-                      <a:noFill/>
-                      <a:prstDash val="solid"/>
-                    </a:lnR>
-                    <a:lnT algn="ctr" cmpd="sng" cap="flat" w="0">
-                      <a:noFill/>
-                      <a:prstDash val="solid"/>
-                    </a:lnT>
-                    <a:lnB algn="ctr" cmpd="sng" cap="flat" w="0">
-                      <a:noFill/>
-                      <a:prstDash val="solid"/>
-                    </a:lnB>
-                    <a:solidFill>
-                      <a:srgbClr val="FFFFFF">
-                        <a:alpha val="0"/>
-                      </a:srgbClr>
-                    </a:solidFill>
-                  </a:tcPr>
-                </a:tc>
-              </a:tr>
-              <a:tr h="228600">
-                <a:tc>
-                  <a:txBody>
-                    <a:bodyPr/>
-                    <a:lstStyle/>
-                    <a:p>
-                      <a:pPr algn="l" marL="63500" marR="63500">
-                        <a:lnSpc>
-                          <a:spcPct val="100000"/>
-                        </a:lnSpc>
-                        <a:spcBef>
-                          <a:spcPts val="500"/>
-                        </a:spcBef>
-                        <a:spcAft>
-                          <a:spcPts val="500"/>
-                        </a:spcAft>
-                        <a:buNone/>
-                      </a:pPr>
-                      <a:r>
-                        <a:rPr cap="none" sz="1100" i="0" b="0" u="none">
-                          <a:solidFill>
-                            <a:srgbClr val="000000">
-                              <a:alpha val="100000"/>
-                            </a:srgbClr>
-                          </a:solidFill>
-                          <a:latin typeface="Helvetica"/>
-                          <a:cs typeface="Helvetica"/>
-                          <a:ea typeface="Helvetica"/>
-                          <a:sym typeface="Helvetica"/>
-                        </a:rPr>
-                        <a:t>I8</a:t>
-                      </a:r>
-                    </a:p>
-                  </a:txBody>
-                  <a:tcPr anchor="ctr" marB="63500" marT="63500" marR="0" marL="0">
-                    <a:lnL algn="ctr" cmpd="sng" cap="flat" w="0">
-                      <a:noFill/>
-                      <a:prstDash val="solid"/>
-                    </a:lnL>
-                    <a:lnR algn="ctr" cmpd="sng" cap="flat" w="0">
-                      <a:noFill/>
-                      <a:prstDash val="solid"/>
-                    </a:lnR>
-                    <a:lnT algn="ctr" cmpd="sng" cap="flat" w="0">
-                      <a:noFill/>
-                      <a:prstDash val="solid"/>
-                    </a:lnT>
-                    <a:lnB algn="ctr" cmpd="sng" cap="flat" w="19050">
-                      <a:solidFill>
-                        <a:srgbClr val="666666">
-                          <a:alpha val="100000"/>
-                        </a:srgbClr>
-                      </a:solidFill>
-                      <a:prstDash val="solid"/>
-                    </a:lnB>
-                    <a:solidFill>
-                      <a:srgbClr val="FFFFFF">
-                        <a:alpha val="0"/>
-                      </a:srgbClr>
-                    </a:solidFill>
-                  </a:tcPr>
-                </a:tc>
-                <a:tc>
-                  <a:txBody>
-                    <a:bodyPr/>
-                    <a:lstStyle/>
-                    <a:p>
-                      <a:pPr algn="r" marL="63500" marR="63500">
-                        <a:lnSpc>
-                          <a:spcPct val="100000"/>
-                        </a:lnSpc>
-                        <a:spcBef>
-                          <a:spcPts val="500"/>
-                        </a:spcBef>
-                        <a:spcAft>
-                          <a:spcPts val="500"/>
-                        </a:spcAft>
-                        <a:buNone/>
-                      </a:pPr>
-                      <a:r>
-                        <a:rPr cap="none" sz="1100" i="0" b="0" u="none">
-                          <a:solidFill>
-                            <a:srgbClr val="000000">
-                              <a:alpha val="100000"/>
-                            </a:srgbClr>
-                          </a:solidFill>
-                          <a:latin typeface="Helvetica"/>
-                          <a:cs typeface="Helvetica"/>
-                          <a:ea typeface="Helvetica"/>
-                          <a:sym typeface="Helvetica"/>
-                        </a:rPr>
-                        <a:t>362.5980</a:t>
-                      </a:r>
-                    </a:p>
-                  </a:txBody>
-                  <a:tcPr anchor="ctr" marB="63500" marT="63500" marR="0" marL="0">
-                    <a:lnL algn="ctr" cmpd="sng" cap="flat" w="0">
-                      <a:noFill/>
-                      <a:prstDash val="solid"/>
-                    </a:lnL>
-                    <a:lnR algn="ctr" cmpd="sng" cap="flat" w="0">
-                      <a:noFill/>
-                      <a:prstDash val="solid"/>
-                    </a:lnR>
-                    <a:lnT algn="ctr" cmpd="sng" cap="flat" w="0">
-                      <a:noFill/>
-                      <a:prstDash val="solid"/>
-                    </a:lnT>
-                    <a:lnB algn="ctr" cmpd="sng" cap="flat" w="19050">
-                      <a:solidFill>
-                        <a:srgbClr val="666666">
-                          <a:alpha val="100000"/>
-                        </a:srgbClr>
-                      </a:solidFill>
-                      <a:prstDash val="solid"/>
-                    </a:lnB>
-                    <a:solidFill>
-                      <a:srgbClr val="FFFFFF">
-                        <a:alpha val="0"/>
-                      </a:srgbClr>
-                    </a:solidFill>
-                  </a:tcPr>
-                </a:tc>
-              </a:tr>
-            </a:tbl>
-          </a:graphicData>
-        </a:graphic>
-      </p:graphicFrame>
     </p:spTree>
   </p:cSld>
 </p:sld>
@@ -4646,404 +4264,23 @@
               <a:t>Median length of all fish: 324.5 mm</a:t>
             </a:r>
           </a:p>
+          <a:p>
+            <a:pPr lvl="0" indent="0">
+              <a:buNone/>
+            </a:pPr>
+            <a:r>
+              <a:rPr>
+                <a:latin typeface="Courier"/>
+              </a:rPr>
+              <a:t># A tibble: 2 × 2
+  lake  median_length
+  &lt;chr&gt;         &lt;dbl&gt;
+1 I3              266
+2 I8              373</a:t>
+            </a:r>
+          </a:p>
         </p:txBody>
       </p:sp>
-      <p:graphicFrame xmlns:a="http://schemas.openxmlformats.org/drawingml/2006/main" xmlns:r="http://schemas.openxmlformats.org/officeDocument/2006/relationships" xmlns:p="http://schemas.openxmlformats.org/presentationml/2006/main">
-        <p:nvGraphicFramePr>
-          <p:cNvPr id="134251882" name=""/>
-          <p:cNvGraphicFramePr>
-            <a:graphicFrameLocks noGrp="true"/>
-          </p:cNvGraphicFramePr>
-          <p:nvPr/>
-        </p:nvGraphicFramePr>
-        <p:xfrm rot="0">
-          <a:off x="914400" y="1828800"/>
-          <a:ext cx="9144000" cy="5486400"/>
-        </p:xfrm>
-        <a:graphic>
-          <a:graphicData uri="http://schemas.openxmlformats.org/drawingml/2006/table">
-            <a:tbl>
-              <a:tblPr/>
-              <a:tblGrid>
-                <a:gridCol w="685800"/>
-                <a:gridCol w="685800"/>
-              </a:tblGrid>
-              <a:tr h="228600">
-                <a:tc>
-                  <a:txBody>
-                    <a:bodyPr/>
-                    <a:lstStyle/>
-                    <a:p>
-                      <a:pPr algn="l" marL="63500" marR="63500">
-                        <a:lnSpc>
-                          <a:spcPct val="100000"/>
-                        </a:lnSpc>
-                        <a:spcBef>
-                          <a:spcPts val="500"/>
-                        </a:spcBef>
-                        <a:spcAft>
-                          <a:spcPts val="500"/>
-                        </a:spcAft>
-                        <a:buNone/>
-                      </a:pPr>
-                      <a:r>
-                        <a:rPr cap="none" sz="1100" i="0" b="0" u="none">
-                          <a:solidFill>
-                            <a:srgbClr val="000000">
-                              <a:alpha val="100000"/>
-                            </a:srgbClr>
-                          </a:solidFill>
-                          <a:latin typeface="Helvetica"/>
-                          <a:cs typeface="Helvetica"/>
-                          <a:ea typeface="Helvetica"/>
-                          <a:sym typeface="Helvetica"/>
-                        </a:rPr>
-                        <a:t>lake</a:t>
-                      </a:r>
-                    </a:p>
-                  </a:txBody>
-                  <a:tcPr anchor="ctr" marB="63500" marT="63500" marR="0" marL="0">
-                    <a:lnL algn="ctr" cmpd="sng" cap="flat" w="0">
-                      <a:noFill/>
-                      <a:prstDash val="solid"/>
-                    </a:lnL>
-                    <a:lnR algn="ctr" cmpd="sng" cap="flat" w="0">
-                      <a:noFill/>
-                      <a:prstDash val="solid"/>
-                    </a:lnR>
-                    <a:lnT algn="ctr" cmpd="sng" cap="flat" w="19050">
-                      <a:solidFill>
-                        <a:srgbClr val="666666">
-                          <a:alpha val="100000"/>
-                        </a:srgbClr>
-                      </a:solidFill>
-                      <a:prstDash val="solid"/>
-                    </a:lnT>
-                    <a:lnB algn="ctr" cmpd="sng" cap="flat" w="19050">
-                      <a:solidFill>
-                        <a:srgbClr val="666666">
-                          <a:alpha val="100000"/>
-                        </a:srgbClr>
-                      </a:solidFill>
-                      <a:prstDash val="solid"/>
-                    </a:lnB>
-                    <a:solidFill>
-                      <a:srgbClr val="FFFFFF">
-                        <a:alpha val="0"/>
-                      </a:srgbClr>
-                    </a:solidFill>
-                  </a:tcPr>
-                </a:tc>
-                <a:tc>
-                  <a:txBody>
-                    <a:bodyPr/>
-                    <a:lstStyle/>
-                    <a:p>
-                      <a:pPr algn="r" marL="63500" marR="63500">
-                        <a:lnSpc>
-                          <a:spcPct val="100000"/>
-                        </a:lnSpc>
-                        <a:spcBef>
-                          <a:spcPts val="500"/>
-                        </a:spcBef>
-                        <a:spcAft>
-                          <a:spcPts val="500"/>
-                        </a:spcAft>
-                        <a:buNone/>
-                      </a:pPr>
-                      <a:r>
-                        <a:rPr cap="none" sz="1100" i="0" b="0" u="none">
-                          <a:solidFill>
-                            <a:srgbClr val="000000">
-                              <a:alpha val="100000"/>
-                            </a:srgbClr>
-                          </a:solidFill>
-                          <a:latin typeface="Helvetica"/>
-                          <a:cs typeface="Helvetica"/>
-                          <a:ea typeface="Helvetica"/>
-                          <a:sym typeface="Helvetica"/>
-                        </a:rPr>
-                        <a:t>median_length</a:t>
-                      </a:r>
-                    </a:p>
-                  </a:txBody>
-                  <a:tcPr anchor="ctr" marB="63500" marT="63500" marR="0" marL="0">
-                    <a:lnL algn="ctr" cmpd="sng" cap="flat" w="0">
-                      <a:noFill/>
-                      <a:prstDash val="solid"/>
-                    </a:lnL>
-                    <a:lnR algn="ctr" cmpd="sng" cap="flat" w="0">
-                      <a:noFill/>
-                      <a:prstDash val="solid"/>
-                    </a:lnR>
-                    <a:lnT algn="ctr" cmpd="sng" cap="flat" w="19050">
-                      <a:solidFill>
-                        <a:srgbClr val="666666">
-                          <a:alpha val="100000"/>
-                        </a:srgbClr>
-                      </a:solidFill>
-                      <a:prstDash val="solid"/>
-                    </a:lnT>
-                    <a:lnB algn="ctr" cmpd="sng" cap="flat" w="19050">
-                      <a:solidFill>
-                        <a:srgbClr val="666666">
-                          <a:alpha val="100000"/>
-                        </a:srgbClr>
-                      </a:solidFill>
-                      <a:prstDash val="solid"/>
-                    </a:lnB>
-                    <a:solidFill>
-                      <a:srgbClr val="FFFFFF">
-                        <a:alpha val="0"/>
-                      </a:srgbClr>
-                    </a:solidFill>
-                  </a:tcPr>
-                </a:tc>
-              </a:tr>
-              <a:tr h="228600">
-                <a:tc>
-                  <a:txBody>
-                    <a:bodyPr/>
-                    <a:lstStyle/>
-                    <a:p>
-                      <a:pPr algn="l" marL="63500" marR="63500">
-                        <a:lnSpc>
-                          <a:spcPct val="100000"/>
-                        </a:lnSpc>
-                        <a:spcBef>
-                          <a:spcPts val="500"/>
-                        </a:spcBef>
-                        <a:spcAft>
-                          <a:spcPts val="500"/>
-                        </a:spcAft>
-                        <a:buNone/>
-                      </a:pPr>
-                      <a:r>
-                        <a:rPr cap="none" sz="1100" i="0" b="0" u="none">
-                          <a:solidFill>
-                            <a:srgbClr val="000000">
-                              <a:alpha val="100000"/>
-                            </a:srgbClr>
-                          </a:solidFill>
-                          <a:latin typeface="Helvetica"/>
-                          <a:cs typeface="Helvetica"/>
-                          <a:ea typeface="Helvetica"/>
-                          <a:sym typeface="Helvetica"/>
-                        </a:rPr>
-                        <a:t>I3</a:t>
-                      </a:r>
-                    </a:p>
-                  </a:txBody>
-                  <a:tcPr anchor="ctr" marB="63500" marT="63500" marR="0" marL="0">
-                    <a:lnL algn="ctr" cmpd="sng" cap="flat" w="0">
-                      <a:noFill/>
-                      <a:prstDash val="solid"/>
-                    </a:lnL>
-                    <a:lnR algn="ctr" cmpd="sng" cap="flat" w="0">
-                      <a:noFill/>
-                      <a:prstDash val="solid"/>
-                    </a:lnR>
-                    <a:lnT algn="ctr" cmpd="sng" cap="flat" w="0">
-                      <a:noFill/>
-                      <a:prstDash val="solid"/>
-                    </a:lnT>
-                    <a:lnB algn="ctr" cmpd="sng" cap="flat" w="0">
-                      <a:noFill/>
-                      <a:prstDash val="solid"/>
-                    </a:lnB>
-                    <a:solidFill>
-                      <a:srgbClr val="FFFFFF">
-                        <a:alpha val="0"/>
-                      </a:srgbClr>
-                    </a:solidFill>
-                  </a:tcPr>
-                </a:tc>
-                <a:tc>
-                  <a:txBody>
-                    <a:bodyPr/>
-                    <a:lstStyle/>
-                    <a:p>
-                      <a:pPr algn="r" marL="63500" marR="63500">
-                        <a:lnSpc>
-                          <a:spcPct val="100000"/>
-                        </a:lnSpc>
-                        <a:spcBef>
-                          <a:spcPts val="500"/>
-                        </a:spcBef>
-                        <a:spcAft>
-                          <a:spcPts val="500"/>
-                        </a:spcAft>
-                        <a:buNone/>
-                      </a:pPr>
-                      <a:r>
-                        <a:rPr cap="none" sz="1100" i="0" b="0" u="none">
-                          <a:solidFill>
-                            <a:srgbClr val="000000">
-                              <a:alpha val="100000"/>
-                            </a:srgbClr>
-                          </a:solidFill>
-                          <a:latin typeface="Helvetica"/>
-                          <a:cs typeface="Helvetica"/>
-                          <a:ea typeface="Helvetica"/>
-                          <a:sym typeface="Helvetica"/>
-                        </a:rPr>
-                        <a:t>266</a:t>
-                      </a:r>
-                    </a:p>
-                  </a:txBody>
-                  <a:tcPr anchor="ctr" marB="63500" marT="63500" marR="0" marL="0">
-                    <a:lnL algn="ctr" cmpd="sng" cap="flat" w="0">
-                      <a:noFill/>
-                      <a:prstDash val="solid"/>
-                    </a:lnL>
-                    <a:lnR algn="ctr" cmpd="sng" cap="flat" w="0">
-                      <a:noFill/>
-                      <a:prstDash val="solid"/>
-                    </a:lnR>
-                    <a:lnT algn="ctr" cmpd="sng" cap="flat" w="0">
-                      <a:noFill/>
-                      <a:prstDash val="solid"/>
-                    </a:lnT>
-                    <a:lnB algn="ctr" cmpd="sng" cap="flat" w="0">
-                      <a:noFill/>
-                      <a:prstDash val="solid"/>
-                    </a:lnB>
-                    <a:solidFill>
-                      <a:srgbClr val="FFFFFF">
-                        <a:alpha val="0"/>
-                      </a:srgbClr>
-                    </a:solidFill>
-                  </a:tcPr>
-                </a:tc>
-              </a:tr>
-              <a:tr h="228600">
-                <a:tc>
-                  <a:txBody>
-                    <a:bodyPr/>
-                    <a:lstStyle/>
-                    <a:p>
-                      <a:pPr algn="l" marL="63500" marR="63500">
-                        <a:lnSpc>
-                          <a:spcPct val="100000"/>
-                        </a:lnSpc>
-                        <a:spcBef>
-                          <a:spcPts val="500"/>
-                        </a:spcBef>
-                        <a:spcAft>
-                          <a:spcPts val="500"/>
-                        </a:spcAft>
-                        <a:buNone/>
-                      </a:pPr>
-                      <a:r>
-                        <a:rPr cap="none" sz="1100" i="0" b="0" u="none">
-                          <a:solidFill>
-                            <a:srgbClr val="000000">
-                              <a:alpha val="100000"/>
-                            </a:srgbClr>
-                          </a:solidFill>
-                          <a:latin typeface="Helvetica"/>
-                          <a:cs typeface="Helvetica"/>
-                          <a:ea typeface="Helvetica"/>
-                          <a:sym typeface="Helvetica"/>
-                        </a:rPr>
-                        <a:t>I8</a:t>
-                      </a:r>
-                    </a:p>
-                  </a:txBody>
-                  <a:tcPr anchor="ctr" marB="63500" marT="63500" marR="0" marL="0">
-                    <a:lnL algn="ctr" cmpd="sng" cap="flat" w="0">
-                      <a:noFill/>
-                      <a:prstDash val="solid"/>
-                    </a:lnL>
-                    <a:lnR algn="ctr" cmpd="sng" cap="flat" w="0">
-                      <a:noFill/>
-                      <a:prstDash val="solid"/>
-                    </a:lnR>
-                    <a:lnT algn="ctr" cmpd="sng" cap="flat" w="0">
-                      <a:noFill/>
-                      <a:prstDash val="solid"/>
-                    </a:lnT>
-                    <a:lnB algn="ctr" cmpd="sng" cap="flat" w="19050">
-                      <a:solidFill>
-                        <a:srgbClr val="666666">
-                          <a:alpha val="100000"/>
-                        </a:srgbClr>
-                      </a:solidFill>
-                      <a:prstDash val="solid"/>
-                    </a:lnB>
-                    <a:solidFill>
-                      <a:srgbClr val="FFFFFF">
-                        <a:alpha val="0"/>
-                      </a:srgbClr>
-                    </a:solidFill>
-                  </a:tcPr>
-                </a:tc>
-                <a:tc>
-                  <a:txBody>
-                    <a:bodyPr/>
-                    <a:lstStyle/>
-                    <a:p>
-                      <a:pPr algn="r" marL="63500" marR="63500">
-                        <a:lnSpc>
-                          <a:spcPct val="100000"/>
-                        </a:lnSpc>
-                        <a:spcBef>
-                          <a:spcPts val="500"/>
-                        </a:spcBef>
-                        <a:spcAft>
-                          <a:spcPts val="500"/>
-                        </a:spcAft>
-                        <a:buNone/>
-                      </a:pPr>
-                      <a:r>
-                        <a:rPr cap="none" sz="1100" i="0" b="0" u="none">
-                          <a:solidFill>
-                            <a:srgbClr val="000000">
-                              <a:alpha val="100000"/>
-                            </a:srgbClr>
-                          </a:solidFill>
-                          <a:latin typeface="Helvetica"/>
-                          <a:cs typeface="Helvetica"/>
-                          <a:ea typeface="Helvetica"/>
-                          <a:sym typeface="Helvetica"/>
-                        </a:rPr>
-                        <a:t>373</a:t>
-                      </a:r>
-                    </a:p>
-                  </a:txBody>
-                  <a:tcPr anchor="ctr" marB="63500" marT="63500" marR="0" marL="0">
-                    <a:lnL algn="ctr" cmpd="sng" cap="flat" w="0">
-                      <a:noFill/>
-                      <a:prstDash val="solid"/>
-                    </a:lnL>
-                    <a:lnR algn="ctr" cmpd="sng" cap="flat" w="0">
-                      <a:noFill/>
-                      <a:prstDash val="solid"/>
-                    </a:lnR>
-                    <a:lnT algn="ctr" cmpd="sng" cap="flat" w="0">
-                      <a:noFill/>
-                      <a:prstDash val="solid"/>
-                    </a:lnT>
-                    <a:lnB algn="ctr" cmpd="sng" cap="flat" w="19050">
-                      <a:solidFill>
-                        <a:srgbClr val="666666">
-                          <a:alpha val="100000"/>
-                        </a:srgbClr>
-                      </a:solidFill>
-                      <a:prstDash val="solid"/>
-                    </a:lnB>
-                    <a:solidFill>
-                      <a:srgbClr val="FFFFFF">
-                        <a:alpha val="0"/>
-                      </a:srgbClr>
-                    </a:solidFill>
-                  </a:tcPr>
-                </a:tc>
-              </a:tr>
-            </a:tbl>
-          </a:graphicData>
-        </a:graphic>
-      </p:graphicFrame>
     </p:spTree>
   </p:cSld>
 </p:sld>
@@ -5464,588 +4701,23 @@
               <a:t>Standard deviation of length: 65 mm</a:t>
             </a:r>
           </a:p>
+          <a:p>
+            <a:pPr lvl="0" indent="0">
+              <a:buNone/>
+            </a:pPr>
+            <a:r>
+              <a:rPr>
+                <a:latin typeface="Courier"/>
+              </a:rPr>
+              <a:t># A tibble: 2 × 3
+  lake  var_length sd_length
+  &lt;chr&gt;      &lt;dbl&gt;     &lt;dbl&gt;
+1 I3          801.      28.3
+2 I8         2739.      52.3</a:t>
+            </a:r>
+          </a:p>
         </p:txBody>
       </p:sp>
-      <p:graphicFrame xmlns:a="http://schemas.openxmlformats.org/drawingml/2006/main" xmlns:r="http://schemas.openxmlformats.org/officeDocument/2006/relationships" xmlns:p="http://schemas.openxmlformats.org/presentationml/2006/main">
-        <p:nvGraphicFramePr>
-          <p:cNvPr id="429456795" name=""/>
-          <p:cNvGraphicFramePr>
-            <a:graphicFrameLocks noGrp="true"/>
-          </p:cNvGraphicFramePr>
-          <p:nvPr/>
-        </p:nvGraphicFramePr>
-        <p:xfrm rot="0">
-          <a:off x="914400" y="1828800"/>
-          <a:ext cx="9144000" cy="5486400"/>
-        </p:xfrm>
-        <a:graphic>
-          <a:graphicData uri="http://schemas.openxmlformats.org/drawingml/2006/table">
-            <a:tbl>
-              <a:tblPr/>
-              <a:tblGrid>
-                <a:gridCol w="685800"/>
-                <a:gridCol w="685800"/>
-                <a:gridCol w="685800"/>
-              </a:tblGrid>
-              <a:tr h="228600">
-                <a:tc>
-                  <a:txBody>
-                    <a:bodyPr/>
-                    <a:lstStyle/>
-                    <a:p>
-                      <a:pPr algn="l" marL="63500" marR="63500">
-                        <a:lnSpc>
-                          <a:spcPct val="100000"/>
-                        </a:lnSpc>
-                        <a:spcBef>
-                          <a:spcPts val="500"/>
-                        </a:spcBef>
-                        <a:spcAft>
-                          <a:spcPts val="500"/>
-                        </a:spcAft>
-                        <a:buNone/>
-                      </a:pPr>
-                      <a:r>
-                        <a:rPr cap="none" sz="1100" i="0" b="0" u="none">
-                          <a:solidFill>
-                            <a:srgbClr val="000000">
-                              <a:alpha val="100000"/>
-                            </a:srgbClr>
-                          </a:solidFill>
-                          <a:latin typeface="Helvetica"/>
-                          <a:cs typeface="Helvetica"/>
-                          <a:ea typeface="Helvetica"/>
-                          <a:sym typeface="Helvetica"/>
-                        </a:rPr>
-                        <a:t>lake</a:t>
-                      </a:r>
-                    </a:p>
-                  </a:txBody>
-                  <a:tcPr anchor="ctr" marB="63500" marT="63500" marR="0" marL="0">
-                    <a:lnL algn="ctr" cmpd="sng" cap="flat" w="0">
-                      <a:noFill/>
-                      <a:prstDash val="solid"/>
-                    </a:lnL>
-                    <a:lnR algn="ctr" cmpd="sng" cap="flat" w="0">
-                      <a:noFill/>
-                      <a:prstDash val="solid"/>
-                    </a:lnR>
-                    <a:lnT algn="ctr" cmpd="sng" cap="flat" w="19050">
-                      <a:solidFill>
-                        <a:srgbClr val="666666">
-                          <a:alpha val="100000"/>
-                        </a:srgbClr>
-                      </a:solidFill>
-                      <a:prstDash val="solid"/>
-                    </a:lnT>
-                    <a:lnB algn="ctr" cmpd="sng" cap="flat" w="19050">
-                      <a:solidFill>
-                        <a:srgbClr val="666666">
-                          <a:alpha val="100000"/>
-                        </a:srgbClr>
-                      </a:solidFill>
-                      <a:prstDash val="solid"/>
-                    </a:lnB>
-                    <a:solidFill>
-                      <a:srgbClr val="FFFFFF">
-                        <a:alpha val="0"/>
-                      </a:srgbClr>
-                    </a:solidFill>
-                  </a:tcPr>
-                </a:tc>
-                <a:tc>
-                  <a:txBody>
-                    <a:bodyPr/>
-                    <a:lstStyle/>
-                    <a:p>
-                      <a:pPr algn="r" marL="63500" marR="63500">
-                        <a:lnSpc>
-                          <a:spcPct val="100000"/>
-                        </a:lnSpc>
-                        <a:spcBef>
-                          <a:spcPts val="500"/>
-                        </a:spcBef>
-                        <a:spcAft>
-                          <a:spcPts val="500"/>
-                        </a:spcAft>
-                        <a:buNone/>
-                      </a:pPr>
-                      <a:r>
-                        <a:rPr cap="none" sz="1100" i="0" b="0" u="none">
-                          <a:solidFill>
-                            <a:srgbClr val="000000">
-                              <a:alpha val="100000"/>
-                            </a:srgbClr>
-                          </a:solidFill>
-                          <a:latin typeface="Helvetica"/>
-                          <a:cs typeface="Helvetica"/>
-                          <a:ea typeface="Helvetica"/>
-                          <a:sym typeface="Helvetica"/>
-                        </a:rPr>
-                        <a:t>var_length</a:t>
-                      </a:r>
-                    </a:p>
-                  </a:txBody>
-                  <a:tcPr anchor="ctr" marB="63500" marT="63500" marR="0" marL="0">
-                    <a:lnL algn="ctr" cmpd="sng" cap="flat" w="0">
-                      <a:noFill/>
-                      <a:prstDash val="solid"/>
-                    </a:lnL>
-                    <a:lnR algn="ctr" cmpd="sng" cap="flat" w="0">
-                      <a:noFill/>
-                      <a:prstDash val="solid"/>
-                    </a:lnR>
-                    <a:lnT algn="ctr" cmpd="sng" cap="flat" w="19050">
-                      <a:solidFill>
-                        <a:srgbClr val="666666">
-                          <a:alpha val="100000"/>
-                        </a:srgbClr>
-                      </a:solidFill>
-                      <a:prstDash val="solid"/>
-                    </a:lnT>
-                    <a:lnB algn="ctr" cmpd="sng" cap="flat" w="19050">
-                      <a:solidFill>
-                        <a:srgbClr val="666666">
-                          <a:alpha val="100000"/>
-                        </a:srgbClr>
-                      </a:solidFill>
-                      <a:prstDash val="solid"/>
-                    </a:lnB>
-                    <a:solidFill>
-                      <a:srgbClr val="FFFFFF">
-                        <a:alpha val="0"/>
-                      </a:srgbClr>
-                    </a:solidFill>
-                  </a:tcPr>
-                </a:tc>
-                <a:tc>
-                  <a:txBody>
-                    <a:bodyPr/>
-                    <a:lstStyle/>
-                    <a:p>
-                      <a:pPr algn="r" marL="63500" marR="63500">
-                        <a:lnSpc>
-                          <a:spcPct val="100000"/>
-                        </a:lnSpc>
-                        <a:spcBef>
-                          <a:spcPts val="500"/>
-                        </a:spcBef>
-                        <a:spcAft>
-                          <a:spcPts val="500"/>
-                        </a:spcAft>
-                        <a:buNone/>
-                      </a:pPr>
-                      <a:r>
-                        <a:rPr cap="none" sz="1100" i="0" b="0" u="none">
-                          <a:solidFill>
-                            <a:srgbClr val="000000">
-                              <a:alpha val="100000"/>
-                            </a:srgbClr>
-                          </a:solidFill>
-                          <a:latin typeface="Helvetica"/>
-                          <a:cs typeface="Helvetica"/>
-                          <a:ea typeface="Helvetica"/>
-                          <a:sym typeface="Helvetica"/>
-                        </a:rPr>
-                        <a:t>sd_length</a:t>
-                      </a:r>
-                    </a:p>
-                  </a:txBody>
-                  <a:tcPr anchor="ctr" marB="63500" marT="63500" marR="0" marL="0">
-                    <a:lnL algn="ctr" cmpd="sng" cap="flat" w="0">
-                      <a:noFill/>
-                      <a:prstDash val="solid"/>
-                    </a:lnL>
-                    <a:lnR algn="ctr" cmpd="sng" cap="flat" w="0">
-                      <a:noFill/>
-                      <a:prstDash val="solid"/>
-                    </a:lnR>
-                    <a:lnT algn="ctr" cmpd="sng" cap="flat" w="19050">
-                      <a:solidFill>
-                        <a:srgbClr val="666666">
-                          <a:alpha val="100000"/>
-                        </a:srgbClr>
-                      </a:solidFill>
-                      <a:prstDash val="solid"/>
-                    </a:lnT>
-                    <a:lnB algn="ctr" cmpd="sng" cap="flat" w="19050">
-                      <a:solidFill>
-                        <a:srgbClr val="666666">
-                          <a:alpha val="100000"/>
-                        </a:srgbClr>
-                      </a:solidFill>
-                      <a:prstDash val="solid"/>
-                    </a:lnB>
-                    <a:solidFill>
-                      <a:srgbClr val="FFFFFF">
-                        <a:alpha val="0"/>
-                      </a:srgbClr>
-                    </a:solidFill>
-                  </a:tcPr>
-                </a:tc>
-              </a:tr>
-              <a:tr h="228600">
-                <a:tc>
-                  <a:txBody>
-                    <a:bodyPr/>
-                    <a:lstStyle/>
-                    <a:p>
-                      <a:pPr algn="l" marL="63500" marR="63500">
-                        <a:lnSpc>
-                          <a:spcPct val="100000"/>
-                        </a:lnSpc>
-                        <a:spcBef>
-                          <a:spcPts val="500"/>
-                        </a:spcBef>
-                        <a:spcAft>
-                          <a:spcPts val="500"/>
-                        </a:spcAft>
-                        <a:buNone/>
-                      </a:pPr>
-                      <a:r>
-                        <a:rPr cap="none" sz="1100" i="0" b="0" u="none">
-                          <a:solidFill>
-                            <a:srgbClr val="000000">
-                              <a:alpha val="100000"/>
-                            </a:srgbClr>
-                          </a:solidFill>
-                          <a:latin typeface="Helvetica"/>
-                          <a:cs typeface="Helvetica"/>
-                          <a:ea typeface="Helvetica"/>
-                          <a:sym typeface="Helvetica"/>
-                        </a:rPr>
-                        <a:t>I3</a:t>
-                      </a:r>
-                    </a:p>
-                  </a:txBody>
-                  <a:tcPr anchor="ctr" marB="63500" marT="63500" marR="0" marL="0">
-                    <a:lnL algn="ctr" cmpd="sng" cap="flat" w="0">
-                      <a:noFill/>
-                      <a:prstDash val="solid"/>
-                    </a:lnL>
-                    <a:lnR algn="ctr" cmpd="sng" cap="flat" w="0">
-                      <a:noFill/>
-                      <a:prstDash val="solid"/>
-                    </a:lnR>
-                    <a:lnT algn="ctr" cmpd="sng" cap="flat" w="0">
-                      <a:noFill/>
-                      <a:prstDash val="solid"/>
-                    </a:lnT>
-                    <a:lnB algn="ctr" cmpd="sng" cap="flat" w="0">
-                      <a:noFill/>
-                      <a:prstDash val="solid"/>
-                    </a:lnB>
-                    <a:solidFill>
-                      <a:srgbClr val="FFFFFF">
-                        <a:alpha val="0"/>
-                      </a:srgbClr>
-                    </a:solidFill>
-                  </a:tcPr>
-                </a:tc>
-                <a:tc>
-                  <a:txBody>
-                    <a:bodyPr/>
-                    <a:lstStyle/>
-                    <a:p>
-                      <a:pPr algn="r" marL="63500" marR="63500">
-                        <a:lnSpc>
-                          <a:spcPct val="100000"/>
-                        </a:lnSpc>
-                        <a:spcBef>
-                          <a:spcPts val="500"/>
-                        </a:spcBef>
-                        <a:spcAft>
-                          <a:spcPts val="500"/>
-                        </a:spcAft>
-                        <a:buNone/>
-                      </a:pPr>
-                      <a:r>
-                        <a:rPr cap="none" sz="1100" i="0" b="0" u="none">
-                          <a:solidFill>
-                            <a:srgbClr val="000000">
-                              <a:alpha val="100000"/>
-                            </a:srgbClr>
-                          </a:solidFill>
-                          <a:latin typeface="Helvetica"/>
-                          <a:cs typeface="Helvetica"/>
-                          <a:ea typeface="Helvetica"/>
-                          <a:sym typeface="Helvetica"/>
-                        </a:rPr>
-                        <a:t>801.104</a:t>
-                      </a:r>
-                    </a:p>
-                  </a:txBody>
-                  <a:tcPr anchor="ctr" marB="63500" marT="63500" marR="0" marL="0">
-                    <a:lnL algn="ctr" cmpd="sng" cap="flat" w="0">
-                      <a:noFill/>
-                      <a:prstDash val="solid"/>
-                    </a:lnL>
-                    <a:lnR algn="ctr" cmpd="sng" cap="flat" w="0">
-                      <a:noFill/>
-                      <a:prstDash val="solid"/>
-                    </a:lnR>
-                    <a:lnT algn="ctr" cmpd="sng" cap="flat" w="0">
-                      <a:noFill/>
-                      <a:prstDash val="solid"/>
-                    </a:lnT>
-                    <a:lnB algn="ctr" cmpd="sng" cap="flat" w="0">
-                      <a:noFill/>
-                      <a:prstDash val="solid"/>
-                    </a:lnB>
-                    <a:solidFill>
-                      <a:srgbClr val="FFFFFF">
-                        <a:alpha val="0"/>
-                      </a:srgbClr>
-                    </a:solidFill>
-                  </a:tcPr>
-                </a:tc>
-                <a:tc>
-                  <a:txBody>
-                    <a:bodyPr/>
-                    <a:lstStyle/>
-                    <a:p>
-                      <a:pPr algn="r" marL="63500" marR="63500">
-                        <a:lnSpc>
-                          <a:spcPct val="100000"/>
-                        </a:lnSpc>
-                        <a:spcBef>
-                          <a:spcPts val="500"/>
-                        </a:spcBef>
-                        <a:spcAft>
-                          <a:spcPts val="500"/>
-                        </a:spcAft>
-                        <a:buNone/>
-                      </a:pPr>
-                      <a:r>
-                        <a:rPr cap="none" sz="1100" i="0" b="0" u="none">
-                          <a:solidFill>
-                            <a:srgbClr val="000000">
-                              <a:alpha val="100000"/>
-                            </a:srgbClr>
-                          </a:solidFill>
-                          <a:latin typeface="Helvetica"/>
-                          <a:cs typeface="Helvetica"/>
-                          <a:ea typeface="Helvetica"/>
-                          <a:sym typeface="Helvetica"/>
-                        </a:rPr>
-                        <a:t>28.30378</a:t>
-                      </a:r>
-                    </a:p>
-                  </a:txBody>
-                  <a:tcPr anchor="ctr" marB="63500" marT="63500" marR="0" marL="0">
-                    <a:lnL algn="ctr" cmpd="sng" cap="flat" w="0">
-                      <a:noFill/>
-                      <a:prstDash val="solid"/>
-                    </a:lnL>
-                    <a:lnR algn="ctr" cmpd="sng" cap="flat" w="0">
-                      <a:noFill/>
-                      <a:prstDash val="solid"/>
-                    </a:lnR>
-                    <a:lnT algn="ctr" cmpd="sng" cap="flat" w="0">
-                      <a:noFill/>
-                      <a:prstDash val="solid"/>
-                    </a:lnT>
-                    <a:lnB algn="ctr" cmpd="sng" cap="flat" w="0">
-                      <a:noFill/>
-                      <a:prstDash val="solid"/>
-                    </a:lnB>
-                    <a:solidFill>
-                      <a:srgbClr val="FFFFFF">
-                        <a:alpha val="0"/>
-                      </a:srgbClr>
-                    </a:solidFill>
-                  </a:tcPr>
-                </a:tc>
-              </a:tr>
-              <a:tr h="228600">
-                <a:tc>
-                  <a:txBody>
-                    <a:bodyPr/>
-                    <a:lstStyle/>
-                    <a:p>
-                      <a:pPr algn="l" marL="63500" marR="63500">
-                        <a:lnSpc>
-                          <a:spcPct val="100000"/>
-                        </a:lnSpc>
-                        <a:spcBef>
-                          <a:spcPts val="500"/>
-                        </a:spcBef>
-                        <a:spcAft>
-                          <a:spcPts val="500"/>
-                        </a:spcAft>
-                        <a:buNone/>
-                      </a:pPr>
-                      <a:r>
-                        <a:rPr cap="none" sz="1100" i="0" b="0" u="none">
-                          <a:solidFill>
-                            <a:srgbClr val="000000">
-                              <a:alpha val="100000"/>
-                            </a:srgbClr>
-                          </a:solidFill>
-                          <a:latin typeface="Helvetica"/>
-                          <a:cs typeface="Helvetica"/>
-                          <a:ea typeface="Helvetica"/>
-                          <a:sym typeface="Helvetica"/>
-                        </a:rPr>
-                        <a:t>I8</a:t>
-                      </a:r>
-                    </a:p>
-                  </a:txBody>
-                  <a:tcPr anchor="ctr" marB="63500" marT="63500" marR="0" marL="0">
-                    <a:lnL algn="ctr" cmpd="sng" cap="flat" w="0">
-                      <a:noFill/>
-                      <a:prstDash val="solid"/>
-                    </a:lnL>
-                    <a:lnR algn="ctr" cmpd="sng" cap="flat" w="0">
-                      <a:noFill/>
-                      <a:prstDash val="solid"/>
-                    </a:lnR>
-                    <a:lnT algn="ctr" cmpd="sng" cap="flat" w="0">
-                      <a:noFill/>
-                      <a:prstDash val="solid"/>
-                    </a:lnT>
-                    <a:lnB algn="ctr" cmpd="sng" cap="flat" w="19050">
-                      <a:solidFill>
-                        <a:srgbClr val="666666">
-                          <a:alpha val="100000"/>
-                        </a:srgbClr>
-                      </a:solidFill>
-                      <a:prstDash val="solid"/>
-                    </a:lnB>
-                    <a:solidFill>
-                      <a:srgbClr val="FFFFFF">
-                        <a:alpha val="0"/>
-                      </a:srgbClr>
-                    </a:solidFill>
-                  </a:tcPr>
-                </a:tc>
-                <a:tc>
-                  <a:txBody>
-                    <a:bodyPr/>
-                    <a:lstStyle/>
-                    <a:p>
-                      <a:pPr algn="r" marL="63500" marR="63500">
-                        <a:lnSpc>
-                          <a:spcPct val="100000"/>
-                        </a:lnSpc>
-                        <a:spcBef>
-                          <a:spcPts val="500"/>
-                        </a:spcBef>
-                        <a:spcAft>
-                          <a:spcPts val="500"/>
-                        </a:spcAft>
-                        <a:buNone/>
-                      </a:pPr>
-                      <a:r>
-                        <a:rPr cap="none" sz="1100" i="0" b="0" u="none">
-                          <a:solidFill>
-                            <a:srgbClr val="000000">
-                              <a:alpha val="100000"/>
-                            </a:srgbClr>
-                          </a:solidFill>
-                          <a:latin typeface="Helvetica"/>
-                          <a:cs typeface="Helvetica"/>
-                          <a:ea typeface="Helvetica"/>
-                          <a:sym typeface="Helvetica"/>
-                        </a:rPr>
-                        <a:t>2,739.371</a:t>
-                      </a:r>
-                    </a:p>
-                  </a:txBody>
-                  <a:tcPr anchor="ctr" marB="63500" marT="63500" marR="0" marL="0">
-                    <a:lnL algn="ctr" cmpd="sng" cap="flat" w="0">
-                      <a:noFill/>
-                      <a:prstDash val="solid"/>
-                    </a:lnL>
-                    <a:lnR algn="ctr" cmpd="sng" cap="flat" w="0">
-                      <a:noFill/>
-                      <a:prstDash val="solid"/>
-                    </a:lnR>
-                    <a:lnT algn="ctr" cmpd="sng" cap="flat" w="0">
-                      <a:noFill/>
-                      <a:prstDash val="solid"/>
-                    </a:lnT>
-                    <a:lnB algn="ctr" cmpd="sng" cap="flat" w="19050">
-                      <a:solidFill>
-                        <a:srgbClr val="666666">
-                          <a:alpha val="100000"/>
-                        </a:srgbClr>
-                      </a:solidFill>
-                      <a:prstDash val="solid"/>
-                    </a:lnB>
-                    <a:solidFill>
-                      <a:srgbClr val="FFFFFF">
-                        <a:alpha val="0"/>
-                      </a:srgbClr>
-                    </a:solidFill>
-                  </a:tcPr>
-                </a:tc>
-                <a:tc>
-                  <a:txBody>
-                    <a:bodyPr/>
-                    <a:lstStyle/>
-                    <a:p>
-                      <a:pPr algn="r" marL="63500" marR="63500">
-                        <a:lnSpc>
-                          <a:spcPct val="100000"/>
-                        </a:lnSpc>
-                        <a:spcBef>
-                          <a:spcPts val="500"/>
-                        </a:spcBef>
-                        <a:spcAft>
-                          <a:spcPts val="500"/>
-                        </a:spcAft>
-                        <a:buNone/>
-                      </a:pPr>
-                      <a:r>
-                        <a:rPr cap="none" sz="1100" i="0" b="0" u="none">
-                          <a:solidFill>
-                            <a:srgbClr val="000000">
-                              <a:alpha val="100000"/>
-                            </a:srgbClr>
-                          </a:solidFill>
-                          <a:latin typeface="Helvetica"/>
-                          <a:cs typeface="Helvetica"/>
-                          <a:ea typeface="Helvetica"/>
-                          <a:sym typeface="Helvetica"/>
-                        </a:rPr>
-                        <a:t>52.33901</a:t>
-                      </a:r>
-                    </a:p>
-                  </a:txBody>
-                  <a:tcPr anchor="ctr" marB="63500" marT="63500" marR="0" marL="0">
-                    <a:lnL algn="ctr" cmpd="sng" cap="flat" w="0">
-                      <a:noFill/>
-                      <a:prstDash val="solid"/>
-                    </a:lnL>
-                    <a:lnR algn="ctr" cmpd="sng" cap="flat" w="0">
-                      <a:noFill/>
-                      <a:prstDash val="solid"/>
-                    </a:lnR>
-                    <a:lnT algn="ctr" cmpd="sng" cap="flat" w="0">
-                      <a:noFill/>
-                      <a:prstDash val="solid"/>
-                    </a:lnT>
-                    <a:lnB algn="ctr" cmpd="sng" cap="flat" w="19050">
-                      <a:solidFill>
-                        <a:srgbClr val="666666">
-                          <a:alpha val="100000"/>
-                        </a:srgbClr>
-                      </a:solidFill>
-                      <a:prstDash val="solid"/>
-                    </a:lnB>
-                    <a:solidFill>
-                      <a:srgbClr val="FFFFFF">
-                        <a:alpha val="0"/>
-                      </a:srgbClr>
-                    </a:solidFill>
-                  </a:tcPr>
-                </a:tc>
-              </a:tr>
-            </a:tbl>
-          </a:graphicData>
-        </a:graphic>
-      </p:graphicFrame>
     </p:spTree>
   </p:cSld>
 </p:sld>
@@ -7917,6 +6589,35 @@
               <a:t>When data are log-normally distributed, the geometric mean often provides a better measure of central tendency than the arithmetic mean.</a:t>
             </a:r>
           </a:p>
+          <a:p>
+            <a:pPr lvl="0"/>
+            <a:r>
+              <a:rPr/>
+              <a:t>But there are issues and it might not be good…</a:t>
+            </a:r>
+          </a:p>
+          <a:p>
+            <a:pPr lvl="1"/>
+            <a:r>
+              <a:rPr/>
+              <a:t>detecting differences in geometric means, not arithmetic means</a:t>
+            </a:r>
+          </a:p>
+          <a:p>
+            <a:pPr lvl="2"/>
+            <a:r>
+              <a:rPr/>
+              <a:t>geometric is all values multiplied taken to the nth root</a:t>
+            </a:r>
+          </a:p>
+          <a:p>
+            <a:pPr lvl="1"/>
+            <a:r>
+              <a:rPr/>
+              <a:t>Can’t handle zeros without adding arbitrary constants (log(x+1) transformations), which can bias results</a:t>
+            </a:r>
+            <a:br/>
+          </a:p>
         </p:txBody>
       </p:sp>
       <p:pic>
@@ -8023,59 +6724,52 @@
             </a:r>
           </a:p>
           <a:p>
-            <a:pPr lvl="0"/>
+            <a:pPr lvl="1"/>
             <a:r>
               <a:rPr/>
-              <a:t>How to design a well-organized project</a:t>
-            </a:r>
-          </a:p>
-          <a:p>
-            <a:pPr lvl="0"/>
+              <a:t>How to design a well-organized project structure</a:t>
+            </a:r>
+          </a:p>
+          <a:p>
+            <a:pPr lvl="1"/>
             <a:r>
               <a:rPr/>
               <a:t>How to implement good naming conventions</a:t>
             </a:r>
           </a:p>
           <a:p>
-            <a:pPr lvl="1"/>
+            <a:pPr lvl="2"/>
             <a:r>
               <a:rPr/>
               <a:t>Controlled vocabulary</a:t>
             </a:r>
           </a:p>
           <a:p>
-            <a:pPr lvl="1"/>
+            <a:pPr lvl="2"/>
             <a:r>
               <a:rPr/>
               <a:t>Including units in names</a:t>
             </a:r>
           </a:p>
           <a:p>
-            <a:pPr lvl="0"/>
+            <a:pPr lvl="1"/>
             <a:r>
               <a:rPr/>
               <a:t>Create and use metadata effectively</a:t>
             </a:r>
           </a:p>
           <a:p>
-            <a:pPr lvl="0"/>
+            <a:pPr lvl="1"/>
             <a:r>
               <a:rPr/>
               <a:t>Build tidy, well-structured spreadsheets</a:t>
             </a:r>
           </a:p>
           <a:p>
-            <a:pPr lvl="0"/>
+            <a:pPr lvl="1"/>
             <a:r>
               <a:rPr/>
-              <a:t>Understand data repositories</a:t>
-            </a:r>
-          </a:p>
-          <a:p>
-            <a:pPr lvl="0"/>
-            <a:r>
-              <a:rPr/>
-              <a:t>Create effective visualizations with ggplot2</a:t>
+              <a:t>Create visualizations with ggplot2</a:t>
             </a:r>
           </a:p>
         </p:txBody>
@@ -8654,1138 +7348,37 @@
           </a:p>
         </p:txBody>
       </p:sp>
-      <p:graphicFrame xmlns:a="http://schemas.openxmlformats.org/drawingml/2006/main" xmlns:r="http://schemas.openxmlformats.org/officeDocument/2006/relationships" xmlns:p="http://schemas.openxmlformats.org/presentationml/2006/main">
-        <p:nvGraphicFramePr>
-          <p:cNvPr id="455712672" name=""/>
-          <p:cNvGraphicFramePr>
-            <a:graphicFrameLocks noGrp="true"/>
-          </p:cNvGraphicFramePr>
-          <p:nvPr/>
-        </p:nvGraphicFramePr>
-        <p:xfrm rot="0">
-          <a:off x="914400" y="1828800"/>
-          <a:ext cx="9144000" cy="5486400"/>
-        </p:xfrm>
-        <a:graphic>
-          <a:graphicData uri="http://schemas.openxmlformats.org/drawingml/2006/table">
-            <a:tbl>
-              <a:tblPr/>
-              <a:tblGrid>
-                <a:gridCol w="685800"/>
-                <a:gridCol w="685800"/>
-                <a:gridCol w="685800"/>
-                <a:gridCol w="685800"/>
-                <a:gridCol w="685800"/>
-                <a:gridCol w="685800"/>
-              </a:tblGrid>
-              <a:tr h="228600">
-                <a:tc>
-                  <a:txBody>
-                    <a:bodyPr/>
-                    <a:lstStyle/>
-                    <a:p>
-                      <a:pPr algn="l" marL="63500" marR="63500">
-                        <a:lnSpc>
-                          <a:spcPct val="100000"/>
-                        </a:lnSpc>
-                        <a:spcBef>
-                          <a:spcPts val="500"/>
-                        </a:spcBef>
-                        <a:spcAft>
-                          <a:spcPts val="500"/>
-                        </a:spcAft>
-                        <a:buNone/>
-                      </a:pPr>
-                      <a:r>
-                        <a:rPr cap="none" sz="1100" i="0" b="0" u="none">
-                          <a:solidFill>
-                            <a:srgbClr val="000000">
-                              <a:alpha val="100000"/>
-                            </a:srgbClr>
-                          </a:solidFill>
-                          <a:latin typeface="Helvetica"/>
-                          <a:cs typeface="Helvetica"/>
-                          <a:ea typeface="Helvetica"/>
-                          <a:sym typeface="Helvetica"/>
-                        </a:rPr>
-                        <a:t>lake</a:t>
-                      </a:r>
-                    </a:p>
-                  </a:txBody>
-                  <a:tcPr anchor="ctr" marB="63500" marT="63500" marR="0" marL="0">
-                    <a:lnL algn="ctr" cmpd="sng" cap="flat" w="0">
-                      <a:noFill/>
-                      <a:prstDash val="solid"/>
-                    </a:lnL>
-                    <a:lnR algn="ctr" cmpd="sng" cap="flat" w="0">
-                      <a:noFill/>
-                      <a:prstDash val="solid"/>
-                    </a:lnR>
-                    <a:lnT algn="ctr" cmpd="sng" cap="flat" w="19050">
-                      <a:solidFill>
-                        <a:srgbClr val="666666">
-                          <a:alpha val="100000"/>
-                        </a:srgbClr>
-                      </a:solidFill>
-                      <a:prstDash val="solid"/>
-                    </a:lnT>
-                    <a:lnB algn="ctr" cmpd="sng" cap="flat" w="19050">
-                      <a:solidFill>
-                        <a:srgbClr val="666666">
-                          <a:alpha val="100000"/>
-                        </a:srgbClr>
-                      </a:solidFill>
-                      <a:prstDash val="solid"/>
-                    </a:lnB>
-                    <a:solidFill>
-                      <a:srgbClr val="FFFFFF">
-                        <a:alpha val="0"/>
-                      </a:srgbClr>
-                    </a:solidFill>
-                  </a:tcPr>
-                </a:tc>
-                <a:tc>
-                  <a:txBody>
-                    <a:bodyPr/>
-                    <a:lstStyle/>
-                    <a:p>
-                      <a:pPr algn="r" marL="63500" marR="63500">
-                        <a:lnSpc>
-                          <a:spcPct val="100000"/>
-                        </a:lnSpc>
-                        <a:spcBef>
-                          <a:spcPts val="500"/>
-                        </a:spcBef>
-                        <a:spcAft>
-                          <a:spcPts val="500"/>
-                        </a:spcAft>
-                        <a:buNone/>
-                      </a:pPr>
-                      <a:r>
-                        <a:rPr cap="none" sz="1100" i="0" b="0" u="none">
-                          <a:solidFill>
-                            <a:srgbClr val="000000">
-                              <a:alpha val="100000"/>
-                            </a:srgbClr>
-                          </a:solidFill>
-                          <a:latin typeface="Helvetica"/>
-                          <a:cs typeface="Helvetica"/>
-                          <a:ea typeface="Helvetica"/>
-                          <a:sym typeface="Helvetica"/>
-                        </a:rPr>
-                        <a:t>mean</a:t>
-                      </a:r>
-                    </a:p>
-                  </a:txBody>
-                  <a:tcPr anchor="ctr" marB="63500" marT="63500" marR="0" marL="0">
-                    <a:lnL algn="ctr" cmpd="sng" cap="flat" w="0">
-                      <a:noFill/>
-                      <a:prstDash val="solid"/>
-                    </a:lnL>
-                    <a:lnR algn="ctr" cmpd="sng" cap="flat" w="0">
-                      <a:noFill/>
-                      <a:prstDash val="solid"/>
-                    </a:lnR>
-                    <a:lnT algn="ctr" cmpd="sng" cap="flat" w="19050">
-                      <a:solidFill>
-                        <a:srgbClr val="666666">
-                          <a:alpha val="100000"/>
-                        </a:srgbClr>
-                      </a:solidFill>
-                      <a:prstDash val="solid"/>
-                    </a:lnT>
-                    <a:lnB algn="ctr" cmpd="sng" cap="flat" w="19050">
-                      <a:solidFill>
-                        <a:srgbClr val="666666">
-                          <a:alpha val="100000"/>
-                        </a:srgbClr>
-                      </a:solidFill>
-                      <a:prstDash val="solid"/>
-                    </a:lnB>
-                    <a:solidFill>
-                      <a:srgbClr val="FFFFFF">
-                        <a:alpha val="0"/>
-                      </a:srgbClr>
-                    </a:solidFill>
-                  </a:tcPr>
-                </a:tc>
-                <a:tc>
-                  <a:txBody>
-                    <a:bodyPr/>
-                    <a:lstStyle/>
-                    <a:p>
-                      <a:pPr algn="r" marL="63500" marR="63500">
-                        <a:lnSpc>
-                          <a:spcPct val="100000"/>
-                        </a:lnSpc>
-                        <a:spcBef>
-                          <a:spcPts val="500"/>
-                        </a:spcBef>
-                        <a:spcAft>
-                          <a:spcPts val="500"/>
-                        </a:spcAft>
-                        <a:buNone/>
-                      </a:pPr>
-                      <a:r>
-                        <a:rPr cap="none" sz="1100" i="0" b="0" u="none">
-                          <a:solidFill>
-                            <a:srgbClr val="000000">
-                              <a:alpha val="100000"/>
-                            </a:srgbClr>
-                          </a:solidFill>
-                          <a:latin typeface="Helvetica"/>
-                          <a:cs typeface="Helvetica"/>
-                          <a:ea typeface="Helvetica"/>
-                          <a:sym typeface="Helvetica"/>
-                        </a:rPr>
-                        <a:t>median</a:t>
-                      </a:r>
-                    </a:p>
-                  </a:txBody>
-                  <a:tcPr anchor="ctr" marB="63500" marT="63500" marR="0" marL="0">
-                    <a:lnL algn="ctr" cmpd="sng" cap="flat" w="0">
-                      <a:noFill/>
-                      <a:prstDash val="solid"/>
-                    </a:lnL>
-                    <a:lnR algn="ctr" cmpd="sng" cap="flat" w="0">
-                      <a:noFill/>
-                      <a:prstDash val="solid"/>
-                    </a:lnR>
-                    <a:lnT algn="ctr" cmpd="sng" cap="flat" w="19050">
-                      <a:solidFill>
-                        <a:srgbClr val="666666">
-                          <a:alpha val="100000"/>
-                        </a:srgbClr>
-                      </a:solidFill>
-                      <a:prstDash val="solid"/>
-                    </a:lnT>
-                    <a:lnB algn="ctr" cmpd="sng" cap="flat" w="19050">
-                      <a:solidFill>
-                        <a:srgbClr val="666666">
-                          <a:alpha val="100000"/>
-                        </a:srgbClr>
-                      </a:solidFill>
-                      <a:prstDash val="solid"/>
-                    </a:lnB>
-                    <a:solidFill>
-                      <a:srgbClr val="FFFFFF">
-                        <a:alpha val="0"/>
-                      </a:srgbClr>
-                    </a:solidFill>
-                  </a:tcPr>
-                </a:tc>
-                <a:tc>
-                  <a:txBody>
-                    <a:bodyPr/>
-                    <a:lstStyle/>
-                    <a:p>
-                      <a:pPr algn="r" marL="63500" marR="63500">
-                        <a:lnSpc>
-                          <a:spcPct val="100000"/>
-                        </a:lnSpc>
-                        <a:spcBef>
-                          <a:spcPts val="500"/>
-                        </a:spcBef>
-                        <a:spcAft>
-                          <a:spcPts val="500"/>
-                        </a:spcAft>
-                        <a:buNone/>
-                      </a:pPr>
-                      <a:r>
-                        <a:rPr cap="none" sz="1100" i="0" b="0" u="none">
-                          <a:solidFill>
-                            <a:srgbClr val="000000">
-                              <a:alpha val="100000"/>
-                            </a:srgbClr>
-                          </a:solidFill>
-                          <a:latin typeface="Helvetica"/>
-                          <a:cs typeface="Helvetica"/>
-                          <a:ea typeface="Helvetica"/>
-                          <a:sym typeface="Helvetica"/>
-                        </a:rPr>
-                        <a:t>sd</a:t>
-                      </a:r>
-                    </a:p>
-                  </a:txBody>
-                  <a:tcPr anchor="ctr" marB="63500" marT="63500" marR="0" marL="0">
-                    <a:lnL algn="ctr" cmpd="sng" cap="flat" w="0">
-                      <a:noFill/>
-                      <a:prstDash val="solid"/>
-                    </a:lnL>
-                    <a:lnR algn="ctr" cmpd="sng" cap="flat" w="0">
-                      <a:noFill/>
-                      <a:prstDash val="solid"/>
-                    </a:lnR>
-                    <a:lnT algn="ctr" cmpd="sng" cap="flat" w="19050">
-                      <a:solidFill>
-                        <a:srgbClr val="666666">
-                          <a:alpha val="100000"/>
-                        </a:srgbClr>
-                      </a:solidFill>
-                      <a:prstDash val="solid"/>
-                    </a:lnT>
-                    <a:lnB algn="ctr" cmpd="sng" cap="flat" w="19050">
-                      <a:solidFill>
-                        <a:srgbClr val="666666">
-                          <a:alpha val="100000"/>
-                        </a:srgbClr>
-                      </a:solidFill>
-                      <a:prstDash val="solid"/>
-                    </a:lnB>
-                    <a:solidFill>
-                      <a:srgbClr val="FFFFFF">
-                        <a:alpha val="0"/>
-                      </a:srgbClr>
-                    </a:solidFill>
-                  </a:tcPr>
-                </a:tc>
-                <a:tc>
-                  <a:txBody>
-                    <a:bodyPr/>
-                    <a:lstStyle/>
-                    <a:p>
-                      <a:pPr algn="r" marL="63500" marR="63500">
-                        <a:lnSpc>
-                          <a:spcPct val="100000"/>
-                        </a:lnSpc>
-                        <a:spcBef>
-                          <a:spcPts val="500"/>
-                        </a:spcBef>
-                        <a:spcAft>
-                          <a:spcPts val="500"/>
-                        </a:spcAft>
-                        <a:buNone/>
-                      </a:pPr>
-                      <a:r>
-                        <a:rPr cap="none" sz="1100" i="0" b="0" u="none">
-                          <a:solidFill>
-                            <a:srgbClr val="000000">
-                              <a:alpha val="100000"/>
-                            </a:srgbClr>
-                          </a:solidFill>
-                          <a:latin typeface="Helvetica"/>
-                          <a:cs typeface="Helvetica"/>
-                          <a:ea typeface="Helvetica"/>
-                          <a:sym typeface="Helvetica"/>
-                        </a:rPr>
-                        <a:t>iqr</a:t>
-                      </a:r>
-                    </a:p>
-                  </a:txBody>
-                  <a:tcPr anchor="ctr" marB="63500" marT="63500" marR="0" marL="0">
-                    <a:lnL algn="ctr" cmpd="sng" cap="flat" w="0">
-                      <a:noFill/>
-                      <a:prstDash val="solid"/>
-                    </a:lnL>
-                    <a:lnR algn="ctr" cmpd="sng" cap="flat" w="0">
-                      <a:noFill/>
-                      <a:prstDash val="solid"/>
-                    </a:lnR>
-                    <a:lnT algn="ctr" cmpd="sng" cap="flat" w="19050">
-                      <a:solidFill>
-                        <a:srgbClr val="666666">
-                          <a:alpha val="100000"/>
-                        </a:srgbClr>
-                      </a:solidFill>
-                      <a:prstDash val="solid"/>
-                    </a:lnT>
-                    <a:lnB algn="ctr" cmpd="sng" cap="flat" w="19050">
-                      <a:solidFill>
-                        <a:srgbClr val="666666">
-                          <a:alpha val="100000"/>
-                        </a:srgbClr>
-                      </a:solidFill>
-                      <a:prstDash val="solid"/>
-                    </a:lnB>
-                    <a:solidFill>
-                      <a:srgbClr val="FFFFFF">
-                        <a:alpha val="0"/>
-                      </a:srgbClr>
-                    </a:solidFill>
-                  </a:tcPr>
-                </a:tc>
-                <a:tc>
-                  <a:txBody>
-                    <a:bodyPr/>
-                    <a:lstStyle/>
-                    <a:p>
-                      <a:pPr algn="r" marL="63500" marR="63500">
-                        <a:lnSpc>
-                          <a:spcPct val="100000"/>
-                        </a:lnSpc>
-                        <a:spcBef>
-                          <a:spcPts val="500"/>
-                        </a:spcBef>
-                        <a:spcAft>
-                          <a:spcPts val="500"/>
-                        </a:spcAft>
-                        <a:buNone/>
-                      </a:pPr>
-                      <a:r>
-                        <a:rPr cap="none" sz="1100" i="0" b="0" u="none">
-                          <a:solidFill>
-                            <a:srgbClr val="000000">
-                              <a:alpha val="100000"/>
-                            </a:srgbClr>
-                          </a:solidFill>
-                          <a:latin typeface="Helvetica"/>
-                          <a:cs typeface="Helvetica"/>
-                          <a:ea typeface="Helvetica"/>
-                          <a:sym typeface="Helvetica"/>
-                        </a:rPr>
-                        <a:t>skewness</a:t>
-                      </a:r>
-                    </a:p>
-                  </a:txBody>
-                  <a:tcPr anchor="ctr" marB="63500" marT="63500" marR="0" marL="0">
-                    <a:lnL algn="ctr" cmpd="sng" cap="flat" w="0">
-                      <a:noFill/>
-                      <a:prstDash val="solid"/>
-                    </a:lnL>
-                    <a:lnR algn="ctr" cmpd="sng" cap="flat" w="0">
-                      <a:noFill/>
-                      <a:prstDash val="solid"/>
-                    </a:lnR>
-                    <a:lnT algn="ctr" cmpd="sng" cap="flat" w="19050">
-                      <a:solidFill>
-                        <a:srgbClr val="666666">
-                          <a:alpha val="100000"/>
-                        </a:srgbClr>
-                      </a:solidFill>
-                      <a:prstDash val="solid"/>
-                    </a:lnT>
-                    <a:lnB algn="ctr" cmpd="sng" cap="flat" w="19050">
-                      <a:solidFill>
-                        <a:srgbClr val="666666">
-                          <a:alpha val="100000"/>
-                        </a:srgbClr>
-                      </a:solidFill>
-                      <a:prstDash val="solid"/>
-                    </a:lnB>
-                    <a:solidFill>
-                      <a:srgbClr val="FFFFFF">
-                        <a:alpha val="0"/>
-                      </a:srgbClr>
-                    </a:solidFill>
-                  </a:tcPr>
-                </a:tc>
-              </a:tr>
-              <a:tr h="228600">
-                <a:tc>
-                  <a:txBody>
-                    <a:bodyPr/>
-                    <a:lstStyle/>
-                    <a:p>
-                      <a:pPr algn="l" marL="63500" marR="63500">
-                        <a:lnSpc>
-                          <a:spcPct val="100000"/>
-                        </a:lnSpc>
-                        <a:spcBef>
-                          <a:spcPts val="500"/>
-                        </a:spcBef>
-                        <a:spcAft>
-                          <a:spcPts val="500"/>
-                        </a:spcAft>
-                        <a:buNone/>
-                      </a:pPr>
-                      <a:r>
-                        <a:rPr cap="none" sz="1100" i="0" b="0" u="none">
-                          <a:solidFill>
-                            <a:srgbClr val="000000">
-                              <a:alpha val="100000"/>
-                            </a:srgbClr>
-                          </a:solidFill>
-                          <a:latin typeface="Helvetica"/>
-                          <a:cs typeface="Helvetica"/>
-                          <a:ea typeface="Helvetica"/>
-                          <a:sym typeface="Helvetica"/>
-                        </a:rPr>
-                        <a:t>I3</a:t>
-                      </a:r>
-                    </a:p>
-                  </a:txBody>
-                  <a:tcPr anchor="ctr" marB="63500" marT="63500" marR="0" marL="0">
-                    <a:lnL algn="ctr" cmpd="sng" cap="flat" w="0">
-                      <a:noFill/>
-                      <a:prstDash val="solid"/>
-                    </a:lnL>
-                    <a:lnR algn="ctr" cmpd="sng" cap="flat" w="0">
-                      <a:noFill/>
-                      <a:prstDash val="solid"/>
-                    </a:lnR>
-                    <a:lnT algn="ctr" cmpd="sng" cap="flat" w="0">
-                      <a:noFill/>
-                      <a:prstDash val="solid"/>
-                    </a:lnT>
-                    <a:lnB algn="ctr" cmpd="sng" cap="flat" w="0">
-                      <a:noFill/>
-                      <a:prstDash val="solid"/>
-                    </a:lnB>
-                    <a:solidFill>
-                      <a:srgbClr val="FFFFFF">
-                        <a:alpha val="0"/>
-                      </a:srgbClr>
-                    </a:solidFill>
-                  </a:tcPr>
-                </a:tc>
-                <a:tc>
-                  <a:txBody>
-                    <a:bodyPr/>
-                    <a:lstStyle/>
-                    <a:p>
-                      <a:pPr algn="r" marL="63500" marR="63500">
-                        <a:lnSpc>
-                          <a:spcPct val="100000"/>
-                        </a:lnSpc>
-                        <a:spcBef>
-                          <a:spcPts val="500"/>
-                        </a:spcBef>
-                        <a:spcAft>
-                          <a:spcPts val="500"/>
-                        </a:spcAft>
-                        <a:buNone/>
-                      </a:pPr>
-                      <a:r>
-                        <a:rPr cap="none" sz="1100" i="0" b="0" u="none">
-                          <a:solidFill>
-                            <a:srgbClr val="000000">
-                              <a:alpha val="100000"/>
-                            </a:srgbClr>
-                          </a:solidFill>
-                          <a:latin typeface="Helvetica"/>
-                          <a:cs typeface="Helvetica"/>
-                          <a:ea typeface="Helvetica"/>
-                          <a:sym typeface="Helvetica"/>
-                        </a:rPr>
-                        <a:t>265.6061</a:t>
-                      </a:r>
-                    </a:p>
-                  </a:txBody>
-                  <a:tcPr anchor="ctr" marB="63500" marT="63500" marR="0" marL="0">
-                    <a:lnL algn="ctr" cmpd="sng" cap="flat" w="0">
-                      <a:noFill/>
-                      <a:prstDash val="solid"/>
-                    </a:lnL>
-                    <a:lnR algn="ctr" cmpd="sng" cap="flat" w="0">
-                      <a:noFill/>
-                      <a:prstDash val="solid"/>
-                    </a:lnR>
-                    <a:lnT algn="ctr" cmpd="sng" cap="flat" w="0">
-                      <a:noFill/>
-                      <a:prstDash val="solid"/>
-                    </a:lnT>
-                    <a:lnB algn="ctr" cmpd="sng" cap="flat" w="0">
-                      <a:noFill/>
-                      <a:prstDash val="solid"/>
-                    </a:lnB>
-                    <a:solidFill>
-                      <a:srgbClr val="FFFFFF">
-                        <a:alpha val="0"/>
-                      </a:srgbClr>
-                    </a:solidFill>
-                  </a:tcPr>
-                </a:tc>
-                <a:tc>
-                  <a:txBody>
-                    <a:bodyPr/>
-                    <a:lstStyle/>
-                    <a:p>
-                      <a:pPr algn="r" marL="63500" marR="63500">
-                        <a:lnSpc>
-                          <a:spcPct val="100000"/>
-                        </a:lnSpc>
-                        <a:spcBef>
-                          <a:spcPts val="500"/>
-                        </a:spcBef>
-                        <a:spcAft>
-                          <a:spcPts val="500"/>
-                        </a:spcAft>
-                        <a:buNone/>
-                      </a:pPr>
-                      <a:r>
-                        <a:rPr cap="none" sz="1100" i="0" b="0" u="none">
-                          <a:solidFill>
-                            <a:srgbClr val="000000">
-                              <a:alpha val="100000"/>
-                            </a:srgbClr>
-                          </a:solidFill>
-                          <a:latin typeface="Helvetica"/>
-                          <a:cs typeface="Helvetica"/>
-                          <a:ea typeface="Helvetica"/>
-                          <a:sym typeface="Helvetica"/>
-                        </a:rPr>
-                        <a:t>266</a:t>
-                      </a:r>
-                    </a:p>
-                  </a:txBody>
-                  <a:tcPr anchor="ctr" marB="63500" marT="63500" marR="0" marL="0">
-                    <a:lnL algn="ctr" cmpd="sng" cap="flat" w="0">
-                      <a:noFill/>
-                      <a:prstDash val="solid"/>
-                    </a:lnL>
-                    <a:lnR algn="ctr" cmpd="sng" cap="flat" w="0">
-                      <a:noFill/>
-                      <a:prstDash val="solid"/>
-                    </a:lnR>
-                    <a:lnT algn="ctr" cmpd="sng" cap="flat" w="0">
-                      <a:noFill/>
-                      <a:prstDash val="solid"/>
-                    </a:lnT>
-                    <a:lnB algn="ctr" cmpd="sng" cap="flat" w="0">
-                      <a:noFill/>
-                      <a:prstDash val="solid"/>
-                    </a:lnB>
-                    <a:solidFill>
-                      <a:srgbClr val="FFFFFF">
-                        <a:alpha val="0"/>
-                      </a:srgbClr>
-                    </a:solidFill>
-                  </a:tcPr>
-                </a:tc>
-                <a:tc>
-                  <a:txBody>
-                    <a:bodyPr/>
-                    <a:lstStyle/>
-                    <a:p>
-                      <a:pPr algn="r" marL="63500" marR="63500">
-                        <a:lnSpc>
-                          <a:spcPct val="100000"/>
-                        </a:lnSpc>
-                        <a:spcBef>
-                          <a:spcPts val="500"/>
-                        </a:spcBef>
-                        <a:spcAft>
-                          <a:spcPts val="500"/>
-                        </a:spcAft>
-                        <a:buNone/>
-                      </a:pPr>
-                      <a:r>
-                        <a:rPr cap="none" sz="1100" i="0" b="0" u="none">
-                          <a:solidFill>
-                            <a:srgbClr val="000000">
-                              <a:alpha val="100000"/>
-                            </a:srgbClr>
-                          </a:solidFill>
-                          <a:latin typeface="Helvetica"/>
-                          <a:cs typeface="Helvetica"/>
-                          <a:ea typeface="Helvetica"/>
-                          <a:sym typeface="Helvetica"/>
-                        </a:rPr>
-                        <a:t>28.30378</a:t>
-                      </a:r>
-                    </a:p>
-                  </a:txBody>
-                  <a:tcPr anchor="ctr" marB="63500" marT="63500" marR="0" marL="0">
-                    <a:lnL algn="ctr" cmpd="sng" cap="flat" w="0">
-                      <a:noFill/>
-                      <a:prstDash val="solid"/>
-                    </a:lnL>
-                    <a:lnR algn="ctr" cmpd="sng" cap="flat" w="0">
-                      <a:noFill/>
-                      <a:prstDash val="solid"/>
-                    </a:lnR>
-                    <a:lnT algn="ctr" cmpd="sng" cap="flat" w="0">
-                      <a:noFill/>
-                      <a:prstDash val="solid"/>
-                    </a:lnT>
-                    <a:lnB algn="ctr" cmpd="sng" cap="flat" w="0">
-                      <a:noFill/>
-                      <a:prstDash val="solid"/>
-                    </a:lnB>
-                    <a:solidFill>
-                      <a:srgbClr val="FFFFFF">
-                        <a:alpha val="0"/>
-                      </a:srgbClr>
-                    </a:solidFill>
-                  </a:tcPr>
-                </a:tc>
-                <a:tc>
-                  <a:txBody>
-                    <a:bodyPr/>
-                    <a:lstStyle/>
-                    <a:p>
-                      <a:pPr algn="r" marL="63500" marR="63500">
-                        <a:lnSpc>
-                          <a:spcPct val="100000"/>
-                        </a:lnSpc>
-                        <a:spcBef>
-                          <a:spcPts val="500"/>
-                        </a:spcBef>
-                        <a:spcAft>
-                          <a:spcPts val="500"/>
-                        </a:spcAft>
-                        <a:buNone/>
-                      </a:pPr>
-                      <a:r>
-                        <a:rPr cap="none" sz="1100" i="0" b="0" u="none">
-                          <a:solidFill>
-                            <a:srgbClr val="000000">
-                              <a:alpha val="100000"/>
-                            </a:srgbClr>
-                          </a:solidFill>
-                          <a:latin typeface="Helvetica"/>
-                          <a:cs typeface="Helvetica"/>
-                          <a:ea typeface="Helvetica"/>
-                          <a:sym typeface="Helvetica"/>
-                        </a:rPr>
-                        <a:t>24</a:t>
-                      </a:r>
-                    </a:p>
-                  </a:txBody>
-                  <a:tcPr anchor="ctr" marB="63500" marT="63500" marR="0" marL="0">
-                    <a:lnL algn="ctr" cmpd="sng" cap="flat" w="0">
-                      <a:noFill/>
-                      <a:prstDash val="solid"/>
-                    </a:lnL>
-                    <a:lnR algn="ctr" cmpd="sng" cap="flat" w="0">
-                      <a:noFill/>
-                      <a:prstDash val="solid"/>
-                    </a:lnR>
-                    <a:lnT algn="ctr" cmpd="sng" cap="flat" w="0">
-                      <a:noFill/>
-                      <a:prstDash val="solid"/>
-                    </a:lnT>
-                    <a:lnB algn="ctr" cmpd="sng" cap="flat" w="0">
-                      <a:noFill/>
-                      <a:prstDash val="solid"/>
-                    </a:lnB>
-                    <a:solidFill>
-                      <a:srgbClr val="FFFFFF">
-                        <a:alpha val="0"/>
-                      </a:srgbClr>
-                    </a:solidFill>
-                  </a:tcPr>
-                </a:tc>
-                <a:tc>
-                  <a:txBody>
-                    <a:bodyPr/>
-                    <a:lstStyle/>
-                    <a:p>
-                      <a:pPr algn="r" marL="63500" marR="63500">
-                        <a:lnSpc>
-                          <a:spcPct val="100000"/>
-                        </a:lnSpc>
-                        <a:spcBef>
-                          <a:spcPts val="500"/>
-                        </a:spcBef>
-                        <a:spcAft>
-                          <a:spcPts val="500"/>
-                        </a:spcAft>
-                        <a:buNone/>
-                      </a:pPr>
-                      <a:r>
-                        <a:rPr cap="none" sz="1100" i="0" b="0" u="none">
-                          <a:solidFill>
-                            <a:srgbClr val="000000">
-                              <a:alpha val="100000"/>
-                            </a:srgbClr>
-                          </a:solidFill>
-                          <a:latin typeface="Helvetica"/>
-                          <a:cs typeface="Helvetica"/>
-                          <a:ea typeface="Helvetica"/>
-                          <a:sym typeface="Helvetica"/>
-                        </a:rPr>
-                        <a:t>-0.8826195</a:t>
-                      </a:r>
-                    </a:p>
-                  </a:txBody>
-                  <a:tcPr anchor="ctr" marB="63500" marT="63500" marR="0" marL="0">
-                    <a:lnL algn="ctr" cmpd="sng" cap="flat" w="0">
-                      <a:noFill/>
-                      <a:prstDash val="solid"/>
-                    </a:lnL>
-                    <a:lnR algn="ctr" cmpd="sng" cap="flat" w="0">
-                      <a:noFill/>
-                      <a:prstDash val="solid"/>
-                    </a:lnR>
-                    <a:lnT algn="ctr" cmpd="sng" cap="flat" w="0">
-                      <a:noFill/>
-                      <a:prstDash val="solid"/>
-                    </a:lnT>
-                    <a:lnB algn="ctr" cmpd="sng" cap="flat" w="0">
-                      <a:noFill/>
-                      <a:prstDash val="solid"/>
-                    </a:lnB>
-                    <a:solidFill>
-                      <a:srgbClr val="FFFFFF">
-                        <a:alpha val="0"/>
-                      </a:srgbClr>
-                    </a:solidFill>
-                  </a:tcPr>
-                </a:tc>
-              </a:tr>
-              <a:tr h="228600">
-                <a:tc>
-                  <a:txBody>
-                    <a:bodyPr/>
-                    <a:lstStyle/>
-                    <a:p>
-                      <a:pPr algn="l" marL="63500" marR="63500">
-                        <a:lnSpc>
-                          <a:spcPct val="100000"/>
-                        </a:lnSpc>
-                        <a:spcBef>
-                          <a:spcPts val="500"/>
-                        </a:spcBef>
-                        <a:spcAft>
-                          <a:spcPts val="500"/>
-                        </a:spcAft>
-                        <a:buNone/>
-                      </a:pPr>
-                      <a:r>
-                        <a:rPr cap="none" sz="1100" i="0" b="0" u="none">
-                          <a:solidFill>
-                            <a:srgbClr val="000000">
-                              <a:alpha val="100000"/>
-                            </a:srgbClr>
-                          </a:solidFill>
-                          <a:latin typeface="Helvetica"/>
-                          <a:cs typeface="Helvetica"/>
-                          <a:ea typeface="Helvetica"/>
-                          <a:sym typeface="Helvetica"/>
-                        </a:rPr>
-                        <a:t>I8</a:t>
-                      </a:r>
-                    </a:p>
-                  </a:txBody>
-                  <a:tcPr anchor="ctr" marB="63500" marT="63500" marR="0" marL="0">
-                    <a:lnL algn="ctr" cmpd="sng" cap="flat" w="0">
-                      <a:noFill/>
-                      <a:prstDash val="solid"/>
-                    </a:lnL>
-                    <a:lnR algn="ctr" cmpd="sng" cap="flat" w="0">
-                      <a:noFill/>
-                      <a:prstDash val="solid"/>
-                    </a:lnR>
-                    <a:lnT algn="ctr" cmpd="sng" cap="flat" w="0">
-                      <a:noFill/>
-                      <a:prstDash val="solid"/>
-                    </a:lnT>
-                    <a:lnB algn="ctr" cmpd="sng" cap="flat" w="19050">
-                      <a:solidFill>
-                        <a:srgbClr val="666666">
-                          <a:alpha val="100000"/>
-                        </a:srgbClr>
-                      </a:solidFill>
-                      <a:prstDash val="solid"/>
-                    </a:lnB>
-                    <a:solidFill>
-                      <a:srgbClr val="FFFFFF">
-                        <a:alpha val="0"/>
-                      </a:srgbClr>
-                    </a:solidFill>
-                  </a:tcPr>
-                </a:tc>
-                <a:tc>
-                  <a:txBody>
-                    <a:bodyPr/>
-                    <a:lstStyle/>
-                    <a:p>
-                      <a:pPr algn="r" marL="63500" marR="63500">
-                        <a:lnSpc>
-                          <a:spcPct val="100000"/>
-                        </a:lnSpc>
-                        <a:spcBef>
-                          <a:spcPts val="500"/>
-                        </a:spcBef>
-                        <a:spcAft>
-                          <a:spcPts val="500"/>
-                        </a:spcAft>
-                        <a:buNone/>
-                      </a:pPr>
-                      <a:r>
-                        <a:rPr cap="none" sz="1100" i="0" b="0" u="none">
-                          <a:solidFill>
-                            <a:srgbClr val="000000">
-                              <a:alpha val="100000"/>
-                            </a:srgbClr>
-                          </a:solidFill>
-                          <a:latin typeface="Helvetica"/>
-                          <a:cs typeface="Helvetica"/>
-                          <a:ea typeface="Helvetica"/>
-                          <a:sym typeface="Helvetica"/>
-                        </a:rPr>
-                        <a:t>362.5980</a:t>
-                      </a:r>
-                    </a:p>
-                  </a:txBody>
-                  <a:tcPr anchor="ctr" marB="63500" marT="63500" marR="0" marL="0">
-                    <a:lnL algn="ctr" cmpd="sng" cap="flat" w="0">
-                      <a:noFill/>
-                      <a:prstDash val="solid"/>
-                    </a:lnL>
-                    <a:lnR algn="ctr" cmpd="sng" cap="flat" w="0">
-                      <a:noFill/>
-                      <a:prstDash val="solid"/>
-                    </a:lnR>
-                    <a:lnT algn="ctr" cmpd="sng" cap="flat" w="0">
-                      <a:noFill/>
-                      <a:prstDash val="solid"/>
-                    </a:lnT>
-                    <a:lnB algn="ctr" cmpd="sng" cap="flat" w="19050">
-                      <a:solidFill>
-                        <a:srgbClr val="666666">
-                          <a:alpha val="100000"/>
-                        </a:srgbClr>
-                      </a:solidFill>
-                      <a:prstDash val="solid"/>
-                    </a:lnB>
-                    <a:solidFill>
-                      <a:srgbClr val="FFFFFF">
-                        <a:alpha val="0"/>
-                      </a:srgbClr>
-                    </a:solidFill>
-                  </a:tcPr>
-                </a:tc>
-                <a:tc>
-                  <a:txBody>
-                    <a:bodyPr/>
-                    <a:lstStyle/>
-                    <a:p>
-                      <a:pPr algn="r" marL="63500" marR="63500">
-                        <a:lnSpc>
-                          <a:spcPct val="100000"/>
-                        </a:lnSpc>
-                        <a:spcBef>
-                          <a:spcPts val="500"/>
-                        </a:spcBef>
-                        <a:spcAft>
-                          <a:spcPts val="500"/>
-                        </a:spcAft>
-                        <a:buNone/>
-                      </a:pPr>
-                      <a:r>
-                        <a:rPr cap="none" sz="1100" i="0" b="0" u="none">
-                          <a:solidFill>
-                            <a:srgbClr val="000000">
-                              <a:alpha val="100000"/>
-                            </a:srgbClr>
-                          </a:solidFill>
-                          <a:latin typeface="Helvetica"/>
-                          <a:cs typeface="Helvetica"/>
-                          <a:ea typeface="Helvetica"/>
-                          <a:sym typeface="Helvetica"/>
-                        </a:rPr>
-                        <a:t>373</a:t>
-                      </a:r>
-                    </a:p>
-                  </a:txBody>
-                  <a:tcPr anchor="ctr" marB="63500" marT="63500" marR="0" marL="0">
-                    <a:lnL algn="ctr" cmpd="sng" cap="flat" w="0">
-                      <a:noFill/>
-                      <a:prstDash val="solid"/>
-                    </a:lnL>
-                    <a:lnR algn="ctr" cmpd="sng" cap="flat" w="0">
-                      <a:noFill/>
-                      <a:prstDash val="solid"/>
-                    </a:lnR>
-                    <a:lnT algn="ctr" cmpd="sng" cap="flat" w="0">
-                      <a:noFill/>
-                      <a:prstDash val="solid"/>
-                    </a:lnT>
-                    <a:lnB algn="ctr" cmpd="sng" cap="flat" w="19050">
-                      <a:solidFill>
-                        <a:srgbClr val="666666">
-                          <a:alpha val="100000"/>
-                        </a:srgbClr>
-                      </a:solidFill>
-                      <a:prstDash val="solid"/>
-                    </a:lnB>
-                    <a:solidFill>
-                      <a:srgbClr val="FFFFFF">
-                        <a:alpha val="0"/>
-                      </a:srgbClr>
-                    </a:solidFill>
-                  </a:tcPr>
-                </a:tc>
-                <a:tc>
-                  <a:txBody>
-                    <a:bodyPr/>
-                    <a:lstStyle/>
-                    <a:p>
-                      <a:pPr algn="r" marL="63500" marR="63500">
-                        <a:lnSpc>
-                          <a:spcPct val="100000"/>
-                        </a:lnSpc>
-                        <a:spcBef>
-                          <a:spcPts val="500"/>
-                        </a:spcBef>
-                        <a:spcAft>
-                          <a:spcPts val="500"/>
-                        </a:spcAft>
-                        <a:buNone/>
-                      </a:pPr>
-                      <a:r>
-                        <a:rPr cap="none" sz="1100" i="0" b="0" u="none">
-                          <a:solidFill>
-                            <a:srgbClr val="000000">
-                              <a:alpha val="100000"/>
-                            </a:srgbClr>
-                          </a:solidFill>
-                          <a:latin typeface="Helvetica"/>
-                          <a:cs typeface="Helvetica"/>
-                          <a:ea typeface="Helvetica"/>
-                          <a:sym typeface="Helvetica"/>
-                        </a:rPr>
-                        <a:t>52.33901</a:t>
-                      </a:r>
-                    </a:p>
-                  </a:txBody>
-                  <a:tcPr anchor="ctr" marB="63500" marT="63500" marR="0" marL="0">
-                    <a:lnL algn="ctr" cmpd="sng" cap="flat" w="0">
-                      <a:noFill/>
-                      <a:prstDash val="solid"/>
-                    </a:lnL>
-                    <a:lnR algn="ctr" cmpd="sng" cap="flat" w="0">
-                      <a:noFill/>
-                      <a:prstDash val="solid"/>
-                    </a:lnR>
-                    <a:lnT algn="ctr" cmpd="sng" cap="flat" w="0">
-                      <a:noFill/>
-                      <a:prstDash val="solid"/>
-                    </a:lnT>
-                    <a:lnB algn="ctr" cmpd="sng" cap="flat" w="19050">
-                      <a:solidFill>
-                        <a:srgbClr val="666666">
-                          <a:alpha val="100000"/>
-                        </a:srgbClr>
-                      </a:solidFill>
-                      <a:prstDash val="solid"/>
-                    </a:lnB>
-                    <a:solidFill>
-                      <a:srgbClr val="FFFFFF">
-                        <a:alpha val="0"/>
-                      </a:srgbClr>
-                    </a:solidFill>
-                  </a:tcPr>
-                </a:tc>
-                <a:tc>
-                  <a:txBody>
-                    <a:bodyPr/>
-                    <a:lstStyle/>
-                    <a:p>
-                      <a:pPr algn="r" marL="63500" marR="63500">
-                        <a:lnSpc>
-                          <a:spcPct val="100000"/>
-                        </a:lnSpc>
-                        <a:spcBef>
-                          <a:spcPts val="500"/>
-                        </a:spcBef>
-                        <a:spcAft>
-                          <a:spcPts val="500"/>
-                        </a:spcAft>
-                        <a:buNone/>
-                      </a:pPr>
-                      <a:r>
-                        <a:rPr cap="none" sz="1100" i="0" b="0" u="none">
-                          <a:solidFill>
-                            <a:srgbClr val="000000">
-                              <a:alpha val="100000"/>
-                            </a:srgbClr>
-                          </a:solidFill>
-                          <a:latin typeface="Helvetica"/>
-                          <a:cs typeface="Helvetica"/>
-                          <a:ea typeface="Helvetica"/>
-                          <a:sym typeface="Helvetica"/>
-                        </a:rPr>
-                        <a:t>61</a:t>
-                      </a:r>
-                    </a:p>
-                  </a:txBody>
-                  <a:tcPr anchor="ctr" marB="63500" marT="63500" marR="0" marL="0">
-                    <a:lnL algn="ctr" cmpd="sng" cap="flat" w="0">
-                      <a:noFill/>
-                      <a:prstDash val="solid"/>
-                    </a:lnL>
-                    <a:lnR algn="ctr" cmpd="sng" cap="flat" w="0">
-                      <a:noFill/>
-                      <a:prstDash val="solid"/>
-                    </a:lnR>
-                    <a:lnT algn="ctr" cmpd="sng" cap="flat" w="0">
-                      <a:noFill/>
-                      <a:prstDash val="solid"/>
-                    </a:lnT>
-                    <a:lnB algn="ctr" cmpd="sng" cap="flat" w="19050">
-                      <a:solidFill>
-                        <a:srgbClr val="666666">
-                          <a:alpha val="100000"/>
-                        </a:srgbClr>
-                      </a:solidFill>
-                      <a:prstDash val="solid"/>
-                    </a:lnB>
-                    <a:solidFill>
-                      <a:srgbClr val="FFFFFF">
-                        <a:alpha val="0"/>
-                      </a:srgbClr>
-                    </a:solidFill>
-                  </a:tcPr>
-                </a:tc>
-                <a:tc>
-                  <a:txBody>
-                    <a:bodyPr/>
-                    <a:lstStyle/>
-                    <a:p>
-                      <a:pPr algn="r" marL="63500" marR="63500">
-                        <a:lnSpc>
-                          <a:spcPct val="100000"/>
-                        </a:lnSpc>
-                        <a:spcBef>
-                          <a:spcPts val="500"/>
-                        </a:spcBef>
-                        <a:spcAft>
-                          <a:spcPts val="500"/>
-                        </a:spcAft>
-                        <a:buNone/>
-                      </a:pPr>
-                      <a:r>
-                        <a:rPr cap="none" sz="1100" i="0" b="0" u="none">
-                          <a:solidFill>
-                            <a:srgbClr val="000000">
-                              <a:alpha val="100000"/>
-                            </a:srgbClr>
-                          </a:solidFill>
-                          <a:latin typeface="Helvetica"/>
-                          <a:cs typeface="Helvetica"/>
-                          <a:ea typeface="Helvetica"/>
-                          <a:sym typeface="Helvetica"/>
-                        </a:rPr>
-                        <a:t>-1.0909961</a:t>
-                      </a:r>
-                    </a:p>
-                  </a:txBody>
-                  <a:tcPr anchor="ctr" marB="63500" marT="63500" marR="0" marL="0">
-                    <a:lnL algn="ctr" cmpd="sng" cap="flat" w="0">
-                      <a:noFill/>
-                      <a:prstDash val="solid"/>
-                    </a:lnL>
-                    <a:lnR algn="ctr" cmpd="sng" cap="flat" w="0">
-                      <a:noFill/>
-                      <a:prstDash val="solid"/>
-                    </a:lnR>
-                    <a:lnT algn="ctr" cmpd="sng" cap="flat" w="0">
-                      <a:noFill/>
-                      <a:prstDash val="solid"/>
-                    </a:lnT>
-                    <a:lnB algn="ctr" cmpd="sng" cap="flat" w="19050">
-                      <a:solidFill>
-                        <a:srgbClr val="666666">
-                          <a:alpha val="100000"/>
-                        </a:srgbClr>
-                      </a:solidFill>
-                      <a:prstDash val="solid"/>
-                    </a:lnB>
-                    <a:solidFill>
-                      <a:srgbClr val="FFFFFF">
-                        <a:alpha val="0"/>
-                      </a:srgbClr>
-                    </a:solidFill>
-                  </a:tcPr>
-                </a:tc>
-              </a:tr>
-            </a:tbl>
-          </a:graphicData>
-        </a:graphic>
-      </p:graphicFrame>
+      <p:sp>
+        <p:nvSpPr>
+          <p:cNvPr id="4" name="Content Placeholder 3"/>
+          <p:cNvSpPr>
+            <a:spLocks noGrp="1"/>
+          </p:cNvSpPr>
+          <p:nvPr>
+            <p:ph idx="2" sz="half"/>
+          </p:nvPr>
+        </p:nvSpPr>
+        <p:spPr/>
+        <p:txBody>
+          <a:bodyPr/>
+          <a:lstStyle/>
+          <a:p>
+            <a:pPr lvl="0" indent="0">
+              <a:buNone/>
+            </a:pPr>
+            <a:r>
+              <a:rPr>
+                <a:latin typeface="Courier"/>
+              </a:rPr>
+              <a:t># A tibble: 2 × 6
+  lake   mean median    sd   iqr skewness
+  &lt;chr&gt; &lt;dbl&gt;  &lt;dbl&gt; &lt;dbl&gt; &lt;dbl&gt;    &lt;dbl&gt;
+1 I3     266.    266  28.3    24   -0.883
+2 I8     363.    373  52.3    61   -1.09 </a:t>
+            </a:r>
+          </a:p>
+        </p:txBody>
+      </p:sp>
     </p:spTree>
   </p:cSld>
 </p:sld>
@@ -13002,20 +10595,6 @@
             <a:pPr lvl="0"/>
             <a:r>
               <a:rPr/>
-              <a:t>Distinguish between different types of biological variables</a:t>
-            </a:r>
-          </a:p>
-          <a:p>
-            <a:pPr lvl="0"/>
-            <a:r>
-              <a:rPr/>
-              <a:t>Learn about accuracy, precision, and bias in measurements</a:t>
-            </a:r>
-          </a:p>
-          <a:p>
-            <a:pPr lvl="0"/>
-            <a:r>
-              <a:rPr/>
               <a:t>Calculate and interpret measures of central tendency (mean, median, geometric mean)</a:t>
             </a:r>
           </a:p>
@@ -13053,7 +10632,17 @@
             </a:pPr>
             <a:r>
               <a:rPr/>
-              <a:t>We’ll use a dataset on grayling fish from two different lakes to explore these concepts..</a:t>
+              <a:t>We’ll use a dataset on grayling - </a:t>
+            </a:r>
+            <a:r>
+              <a:rPr>
+                <a:latin typeface="Courier"/>
+              </a:rPr>
+              <a:t>gray_I3_I8.csv</a:t>
+            </a:r>
+            <a:r>
+              <a:rPr/>
+              <a:t>` from two different lakes to explore these concepts.. like you did in the homework</a:t>
             </a:r>
           </a:p>
         </p:txBody>
@@ -15765,7 +13354,34 @@
             </a:pPr>
             <a:r>
               <a:rPr/>
-              <a:t>Important properties: 1. It is centered at the population mean (μ) 2. Its standard deviation is the standard error (σ/√n) 3. For large sample sizes, it approaches a normal distribution (Central Limit Theorem)</a:t>
+              <a:t>Important properties:</a:t>
+            </a:r>
+          </a:p>
+          <a:p>
+            <a:pPr lvl="0" indent="-342900" marL="342900">
+              <a:buAutoNum type="arabicPeriod"/>
+            </a:pPr>
+            <a:r>
+              <a:rPr/>
+              <a:t>It is centered at the population mean (μ)</a:t>
+            </a:r>
+          </a:p>
+          <a:p>
+            <a:pPr lvl="0" indent="-342900" marL="342900">
+              <a:buAutoNum type="arabicPeriod"/>
+            </a:pPr>
+            <a:r>
+              <a:rPr/>
+              <a:t>Its standard deviation is the standard error (σ/√n)</a:t>
+            </a:r>
+          </a:p>
+          <a:p>
+            <a:pPr lvl="0" indent="-342900" marL="342900">
+              <a:buAutoNum type="arabicPeriod"/>
+            </a:pPr>
+            <a:r>
+              <a:rPr/>
+              <a:t>For large sample sizes, it approaches a normal distribution (Central Limit Theorem)</a:t>
             </a:r>
           </a:p>
           <a:p>
@@ -15774,7 +13390,28 @@
             </a:pPr>
             <a:r>
               <a:rPr/>
-              <a:t>The larger the sample size: - The narrower the sampling distribution - The smaller the standard error - The more precise our estimate of the population mean</a:t>
+              <a:t>The larger the sample size:</a:t>
+            </a:r>
+          </a:p>
+          <a:p>
+            <a:pPr lvl="0"/>
+            <a:r>
+              <a:rPr/>
+              <a:t>- The narrower the sampling distribution</a:t>
+            </a:r>
+          </a:p>
+          <a:p>
+            <a:pPr lvl="0"/>
+            <a:r>
+              <a:rPr/>
+              <a:t>- The smaller the standard error</a:t>
+            </a:r>
+          </a:p>
+          <a:p>
+            <a:pPr lvl="0"/>
+            <a:r>
+              <a:rPr/>
+              <a:t>- The more precise our estimate of the population mean</a:t>
             </a:r>
           </a:p>
         </p:txBody>
@@ -16712,7 +14349,7 @@
                 </a:solidFill>
                 <a:latin typeface="Courier"/>
               </a:rPr>
-              <a:t>size =</a:t>
+              <a:t>linewidth =</a:t>
             </a:r>
             <a:r>
               <a:rPr>
@@ -17396,7 +15033,7 @@
             </a:pPr>
             <a:r>
               <a:rPr/>
-              <a:t>Biology is fundamentally different from fields like physics in that:</a:t>
+              <a:t>Biology is fundamentally different from fields like physics/chemistry in that:</a:t>
             </a:r>
           </a:p>
           <a:p>
@@ -17519,8 +15156,8 @@
         </p:blipFill>
         <p:spPr bwMode="auto">
           <a:xfrm>
-            <a:off x="6121400" y="1498600"/>
-            <a:ext cx="2781300" cy="2781300"/>
+            <a:off x="6121400" y="2044700"/>
+            <a:ext cx="2781300" cy="1714500"/>
           </a:xfrm>
           <a:prstGeom prst="rect">
             <a:avLst/>
@@ -22325,8 +19962,8 @@
               <a:buNone/>
             </a:pPr>
             <a:r>
-              <a:rPr b="1"/>
-              <a:t>For Further Practice</a:t>
+              <a:rPr/>
+              <a:t>Lecture 3: Conclusion</a:t>
             </a:r>
           </a:p>
         </p:txBody>
@@ -22346,31 +19983,77 @@
           <a:bodyPr/>
           <a:lstStyle/>
           <a:p>
+            <a:pPr lvl="0" indent="0" marL="0">
+              <a:buNone/>
+            </a:pPr>
+            <a:r>
+              <a:rPr/>
+              <a:t>In this lecture, we’ve explored:</a:t>
+            </a:r>
+          </a:p>
+          <a:p>
             <a:pPr lvl="0"/>
             <a:r>
               <a:rPr/>
-              <a:t>Try calculating the standard error and confidence intervals for other variables in the dataset</a:t>
+              <a:t>Why statistics is essential in biology</a:t>
             </a:r>
           </a:p>
           <a:p>
             <a:pPr lvl="0"/>
             <a:r>
               <a:rPr/>
-              <a:t>Experiment with different sample sizes to see how they affect the precision of estimates</a:t>
+              <a:t>Types of biological variables and their properties</a:t>
             </a:r>
           </a:p>
           <a:p>
             <a:pPr lvl="0"/>
             <a:r>
               <a:rPr/>
-              <a:t>Compare the means of the two lakes using confidence intervals - do they overlap?</a:t>
+              <a:t>Accuracy, precision, and bias in measurements</a:t>
             </a:r>
           </a:p>
           <a:p>
             <a:pPr lvl="0"/>
             <a:r>
               <a:rPr/>
-              <a:t>Consider how these concepts extend to other statistics beyond the mean</a:t>
+              <a:t>Measures of central tendency (mean, median, geometric mean)</a:t>
+            </a:r>
+          </a:p>
+          <a:p>
+            <a:pPr lvl="0"/>
+            <a:r>
+              <a:rPr/>
+              <a:t>Measures of spread (standard deviation, variance, and interquartile range)</a:t>
+            </a:r>
+          </a:p>
+          <a:p>
+            <a:pPr lvl="0"/>
+            <a:r>
+              <a:rPr/>
+              <a:t>Data transformations for skewed distributions</a:t>
+            </a:r>
+          </a:p>
+          <a:p>
+            <a:pPr lvl="0"/>
+            <a:r>
+              <a:rPr/>
+              <a:t>Visualization techniques for understanding distributions</a:t>
+            </a:r>
+          </a:p>
+          <a:p>
+            <a:pPr lvl="0"/>
+            <a:r>
+              <a:rPr/>
+              <a:t>Handling missing values</a:t>
+            </a:r>
+          </a:p>
+          <a:p>
+            <a:pPr lvl="0" indent="0" marL="0">
+              <a:buNone/>
+            </a:pPr>
+            <a:r>
+              <a:rPr/>
+              <a:t>These tools form the foundation of statistical analysis and will be essential as we move forward to more complex statistical methods.</a:t>
             </a:r>
           </a:p>
         </p:txBody>
@@ -22422,7 +20105,7 @@
             </a:pPr>
             <a:r>
               <a:rPr/>
-              <a:t>Practice Exercise 1: Pine Data Analysis</a:t>
+              <a:t>Practice Exercise 1: Fish Data</a:t>
             </a:r>
           </a:p>
         </p:txBody>
@@ -22447,7 +20130,17 @@
             </a:pPr>
             <a:r>
               <a:rPr sz="2000" b="1"/>
-              <a:t>Practice Exercise 1: Can you do this for the pine data we have collected?</a:t>
+              <a:t>Practice Exercise 1: Can you open the fish data </a:t>
+            </a:r>
+            <a:r>
+              <a:rPr sz="2000" b="1">
+                <a:latin typeface="Courier"/>
+              </a:rPr>
+              <a:t>gray_I3_I8.csv</a:t>
+            </a:r>
+            <a:r>
+              <a:rPr sz="2000" b="1"/>
+              <a:t> and look at the structure and make a histogram?- see activity</a:t>
             </a:r>
           </a:p>
           <a:p>
@@ -22456,17 +20149,13 @@
             </a:pPr>
             <a:r>
               <a:rPr sz="2000"/>
-              <a:t>Let’s recreate the basic histogram of fish lengths from our last class. Use the </a:t>
+              <a:t>Let’s recreate the basic histogram of fish lengths using </a:t>
             </a:r>
             <a:r>
               <a:rPr sz="2000">
                 <a:latin typeface="Courier"/>
               </a:rPr>
-              <a:t>sculpin_df</a:t>
-            </a:r>
-            <a:r>
-              <a:rPr sz="2000"/>
-              <a:t> data frame that’s already loaded.</a:t>
+              <a:t>gray_I3_I8.csv</a:t>
             </a:r>
           </a:p>
           <a:p>
@@ -22491,148 +20180,6 @@
                 <a:latin typeface="Courier"/>
               </a:rPr>
               <a:t># How do you examine the data - what are the ways you think and lets try it!</a:t>
-            </a:r>
-          </a:p>
-        </p:txBody>
-      </p:sp>
-    </p:spTree>
-  </p:cSld>
-</p:sld>
-</file>
-
-<file path=ppt/slides/slide50.xml><?xml version="1.0" encoding="utf-8"?>
-<p:sld xmlns:a="http://schemas.openxmlformats.org/drawingml/2006/main" xmlns:r="http://schemas.openxmlformats.org/officeDocument/2006/relationships" xmlns:p="http://schemas.openxmlformats.org/presentationml/2006/main">
-  <p:cSld>
-    <p:spTree>
-      <p:nvGrpSpPr>
-        <p:cNvPr id="1" name=""/>
-        <p:cNvGrpSpPr/>
-        <p:nvPr/>
-      </p:nvGrpSpPr>
-      <p:grpSpPr>
-        <a:xfrm>
-          <a:off x="0" y="0"/>
-          <a:ext cx="0" cy="0"/>
-          <a:chOff x="0" y="0"/>
-          <a:chExt cx="0" cy="0"/>
-        </a:xfrm>
-      </p:grpSpPr>
-      <p:sp>
-        <p:nvSpPr>
-          <p:cNvPr id="2" name="Title 1"/>
-          <p:cNvSpPr>
-            <a:spLocks noGrp="1"/>
-          </p:cNvSpPr>
-          <p:nvPr>
-            <p:ph type="title"/>
-          </p:nvPr>
-        </p:nvSpPr>
-        <p:spPr>
-          <a:xfrm>
-            <a:off x="0" y="0"/>
-            <a:ext cx="9144000" cy="582780"/>
-          </a:xfrm>
-        </p:spPr>
-        <p:txBody>
-          <a:bodyPr/>
-          <a:lstStyle/>
-          <a:p>
-            <a:pPr lvl="0" indent="0" marL="0">
-              <a:buNone/>
-            </a:pPr>
-            <a:r>
-              <a:rPr/>
-              <a:t>Lecture 3: Conclusion</a:t>
-            </a:r>
-          </a:p>
-        </p:txBody>
-      </p:sp>
-      <p:sp>
-        <p:nvSpPr>
-          <p:cNvPr id="3" name="Content Placeholder 2"/>
-          <p:cNvSpPr>
-            <a:spLocks noGrp="1"/>
-          </p:cNvSpPr>
-          <p:nvPr>
-            <p:ph idx="1"/>
-          </p:nvPr>
-        </p:nvSpPr>
-        <p:spPr/>
-        <p:txBody>
-          <a:bodyPr/>
-          <a:lstStyle/>
-          <a:p>
-            <a:pPr lvl="0" indent="0" marL="0">
-              <a:buNone/>
-            </a:pPr>
-            <a:r>
-              <a:rPr/>
-              <a:t>In this lecture, we’ve explored:</a:t>
-            </a:r>
-          </a:p>
-          <a:p>
-            <a:pPr lvl="0"/>
-            <a:r>
-              <a:rPr/>
-              <a:t>Why statistics is essential in biology</a:t>
-            </a:r>
-          </a:p>
-          <a:p>
-            <a:pPr lvl="0"/>
-            <a:r>
-              <a:rPr/>
-              <a:t>Types of biological variables and their properties</a:t>
-            </a:r>
-          </a:p>
-          <a:p>
-            <a:pPr lvl="0"/>
-            <a:r>
-              <a:rPr/>
-              <a:t>Accuracy, precision, and bias in measurements</a:t>
-            </a:r>
-          </a:p>
-          <a:p>
-            <a:pPr lvl="0"/>
-            <a:r>
-              <a:rPr/>
-              <a:t>Measures of central tendency (mean, median, geometric mean)</a:t>
-            </a:r>
-          </a:p>
-          <a:p>
-            <a:pPr lvl="0"/>
-            <a:r>
-              <a:rPr/>
-              <a:t>Measures of spread (standard deviation, variance, and interquartile range)</a:t>
-            </a:r>
-          </a:p>
-          <a:p>
-            <a:pPr lvl="0"/>
-            <a:r>
-              <a:rPr/>
-              <a:t>Data transformations for skewed distributions</a:t>
-            </a:r>
-          </a:p>
-          <a:p>
-            <a:pPr lvl="0"/>
-            <a:r>
-              <a:rPr/>
-              <a:t>Visualization techniques for understanding distributions</a:t>
-            </a:r>
-          </a:p>
-          <a:p>
-            <a:pPr lvl="0"/>
-            <a:r>
-              <a:rPr/>
-              <a:t>Handling missing values</a:t>
-            </a:r>
-          </a:p>
-          <a:p>
-            <a:pPr lvl="0" indent="0" marL="0">
-              <a:buNone/>
-            </a:pPr>
-            <a:r>
-              <a:rPr/>
-              <a:t>These tools form the foundation of statistical analysis and will be essential as we move forward to more complex statistical methods.</a:t>
             </a:r>
           </a:p>
         </p:txBody>
@@ -23304,7 +20851,7 @@
             </a:pPr>
             <a:r>
               <a:rPr/>
-              <a:t>Let’s explore our grayling fish dataset and identify the types of variables it contains.</a:t>
+              <a:t>Let’s explore our grayling dataset and identify the types of variables it contains.</a:t>
             </a:r>
           </a:p>
         </p:txBody>

--- a/docs/ecostats_lectures/lecture_03/03_01_lecture_powerpoint.pptx
+++ b/docs/ecostats_lectures/lecture_03/03_01_lecture_powerpoint.pptx
@@ -3668,7 +3668,7 @@
               <a:buNone/>
             </a:pPr>
             <a:r>
-              <a:rPr/>
+              <a:rPr b="1"/>
               <a:t>When taking biological measurements, understanding measurement quality is essential:</a:t>
             </a:r>
           </a:p>
@@ -4687,18 +4687,8 @@
               <a:rPr>
                 <a:latin typeface="Courier"/>
               </a:rPr>
-              <a:t>Variance of length: 4225.9 mm²</a:t>
-            </a:r>
-          </a:p>
-          <a:p>
-            <a:pPr lvl="0" indent="0">
-              <a:buNone/>
-            </a:pPr>
-            <a:r>
-              <a:rPr>
-                <a:latin typeface="Courier"/>
-              </a:rPr>
-              <a:t>Standard deviation of length: 65 mm</a:t>
+              <a:t>Variance of length: 4225.9 mm²
+ Standard deviation of length: 65 mm</a:t>
             </a:r>
           </a:p>
           <a:p>
@@ -4795,6 +4785,21 @@
               <a:rPr/>
               <a:t>The area under the curve of a bell shaped curve within + and - 2 Standard deviations on each side includes about 95% of the data</a:t>
             </a:r>
+            <a:br/>
+            <a:br/>
+            <a:r>
+              <a:rPr/>
+              <a:t>so there is only 2.5% of the data that is outside this range</a:t>
+            </a:r>
+          </a:p>
+          <a:p>
+            <a:pPr lvl="0" indent="0" marL="0">
+              <a:buNone/>
+            </a:pPr>
+            <a:r>
+              <a:rPr/>
+              <a:t>- note the similarity to the p &lt; 0.5</a:t>
+            </a:r>
           </a:p>
           <a:p>
             <a:pPr lvl="0" indent="0">
@@ -4804,62 +4809,12 @@
               <a:rPr>
                 <a:latin typeface="Courier"/>
               </a:rPr>
-              <a:t>i3 Lake Fish Length Summary:</a:t>
-            </a:r>
-          </a:p>
-          <a:p>
-            <a:pPr lvl="0" indent="0">
-              <a:buNone/>
-            </a:pPr>
-            <a:r>
-              <a:rPr>
-                <a:latin typeface="Courier"/>
-              </a:rPr>
-              <a:t>Number of fish: 66 </a:t>
-            </a:r>
-          </a:p>
-          <a:p>
-            <a:pPr lvl="0" indent="0">
-              <a:buNone/>
-            </a:pPr>
-            <a:r>
-              <a:rPr>
-                <a:latin typeface="Courier"/>
-              </a:rPr>
-              <a:t>Mean length: 265.61 mm</a:t>
-            </a:r>
-          </a:p>
-          <a:p>
-            <a:pPr lvl="0" indent="0">
-              <a:buNone/>
-            </a:pPr>
-            <a:r>
-              <a:rPr>
-                <a:latin typeface="Courier"/>
-              </a:rPr>
-              <a:t>Standard Deviation: 28.3 mm</a:t>
-            </a:r>
-          </a:p>
-          <a:p>
-            <a:pPr lvl="0" indent="0">
-              <a:buNone/>
-            </a:pPr>
-            <a:r>
-              <a:rPr>
-                <a:latin typeface="Courier"/>
-              </a:rPr>
-              <a:t>Range for ±2 SD: 209 to 322.21 mm</a:t>
-            </a:r>
-          </a:p>
-          <a:p>
-            <a:pPr lvl="0" indent="0">
-              <a:buNone/>
-            </a:pPr>
-            <a:r>
-              <a:rPr>
-                <a:latin typeface="Courier"/>
-              </a:rPr>
-              <a:t>Percentage within ±2 SD: 90.91 %</a:t>
+              <a:t>i3 Lake Fish Length Summary:
+ Number of fish: 66 
+ Mean length: 265.61 mm
+ Standard Deviation: 28.3 mm
+ Range for ±2 SD: 209 to 322.21 mm
+ Percentage within ±2 SD: 90.91 %</a:t>
             </a:r>
           </a:p>
         </p:txBody>
@@ -5078,404 +5033,23 @@
               <a:t>Coefficient of variation: 10.7 %</a:t>
             </a:r>
           </a:p>
+          <a:p>
+            <a:pPr lvl="0" indent="0">
+              <a:buNone/>
+            </a:pPr>
+            <a:r>
+              <a:rPr>
+                <a:latin typeface="Courier"/>
+              </a:rPr>
+              <a:t># A tibble: 2 × 2
+  lake  cv_length
+  &lt;chr&gt;     &lt;dbl&gt;
+1 I3         10.7
+2 I8         14.4</a:t>
+            </a:r>
+          </a:p>
         </p:txBody>
       </p:sp>
-      <p:graphicFrame xmlns:a="http://schemas.openxmlformats.org/drawingml/2006/main" xmlns:r="http://schemas.openxmlformats.org/officeDocument/2006/relationships" xmlns:p="http://schemas.openxmlformats.org/presentationml/2006/main">
-        <p:nvGraphicFramePr>
-          <p:cNvPr id="784167885" name=""/>
-          <p:cNvGraphicFramePr>
-            <a:graphicFrameLocks noGrp="true"/>
-          </p:cNvGraphicFramePr>
-          <p:nvPr/>
-        </p:nvGraphicFramePr>
-        <p:xfrm rot="0">
-          <a:off x="914400" y="1828800"/>
-          <a:ext cx="9144000" cy="5486400"/>
-        </p:xfrm>
-        <a:graphic>
-          <a:graphicData uri="http://schemas.openxmlformats.org/drawingml/2006/table">
-            <a:tbl>
-              <a:tblPr/>
-              <a:tblGrid>
-                <a:gridCol w="685800"/>
-                <a:gridCol w="685800"/>
-              </a:tblGrid>
-              <a:tr h="228600">
-                <a:tc>
-                  <a:txBody>
-                    <a:bodyPr/>
-                    <a:lstStyle/>
-                    <a:p>
-                      <a:pPr algn="l" marL="63500" marR="63500">
-                        <a:lnSpc>
-                          <a:spcPct val="100000"/>
-                        </a:lnSpc>
-                        <a:spcBef>
-                          <a:spcPts val="500"/>
-                        </a:spcBef>
-                        <a:spcAft>
-                          <a:spcPts val="500"/>
-                        </a:spcAft>
-                        <a:buNone/>
-                      </a:pPr>
-                      <a:r>
-                        <a:rPr cap="none" sz="1100" i="0" b="0" u="none">
-                          <a:solidFill>
-                            <a:srgbClr val="000000">
-                              <a:alpha val="100000"/>
-                            </a:srgbClr>
-                          </a:solidFill>
-                          <a:latin typeface="Helvetica"/>
-                          <a:cs typeface="Helvetica"/>
-                          <a:ea typeface="Helvetica"/>
-                          <a:sym typeface="Helvetica"/>
-                        </a:rPr>
-                        <a:t>lake</a:t>
-                      </a:r>
-                    </a:p>
-                  </a:txBody>
-                  <a:tcPr anchor="ctr" marB="63500" marT="63500" marR="0" marL="0">
-                    <a:lnL algn="ctr" cmpd="sng" cap="flat" w="0">
-                      <a:noFill/>
-                      <a:prstDash val="solid"/>
-                    </a:lnL>
-                    <a:lnR algn="ctr" cmpd="sng" cap="flat" w="0">
-                      <a:noFill/>
-                      <a:prstDash val="solid"/>
-                    </a:lnR>
-                    <a:lnT algn="ctr" cmpd="sng" cap="flat" w="19050">
-                      <a:solidFill>
-                        <a:srgbClr val="666666">
-                          <a:alpha val="100000"/>
-                        </a:srgbClr>
-                      </a:solidFill>
-                      <a:prstDash val="solid"/>
-                    </a:lnT>
-                    <a:lnB algn="ctr" cmpd="sng" cap="flat" w="19050">
-                      <a:solidFill>
-                        <a:srgbClr val="666666">
-                          <a:alpha val="100000"/>
-                        </a:srgbClr>
-                      </a:solidFill>
-                      <a:prstDash val="solid"/>
-                    </a:lnB>
-                    <a:solidFill>
-                      <a:srgbClr val="FFFFFF">
-                        <a:alpha val="0"/>
-                      </a:srgbClr>
-                    </a:solidFill>
-                  </a:tcPr>
-                </a:tc>
-                <a:tc>
-                  <a:txBody>
-                    <a:bodyPr/>
-                    <a:lstStyle/>
-                    <a:p>
-                      <a:pPr algn="r" marL="63500" marR="63500">
-                        <a:lnSpc>
-                          <a:spcPct val="100000"/>
-                        </a:lnSpc>
-                        <a:spcBef>
-                          <a:spcPts val="500"/>
-                        </a:spcBef>
-                        <a:spcAft>
-                          <a:spcPts val="500"/>
-                        </a:spcAft>
-                        <a:buNone/>
-                      </a:pPr>
-                      <a:r>
-                        <a:rPr cap="none" sz="1100" i="0" b="0" u="none">
-                          <a:solidFill>
-                            <a:srgbClr val="000000">
-                              <a:alpha val="100000"/>
-                            </a:srgbClr>
-                          </a:solidFill>
-                          <a:latin typeface="Helvetica"/>
-                          <a:cs typeface="Helvetica"/>
-                          <a:ea typeface="Helvetica"/>
-                          <a:sym typeface="Helvetica"/>
-                        </a:rPr>
-                        <a:t>cv_length</a:t>
-                      </a:r>
-                    </a:p>
-                  </a:txBody>
-                  <a:tcPr anchor="ctr" marB="63500" marT="63500" marR="0" marL="0">
-                    <a:lnL algn="ctr" cmpd="sng" cap="flat" w="0">
-                      <a:noFill/>
-                      <a:prstDash val="solid"/>
-                    </a:lnL>
-                    <a:lnR algn="ctr" cmpd="sng" cap="flat" w="0">
-                      <a:noFill/>
-                      <a:prstDash val="solid"/>
-                    </a:lnR>
-                    <a:lnT algn="ctr" cmpd="sng" cap="flat" w="19050">
-                      <a:solidFill>
-                        <a:srgbClr val="666666">
-                          <a:alpha val="100000"/>
-                        </a:srgbClr>
-                      </a:solidFill>
-                      <a:prstDash val="solid"/>
-                    </a:lnT>
-                    <a:lnB algn="ctr" cmpd="sng" cap="flat" w="19050">
-                      <a:solidFill>
-                        <a:srgbClr val="666666">
-                          <a:alpha val="100000"/>
-                        </a:srgbClr>
-                      </a:solidFill>
-                      <a:prstDash val="solid"/>
-                    </a:lnB>
-                    <a:solidFill>
-                      <a:srgbClr val="FFFFFF">
-                        <a:alpha val="0"/>
-                      </a:srgbClr>
-                    </a:solidFill>
-                  </a:tcPr>
-                </a:tc>
-              </a:tr>
-              <a:tr h="228600">
-                <a:tc>
-                  <a:txBody>
-                    <a:bodyPr/>
-                    <a:lstStyle/>
-                    <a:p>
-                      <a:pPr algn="l" marL="63500" marR="63500">
-                        <a:lnSpc>
-                          <a:spcPct val="100000"/>
-                        </a:lnSpc>
-                        <a:spcBef>
-                          <a:spcPts val="500"/>
-                        </a:spcBef>
-                        <a:spcAft>
-                          <a:spcPts val="500"/>
-                        </a:spcAft>
-                        <a:buNone/>
-                      </a:pPr>
-                      <a:r>
-                        <a:rPr cap="none" sz="1100" i="0" b="0" u="none">
-                          <a:solidFill>
-                            <a:srgbClr val="000000">
-                              <a:alpha val="100000"/>
-                            </a:srgbClr>
-                          </a:solidFill>
-                          <a:latin typeface="Helvetica"/>
-                          <a:cs typeface="Helvetica"/>
-                          <a:ea typeface="Helvetica"/>
-                          <a:sym typeface="Helvetica"/>
-                        </a:rPr>
-                        <a:t>I3</a:t>
-                      </a:r>
-                    </a:p>
-                  </a:txBody>
-                  <a:tcPr anchor="ctr" marB="63500" marT="63500" marR="0" marL="0">
-                    <a:lnL algn="ctr" cmpd="sng" cap="flat" w="0">
-                      <a:noFill/>
-                      <a:prstDash val="solid"/>
-                    </a:lnL>
-                    <a:lnR algn="ctr" cmpd="sng" cap="flat" w="0">
-                      <a:noFill/>
-                      <a:prstDash val="solid"/>
-                    </a:lnR>
-                    <a:lnT algn="ctr" cmpd="sng" cap="flat" w="0">
-                      <a:noFill/>
-                      <a:prstDash val="solid"/>
-                    </a:lnT>
-                    <a:lnB algn="ctr" cmpd="sng" cap="flat" w="0">
-                      <a:noFill/>
-                      <a:prstDash val="solid"/>
-                    </a:lnB>
-                    <a:solidFill>
-                      <a:srgbClr val="FFFFFF">
-                        <a:alpha val="0"/>
-                      </a:srgbClr>
-                    </a:solidFill>
-                  </a:tcPr>
-                </a:tc>
-                <a:tc>
-                  <a:txBody>
-                    <a:bodyPr/>
-                    <a:lstStyle/>
-                    <a:p>
-                      <a:pPr algn="r" marL="63500" marR="63500">
-                        <a:lnSpc>
-                          <a:spcPct val="100000"/>
-                        </a:lnSpc>
-                        <a:spcBef>
-                          <a:spcPts val="500"/>
-                        </a:spcBef>
-                        <a:spcAft>
-                          <a:spcPts val="500"/>
-                        </a:spcAft>
-                        <a:buNone/>
-                      </a:pPr>
-                      <a:r>
-                        <a:rPr cap="none" sz="1100" i="0" b="0" u="none">
-                          <a:solidFill>
-                            <a:srgbClr val="000000">
-                              <a:alpha val="100000"/>
-                            </a:srgbClr>
-                          </a:solidFill>
-                          <a:latin typeface="Helvetica"/>
-                          <a:cs typeface="Helvetica"/>
-                          <a:ea typeface="Helvetica"/>
-                          <a:sym typeface="Helvetica"/>
-                        </a:rPr>
-                        <a:t>10.65630</a:t>
-                      </a:r>
-                    </a:p>
-                  </a:txBody>
-                  <a:tcPr anchor="ctr" marB="63500" marT="63500" marR="0" marL="0">
-                    <a:lnL algn="ctr" cmpd="sng" cap="flat" w="0">
-                      <a:noFill/>
-                      <a:prstDash val="solid"/>
-                    </a:lnL>
-                    <a:lnR algn="ctr" cmpd="sng" cap="flat" w="0">
-                      <a:noFill/>
-                      <a:prstDash val="solid"/>
-                    </a:lnR>
-                    <a:lnT algn="ctr" cmpd="sng" cap="flat" w="0">
-                      <a:noFill/>
-                      <a:prstDash val="solid"/>
-                    </a:lnT>
-                    <a:lnB algn="ctr" cmpd="sng" cap="flat" w="0">
-                      <a:noFill/>
-                      <a:prstDash val="solid"/>
-                    </a:lnB>
-                    <a:solidFill>
-                      <a:srgbClr val="FFFFFF">
-                        <a:alpha val="0"/>
-                      </a:srgbClr>
-                    </a:solidFill>
-                  </a:tcPr>
-                </a:tc>
-              </a:tr>
-              <a:tr h="228600">
-                <a:tc>
-                  <a:txBody>
-                    <a:bodyPr/>
-                    <a:lstStyle/>
-                    <a:p>
-                      <a:pPr algn="l" marL="63500" marR="63500">
-                        <a:lnSpc>
-                          <a:spcPct val="100000"/>
-                        </a:lnSpc>
-                        <a:spcBef>
-                          <a:spcPts val="500"/>
-                        </a:spcBef>
-                        <a:spcAft>
-                          <a:spcPts val="500"/>
-                        </a:spcAft>
-                        <a:buNone/>
-                      </a:pPr>
-                      <a:r>
-                        <a:rPr cap="none" sz="1100" i="0" b="0" u="none">
-                          <a:solidFill>
-                            <a:srgbClr val="000000">
-                              <a:alpha val="100000"/>
-                            </a:srgbClr>
-                          </a:solidFill>
-                          <a:latin typeface="Helvetica"/>
-                          <a:cs typeface="Helvetica"/>
-                          <a:ea typeface="Helvetica"/>
-                          <a:sym typeface="Helvetica"/>
-                        </a:rPr>
-                        <a:t>I8</a:t>
-                      </a:r>
-                    </a:p>
-                  </a:txBody>
-                  <a:tcPr anchor="ctr" marB="63500" marT="63500" marR="0" marL="0">
-                    <a:lnL algn="ctr" cmpd="sng" cap="flat" w="0">
-                      <a:noFill/>
-                      <a:prstDash val="solid"/>
-                    </a:lnL>
-                    <a:lnR algn="ctr" cmpd="sng" cap="flat" w="0">
-                      <a:noFill/>
-                      <a:prstDash val="solid"/>
-                    </a:lnR>
-                    <a:lnT algn="ctr" cmpd="sng" cap="flat" w="0">
-                      <a:noFill/>
-                      <a:prstDash val="solid"/>
-                    </a:lnT>
-                    <a:lnB algn="ctr" cmpd="sng" cap="flat" w="19050">
-                      <a:solidFill>
-                        <a:srgbClr val="666666">
-                          <a:alpha val="100000"/>
-                        </a:srgbClr>
-                      </a:solidFill>
-                      <a:prstDash val="solid"/>
-                    </a:lnB>
-                    <a:solidFill>
-                      <a:srgbClr val="FFFFFF">
-                        <a:alpha val="0"/>
-                      </a:srgbClr>
-                    </a:solidFill>
-                  </a:tcPr>
-                </a:tc>
-                <a:tc>
-                  <a:txBody>
-                    <a:bodyPr/>
-                    <a:lstStyle/>
-                    <a:p>
-                      <a:pPr algn="r" marL="63500" marR="63500">
-                        <a:lnSpc>
-                          <a:spcPct val="100000"/>
-                        </a:lnSpc>
-                        <a:spcBef>
-                          <a:spcPts val="500"/>
-                        </a:spcBef>
-                        <a:spcAft>
-                          <a:spcPts val="500"/>
-                        </a:spcAft>
-                        <a:buNone/>
-                      </a:pPr>
-                      <a:r>
-                        <a:rPr cap="none" sz="1100" i="0" b="0" u="none">
-                          <a:solidFill>
-                            <a:srgbClr val="000000">
-                              <a:alpha val="100000"/>
-                            </a:srgbClr>
-                          </a:solidFill>
-                          <a:latin typeface="Helvetica"/>
-                          <a:cs typeface="Helvetica"/>
-                          <a:ea typeface="Helvetica"/>
-                          <a:sym typeface="Helvetica"/>
-                        </a:rPr>
-                        <a:t>14.43444</a:t>
-                      </a:r>
-                    </a:p>
-                  </a:txBody>
-                  <a:tcPr anchor="ctr" marB="63500" marT="63500" marR="0" marL="0">
-                    <a:lnL algn="ctr" cmpd="sng" cap="flat" w="0">
-                      <a:noFill/>
-                      <a:prstDash val="solid"/>
-                    </a:lnL>
-                    <a:lnR algn="ctr" cmpd="sng" cap="flat" w="0">
-                      <a:noFill/>
-                      <a:prstDash val="solid"/>
-                    </a:lnR>
-                    <a:lnT algn="ctr" cmpd="sng" cap="flat" w="0">
-                      <a:noFill/>
-                      <a:prstDash val="solid"/>
-                    </a:lnT>
-                    <a:lnB algn="ctr" cmpd="sng" cap="flat" w="19050">
-                      <a:solidFill>
-                        <a:srgbClr val="666666">
-                          <a:alpha val="100000"/>
-                        </a:srgbClr>
-                      </a:solidFill>
-                      <a:prstDash val="solid"/>
-                    </a:lnB>
-                    <a:solidFill>
-                      <a:srgbClr val="FFFFFF">
-                        <a:alpha val="0"/>
-                      </a:srgbClr>
-                    </a:solidFill>
-                  </a:tcPr>
-                </a:tc>
-              </a:tr>
-            </a:tbl>
-          </a:graphicData>
-        </a:graphic>
-      </p:graphicFrame>
     </p:spTree>
   </p:cSld>
 </p:sld>
@@ -5715,772 +5289,23 @@
               <a:t>Interquartile range: 106.25 mm</a:t>
             </a:r>
           </a:p>
+          <a:p>
+            <a:pPr lvl="0" indent="0">
+              <a:buNone/>
+            </a:pPr>
+            <a:r>
+              <a:rPr>
+                <a:latin typeface="Courier"/>
+              </a:rPr>
+              <a:t># A tibble: 2 × 4
+  lake     q1    q3   iqr
+  &lt;chr&gt; &lt;dbl&gt; &lt;dbl&gt; &lt;dbl&gt;
+1 I3      256   280    24
+2 I8      340   401    61</a:t>
+            </a:r>
+          </a:p>
         </p:txBody>
       </p:sp>
-      <p:graphicFrame xmlns:a="http://schemas.openxmlformats.org/drawingml/2006/main" xmlns:r="http://schemas.openxmlformats.org/officeDocument/2006/relationships" xmlns:p="http://schemas.openxmlformats.org/presentationml/2006/main">
-        <p:nvGraphicFramePr>
-          <p:cNvPr id="390225345" name=""/>
-          <p:cNvGraphicFramePr>
-            <a:graphicFrameLocks noGrp="true"/>
-          </p:cNvGraphicFramePr>
-          <p:nvPr/>
-        </p:nvGraphicFramePr>
-        <p:xfrm rot="0">
-          <a:off x="914400" y="1828800"/>
-          <a:ext cx="9144000" cy="5486400"/>
-        </p:xfrm>
-        <a:graphic>
-          <a:graphicData uri="http://schemas.openxmlformats.org/drawingml/2006/table">
-            <a:tbl>
-              <a:tblPr/>
-              <a:tblGrid>
-                <a:gridCol w="685800"/>
-                <a:gridCol w="685800"/>
-                <a:gridCol w="685800"/>
-                <a:gridCol w="685800"/>
-              </a:tblGrid>
-              <a:tr h="228600">
-                <a:tc>
-                  <a:txBody>
-                    <a:bodyPr/>
-                    <a:lstStyle/>
-                    <a:p>
-                      <a:pPr algn="l" marL="63500" marR="63500">
-                        <a:lnSpc>
-                          <a:spcPct val="100000"/>
-                        </a:lnSpc>
-                        <a:spcBef>
-                          <a:spcPts val="500"/>
-                        </a:spcBef>
-                        <a:spcAft>
-                          <a:spcPts val="500"/>
-                        </a:spcAft>
-                        <a:buNone/>
-                      </a:pPr>
-                      <a:r>
-                        <a:rPr cap="none" sz="1100" i="0" b="0" u="none">
-                          <a:solidFill>
-                            <a:srgbClr val="000000">
-                              <a:alpha val="100000"/>
-                            </a:srgbClr>
-                          </a:solidFill>
-                          <a:latin typeface="Helvetica"/>
-                          <a:cs typeface="Helvetica"/>
-                          <a:ea typeface="Helvetica"/>
-                          <a:sym typeface="Helvetica"/>
-                        </a:rPr>
-                        <a:t>lake</a:t>
-                      </a:r>
-                    </a:p>
-                  </a:txBody>
-                  <a:tcPr anchor="ctr" marB="63500" marT="63500" marR="0" marL="0">
-                    <a:lnL algn="ctr" cmpd="sng" cap="flat" w="0">
-                      <a:noFill/>
-                      <a:prstDash val="solid"/>
-                    </a:lnL>
-                    <a:lnR algn="ctr" cmpd="sng" cap="flat" w="0">
-                      <a:noFill/>
-                      <a:prstDash val="solid"/>
-                    </a:lnR>
-                    <a:lnT algn="ctr" cmpd="sng" cap="flat" w="19050">
-                      <a:solidFill>
-                        <a:srgbClr val="666666">
-                          <a:alpha val="100000"/>
-                        </a:srgbClr>
-                      </a:solidFill>
-                      <a:prstDash val="solid"/>
-                    </a:lnT>
-                    <a:lnB algn="ctr" cmpd="sng" cap="flat" w="19050">
-                      <a:solidFill>
-                        <a:srgbClr val="666666">
-                          <a:alpha val="100000"/>
-                        </a:srgbClr>
-                      </a:solidFill>
-                      <a:prstDash val="solid"/>
-                    </a:lnB>
-                    <a:solidFill>
-                      <a:srgbClr val="FFFFFF">
-                        <a:alpha val="0"/>
-                      </a:srgbClr>
-                    </a:solidFill>
-                  </a:tcPr>
-                </a:tc>
-                <a:tc>
-                  <a:txBody>
-                    <a:bodyPr/>
-                    <a:lstStyle/>
-                    <a:p>
-                      <a:pPr algn="r" marL="63500" marR="63500">
-                        <a:lnSpc>
-                          <a:spcPct val="100000"/>
-                        </a:lnSpc>
-                        <a:spcBef>
-                          <a:spcPts val="500"/>
-                        </a:spcBef>
-                        <a:spcAft>
-                          <a:spcPts val="500"/>
-                        </a:spcAft>
-                        <a:buNone/>
-                      </a:pPr>
-                      <a:r>
-                        <a:rPr cap="none" sz="1100" i="0" b="0" u="none">
-                          <a:solidFill>
-                            <a:srgbClr val="000000">
-                              <a:alpha val="100000"/>
-                            </a:srgbClr>
-                          </a:solidFill>
-                          <a:latin typeface="Helvetica"/>
-                          <a:cs typeface="Helvetica"/>
-                          <a:ea typeface="Helvetica"/>
-                          <a:sym typeface="Helvetica"/>
-                        </a:rPr>
-                        <a:t>q1</a:t>
-                      </a:r>
-                    </a:p>
-                  </a:txBody>
-                  <a:tcPr anchor="ctr" marB="63500" marT="63500" marR="0" marL="0">
-                    <a:lnL algn="ctr" cmpd="sng" cap="flat" w="0">
-                      <a:noFill/>
-                      <a:prstDash val="solid"/>
-                    </a:lnL>
-                    <a:lnR algn="ctr" cmpd="sng" cap="flat" w="0">
-                      <a:noFill/>
-                      <a:prstDash val="solid"/>
-                    </a:lnR>
-                    <a:lnT algn="ctr" cmpd="sng" cap="flat" w="19050">
-                      <a:solidFill>
-                        <a:srgbClr val="666666">
-                          <a:alpha val="100000"/>
-                        </a:srgbClr>
-                      </a:solidFill>
-                      <a:prstDash val="solid"/>
-                    </a:lnT>
-                    <a:lnB algn="ctr" cmpd="sng" cap="flat" w="19050">
-                      <a:solidFill>
-                        <a:srgbClr val="666666">
-                          <a:alpha val="100000"/>
-                        </a:srgbClr>
-                      </a:solidFill>
-                      <a:prstDash val="solid"/>
-                    </a:lnB>
-                    <a:solidFill>
-                      <a:srgbClr val="FFFFFF">
-                        <a:alpha val="0"/>
-                      </a:srgbClr>
-                    </a:solidFill>
-                  </a:tcPr>
-                </a:tc>
-                <a:tc>
-                  <a:txBody>
-                    <a:bodyPr/>
-                    <a:lstStyle/>
-                    <a:p>
-                      <a:pPr algn="r" marL="63500" marR="63500">
-                        <a:lnSpc>
-                          <a:spcPct val="100000"/>
-                        </a:lnSpc>
-                        <a:spcBef>
-                          <a:spcPts val="500"/>
-                        </a:spcBef>
-                        <a:spcAft>
-                          <a:spcPts val="500"/>
-                        </a:spcAft>
-                        <a:buNone/>
-                      </a:pPr>
-                      <a:r>
-                        <a:rPr cap="none" sz="1100" i="0" b="0" u="none">
-                          <a:solidFill>
-                            <a:srgbClr val="000000">
-                              <a:alpha val="100000"/>
-                            </a:srgbClr>
-                          </a:solidFill>
-                          <a:latin typeface="Helvetica"/>
-                          <a:cs typeface="Helvetica"/>
-                          <a:ea typeface="Helvetica"/>
-                          <a:sym typeface="Helvetica"/>
-                        </a:rPr>
-                        <a:t>q3</a:t>
-                      </a:r>
-                    </a:p>
-                  </a:txBody>
-                  <a:tcPr anchor="ctr" marB="63500" marT="63500" marR="0" marL="0">
-                    <a:lnL algn="ctr" cmpd="sng" cap="flat" w="0">
-                      <a:noFill/>
-                      <a:prstDash val="solid"/>
-                    </a:lnL>
-                    <a:lnR algn="ctr" cmpd="sng" cap="flat" w="0">
-                      <a:noFill/>
-                      <a:prstDash val="solid"/>
-                    </a:lnR>
-                    <a:lnT algn="ctr" cmpd="sng" cap="flat" w="19050">
-                      <a:solidFill>
-                        <a:srgbClr val="666666">
-                          <a:alpha val="100000"/>
-                        </a:srgbClr>
-                      </a:solidFill>
-                      <a:prstDash val="solid"/>
-                    </a:lnT>
-                    <a:lnB algn="ctr" cmpd="sng" cap="flat" w="19050">
-                      <a:solidFill>
-                        <a:srgbClr val="666666">
-                          <a:alpha val="100000"/>
-                        </a:srgbClr>
-                      </a:solidFill>
-                      <a:prstDash val="solid"/>
-                    </a:lnB>
-                    <a:solidFill>
-                      <a:srgbClr val="FFFFFF">
-                        <a:alpha val="0"/>
-                      </a:srgbClr>
-                    </a:solidFill>
-                  </a:tcPr>
-                </a:tc>
-                <a:tc>
-                  <a:txBody>
-                    <a:bodyPr/>
-                    <a:lstStyle/>
-                    <a:p>
-                      <a:pPr algn="r" marL="63500" marR="63500">
-                        <a:lnSpc>
-                          <a:spcPct val="100000"/>
-                        </a:lnSpc>
-                        <a:spcBef>
-                          <a:spcPts val="500"/>
-                        </a:spcBef>
-                        <a:spcAft>
-                          <a:spcPts val="500"/>
-                        </a:spcAft>
-                        <a:buNone/>
-                      </a:pPr>
-                      <a:r>
-                        <a:rPr cap="none" sz="1100" i="0" b="0" u="none">
-                          <a:solidFill>
-                            <a:srgbClr val="000000">
-                              <a:alpha val="100000"/>
-                            </a:srgbClr>
-                          </a:solidFill>
-                          <a:latin typeface="Helvetica"/>
-                          <a:cs typeface="Helvetica"/>
-                          <a:ea typeface="Helvetica"/>
-                          <a:sym typeface="Helvetica"/>
-                        </a:rPr>
-                        <a:t>iqr</a:t>
-                      </a:r>
-                    </a:p>
-                  </a:txBody>
-                  <a:tcPr anchor="ctr" marB="63500" marT="63500" marR="0" marL="0">
-                    <a:lnL algn="ctr" cmpd="sng" cap="flat" w="0">
-                      <a:noFill/>
-                      <a:prstDash val="solid"/>
-                    </a:lnL>
-                    <a:lnR algn="ctr" cmpd="sng" cap="flat" w="0">
-                      <a:noFill/>
-                      <a:prstDash val="solid"/>
-                    </a:lnR>
-                    <a:lnT algn="ctr" cmpd="sng" cap="flat" w="19050">
-                      <a:solidFill>
-                        <a:srgbClr val="666666">
-                          <a:alpha val="100000"/>
-                        </a:srgbClr>
-                      </a:solidFill>
-                      <a:prstDash val="solid"/>
-                    </a:lnT>
-                    <a:lnB algn="ctr" cmpd="sng" cap="flat" w="19050">
-                      <a:solidFill>
-                        <a:srgbClr val="666666">
-                          <a:alpha val="100000"/>
-                        </a:srgbClr>
-                      </a:solidFill>
-                      <a:prstDash val="solid"/>
-                    </a:lnB>
-                    <a:solidFill>
-                      <a:srgbClr val="FFFFFF">
-                        <a:alpha val="0"/>
-                      </a:srgbClr>
-                    </a:solidFill>
-                  </a:tcPr>
-                </a:tc>
-              </a:tr>
-              <a:tr h="228600">
-                <a:tc>
-                  <a:txBody>
-                    <a:bodyPr/>
-                    <a:lstStyle/>
-                    <a:p>
-                      <a:pPr algn="l" marL="63500" marR="63500">
-                        <a:lnSpc>
-                          <a:spcPct val="100000"/>
-                        </a:lnSpc>
-                        <a:spcBef>
-                          <a:spcPts val="500"/>
-                        </a:spcBef>
-                        <a:spcAft>
-                          <a:spcPts val="500"/>
-                        </a:spcAft>
-                        <a:buNone/>
-                      </a:pPr>
-                      <a:r>
-                        <a:rPr cap="none" sz="1100" i="0" b="0" u="none">
-                          <a:solidFill>
-                            <a:srgbClr val="000000">
-                              <a:alpha val="100000"/>
-                            </a:srgbClr>
-                          </a:solidFill>
-                          <a:latin typeface="Helvetica"/>
-                          <a:cs typeface="Helvetica"/>
-                          <a:ea typeface="Helvetica"/>
-                          <a:sym typeface="Helvetica"/>
-                        </a:rPr>
-                        <a:t>I3</a:t>
-                      </a:r>
-                    </a:p>
-                  </a:txBody>
-                  <a:tcPr anchor="ctr" marB="63500" marT="63500" marR="0" marL="0">
-                    <a:lnL algn="ctr" cmpd="sng" cap="flat" w="0">
-                      <a:noFill/>
-                      <a:prstDash val="solid"/>
-                    </a:lnL>
-                    <a:lnR algn="ctr" cmpd="sng" cap="flat" w="0">
-                      <a:noFill/>
-                      <a:prstDash val="solid"/>
-                    </a:lnR>
-                    <a:lnT algn="ctr" cmpd="sng" cap="flat" w="0">
-                      <a:noFill/>
-                      <a:prstDash val="solid"/>
-                    </a:lnT>
-                    <a:lnB algn="ctr" cmpd="sng" cap="flat" w="0">
-                      <a:noFill/>
-                      <a:prstDash val="solid"/>
-                    </a:lnB>
-                    <a:solidFill>
-                      <a:srgbClr val="FFFFFF">
-                        <a:alpha val="0"/>
-                      </a:srgbClr>
-                    </a:solidFill>
-                  </a:tcPr>
-                </a:tc>
-                <a:tc>
-                  <a:txBody>
-                    <a:bodyPr/>
-                    <a:lstStyle/>
-                    <a:p>
-                      <a:pPr algn="r" marL="63500" marR="63500">
-                        <a:lnSpc>
-                          <a:spcPct val="100000"/>
-                        </a:lnSpc>
-                        <a:spcBef>
-                          <a:spcPts val="500"/>
-                        </a:spcBef>
-                        <a:spcAft>
-                          <a:spcPts val="500"/>
-                        </a:spcAft>
-                        <a:buNone/>
-                      </a:pPr>
-                      <a:r>
-                        <a:rPr cap="none" sz="1100" i="0" b="0" u="none">
-                          <a:solidFill>
-                            <a:srgbClr val="000000">
-                              <a:alpha val="100000"/>
-                            </a:srgbClr>
-                          </a:solidFill>
-                          <a:latin typeface="Helvetica"/>
-                          <a:cs typeface="Helvetica"/>
-                          <a:ea typeface="Helvetica"/>
-                          <a:sym typeface="Helvetica"/>
-                        </a:rPr>
-                        <a:t>256</a:t>
-                      </a:r>
-                    </a:p>
-                  </a:txBody>
-                  <a:tcPr anchor="ctr" marB="63500" marT="63500" marR="0" marL="0">
-                    <a:lnL algn="ctr" cmpd="sng" cap="flat" w="0">
-                      <a:noFill/>
-                      <a:prstDash val="solid"/>
-                    </a:lnL>
-                    <a:lnR algn="ctr" cmpd="sng" cap="flat" w="0">
-                      <a:noFill/>
-                      <a:prstDash val="solid"/>
-                    </a:lnR>
-                    <a:lnT algn="ctr" cmpd="sng" cap="flat" w="0">
-                      <a:noFill/>
-                      <a:prstDash val="solid"/>
-                    </a:lnT>
-                    <a:lnB algn="ctr" cmpd="sng" cap="flat" w="0">
-                      <a:noFill/>
-                      <a:prstDash val="solid"/>
-                    </a:lnB>
-                    <a:solidFill>
-                      <a:srgbClr val="FFFFFF">
-                        <a:alpha val="0"/>
-                      </a:srgbClr>
-                    </a:solidFill>
-                  </a:tcPr>
-                </a:tc>
-                <a:tc>
-                  <a:txBody>
-                    <a:bodyPr/>
-                    <a:lstStyle/>
-                    <a:p>
-                      <a:pPr algn="r" marL="63500" marR="63500">
-                        <a:lnSpc>
-                          <a:spcPct val="100000"/>
-                        </a:lnSpc>
-                        <a:spcBef>
-                          <a:spcPts val="500"/>
-                        </a:spcBef>
-                        <a:spcAft>
-                          <a:spcPts val="500"/>
-                        </a:spcAft>
-                        <a:buNone/>
-                      </a:pPr>
-                      <a:r>
-                        <a:rPr cap="none" sz="1100" i="0" b="0" u="none">
-                          <a:solidFill>
-                            <a:srgbClr val="000000">
-                              <a:alpha val="100000"/>
-                            </a:srgbClr>
-                          </a:solidFill>
-                          <a:latin typeface="Helvetica"/>
-                          <a:cs typeface="Helvetica"/>
-                          <a:ea typeface="Helvetica"/>
-                          <a:sym typeface="Helvetica"/>
-                        </a:rPr>
-                        <a:t>280</a:t>
-                      </a:r>
-                    </a:p>
-                  </a:txBody>
-                  <a:tcPr anchor="ctr" marB="63500" marT="63500" marR="0" marL="0">
-                    <a:lnL algn="ctr" cmpd="sng" cap="flat" w="0">
-                      <a:noFill/>
-                      <a:prstDash val="solid"/>
-                    </a:lnL>
-                    <a:lnR algn="ctr" cmpd="sng" cap="flat" w="0">
-                      <a:noFill/>
-                      <a:prstDash val="solid"/>
-                    </a:lnR>
-                    <a:lnT algn="ctr" cmpd="sng" cap="flat" w="0">
-                      <a:noFill/>
-                      <a:prstDash val="solid"/>
-                    </a:lnT>
-                    <a:lnB algn="ctr" cmpd="sng" cap="flat" w="0">
-                      <a:noFill/>
-                      <a:prstDash val="solid"/>
-                    </a:lnB>
-                    <a:solidFill>
-                      <a:srgbClr val="FFFFFF">
-                        <a:alpha val="0"/>
-                      </a:srgbClr>
-                    </a:solidFill>
-                  </a:tcPr>
-                </a:tc>
-                <a:tc>
-                  <a:txBody>
-                    <a:bodyPr/>
-                    <a:lstStyle/>
-                    <a:p>
-                      <a:pPr algn="r" marL="63500" marR="63500">
-                        <a:lnSpc>
-                          <a:spcPct val="100000"/>
-                        </a:lnSpc>
-                        <a:spcBef>
-                          <a:spcPts val="500"/>
-                        </a:spcBef>
-                        <a:spcAft>
-                          <a:spcPts val="500"/>
-                        </a:spcAft>
-                        <a:buNone/>
-                      </a:pPr>
-                      <a:r>
-                        <a:rPr cap="none" sz="1100" i="0" b="0" u="none">
-                          <a:solidFill>
-                            <a:srgbClr val="000000">
-                              <a:alpha val="100000"/>
-                            </a:srgbClr>
-                          </a:solidFill>
-                          <a:latin typeface="Helvetica"/>
-                          <a:cs typeface="Helvetica"/>
-                          <a:ea typeface="Helvetica"/>
-                          <a:sym typeface="Helvetica"/>
-                        </a:rPr>
-                        <a:t>24</a:t>
-                      </a:r>
-                    </a:p>
-                  </a:txBody>
-                  <a:tcPr anchor="ctr" marB="63500" marT="63500" marR="0" marL="0">
-                    <a:lnL algn="ctr" cmpd="sng" cap="flat" w="0">
-                      <a:noFill/>
-                      <a:prstDash val="solid"/>
-                    </a:lnL>
-                    <a:lnR algn="ctr" cmpd="sng" cap="flat" w="0">
-                      <a:noFill/>
-                      <a:prstDash val="solid"/>
-                    </a:lnR>
-                    <a:lnT algn="ctr" cmpd="sng" cap="flat" w="0">
-                      <a:noFill/>
-                      <a:prstDash val="solid"/>
-                    </a:lnT>
-                    <a:lnB algn="ctr" cmpd="sng" cap="flat" w="0">
-                      <a:noFill/>
-                      <a:prstDash val="solid"/>
-                    </a:lnB>
-                    <a:solidFill>
-                      <a:srgbClr val="FFFFFF">
-                        <a:alpha val="0"/>
-                      </a:srgbClr>
-                    </a:solidFill>
-                  </a:tcPr>
-                </a:tc>
-              </a:tr>
-              <a:tr h="228600">
-                <a:tc>
-                  <a:txBody>
-                    <a:bodyPr/>
-                    <a:lstStyle/>
-                    <a:p>
-                      <a:pPr algn="l" marL="63500" marR="63500">
-                        <a:lnSpc>
-                          <a:spcPct val="100000"/>
-                        </a:lnSpc>
-                        <a:spcBef>
-                          <a:spcPts val="500"/>
-                        </a:spcBef>
-                        <a:spcAft>
-                          <a:spcPts val="500"/>
-                        </a:spcAft>
-                        <a:buNone/>
-                      </a:pPr>
-                      <a:r>
-                        <a:rPr cap="none" sz="1100" i="0" b="0" u="none">
-                          <a:solidFill>
-                            <a:srgbClr val="000000">
-                              <a:alpha val="100000"/>
-                            </a:srgbClr>
-                          </a:solidFill>
-                          <a:latin typeface="Helvetica"/>
-                          <a:cs typeface="Helvetica"/>
-                          <a:ea typeface="Helvetica"/>
-                          <a:sym typeface="Helvetica"/>
-                        </a:rPr>
-                        <a:t>I8</a:t>
-                      </a:r>
-                    </a:p>
-                  </a:txBody>
-                  <a:tcPr anchor="ctr" marB="63500" marT="63500" marR="0" marL="0">
-                    <a:lnL algn="ctr" cmpd="sng" cap="flat" w="0">
-                      <a:noFill/>
-                      <a:prstDash val="solid"/>
-                    </a:lnL>
-                    <a:lnR algn="ctr" cmpd="sng" cap="flat" w="0">
-                      <a:noFill/>
-                      <a:prstDash val="solid"/>
-                    </a:lnR>
-                    <a:lnT algn="ctr" cmpd="sng" cap="flat" w="0">
-                      <a:noFill/>
-                      <a:prstDash val="solid"/>
-                    </a:lnT>
-                    <a:lnB algn="ctr" cmpd="sng" cap="flat" w="19050">
-                      <a:solidFill>
-                        <a:srgbClr val="666666">
-                          <a:alpha val="100000"/>
-                        </a:srgbClr>
-                      </a:solidFill>
-                      <a:prstDash val="solid"/>
-                    </a:lnB>
-                    <a:solidFill>
-                      <a:srgbClr val="FFFFFF">
-                        <a:alpha val="0"/>
-                      </a:srgbClr>
-                    </a:solidFill>
-                  </a:tcPr>
-                </a:tc>
-                <a:tc>
-                  <a:txBody>
-                    <a:bodyPr/>
-                    <a:lstStyle/>
-                    <a:p>
-                      <a:pPr algn="r" marL="63500" marR="63500">
-                        <a:lnSpc>
-                          <a:spcPct val="100000"/>
-                        </a:lnSpc>
-                        <a:spcBef>
-                          <a:spcPts val="500"/>
-                        </a:spcBef>
-                        <a:spcAft>
-                          <a:spcPts val="500"/>
-                        </a:spcAft>
-                        <a:buNone/>
-                      </a:pPr>
-                      <a:r>
-                        <a:rPr cap="none" sz="1100" i="0" b="0" u="none">
-                          <a:solidFill>
-                            <a:srgbClr val="000000">
-                              <a:alpha val="100000"/>
-                            </a:srgbClr>
-                          </a:solidFill>
-                          <a:latin typeface="Helvetica"/>
-                          <a:cs typeface="Helvetica"/>
-                          <a:ea typeface="Helvetica"/>
-                          <a:sym typeface="Helvetica"/>
-                        </a:rPr>
-                        <a:t>340</a:t>
-                      </a:r>
-                    </a:p>
-                  </a:txBody>
-                  <a:tcPr anchor="ctr" marB="63500" marT="63500" marR="0" marL="0">
-                    <a:lnL algn="ctr" cmpd="sng" cap="flat" w="0">
-                      <a:noFill/>
-                      <a:prstDash val="solid"/>
-                    </a:lnL>
-                    <a:lnR algn="ctr" cmpd="sng" cap="flat" w="0">
-                      <a:noFill/>
-                      <a:prstDash val="solid"/>
-                    </a:lnR>
-                    <a:lnT algn="ctr" cmpd="sng" cap="flat" w="0">
-                      <a:noFill/>
-                      <a:prstDash val="solid"/>
-                    </a:lnT>
-                    <a:lnB algn="ctr" cmpd="sng" cap="flat" w="19050">
-                      <a:solidFill>
-                        <a:srgbClr val="666666">
-                          <a:alpha val="100000"/>
-                        </a:srgbClr>
-                      </a:solidFill>
-                      <a:prstDash val="solid"/>
-                    </a:lnB>
-                    <a:solidFill>
-                      <a:srgbClr val="FFFFFF">
-                        <a:alpha val="0"/>
-                      </a:srgbClr>
-                    </a:solidFill>
-                  </a:tcPr>
-                </a:tc>
-                <a:tc>
-                  <a:txBody>
-                    <a:bodyPr/>
-                    <a:lstStyle/>
-                    <a:p>
-                      <a:pPr algn="r" marL="63500" marR="63500">
-                        <a:lnSpc>
-                          <a:spcPct val="100000"/>
-                        </a:lnSpc>
-                        <a:spcBef>
-                          <a:spcPts val="500"/>
-                        </a:spcBef>
-                        <a:spcAft>
-                          <a:spcPts val="500"/>
-                        </a:spcAft>
-                        <a:buNone/>
-                      </a:pPr>
-                      <a:r>
-                        <a:rPr cap="none" sz="1100" i="0" b="0" u="none">
-                          <a:solidFill>
-                            <a:srgbClr val="000000">
-                              <a:alpha val="100000"/>
-                            </a:srgbClr>
-                          </a:solidFill>
-                          <a:latin typeface="Helvetica"/>
-                          <a:cs typeface="Helvetica"/>
-                          <a:ea typeface="Helvetica"/>
-                          <a:sym typeface="Helvetica"/>
-                        </a:rPr>
-                        <a:t>401</a:t>
-                      </a:r>
-                    </a:p>
-                  </a:txBody>
-                  <a:tcPr anchor="ctr" marB="63500" marT="63500" marR="0" marL="0">
-                    <a:lnL algn="ctr" cmpd="sng" cap="flat" w="0">
-                      <a:noFill/>
-                      <a:prstDash val="solid"/>
-                    </a:lnL>
-                    <a:lnR algn="ctr" cmpd="sng" cap="flat" w="0">
-                      <a:noFill/>
-                      <a:prstDash val="solid"/>
-                    </a:lnR>
-                    <a:lnT algn="ctr" cmpd="sng" cap="flat" w="0">
-                      <a:noFill/>
-                      <a:prstDash val="solid"/>
-                    </a:lnT>
-                    <a:lnB algn="ctr" cmpd="sng" cap="flat" w="19050">
-                      <a:solidFill>
-                        <a:srgbClr val="666666">
-                          <a:alpha val="100000"/>
-                        </a:srgbClr>
-                      </a:solidFill>
-                      <a:prstDash val="solid"/>
-                    </a:lnB>
-                    <a:solidFill>
-                      <a:srgbClr val="FFFFFF">
-                        <a:alpha val="0"/>
-                      </a:srgbClr>
-                    </a:solidFill>
-                  </a:tcPr>
-                </a:tc>
-                <a:tc>
-                  <a:txBody>
-                    <a:bodyPr/>
-                    <a:lstStyle/>
-                    <a:p>
-                      <a:pPr algn="r" marL="63500" marR="63500">
-                        <a:lnSpc>
-                          <a:spcPct val="100000"/>
-                        </a:lnSpc>
-                        <a:spcBef>
-                          <a:spcPts val="500"/>
-                        </a:spcBef>
-                        <a:spcAft>
-                          <a:spcPts val="500"/>
-                        </a:spcAft>
-                        <a:buNone/>
-                      </a:pPr>
-                      <a:r>
-                        <a:rPr cap="none" sz="1100" i="0" b="0" u="none">
-                          <a:solidFill>
-                            <a:srgbClr val="000000">
-                              <a:alpha val="100000"/>
-                            </a:srgbClr>
-                          </a:solidFill>
-                          <a:latin typeface="Helvetica"/>
-                          <a:cs typeface="Helvetica"/>
-                          <a:ea typeface="Helvetica"/>
-                          <a:sym typeface="Helvetica"/>
-                        </a:rPr>
-                        <a:t>61</a:t>
-                      </a:r>
-                    </a:p>
-                  </a:txBody>
-                  <a:tcPr anchor="ctr" marB="63500" marT="63500" marR="0" marL="0">
-                    <a:lnL algn="ctr" cmpd="sng" cap="flat" w="0">
-                      <a:noFill/>
-                      <a:prstDash val="solid"/>
-                    </a:lnL>
-                    <a:lnR algn="ctr" cmpd="sng" cap="flat" w="0">
-                      <a:noFill/>
-                      <a:prstDash val="solid"/>
-                    </a:lnR>
-                    <a:lnT algn="ctr" cmpd="sng" cap="flat" w="0">
-                      <a:noFill/>
-                      <a:prstDash val="solid"/>
-                    </a:lnT>
-                    <a:lnB algn="ctr" cmpd="sng" cap="flat" w="19050">
-                      <a:solidFill>
-                        <a:srgbClr val="666666">
-                          <a:alpha val="100000"/>
-                        </a:srgbClr>
-                      </a:solidFill>
-                      <a:prstDash val="solid"/>
-                    </a:lnB>
-                    <a:solidFill>
-                      <a:srgbClr val="FFFFFF">
-                        <a:alpha val="0"/>
-                      </a:srgbClr>
-                    </a:solidFill>
-                  </a:tcPr>
-                </a:tc>
-              </a:tr>
-            </a:tbl>
-          </a:graphicData>
-        </a:graphic>
-      </p:graphicFrame>
     </p:spTree>
   </p:cSld>
 </p:sld>
@@ -6636,8 +5461,8 @@
         </p:blipFill>
         <p:spPr bwMode="auto">
           <a:xfrm>
-            <a:off x="6121400" y="1739900"/>
-            <a:ext cx="2781300" cy="2311400"/>
+            <a:off x="6121400" y="2044700"/>
+            <a:ext cx="2781300" cy="1714500"/>
           </a:xfrm>
           <a:prstGeom prst="rect">
             <a:avLst/>
@@ -6969,11 +5794,28 @@
               <a:t>: For proportions or percentages (though logistic regression is often preferred now)</a:t>
             </a:r>
           </a:p>
+          <a:p>
+            <a:pPr lvl="0" indent="0" marL="0">
+              <a:buNone/>
+            </a:pPr>
+            <a:r>
+              <a:rPr/>
+              <a:t>In a reflection the parameter </a:t>
+            </a:r>
+            <a:r>
+              <a:rPr b="1"/>
+              <a:t>k</a:t>
+            </a:r>
+            <a:r>
+              <a:rPr/>
+              <a:t> is typically chosen to be a value that’s larger than the maximum value</a:t>
+            </a:r>
+          </a:p>
         </p:txBody>
       </p:sp>
       <p:pic>
         <p:nvPicPr>
-          <p:cNvPr descr="images/clipboard-3086284529.png" id="0" name="Picture 1"/>
+          <p:cNvPr descr="images/clipboard-2483693250.png" id="0" name="Picture 1"/>
           <p:cNvPicPr>
             <a:picLocks noGrp="1" noChangeAspect="1"/>
           </p:cNvPicPr>
@@ -6987,8 +5829,8 @@
         </p:blipFill>
         <p:spPr bwMode="auto">
           <a:xfrm>
-            <a:off x="6121400" y="2171700"/>
-            <a:ext cx="2781300" cy="1447800"/>
+            <a:off x="6121400" y="2159000"/>
+            <a:ext cx="2781300" cy="1473200"/>
           </a:xfrm>
           <a:prstGeom prst="rect">
             <a:avLst/>
@@ -7639,770 +6481,37 @@
           </a:p>
         </p:txBody>
       </p:sp>
-      <p:graphicFrame xmlns:a="http://schemas.openxmlformats.org/drawingml/2006/main" xmlns:r="http://schemas.openxmlformats.org/officeDocument/2006/relationships" xmlns:p="http://schemas.openxmlformats.org/presentationml/2006/main">
-        <p:nvGraphicFramePr>
-          <p:cNvPr id="616039946" name=""/>
-          <p:cNvGraphicFramePr>
-            <a:graphicFrameLocks noGrp="true"/>
-          </p:cNvGraphicFramePr>
-          <p:nvPr/>
-        </p:nvGraphicFramePr>
-        <p:xfrm rot="0">
-          <a:off x="914400" y="1828800"/>
-          <a:ext cx="9144000" cy="5486400"/>
-        </p:xfrm>
-        <a:graphic>
-          <a:graphicData uri="http://schemas.openxmlformats.org/drawingml/2006/table">
-            <a:tbl>
-              <a:tblPr/>
-              <a:tblGrid>
-                <a:gridCol w="517049"/>
-                <a:gridCol w="610364"/>
-                <a:gridCol w="610364"/>
-                <a:gridCol w="990719"/>
-              </a:tblGrid>
-              <a:tr h="390446">
-                <a:tc>
-                  <a:txBody>
-                    <a:bodyPr/>
-                    <a:lstStyle/>
-                    <a:p>
-                      <a:pPr algn="l" marL="63500" marR="63500">
-                        <a:lnSpc>
-                          <a:spcPct val="100000"/>
-                        </a:lnSpc>
-                        <a:spcBef>
-                          <a:spcPts val="500"/>
-                        </a:spcBef>
-                        <a:spcAft>
-                          <a:spcPts val="500"/>
-                        </a:spcAft>
-                        <a:buNone/>
-                      </a:pPr>
-                      <a:r>
-                        <a:rPr cap="none" sz="1100" i="0" b="0" u="none">
-                          <a:solidFill>
-                            <a:srgbClr val="000000">
-                              <a:alpha val="100000"/>
-                            </a:srgbClr>
-                          </a:solidFill>
-                          <a:latin typeface="Helvetica"/>
-                          <a:cs typeface="Helvetica"/>
-                          <a:ea typeface="Helvetica"/>
-                          <a:sym typeface="Helvetica"/>
-                        </a:rPr>
-                        <a:t>lake</a:t>
-                      </a:r>
-                    </a:p>
-                  </a:txBody>
-                  <a:tcPr anchor="ctr" marB="63500" marT="63500" marR="0" marL="0">
-                    <a:lnL algn="ctr" cmpd="sng" cap="flat" w="0">
-                      <a:noFill/>
-                      <a:prstDash val="solid"/>
-                    </a:lnL>
-                    <a:lnR algn="ctr" cmpd="sng" cap="flat" w="0">
-                      <a:noFill/>
-                      <a:prstDash val="solid"/>
-                    </a:lnR>
-                    <a:lnT algn="ctr" cmpd="sng" cap="flat" w="19050">
-                      <a:solidFill>
-                        <a:srgbClr val="666666">
-                          <a:alpha val="100000"/>
-                        </a:srgbClr>
-                      </a:solidFill>
-                      <a:prstDash val="solid"/>
-                    </a:lnT>
-                    <a:lnB algn="ctr" cmpd="sng" cap="flat" w="19050">
-                      <a:solidFill>
-                        <a:srgbClr val="666666">
-                          <a:alpha val="100000"/>
-                        </a:srgbClr>
-                      </a:solidFill>
-                      <a:prstDash val="solid"/>
-                    </a:lnB>
-                    <a:solidFill>
-                      <a:srgbClr val="FFFFFF">
-                        <a:alpha val="0"/>
-                      </a:srgbClr>
-                    </a:solidFill>
-                  </a:tcPr>
-                </a:tc>
-                <a:tc>
-                  <a:txBody>
-                    <a:bodyPr/>
-                    <a:lstStyle/>
-                    <a:p>
-                      <a:pPr algn="r" marL="63500" marR="63500">
-                        <a:lnSpc>
-                          <a:spcPct val="100000"/>
-                        </a:lnSpc>
-                        <a:spcBef>
-                          <a:spcPts val="500"/>
-                        </a:spcBef>
-                        <a:spcAft>
-                          <a:spcPts val="500"/>
-                        </a:spcAft>
-                        <a:buNone/>
-                      </a:pPr>
-                      <a:r>
-                        <a:rPr cap="none" sz="1100" i="0" b="0" u="none">
-                          <a:solidFill>
-                            <a:srgbClr val="000000">
-                              <a:alpha val="100000"/>
-                            </a:srgbClr>
-                          </a:solidFill>
-                          <a:latin typeface="Helvetica"/>
-                          <a:cs typeface="Helvetica"/>
-                          <a:ea typeface="Helvetica"/>
-                          <a:sym typeface="Helvetica"/>
-                        </a:rPr>
-                        <a:t>sd</a:t>
-                      </a:r>
-                    </a:p>
-                  </a:txBody>
-                  <a:tcPr anchor="ctr" marB="63500" marT="63500" marR="0" marL="0">
-                    <a:lnL algn="ctr" cmpd="sng" cap="flat" w="0">
-                      <a:noFill/>
-                      <a:prstDash val="solid"/>
-                    </a:lnL>
-                    <a:lnR algn="ctr" cmpd="sng" cap="flat" w="0">
-                      <a:noFill/>
-                      <a:prstDash val="solid"/>
-                    </a:lnR>
-                    <a:lnT algn="ctr" cmpd="sng" cap="flat" w="19050">
-                      <a:solidFill>
-                        <a:srgbClr val="666666">
-                          <a:alpha val="100000"/>
-                        </a:srgbClr>
-                      </a:solidFill>
-                      <a:prstDash val="solid"/>
-                    </a:lnT>
-                    <a:lnB algn="ctr" cmpd="sng" cap="flat" w="19050">
-                      <a:solidFill>
-                        <a:srgbClr val="666666">
-                          <a:alpha val="100000"/>
-                        </a:srgbClr>
-                      </a:solidFill>
-                      <a:prstDash val="solid"/>
-                    </a:lnB>
-                    <a:solidFill>
-                      <a:srgbClr val="FFFFFF">
-                        <a:alpha val="0"/>
-                      </a:srgbClr>
-                    </a:solidFill>
-                  </a:tcPr>
-                </a:tc>
-                <a:tc>
-                  <a:txBody>
-                    <a:bodyPr/>
-                    <a:lstStyle/>
-                    <a:p>
-                      <a:pPr algn="r" marL="63500" marR="63500">
-                        <a:lnSpc>
-                          <a:spcPct val="100000"/>
-                        </a:lnSpc>
-                        <a:spcBef>
-                          <a:spcPts val="500"/>
-                        </a:spcBef>
-                        <a:spcAft>
-                          <a:spcPts val="500"/>
-                        </a:spcAft>
-                        <a:buNone/>
-                      </a:pPr>
-                      <a:r>
-                        <a:rPr cap="none" sz="1100" i="0" b="0" u="none">
-                          <a:solidFill>
-                            <a:srgbClr val="000000">
-                              <a:alpha val="100000"/>
-                            </a:srgbClr>
-                          </a:solidFill>
-                          <a:latin typeface="Helvetica"/>
-                          <a:cs typeface="Helvetica"/>
-                          <a:ea typeface="Helvetica"/>
-                          <a:sym typeface="Helvetica"/>
-                        </a:rPr>
-                        <a:t>iqr</a:t>
-                      </a:r>
-                    </a:p>
-                  </a:txBody>
-                  <a:tcPr anchor="ctr" marB="63500" marT="63500" marR="0" marL="0">
-                    <a:lnL algn="ctr" cmpd="sng" cap="flat" w="0">
-                      <a:noFill/>
-                      <a:prstDash val="solid"/>
-                    </a:lnL>
-                    <a:lnR algn="ctr" cmpd="sng" cap="flat" w="0">
-                      <a:noFill/>
-                      <a:prstDash val="solid"/>
-                    </a:lnR>
-                    <a:lnT algn="ctr" cmpd="sng" cap="flat" w="19050">
-                      <a:solidFill>
-                        <a:srgbClr val="666666">
-                          <a:alpha val="100000"/>
-                        </a:srgbClr>
-                      </a:solidFill>
-                      <a:prstDash val="solid"/>
-                    </a:lnT>
-                    <a:lnB algn="ctr" cmpd="sng" cap="flat" w="19050">
-                      <a:solidFill>
-                        <a:srgbClr val="666666">
-                          <a:alpha val="100000"/>
-                        </a:srgbClr>
-                      </a:solidFill>
-                      <a:prstDash val="solid"/>
-                    </a:lnB>
-                    <a:solidFill>
-                      <a:srgbClr val="FFFFFF">
-                        <a:alpha val="0"/>
-                      </a:srgbClr>
-                    </a:solidFill>
-                  </a:tcPr>
-                </a:tc>
-                <a:tc>
-                  <a:txBody>
-                    <a:bodyPr/>
-                    <a:lstStyle/>
-                    <a:p>
-                      <a:pPr algn="r" marL="63500" marR="63500">
-                        <a:lnSpc>
-                          <a:spcPct val="100000"/>
-                        </a:lnSpc>
-                        <a:spcBef>
-                          <a:spcPts val="500"/>
-                        </a:spcBef>
-                        <a:spcAft>
-                          <a:spcPts val="500"/>
-                        </a:spcAft>
-                        <a:buNone/>
-                      </a:pPr>
-                      <a:r>
-                        <a:rPr cap="none" sz="1100" i="0" b="0" u="none">
-                          <a:solidFill>
-                            <a:srgbClr val="000000">
-                              <a:alpha val="100000"/>
-                            </a:srgbClr>
-                          </a:solidFill>
-                          <a:latin typeface="Helvetica"/>
-                          <a:cs typeface="Helvetica"/>
-                          <a:ea typeface="Helvetica"/>
-                          <a:sym typeface="Helvetica"/>
-                        </a:rPr>
-                        <a:t>ratio_iqr_sd</a:t>
-                      </a:r>
-                    </a:p>
-                  </a:txBody>
-                  <a:tcPr anchor="ctr" marB="63500" marT="63500" marR="0" marL="0">
-                    <a:lnL algn="ctr" cmpd="sng" cap="flat" w="0">
-                      <a:noFill/>
-                      <a:prstDash val="solid"/>
-                    </a:lnL>
-                    <a:lnR algn="ctr" cmpd="sng" cap="flat" w="0">
-                      <a:noFill/>
-                      <a:prstDash val="solid"/>
-                    </a:lnR>
-                    <a:lnT algn="ctr" cmpd="sng" cap="flat" w="19050">
-                      <a:solidFill>
-                        <a:srgbClr val="666666">
-                          <a:alpha val="100000"/>
-                        </a:srgbClr>
-                      </a:solidFill>
-                      <a:prstDash val="solid"/>
-                    </a:lnT>
-                    <a:lnB algn="ctr" cmpd="sng" cap="flat" w="19050">
-                      <a:solidFill>
-                        <a:srgbClr val="666666">
-                          <a:alpha val="100000"/>
-                        </a:srgbClr>
-                      </a:solidFill>
-                      <a:prstDash val="solid"/>
-                    </a:lnB>
-                    <a:solidFill>
-                      <a:srgbClr val="FFFFFF">
-                        <a:alpha val="0"/>
-                      </a:srgbClr>
-                    </a:solidFill>
-                  </a:tcPr>
-                </a:tc>
-              </a:tr>
-              <a:tr h="363638">
-                <a:tc>
-                  <a:txBody>
-                    <a:bodyPr/>
-                    <a:lstStyle/>
-                    <a:p>
-                      <a:pPr algn="l" marL="63500" marR="63500">
-                        <a:lnSpc>
-                          <a:spcPct val="100000"/>
-                        </a:lnSpc>
-                        <a:spcBef>
-                          <a:spcPts val="500"/>
-                        </a:spcBef>
-                        <a:spcAft>
-                          <a:spcPts val="500"/>
-                        </a:spcAft>
-                        <a:buNone/>
-                      </a:pPr>
-                      <a:r>
-                        <a:rPr cap="none" sz="1100" i="0" b="0" u="none">
-                          <a:solidFill>
-                            <a:srgbClr val="000000">
-                              <a:alpha val="100000"/>
-                            </a:srgbClr>
-                          </a:solidFill>
-                          <a:latin typeface="Helvetica"/>
-                          <a:cs typeface="Helvetica"/>
-                          <a:ea typeface="Helvetica"/>
-                          <a:sym typeface="Helvetica"/>
-                        </a:rPr>
-                        <a:t>I3</a:t>
-                      </a:r>
-                    </a:p>
-                  </a:txBody>
-                  <a:tcPr anchor="ctr" marB="63500" marT="63500" marR="0" marL="0">
-                    <a:lnL algn="ctr" cmpd="sng" cap="flat" w="0">
-                      <a:noFill/>
-                      <a:prstDash val="solid"/>
-                    </a:lnL>
-                    <a:lnR algn="ctr" cmpd="sng" cap="flat" w="0">
-                      <a:noFill/>
-                      <a:prstDash val="solid"/>
-                    </a:lnR>
-                    <a:lnT algn="ctr" cmpd="sng" cap="flat" w="0">
-                      <a:noFill/>
-                      <a:prstDash val="solid"/>
-                    </a:lnT>
-                    <a:lnB algn="ctr" cmpd="sng" cap="flat" w="0">
-                      <a:noFill/>
-                      <a:prstDash val="solid"/>
-                    </a:lnB>
-                    <a:solidFill>
-                      <a:srgbClr val="FFFFFF">
-                        <a:alpha val="0"/>
-                      </a:srgbClr>
-                    </a:solidFill>
-                  </a:tcPr>
-                </a:tc>
-                <a:tc>
-                  <a:txBody>
-                    <a:bodyPr/>
-                    <a:lstStyle/>
-                    <a:p>
-                      <a:pPr algn="r" marL="63500" marR="63500">
-                        <a:lnSpc>
-                          <a:spcPct val="100000"/>
-                        </a:lnSpc>
-                        <a:spcBef>
-                          <a:spcPts val="500"/>
-                        </a:spcBef>
-                        <a:spcAft>
-                          <a:spcPts val="500"/>
-                        </a:spcAft>
-                        <a:buNone/>
-                      </a:pPr>
-                      <a:r>
-                        <a:rPr cap="none" sz="1100" i="0" b="0" u="none">
-                          <a:solidFill>
-                            <a:srgbClr val="000000">
-                              <a:alpha val="100000"/>
-                            </a:srgbClr>
-                          </a:solidFill>
-                          <a:latin typeface="Helvetica"/>
-                          <a:cs typeface="Helvetica"/>
-                          <a:ea typeface="Helvetica"/>
-                          <a:sym typeface="Helvetica"/>
-                        </a:rPr>
-                        <a:t>28.30</a:t>
-                      </a:r>
-                    </a:p>
-                  </a:txBody>
-                  <a:tcPr anchor="ctr" marB="63500" marT="63500" marR="0" marL="0">
-                    <a:lnL algn="ctr" cmpd="sng" cap="flat" w="0">
-                      <a:noFill/>
-                      <a:prstDash val="solid"/>
-                    </a:lnL>
-                    <a:lnR algn="ctr" cmpd="sng" cap="flat" w="0">
-                      <a:noFill/>
-                      <a:prstDash val="solid"/>
-                    </a:lnR>
-                    <a:lnT algn="ctr" cmpd="sng" cap="flat" w="0">
-                      <a:noFill/>
-                      <a:prstDash val="solid"/>
-                    </a:lnT>
-                    <a:lnB algn="ctr" cmpd="sng" cap="flat" w="0">
-                      <a:noFill/>
-                      <a:prstDash val="solid"/>
-                    </a:lnB>
-                    <a:solidFill>
-                      <a:srgbClr val="FFFFFF">
-                        <a:alpha val="0"/>
-                      </a:srgbClr>
-                    </a:solidFill>
-                  </a:tcPr>
-                </a:tc>
-                <a:tc>
-                  <a:txBody>
-                    <a:bodyPr/>
-                    <a:lstStyle/>
-                    <a:p>
-                      <a:pPr algn="r" marL="63500" marR="63500">
-                        <a:lnSpc>
-                          <a:spcPct val="100000"/>
-                        </a:lnSpc>
-                        <a:spcBef>
-                          <a:spcPts val="500"/>
-                        </a:spcBef>
-                        <a:spcAft>
-                          <a:spcPts val="500"/>
-                        </a:spcAft>
-                        <a:buNone/>
-                      </a:pPr>
-                      <a:r>
-                        <a:rPr cap="none" sz="1100" i="0" b="0" u="none">
-                          <a:solidFill>
-                            <a:srgbClr val="000000">
-                              <a:alpha val="100000"/>
-                            </a:srgbClr>
-                          </a:solidFill>
-                          <a:latin typeface="Helvetica"/>
-                          <a:cs typeface="Helvetica"/>
-                          <a:ea typeface="Helvetica"/>
-                          <a:sym typeface="Helvetica"/>
-                        </a:rPr>
-                        <a:t>24.00</a:t>
-                      </a:r>
-                    </a:p>
-                  </a:txBody>
-                  <a:tcPr anchor="ctr" marB="63500" marT="63500" marR="0" marL="0">
-                    <a:lnL algn="ctr" cmpd="sng" cap="flat" w="0">
-                      <a:noFill/>
-                      <a:prstDash val="solid"/>
-                    </a:lnL>
-                    <a:lnR algn="ctr" cmpd="sng" cap="flat" w="0">
-                      <a:noFill/>
-                      <a:prstDash val="solid"/>
-                    </a:lnR>
-                    <a:lnT algn="ctr" cmpd="sng" cap="flat" w="0">
-                      <a:noFill/>
-                      <a:prstDash val="solid"/>
-                    </a:lnT>
-                    <a:lnB algn="ctr" cmpd="sng" cap="flat" w="0">
-                      <a:noFill/>
-                      <a:prstDash val="solid"/>
-                    </a:lnB>
-                    <a:solidFill>
-                      <a:srgbClr val="FFFFFF">
-                        <a:alpha val="0"/>
-                      </a:srgbClr>
-                    </a:solidFill>
-                  </a:tcPr>
-                </a:tc>
-                <a:tc>
-                  <a:txBody>
-                    <a:bodyPr/>
-                    <a:lstStyle/>
-                    <a:p>
-                      <a:pPr algn="r" marL="63500" marR="63500">
-                        <a:lnSpc>
-                          <a:spcPct val="100000"/>
-                        </a:lnSpc>
-                        <a:spcBef>
-                          <a:spcPts val="500"/>
-                        </a:spcBef>
-                        <a:spcAft>
-                          <a:spcPts val="500"/>
-                        </a:spcAft>
-                        <a:buNone/>
-                      </a:pPr>
-                      <a:r>
-                        <a:rPr cap="none" sz="1100" i="0" b="0" u="none">
-                          <a:solidFill>
-                            <a:srgbClr val="000000">
-                              <a:alpha val="100000"/>
-                            </a:srgbClr>
-                          </a:solidFill>
-                          <a:latin typeface="Helvetica"/>
-                          <a:cs typeface="Helvetica"/>
-                          <a:ea typeface="Helvetica"/>
-                          <a:sym typeface="Helvetica"/>
-                        </a:rPr>
-                        <a:t>0.85</a:t>
-                      </a:r>
-                    </a:p>
-                  </a:txBody>
-                  <a:tcPr anchor="ctr" marB="63500" marT="63500" marR="0" marL="0">
-                    <a:lnL algn="ctr" cmpd="sng" cap="flat" w="0">
-                      <a:noFill/>
-                      <a:prstDash val="solid"/>
-                    </a:lnL>
-                    <a:lnR algn="ctr" cmpd="sng" cap="flat" w="0">
-                      <a:noFill/>
-                      <a:prstDash val="solid"/>
-                    </a:lnR>
-                    <a:lnT algn="ctr" cmpd="sng" cap="flat" w="0">
-                      <a:noFill/>
-                      <a:prstDash val="solid"/>
-                    </a:lnT>
-                    <a:lnB algn="ctr" cmpd="sng" cap="flat" w="0">
-                      <a:noFill/>
-                      <a:prstDash val="solid"/>
-                    </a:lnB>
-                    <a:solidFill>
-                      <a:srgbClr val="FFFFFF">
-                        <a:alpha val="0"/>
-                      </a:srgbClr>
-                    </a:solidFill>
-                  </a:tcPr>
-                </a:tc>
-              </a:tr>
-              <a:tr h="363775">
-                <a:tc>
-                  <a:txBody>
-                    <a:bodyPr/>
-                    <a:lstStyle/>
-                    <a:p>
-                      <a:pPr algn="l" marL="63500" marR="63500">
-                        <a:lnSpc>
-                          <a:spcPct val="100000"/>
-                        </a:lnSpc>
-                        <a:spcBef>
-                          <a:spcPts val="500"/>
-                        </a:spcBef>
-                        <a:spcAft>
-                          <a:spcPts val="500"/>
-                        </a:spcAft>
-                        <a:buNone/>
-                      </a:pPr>
-                      <a:r>
-                        <a:rPr cap="none" sz="1100" i="0" b="0" u="none">
-                          <a:solidFill>
-                            <a:srgbClr val="000000">
-                              <a:alpha val="100000"/>
-                            </a:srgbClr>
-                          </a:solidFill>
-                          <a:latin typeface="Helvetica"/>
-                          <a:cs typeface="Helvetica"/>
-                          <a:ea typeface="Helvetica"/>
-                          <a:sym typeface="Helvetica"/>
-                        </a:rPr>
-                        <a:t>I8</a:t>
-                      </a:r>
-                    </a:p>
-                  </a:txBody>
-                  <a:tcPr anchor="ctr" marB="63500" marT="63500" marR="0" marL="0">
-                    <a:lnL algn="ctr" cmpd="sng" cap="flat" w="0">
-                      <a:noFill/>
-                      <a:prstDash val="solid"/>
-                    </a:lnL>
-                    <a:lnR algn="ctr" cmpd="sng" cap="flat" w="0">
-                      <a:noFill/>
-                      <a:prstDash val="solid"/>
-                    </a:lnR>
-                    <a:lnT algn="ctr" cmpd="sng" cap="flat" w="0">
-                      <a:noFill/>
-                      <a:prstDash val="solid"/>
-                    </a:lnT>
-                    <a:lnB algn="ctr" cmpd="sng" cap="flat" w="19050">
-                      <a:solidFill>
-                        <a:srgbClr val="666666">
-                          <a:alpha val="100000"/>
-                        </a:srgbClr>
-                      </a:solidFill>
-                      <a:prstDash val="solid"/>
-                    </a:lnB>
-                    <a:solidFill>
-                      <a:srgbClr val="FFFFFF">
-                        <a:alpha val="0"/>
-                      </a:srgbClr>
-                    </a:solidFill>
-                  </a:tcPr>
-                </a:tc>
-                <a:tc>
-                  <a:txBody>
-                    <a:bodyPr/>
-                    <a:lstStyle/>
-                    <a:p>
-                      <a:pPr algn="r" marL="63500" marR="63500">
-                        <a:lnSpc>
-                          <a:spcPct val="100000"/>
-                        </a:lnSpc>
-                        <a:spcBef>
-                          <a:spcPts val="500"/>
-                        </a:spcBef>
-                        <a:spcAft>
-                          <a:spcPts val="500"/>
-                        </a:spcAft>
-                        <a:buNone/>
-                      </a:pPr>
-                      <a:r>
-                        <a:rPr cap="none" sz="1100" i="0" b="0" u="none">
-                          <a:solidFill>
-                            <a:srgbClr val="000000">
-                              <a:alpha val="100000"/>
-                            </a:srgbClr>
-                          </a:solidFill>
-                          <a:latin typeface="Helvetica"/>
-                          <a:cs typeface="Helvetica"/>
-                          <a:ea typeface="Helvetica"/>
-                          <a:sym typeface="Helvetica"/>
-                        </a:rPr>
-                        <a:t>52.34</a:t>
-                      </a:r>
-                    </a:p>
-                  </a:txBody>
-                  <a:tcPr anchor="ctr" marB="63500" marT="63500" marR="0" marL="0">
-                    <a:lnL algn="ctr" cmpd="sng" cap="flat" w="0">
-                      <a:noFill/>
-                      <a:prstDash val="solid"/>
-                    </a:lnL>
-                    <a:lnR algn="ctr" cmpd="sng" cap="flat" w="0">
-                      <a:noFill/>
-                      <a:prstDash val="solid"/>
-                    </a:lnR>
-                    <a:lnT algn="ctr" cmpd="sng" cap="flat" w="0">
-                      <a:noFill/>
-                      <a:prstDash val="solid"/>
-                    </a:lnT>
-                    <a:lnB algn="ctr" cmpd="sng" cap="flat" w="19050">
-                      <a:solidFill>
-                        <a:srgbClr val="666666">
-                          <a:alpha val="100000"/>
-                        </a:srgbClr>
-                      </a:solidFill>
-                      <a:prstDash val="solid"/>
-                    </a:lnB>
-                    <a:solidFill>
-                      <a:srgbClr val="FFFFFF">
-                        <a:alpha val="0"/>
-                      </a:srgbClr>
-                    </a:solidFill>
-                  </a:tcPr>
-                </a:tc>
-                <a:tc>
-                  <a:txBody>
-                    <a:bodyPr/>
-                    <a:lstStyle/>
-                    <a:p>
-                      <a:pPr algn="r" marL="63500" marR="63500">
-                        <a:lnSpc>
-                          <a:spcPct val="100000"/>
-                        </a:lnSpc>
-                        <a:spcBef>
-                          <a:spcPts val="500"/>
-                        </a:spcBef>
-                        <a:spcAft>
-                          <a:spcPts val="500"/>
-                        </a:spcAft>
-                        <a:buNone/>
-                      </a:pPr>
-                      <a:r>
-                        <a:rPr cap="none" sz="1100" i="0" b="0" u="none">
-                          <a:solidFill>
-                            <a:srgbClr val="000000">
-                              <a:alpha val="100000"/>
-                            </a:srgbClr>
-                          </a:solidFill>
-                          <a:latin typeface="Helvetica"/>
-                          <a:cs typeface="Helvetica"/>
-                          <a:ea typeface="Helvetica"/>
-                          <a:sym typeface="Helvetica"/>
-                        </a:rPr>
-                        <a:t>61.00</a:t>
-                      </a:r>
-                    </a:p>
-                  </a:txBody>
-                  <a:tcPr anchor="ctr" marB="63500" marT="63500" marR="0" marL="0">
-                    <a:lnL algn="ctr" cmpd="sng" cap="flat" w="0">
-                      <a:noFill/>
-                      <a:prstDash val="solid"/>
-                    </a:lnL>
-                    <a:lnR algn="ctr" cmpd="sng" cap="flat" w="0">
-                      <a:noFill/>
-                      <a:prstDash val="solid"/>
-                    </a:lnR>
-                    <a:lnT algn="ctr" cmpd="sng" cap="flat" w="0">
-                      <a:noFill/>
-                      <a:prstDash val="solid"/>
-                    </a:lnT>
-                    <a:lnB algn="ctr" cmpd="sng" cap="flat" w="19050">
-                      <a:solidFill>
-                        <a:srgbClr val="666666">
-                          <a:alpha val="100000"/>
-                        </a:srgbClr>
-                      </a:solidFill>
-                      <a:prstDash val="solid"/>
-                    </a:lnB>
-                    <a:solidFill>
-                      <a:srgbClr val="FFFFFF">
-                        <a:alpha val="0"/>
-                      </a:srgbClr>
-                    </a:solidFill>
-                  </a:tcPr>
-                </a:tc>
-                <a:tc>
-                  <a:txBody>
-                    <a:bodyPr/>
-                    <a:lstStyle/>
-                    <a:p>
-                      <a:pPr algn="r" marL="63500" marR="63500">
-                        <a:lnSpc>
-                          <a:spcPct val="100000"/>
-                        </a:lnSpc>
-                        <a:spcBef>
-                          <a:spcPts val="500"/>
-                        </a:spcBef>
-                        <a:spcAft>
-                          <a:spcPts val="500"/>
-                        </a:spcAft>
-                        <a:buNone/>
-                      </a:pPr>
-                      <a:r>
-                        <a:rPr cap="none" sz="1100" i="0" b="0" u="none">
-                          <a:solidFill>
-                            <a:srgbClr val="000000">
-                              <a:alpha val="100000"/>
-                            </a:srgbClr>
-                          </a:solidFill>
-                          <a:latin typeface="Helvetica"/>
-                          <a:cs typeface="Helvetica"/>
-                          <a:ea typeface="Helvetica"/>
-                          <a:sym typeface="Helvetica"/>
-                        </a:rPr>
-                        <a:t>1.17</a:t>
-                      </a:r>
-                    </a:p>
-                  </a:txBody>
-                  <a:tcPr anchor="ctr" marB="63500" marT="63500" marR="0" marL="0">
-                    <a:lnL algn="ctr" cmpd="sng" cap="flat" w="0">
-                      <a:noFill/>
-                      <a:prstDash val="solid"/>
-                    </a:lnL>
-                    <a:lnR algn="ctr" cmpd="sng" cap="flat" w="0">
-                      <a:noFill/>
-                      <a:prstDash val="solid"/>
-                    </a:lnR>
-                    <a:lnT algn="ctr" cmpd="sng" cap="flat" w="0">
-                      <a:noFill/>
-                      <a:prstDash val="solid"/>
-                    </a:lnT>
-                    <a:lnB algn="ctr" cmpd="sng" cap="flat" w="19050">
-                      <a:solidFill>
-                        <a:srgbClr val="666666">
-                          <a:alpha val="100000"/>
-                        </a:srgbClr>
-                      </a:solidFill>
-                      <a:prstDash val="solid"/>
-                    </a:lnB>
-                    <a:solidFill>
-                      <a:srgbClr val="FFFFFF">
-                        <a:alpha val="0"/>
-                      </a:srgbClr>
-                    </a:solidFill>
-                  </a:tcPr>
-                </a:tc>
-              </a:tr>
-            </a:tbl>
-          </a:graphicData>
-        </a:graphic>
-      </p:graphicFrame>
+      <p:sp>
+        <p:nvSpPr>
+          <p:cNvPr id="4" name="Content Placeholder 3"/>
+          <p:cNvSpPr>
+            <a:spLocks noGrp="1"/>
+          </p:cNvSpPr>
+          <p:nvPr>
+            <p:ph idx="2" sz="half"/>
+          </p:nvPr>
+        </p:nvSpPr>
+        <p:spPr/>
+        <p:txBody>
+          <a:bodyPr/>
+          <a:lstStyle/>
+          <a:p>
+            <a:pPr lvl="0" indent="0">
+              <a:buNone/>
+            </a:pPr>
+            <a:r>
+              <a:rPr>
+                <a:latin typeface="Courier"/>
+              </a:rPr>
+              <a:t># A tibble: 2 × 4
+  lake     sd   iqr ratio_iqr_sd
+  &lt;chr&gt; &lt;dbl&gt; &lt;dbl&gt;        &lt;dbl&gt;
+1 I3     28.3    24        0.848
+2 I8     52.3    61        1.17 </a:t>
+            </a:r>
+          </a:p>
+        </p:txBody>
+      </p:sp>
     </p:spTree>
   </p:cSld>
 </p:sld>
@@ -8519,750 +6628,6 @@
           </a:p>
         </p:txBody>
       </p:sp>
-      <p:graphicFrame xmlns:a="http://schemas.openxmlformats.org/drawingml/2006/main" xmlns:r="http://schemas.openxmlformats.org/officeDocument/2006/relationships" xmlns:p="http://schemas.openxmlformats.org/presentationml/2006/main">
-        <p:nvGraphicFramePr>
-          <p:cNvPr id="128498712" name=""/>
-          <p:cNvGraphicFramePr>
-            <a:graphicFrameLocks noGrp="true"/>
-          </p:cNvGraphicFramePr>
-          <p:nvPr/>
-        </p:nvGraphicFramePr>
-        <p:xfrm rot="0">
-          <a:off x="914400" y="1828800"/>
-          <a:ext cx="9144000" cy="5486400"/>
-        </p:xfrm>
-        <a:graphic>
-          <a:graphicData uri="http://schemas.openxmlformats.org/drawingml/2006/table">
-            <a:tbl>
-              <a:tblPr/>
-              <a:tblGrid>
-                <a:gridCol w="1122711"/>
-                <a:gridCol w="618072"/>
-              </a:tblGrid>
-              <a:tr h="363570">
-                <a:tc>
-                  <a:txBody>
-                    <a:bodyPr/>
-                    <a:lstStyle/>
-                    <a:p>
-                      <a:pPr algn="l" marL="63500" marR="63500">
-                        <a:lnSpc>
-                          <a:spcPct val="100000"/>
-                        </a:lnSpc>
-                        <a:spcBef>
-                          <a:spcPts val="500"/>
-                        </a:spcBef>
-                        <a:spcAft>
-                          <a:spcPts val="500"/>
-                        </a:spcAft>
-                        <a:buNone/>
-                      </a:pPr>
-                      <a:r>
-                        <a:rPr cap="none" sz="1100" i="0" b="0" u="none">
-                          <a:solidFill>
-                            <a:srgbClr val="000000">
-                              <a:alpha val="100000"/>
-                            </a:srgbClr>
-                          </a:solidFill>
-                          <a:latin typeface="Helvetica"/>
-                          <a:cs typeface="Helvetica"/>
-                          <a:ea typeface="Helvetica"/>
-                          <a:sym typeface="Helvetica"/>
-                        </a:rPr>
-                        <a:t>Percentile</a:t>
-                      </a:r>
-                    </a:p>
-                  </a:txBody>
-                  <a:tcPr anchor="ctr" marB="63500" marT="63500" marR="0" marL="0">
-                    <a:lnL algn="ctr" cmpd="sng" cap="flat" w="0">
-                      <a:noFill/>
-                      <a:prstDash val="solid"/>
-                    </a:lnL>
-                    <a:lnR algn="ctr" cmpd="sng" cap="flat" w="0">
-                      <a:noFill/>
-                      <a:prstDash val="solid"/>
-                    </a:lnR>
-                    <a:lnT algn="ctr" cmpd="sng" cap="flat" w="19050">
-                      <a:solidFill>
-                        <a:srgbClr val="666666">
-                          <a:alpha val="100000"/>
-                        </a:srgbClr>
-                      </a:solidFill>
-                      <a:prstDash val="solid"/>
-                    </a:lnT>
-                    <a:lnB algn="ctr" cmpd="sng" cap="flat" w="19050">
-                      <a:solidFill>
-                        <a:srgbClr val="666666">
-                          <a:alpha val="100000"/>
-                        </a:srgbClr>
-                      </a:solidFill>
-                      <a:prstDash val="solid"/>
-                    </a:lnB>
-                    <a:solidFill>
-                      <a:srgbClr val="FFFFFF">
-                        <a:alpha val="0"/>
-                      </a:srgbClr>
-                    </a:solidFill>
-                  </a:tcPr>
-                </a:tc>
-                <a:tc>
-                  <a:txBody>
-                    <a:bodyPr/>
-                    <a:lstStyle/>
-                    <a:p>
-                      <a:pPr algn="r" marL="63500" marR="63500">
-                        <a:lnSpc>
-                          <a:spcPct val="100000"/>
-                        </a:lnSpc>
-                        <a:spcBef>
-                          <a:spcPts val="500"/>
-                        </a:spcBef>
-                        <a:spcAft>
-                          <a:spcPts val="500"/>
-                        </a:spcAft>
-                        <a:buNone/>
-                      </a:pPr>
-                      <a:r>
-                        <a:rPr cap="none" sz="1100" i="0" b="0" u="none">
-                          <a:solidFill>
-                            <a:srgbClr val="000000">
-                              <a:alpha val="100000"/>
-                            </a:srgbClr>
-                          </a:solidFill>
-                          <a:latin typeface="Helvetica"/>
-                          <a:cs typeface="Helvetica"/>
-                          <a:ea typeface="Helvetica"/>
-                          <a:sym typeface="Helvetica"/>
-                        </a:rPr>
-                        <a:t>Value</a:t>
-                      </a:r>
-                    </a:p>
-                  </a:txBody>
-                  <a:tcPr anchor="ctr" marB="63500" marT="63500" marR="0" marL="0">
-                    <a:lnL algn="ctr" cmpd="sng" cap="flat" w="0">
-                      <a:noFill/>
-                      <a:prstDash val="solid"/>
-                    </a:lnL>
-                    <a:lnR algn="ctr" cmpd="sng" cap="flat" w="0">
-                      <a:noFill/>
-                      <a:prstDash val="solid"/>
-                    </a:lnR>
-                    <a:lnT algn="ctr" cmpd="sng" cap="flat" w="19050">
-                      <a:solidFill>
-                        <a:srgbClr val="666666">
-                          <a:alpha val="100000"/>
-                        </a:srgbClr>
-                      </a:solidFill>
-                      <a:prstDash val="solid"/>
-                    </a:lnT>
-                    <a:lnB algn="ctr" cmpd="sng" cap="flat" w="19050">
-                      <a:solidFill>
-                        <a:srgbClr val="666666">
-                          <a:alpha val="100000"/>
-                        </a:srgbClr>
-                      </a:solidFill>
-                      <a:prstDash val="solid"/>
-                    </a:lnB>
-                    <a:solidFill>
-                      <a:srgbClr val="FFFFFF">
-                        <a:alpha val="0"/>
-                      </a:srgbClr>
-                    </a:solidFill>
-                  </a:tcPr>
-                </a:tc>
-              </a:tr>
-              <a:tr h="363979">
-                <a:tc>
-                  <a:txBody>
-                    <a:bodyPr/>
-                    <a:lstStyle/>
-                    <a:p>
-                      <a:pPr algn="l" marL="63500" marR="63500">
-                        <a:lnSpc>
-                          <a:spcPct val="100000"/>
-                        </a:lnSpc>
-                        <a:spcBef>
-                          <a:spcPts val="500"/>
-                        </a:spcBef>
-                        <a:spcAft>
-                          <a:spcPts val="500"/>
-                        </a:spcAft>
-                        <a:buNone/>
-                      </a:pPr>
-                      <a:r>
-                        <a:rPr cap="none" sz="1100" i="0" b="0" u="none">
-                          <a:solidFill>
-                            <a:srgbClr val="000000">
-                              <a:alpha val="100000"/>
-                            </a:srgbClr>
-                          </a:solidFill>
-                          <a:latin typeface="Helvetica"/>
-                          <a:cs typeface="Helvetica"/>
-                          <a:ea typeface="Helvetica"/>
-                          <a:sym typeface="Helvetica"/>
-                        </a:rPr>
-                        <a:t>10th</a:t>
-                      </a:r>
-                    </a:p>
-                  </a:txBody>
-                  <a:tcPr anchor="ctr" marB="63500" marT="63500" marR="0" marL="0">
-                    <a:lnL algn="ctr" cmpd="sng" cap="flat" w="0">
-                      <a:noFill/>
-                      <a:prstDash val="solid"/>
-                    </a:lnL>
-                    <a:lnR algn="ctr" cmpd="sng" cap="flat" w="0">
-                      <a:noFill/>
-                      <a:prstDash val="solid"/>
-                    </a:lnR>
-                    <a:lnT algn="ctr" cmpd="sng" cap="flat" w="0">
-                      <a:noFill/>
-                      <a:prstDash val="solid"/>
-                    </a:lnT>
-                    <a:lnB algn="ctr" cmpd="sng" cap="flat" w="0">
-                      <a:noFill/>
-                      <a:prstDash val="solid"/>
-                    </a:lnB>
-                    <a:solidFill>
-                      <a:srgbClr val="FFFFFF">
-                        <a:alpha val="0"/>
-                      </a:srgbClr>
-                    </a:solidFill>
-                  </a:tcPr>
-                </a:tc>
-                <a:tc>
-                  <a:txBody>
-                    <a:bodyPr/>
-                    <a:lstStyle/>
-                    <a:p>
-                      <a:pPr algn="r" marL="63500" marR="63500">
-                        <a:lnSpc>
-                          <a:spcPct val="100000"/>
-                        </a:lnSpc>
-                        <a:spcBef>
-                          <a:spcPts val="500"/>
-                        </a:spcBef>
-                        <a:spcAft>
-                          <a:spcPts val="500"/>
-                        </a:spcAft>
-                        <a:buNone/>
-                      </a:pPr>
-                      <a:r>
-                        <a:rPr cap="none" sz="1100" i="0" b="0" u="none">
-                          <a:solidFill>
-                            <a:srgbClr val="000000">
-                              <a:alpha val="100000"/>
-                            </a:srgbClr>
-                          </a:solidFill>
-                          <a:latin typeface="Helvetica"/>
-                          <a:cs typeface="Helvetica"/>
-                          <a:ea typeface="Helvetica"/>
-                          <a:sym typeface="Helvetica"/>
-                        </a:rPr>
-                        <a:t>251.1</a:t>
-                      </a:r>
-                    </a:p>
-                  </a:txBody>
-                  <a:tcPr anchor="ctr" marB="63500" marT="63500" marR="0" marL="0">
-                    <a:lnL algn="ctr" cmpd="sng" cap="flat" w="0">
-                      <a:noFill/>
-                      <a:prstDash val="solid"/>
-                    </a:lnL>
-                    <a:lnR algn="ctr" cmpd="sng" cap="flat" w="0">
-                      <a:noFill/>
-                      <a:prstDash val="solid"/>
-                    </a:lnR>
-                    <a:lnT algn="ctr" cmpd="sng" cap="flat" w="0">
-                      <a:noFill/>
-                      <a:prstDash val="solid"/>
-                    </a:lnT>
-                    <a:lnB algn="ctr" cmpd="sng" cap="flat" w="0">
-                      <a:noFill/>
-                      <a:prstDash val="solid"/>
-                    </a:lnB>
-                    <a:solidFill>
-                      <a:srgbClr val="FFFFFF">
-                        <a:alpha val="0"/>
-                      </a:srgbClr>
-                    </a:solidFill>
-                  </a:tcPr>
-                </a:tc>
-              </a:tr>
-              <a:tr h="392220">
-                <a:tc>
-                  <a:txBody>
-                    <a:bodyPr/>
-                    <a:lstStyle/>
-                    <a:p>
-                      <a:pPr algn="l" marL="63500" marR="63500">
-                        <a:lnSpc>
-                          <a:spcPct val="100000"/>
-                        </a:lnSpc>
-                        <a:spcBef>
-                          <a:spcPts val="500"/>
-                        </a:spcBef>
-                        <a:spcAft>
-                          <a:spcPts val="500"/>
-                        </a:spcAft>
-                        <a:buNone/>
-                      </a:pPr>
-                      <a:r>
-                        <a:rPr cap="none" sz="1100" i="0" b="0" u="none">
-                          <a:solidFill>
-                            <a:srgbClr val="000000">
-                              <a:alpha val="100000"/>
-                            </a:srgbClr>
-                          </a:solidFill>
-                          <a:latin typeface="Helvetica"/>
-                          <a:cs typeface="Helvetica"/>
-                          <a:ea typeface="Helvetica"/>
-                          <a:sym typeface="Helvetica"/>
-                        </a:rPr>
-                        <a:t>25th (Q1)</a:t>
-                      </a:r>
-                    </a:p>
-                  </a:txBody>
-                  <a:tcPr anchor="ctr" marB="63500" marT="63500" marR="0" marL="0">
-                    <a:lnL algn="ctr" cmpd="sng" cap="flat" w="0">
-                      <a:noFill/>
-                      <a:prstDash val="solid"/>
-                    </a:lnL>
-                    <a:lnR algn="ctr" cmpd="sng" cap="flat" w="0">
-                      <a:noFill/>
-                      <a:prstDash val="solid"/>
-                    </a:lnR>
-                    <a:lnT algn="ctr" cmpd="sng" cap="flat" w="0">
-                      <a:noFill/>
-                      <a:prstDash val="solid"/>
-                    </a:lnT>
-                    <a:lnB algn="ctr" cmpd="sng" cap="flat" w="0">
-                      <a:noFill/>
-                      <a:prstDash val="solid"/>
-                    </a:lnB>
-                    <a:solidFill>
-                      <a:srgbClr val="FFFFFF">
-                        <a:alpha val="0"/>
-                      </a:srgbClr>
-                    </a:solidFill>
-                  </a:tcPr>
-                </a:tc>
-                <a:tc>
-                  <a:txBody>
-                    <a:bodyPr/>
-                    <a:lstStyle/>
-                    <a:p>
-                      <a:pPr algn="r" marL="63500" marR="63500">
-                        <a:lnSpc>
-                          <a:spcPct val="100000"/>
-                        </a:lnSpc>
-                        <a:spcBef>
-                          <a:spcPts val="500"/>
-                        </a:spcBef>
-                        <a:spcAft>
-                          <a:spcPts val="500"/>
-                        </a:spcAft>
-                        <a:buNone/>
-                      </a:pPr>
-                      <a:r>
-                        <a:rPr cap="none" sz="1100" i="0" b="0" u="none">
-                          <a:solidFill>
-                            <a:srgbClr val="000000">
-                              <a:alpha val="100000"/>
-                            </a:srgbClr>
-                          </a:solidFill>
-                          <a:latin typeface="Helvetica"/>
-                          <a:cs typeface="Helvetica"/>
-                          <a:ea typeface="Helvetica"/>
-                          <a:sym typeface="Helvetica"/>
-                        </a:rPr>
-                        <a:t>270.8</a:t>
-                      </a:r>
-                    </a:p>
-                  </a:txBody>
-                  <a:tcPr anchor="ctr" marB="63500" marT="63500" marR="0" marL="0">
-                    <a:lnL algn="ctr" cmpd="sng" cap="flat" w="0">
-                      <a:noFill/>
-                      <a:prstDash val="solid"/>
-                    </a:lnL>
-                    <a:lnR algn="ctr" cmpd="sng" cap="flat" w="0">
-                      <a:noFill/>
-                      <a:prstDash val="solid"/>
-                    </a:lnR>
-                    <a:lnT algn="ctr" cmpd="sng" cap="flat" w="0">
-                      <a:noFill/>
-                      <a:prstDash val="solid"/>
-                    </a:lnT>
-                    <a:lnB algn="ctr" cmpd="sng" cap="flat" w="0">
-                      <a:noFill/>
-                      <a:prstDash val="solid"/>
-                    </a:lnB>
-                    <a:solidFill>
-                      <a:srgbClr val="FFFFFF">
-                        <a:alpha val="0"/>
-                      </a:srgbClr>
-                    </a:solidFill>
-                  </a:tcPr>
-                </a:tc>
-              </a:tr>
-              <a:tr h="391128">
-                <a:tc>
-                  <a:txBody>
-                    <a:bodyPr/>
-                    <a:lstStyle/>
-                    <a:p>
-                      <a:pPr algn="l" marL="63500" marR="63500">
-                        <a:lnSpc>
-                          <a:spcPct val="100000"/>
-                        </a:lnSpc>
-                        <a:spcBef>
-                          <a:spcPts val="500"/>
-                        </a:spcBef>
-                        <a:spcAft>
-                          <a:spcPts val="500"/>
-                        </a:spcAft>
-                        <a:buNone/>
-                      </a:pPr>
-                      <a:r>
-                        <a:rPr cap="none" sz="1100" i="0" b="0" u="none">
-                          <a:solidFill>
-                            <a:srgbClr val="000000">
-                              <a:alpha val="100000"/>
-                            </a:srgbClr>
-                          </a:solidFill>
-                          <a:latin typeface="Helvetica"/>
-                          <a:cs typeface="Helvetica"/>
-                          <a:ea typeface="Helvetica"/>
-                          <a:sym typeface="Helvetica"/>
-                        </a:rPr>
-                        <a:t>50th (Median)</a:t>
-                      </a:r>
-                    </a:p>
-                  </a:txBody>
-                  <a:tcPr anchor="ctr" marB="63500" marT="63500" marR="0" marL="0">
-                    <a:lnL algn="ctr" cmpd="sng" cap="flat" w="0">
-                      <a:noFill/>
-                      <a:prstDash val="solid"/>
-                    </a:lnL>
-                    <a:lnR algn="ctr" cmpd="sng" cap="flat" w="0">
-                      <a:noFill/>
-                      <a:prstDash val="solid"/>
-                    </a:lnR>
-                    <a:lnT algn="ctr" cmpd="sng" cap="flat" w="0">
-                      <a:noFill/>
-                      <a:prstDash val="solid"/>
-                    </a:lnT>
-                    <a:lnB algn="ctr" cmpd="sng" cap="flat" w="0">
-                      <a:noFill/>
-                      <a:prstDash val="solid"/>
-                    </a:lnB>
-                    <a:solidFill>
-                      <a:srgbClr val="FFFFFF">
-                        <a:alpha val="0"/>
-                      </a:srgbClr>
-                    </a:solidFill>
-                  </a:tcPr>
-                </a:tc>
-                <a:tc>
-                  <a:txBody>
-                    <a:bodyPr/>
-                    <a:lstStyle/>
-                    <a:p>
-                      <a:pPr algn="r" marL="63500" marR="63500">
-                        <a:lnSpc>
-                          <a:spcPct val="100000"/>
-                        </a:lnSpc>
-                        <a:spcBef>
-                          <a:spcPts val="500"/>
-                        </a:spcBef>
-                        <a:spcAft>
-                          <a:spcPts val="500"/>
-                        </a:spcAft>
-                        <a:buNone/>
-                      </a:pPr>
-                      <a:r>
-                        <a:rPr cap="none" sz="1100" i="0" b="0" u="none">
-                          <a:solidFill>
-                            <a:srgbClr val="000000">
-                              <a:alpha val="100000"/>
-                            </a:srgbClr>
-                          </a:solidFill>
-                          <a:latin typeface="Helvetica"/>
-                          <a:cs typeface="Helvetica"/>
-                          <a:ea typeface="Helvetica"/>
-                          <a:sym typeface="Helvetica"/>
-                        </a:rPr>
-                        <a:t>324.5</a:t>
-                      </a:r>
-                    </a:p>
-                  </a:txBody>
-                  <a:tcPr anchor="ctr" marB="63500" marT="63500" marR="0" marL="0">
-                    <a:lnL algn="ctr" cmpd="sng" cap="flat" w="0">
-                      <a:noFill/>
-                      <a:prstDash val="solid"/>
-                    </a:lnL>
-                    <a:lnR algn="ctr" cmpd="sng" cap="flat" w="0">
-                      <a:noFill/>
-                      <a:prstDash val="solid"/>
-                    </a:lnR>
-                    <a:lnT algn="ctr" cmpd="sng" cap="flat" w="0">
-                      <a:noFill/>
-                      <a:prstDash val="solid"/>
-                    </a:lnT>
-                    <a:lnB algn="ctr" cmpd="sng" cap="flat" w="0">
-                      <a:noFill/>
-                      <a:prstDash val="solid"/>
-                    </a:lnB>
-                    <a:solidFill>
-                      <a:srgbClr val="FFFFFF">
-                        <a:alpha val="0"/>
-                      </a:srgbClr>
-                    </a:solidFill>
-                  </a:tcPr>
-                </a:tc>
-              </a:tr>
-              <a:tr h="392220">
-                <a:tc>
-                  <a:txBody>
-                    <a:bodyPr/>
-                    <a:lstStyle/>
-                    <a:p>
-                      <a:pPr algn="l" marL="63500" marR="63500">
-                        <a:lnSpc>
-                          <a:spcPct val="100000"/>
-                        </a:lnSpc>
-                        <a:spcBef>
-                          <a:spcPts val="500"/>
-                        </a:spcBef>
-                        <a:spcAft>
-                          <a:spcPts val="500"/>
-                        </a:spcAft>
-                        <a:buNone/>
-                      </a:pPr>
-                      <a:r>
-                        <a:rPr cap="none" sz="1100" i="0" b="0" u="none">
-                          <a:solidFill>
-                            <a:srgbClr val="000000">
-                              <a:alpha val="100000"/>
-                            </a:srgbClr>
-                          </a:solidFill>
-                          <a:latin typeface="Helvetica"/>
-                          <a:cs typeface="Helvetica"/>
-                          <a:ea typeface="Helvetica"/>
-                          <a:sym typeface="Helvetica"/>
-                        </a:rPr>
-                        <a:t>75th (Q3)</a:t>
-                      </a:r>
-                    </a:p>
-                  </a:txBody>
-                  <a:tcPr anchor="ctr" marB="63500" marT="63500" marR="0" marL="0">
-                    <a:lnL algn="ctr" cmpd="sng" cap="flat" w="0">
-                      <a:noFill/>
-                      <a:prstDash val="solid"/>
-                    </a:lnL>
-                    <a:lnR algn="ctr" cmpd="sng" cap="flat" w="0">
-                      <a:noFill/>
-                      <a:prstDash val="solid"/>
-                    </a:lnR>
-                    <a:lnT algn="ctr" cmpd="sng" cap="flat" w="0">
-                      <a:noFill/>
-                      <a:prstDash val="solid"/>
-                    </a:lnT>
-                    <a:lnB algn="ctr" cmpd="sng" cap="flat" w="0">
-                      <a:noFill/>
-                      <a:prstDash val="solid"/>
-                    </a:lnB>
-                    <a:solidFill>
-                      <a:srgbClr val="FFFFFF">
-                        <a:alpha val="0"/>
-                      </a:srgbClr>
-                    </a:solidFill>
-                  </a:tcPr>
-                </a:tc>
-                <a:tc>
-                  <a:txBody>
-                    <a:bodyPr/>
-                    <a:lstStyle/>
-                    <a:p>
-                      <a:pPr algn="r" marL="63500" marR="63500">
-                        <a:lnSpc>
-                          <a:spcPct val="100000"/>
-                        </a:lnSpc>
-                        <a:spcBef>
-                          <a:spcPts val="500"/>
-                        </a:spcBef>
-                        <a:spcAft>
-                          <a:spcPts val="500"/>
-                        </a:spcAft>
-                        <a:buNone/>
-                      </a:pPr>
-                      <a:r>
-                        <a:rPr cap="none" sz="1100" i="0" b="0" u="none">
-                          <a:solidFill>
-                            <a:srgbClr val="000000">
-                              <a:alpha val="100000"/>
-                            </a:srgbClr>
-                          </a:solidFill>
-                          <a:latin typeface="Helvetica"/>
-                          <a:cs typeface="Helvetica"/>
-                          <a:ea typeface="Helvetica"/>
-                          <a:sym typeface="Helvetica"/>
-                        </a:rPr>
-                        <a:t>377.0</a:t>
-                      </a:r>
-                    </a:p>
-                  </a:txBody>
-                  <a:tcPr anchor="ctr" marB="63500" marT="63500" marR="0" marL="0">
-                    <a:lnL algn="ctr" cmpd="sng" cap="flat" w="0">
-                      <a:noFill/>
-                      <a:prstDash val="solid"/>
-                    </a:lnL>
-                    <a:lnR algn="ctr" cmpd="sng" cap="flat" w="0">
-                      <a:noFill/>
-                      <a:prstDash val="solid"/>
-                    </a:lnR>
-                    <a:lnT algn="ctr" cmpd="sng" cap="flat" w="0">
-                      <a:noFill/>
-                      <a:prstDash val="solid"/>
-                    </a:lnT>
-                    <a:lnB algn="ctr" cmpd="sng" cap="flat" w="0">
-                      <a:noFill/>
-                      <a:prstDash val="solid"/>
-                    </a:lnB>
-                    <a:solidFill>
-                      <a:srgbClr val="FFFFFF">
-                        <a:alpha val="0"/>
-                      </a:srgbClr>
-                    </a:solidFill>
-                  </a:tcPr>
-                </a:tc>
-              </a:tr>
-              <a:tr h="364048">
-                <a:tc>
-                  <a:txBody>
-                    <a:bodyPr/>
-                    <a:lstStyle/>
-                    <a:p>
-                      <a:pPr algn="l" marL="63500" marR="63500">
-                        <a:lnSpc>
-                          <a:spcPct val="100000"/>
-                        </a:lnSpc>
-                        <a:spcBef>
-                          <a:spcPts val="500"/>
-                        </a:spcBef>
-                        <a:spcAft>
-                          <a:spcPts val="500"/>
-                        </a:spcAft>
-                        <a:buNone/>
-                      </a:pPr>
-                      <a:r>
-                        <a:rPr cap="none" sz="1100" i="0" b="0" u="none">
-                          <a:solidFill>
-                            <a:srgbClr val="000000">
-                              <a:alpha val="100000"/>
-                            </a:srgbClr>
-                          </a:solidFill>
-                          <a:latin typeface="Helvetica"/>
-                          <a:cs typeface="Helvetica"/>
-                          <a:ea typeface="Helvetica"/>
-                          <a:sym typeface="Helvetica"/>
-                        </a:rPr>
-                        <a:t>90th</a:t>
-                      </a:r>
-                    </a:p>
-                  </a:txBody>
-                  <a:tcPr anchor="ctr" marB="63500" marT="63500" marR="0" marL="0">
-                    <a:lnL algn="ctr" cmpd="sng" cap="flat" w="0">
-                      <a:noFill/>
-                      <a:prstDash val="solid"/>
-                    </a:lnL>
-                    <a:lnR algn="ctr" cmpd="sng" cap="flat" w="0">
-                      <a:noFill/>
-                      <a:prstDash val="solid"/>
-                    </a:lnR>
-                    <a:lnT algn="ctr" cmpd="sng" cap="flat" w="0">
-                      <a:noFill/>
-                      <a:prstDash val="solid"/>
-                    </a:lnT>
-                    <a:lnB algn="ctr" cmpd="sng" cap="flat" w="19050">
-                      <a:solidFill>
-                        <a:srgbClr val="666666">
-                          <a:alpha val="100000"/>
-                        </a:srgbClr>
-                      </a:solidFill>
-                      <a:prstDash val="solid"/>
-                    </a:lnB>
-                    <a:solidFill>
-                      <a:srgbClr val="FFFFFF">
-                        <a:alpha val="0"/>
-                      </a:srgbClr>
-                    </a:solidFill>
-                  </a:tcPr>
-                </a:tc>
-                <a:tc>
-                  <a:txBody>
-                    <a:bodyPr/>
-                    <a:lstStyle/>
-                    <a:p>
-                      <a:pPr algn="r" marL="63500" marR="63500">
-                        <a:lnSpc>
-                          <a:spcPct val="100000"/>
-                        </a:lnSpc>
-                        <a:spcBef>
-                          <a:spcPts val="500"/>
-                        </a:spcBef>
-                        <a:spcAft>
-                          <a:spcPts val="500"/>
-                        </a:spcAft>
-                        <a:buNone/>
-                      </a:pPr>
-                      <a:r>
-                        <a:rPr cap="none" sz="1100" i="0" b="0" u="none">
-                          <a:solidFill>
-                            <a:srgbClr val="000000">
-                              <a:alpha val="100000"/>
-                            </a:srgbClr>
-                          </a:solidFill>
-                          <a:latin typeface="Helvetica"/>
-                          <a:cs typeface="Helvetica"/>
-                          <a:ea typeface="Helvetica"/>
-                          <a:sym typeface="Helvetica"/>
-                        </a:rPr>
-                        <a:t>408.6</a:t>
-                      </a:r>
-                    </a:p>
-                  </a:txBody>
-                  <a:tcPr anchor="ctr" marB="63500" marT="63500" marR="0" marL="0">
-                    <a:lnL algn="ctr" cmpd="sng" cap="flat" w="0">
-                      <a:noFill/>
-                      <a:prstDash val="solid"/>
-                    </a:lnL>
-                    <a:lnR algn="ctr" cmpd="sng" cap="flat" w="0">
-                      <a:noFill/>
-                      <a:prstDash val="solid"/>
-                    </a:lnR>
-                    <a:lnT algn="ctr" cmpd="sng" cap="flat" w="0">
-                      <a:noFill/>
-                      <a:prstDash val="solid"/>
-                    </a:lnT>
-                    <a:lnB algn="ctr" cmpd="sng" cap="flat" w="19050">
-                      <a:solidFill>
-                        <a:srgbClr val="666666">
-                          <a:alpha val="100000"/>
-                        </a:srgbClr>
-                      </a:solidFill>
-                      <a:prstDash val="solid"/>
-                    </a:lnB>
-                    <a:solidFill>
-                      <a:srgbClr val="FFFFFF">
-                        <a:alpha val="0"/>
-                      </a:srgbClr>
-                    </a:solidFill>
-                  </a:tcPr>
-                </a:tc>
-              </a:tr>
-            </a:tbl>
-          </a:graphicData>
-        </a:graphic>
-      </p:graphicFrame>
     </p:spTree>
   </p:cSld>
 </p:sld>
@@ -9357,7 +6722,8 @@
               <a:rPr>
                 <a:latin typeface="Courier"/>
               </a:rPr>
-              <a:t>Mean mass without handling NAs: NA g</a:t>
+              <a:t>Mean mass without handling NAs: NA g
+ Mean mass with na.rm=TRUE: 351.2289 g</a:t>
             </a:r>
           </a:p>
           <a:p>
@@ -9368,959 +6734,15 @@
               <a:rPr>
                 <a:latin typeface="Courier"/>
               </a:rPr>
-              <a:t>Mean mass with na.rm=TRUE: 351.2289 g</a:t>
+              <a:t># A tibble: 2 × 5
+  lake  mean_mass median_mass sd_mass n_missing
+  &lt;chr&gt;     &lt;dbl&gt;       &lt;dbl&gt;   &lt;dbl&gt;     &lt;int&gt;
+1 I3         150.         147    42.2         0
+2 I8         484.         490   176.          2</a:t>
             </a:r>
           </a:p>
         </p:txBody>
       </p:sp>
-      <p:graphicFrame xmlns:a="http://schemas.openxmlformats.org/drawingml/2006/main" xmlns:r="http://schemas.openxmlformats.org/officeDocument/2006/relationships" xmlns:p="http://schemas.openxmlformats.org/presentationml/2006/main">
-        <p:nvGraphicFramePr>
-          <p:cNvPr id="695487642" name=""/>
-          <p:cNvGraphicFramePr>
-            <a:graphicFrameLocks noGrp="true"/>
-          </p:cNvGraphicFramePr>
-          <p:nvPr/>
-        </p:nvGraphicFramePr>
-        <p:xfrm rot="0">
-          <a:off x="914400" y="1828800"/>
-          <a:ext cx="9144000" cy="5486400"/>
-        </p:xfrm>
-        <a:graphic>
-          <a:graphicData uri="http://schemas.openxmlformats.org/drawingml/2006/table">
-            <a:tbl>
-              <a:tblPr/>
-              <a:tblGrid>
-                <a:gridCol w="517049"/>
-                <a:gridCol w="1021688"/>
-                <a:gridCol w="1130419"/>
-                <a:gridCol w="819778"/>
-                <a:gridCol w="889696"/>
-              </a:tblGrid>
-              <a:tr h="391879">
-                <a:tc>
-                  <a:txBody>
-                    <a:bodyPr/>
-                    <a:lstStyle/>
-                    <a:p>
-                      <a:pPr algn="l" marL="63500" marR="63500">
-                        <a:lnSpc>
-                          <a:spcPct val="100000"/>
-                        </a:lnSpc>
-                        <a:spcBef>
-                          <a:spcPts val="500"/>
-                        </a:spcBef>
-                        <a:spcAft>
-                          <a:spcPts val="500"/>
-                        </a:spcAft>
-                        <a:buNone/>
-                      </a:pPr>
-                      <a:r>
-                        <a:rPr cap="none" sz="1100" i="0" b="0" u="none">
-                          <a:solidFill>
-                            <a:srgbClr val="000000">
-                              <a:alpha val="100000"/>
-                            </a:srgbClr>
-                          </a:solidFill>
-                          <a:latin typeface="Helvetica"/>
-                          <a:cs typeface="Helvetica"/>
-                          <a:ea typeface="Helvetica"/>
-                          <a:sym typeface="Helvetica"/>
-                        </a:rPr>
-                        <a:t>lake</a:t>
-                      </a:r>
-                    </a:p>
-                  </a:txBody>
-                  <a:tcPr anchor="ctr" marB="63500" marT="63500" marR="0" marL="0">
-                    <a:lnL algn="ctr" cmpd="sng" cap="flat" w="0">
-                      <a:noFill/>
-                      <a:prstDash val="solid"/>
-                    </a:lnL>
-                    <a:lnR algn="ctr" cmpd="sng" cap="flat" w="0">
-                      <a:noFill/>
-                      <a:prstDash val="solid"/>
-                    </a:lnR>
-                    <a:lnT algn="ctr" cmpd="sng" cap="flat" w="19050">
-                      <a:solidFill>
-                        <a:srgbClr val="666666">
-                          <a:alpha val="100000"/>
-                        </a:srgbClr>
-                      </a:solidFill>
-                      <a:prstDash val="solid"/>
-                    </a:lnT>
-                    <a:lnB algn="ctr" cmpd="sng" cap="flat" w="19050">
-                      <a:solidFill>
-                        <a:srgbClr val="666666">
-                          <a:alpha val="100000"/>
-                        </a:srgbClr>
-                      </a:solidFill>
-                      <a:prstDash val="solid"/>
-                    </a:lnB>
-                    <a:solidFill>
-                      <a:srgbClr val="FFFFFF">
-                        <a:alpha val="0"/>
-                      </a:srgbClr>
-                    </a:solidFill>
-                  </a:tcPr>
-                </a:tc>
-                <a:tc>
-                  <a:txBody>
-                    <a:bodyPr/>
-                    <a:lstStyle/>
-                    <a:p>
-                      <a:pPr algn="r" marL="63500" marR="63500">
-                        <a:lnSpc>
-                          <a:spcPct val="100000"/>
-                        </a:lnSpc>
-                        <a:spcBef>
-                          <a:spcPts val="500"/>
-                        </a:spcBef>
-                        <a:spcAft>
-                          <a:spcPts val="500"/>
-                        </a:spcAft>
-                        <a:buNone/>
-                      </a:pPr>
-                      <a:r>
-                        <a:rPr cap="none" sz="1100" i="0" b="0" u="none">
-                          <a:solidFill>
-                            <a:srgbClr val="000000">
-                              <a:alpha val="100000"/>
-                            </a:srgbClr>
-                          </a:solidFill>
-                          <a:latin typeface="Helvetica"/>
-                          <a:cs typeface="Helvetica"/>
-                          <a:ea typeface="Helvetica"/>
-                          <a:sym typeface="Helvetica"/>
-                        </a:rPr>
-                        <a:t>mean_mass</a:t>
-                      </a:r>
-                    </a:p>
-                  </a:txBody>
-                  <a:tcPr anchor="ctr" marB="63500" marT="63500" marR="0" marL="0">
-                    <a:lnL algn="ctr" cmpd="sng" cap="flat" w="0">
-                      <a:noFill/>
-                      <a:prstDash val="solid"/>
-                    </a:lnL>
-                    <a:lnR algn="ctr" cmpd="sng" cap="flat" w="0">
-                      <a:noFill/>
-                      <a:prstDash val="solid"/>
-                    </a:lnR>
-                    <a:lnT algn="ctr" cmpd="sng" cap="flat" w="19050">
-                      <a:solidFill>
-                        <a:srgbClr val="666666">
-                          <a:alpha val="100000"/>
-                        </a:srgbClr>
-                      </a:solidFill>
-                      <a:prstDash val="solid"/>
-                    </a:lnT>
-                    <a:lnB algn="ctr" cmpd="sng" cap="flat" w="19050">
-                      <a:solidFill>
-                        <a:srgbClr val="666666">
-                          <a:alpha val="100000"/>
-                        </a:srgbClr>
-                      </a:solidFill>
-                      <a:prstDash val="solid"/>
-                    </a:lnB>
-                    <a:solidFill>
-                      <a:srgbClr val="FFFFFF">
-                        <a:alpha val="0"/>
-                      </a:srgbClr>
-                    </a:solidFill>
-                  </a:tcPr>
-                </a:tc>
-                <a:tc>
-                  <a:txBody>
-                    <a:bodyPr/>
-                    <a:lstStyle/>
-                    <a:p>
-                      <a:pPr algn="r" marL="63500" marR="63500">
-                        <a:lnSpc>
-                          <a:spcPct val="100000"/>
-                        </a:lnSpc>
-                        <a:spcBef>
-                          <a:spcPts val="500"/>
-                        </a:spcBef>
-                        <a:spcAft>
-                          <a:spcPts val="500"/>
-                        </a:spcAft>
-                        <a:buNone/>
-                      </a:pPr>
-                      <a:r>
-                        <a:rPr cap="none" sz="1100" i="0" b="0" u="none">
-                          <a:solidFill>
-                            <a:srgbClr val="000000">
-                              <a:alpha val="100000"/>
-                            </a:srgbClr>
-                          </a:solidFill>
-                          <a:latin typeface="Helvetica"/>
-                          <a:cs typeface="Helvetica"/>
-                          <a:ea typeface="Helvetica"/>
-                          <a:sym typeface="Helvetica"/>
-                        </a:rPr>
-                        <a:t>median_mass</a:t>
-                      </a:r>
-                    </a:p>
-                  </a:txBody>
-                  <a:tcPr anchor="ctr" marB="63500" marT="63500" marR="0" marL="0">
-                    <a:lnL algn="ctr" cmpd="sng" cap="flat" w="0">
-                      <a:noFill/>
-                      <a:prstDash val="solid"/>
-                    </a:lnL>
-                    <a:lnR algn="ctr" cmpd="sng" cap="flat" w="0">
-                      <a:noFill/>
-                      <a:prstDash val="solid"/>
-                    </a:lnR>
-                    <a:lnT algn="ctr" cmpd="sng" cap="flat" w="19050">
-                      <a:solidFill>
-                        <a:srgbClr val="666666">
-                          <a:alpha val="100000"/>
-                        </a:srgbClr>
-                      </a:solidFill>
-                      <a:prstDash val="solid"/>
-                    </a:lnT>
-                    <a:lnB algn="ctr" cmpd="sng" cap="flat" w="19050">
-                      <a:solidFill>
-                        <a:srgbClr val="666666">
-                          <a:alpha val="100000"/>
-                        </a:srgbClr>
-                      </a:solidFill>
-                      <a:prstDash val="solid"/>
-                    </a:lnB>
-                    <a:solidFill>
-                      <a:srgbClr val="FFFFFF">
-                        <a:alpha val="0"/>
-                      </a:srgbClr>
-                    </a:solidFill>
-                  </a:tcPr>
-                </a:tc>
-                <a:tc>
-                  <a:txBody>
-                    <a:bodyPr/>
-                    <a:lstStyle/>
-                    <a:p>
-                      <a:pPr algn="r" marL="63500" marR="63500">
-                        <a:lnSpc>
-                          <a:spcPct val="100000"/>
-                        </a:lnSpc>
-                        <a:spcBef>
-                          <a:spcPts val="500"/>
-                        </a:spcBef>
-                        <a:spcAft>
-                          <a:spcPts val="500"/>
-                        </a:spcAft>
-                        <a:buNone/>
-                      </a:pPr>
-                      <a:r>
-                        <a:rPr cap="none" sz="1100" i="0" b="0" u="none">
-                          <a:solidFill>
-                            <a:srgbClr val="000000">
-                              <a:alpha val="100000"/>
-                            </a:srgbClr>
-                          </a:solidFill>
-                          <a:latin typeface="Helvetica"/>
-                          <a:cs typeface="Helvetica"/>
-                          <a:ea typeface="Helvetica"/>
-                          <a:sym typeface="Helvetica"/>
-                        </a:rPr>
-                        <a:t>sd_mass</a:t>
-                      </a:r>
-                    </a:p>
-                  </a:txBody>
-                  <a:tcPr anchor="ctr" marB="63500" marT="63500" marR="0" marL="0">
-                    <a:lnL algn="ctr" cmpd="sng" cap="flat" w="0">
-                      <a:noFill/>
-                      <a:prstDash val="solid"/>
-                    </a:lnL>
-                    <a:lnR algn="ctr" cmpd="sng" cap="flat" w="0">
-                      <a:noFill/>
-                      <a:prstDash val="solid"/>
-                    </a:lnR>
-                    <a:lnT algn="ctr" cmpd="sng" cap="flat" w="19050">
-                      <a:solidFill>
-                        <a:srgbClr val="666666">
-                          <a:alpha val="100000"/>
-                        </a:srgbClr>
-                      </a:solidFill>
-                      <a:prstDash val="solid"/>
-                    </a:lnT>
-                    <a:lnB algn="ctr" cmpd="sng" cap="flat" w="19050">
-                      <a:solidFill>
-                        <a:srgbClr val="666666">
-                          <a:alpha val="100000"/>
-                        </a:srgbClr>
-                      </a:solidFill>
-                      <a:prstDash val="solid"/>
-                    </a:lnB>
-                    <a:solidFill>
-                      <a:srgbClr val="FFFFFF">
-                        <a:alpha val="0"/>
-                      </a:srgbClr>
-                    </a:solidFill>
-                  </a:tcPr>
-                </a:tc>
-                <a:tc>
-                  <a:txBody>
-                    <a:bodyPr/>
-                    <a:lstStyle/>
-                    <a:p>
-                      <a:pPr algn="r" marL="63500" marR="63500">
-                        <a:lnSpc>
-                          <a:spcPct val="100000"/>
-                        </a:lnSpc>
-                        <a:spcBef>
-                          <a:spcPts val="500"/>
-                        </a:spcBef>
-                        <a:spcAft>
-                          <a:spcPts val="500"/>
-                        </a:spcAft>
-                        <a:buNone/>
-                      </a:pPr>
-                      <a:r>
-                        <a:rPr cap="none" sz="1100" i="0" b="0" u="none">
-                          <a:solidFill>
-                            <a:srgbClr val="000000">
-                              <a:alpha val="100000"/>
-                            </a:srgbClr>
-                          </a:solidFill>
-                          <a:latin typeface="Helvetica"/>
-                          <a:cs typeface="Helvetica"/>
-                          <a:ea typeface="Helvetica"/>
-                          <a:sym typeface="Helvetica"/>
-                        </a:rPr>
-                        <a:t>n_missing</a:t>
-                      </a:r>
-                    </a:p>
-                  </a:txBody>
-                  <a:tcPr anchor="ctr" marB="63500" marT="63500" marR="0" marL="0">
-                    <a:lnL algn="ctr" cmpd="sng" cap="flat" w="0">
-                      <a:noFill/>
-                      <a:prstDash val="solid"/>
-                    </a:lnL>
-                    <a:lnR algn="ctr" cmpd="sng" cap="flat" w="0">
-                      <a:noFill/>
-                      <a:prstDash val="solid"/>
-                    </a:lnR>
-                    <a:lnT algn="ctr" cmpd="sng" cap="flat" w="19050">
-                      <a:solidFill>
-                        <a:srgbClr val="666666">
-                          <a:alpha val="100000"/>
-                        </a:srgbClr>
-                      </a:solidFill>
-                      <a:prstDash val="solid"/>
-                    </a:lnT>
-                    <a:lnB algn="ctr" cmpd="sng" cap="flat" w="19050">
-                      <a:solidFill>
-                        <a:srgbClr val="666666">
-                          <a:alpha val="100000"/>
-                        </a:srgbClr>
-                      </a:solidFill>
-                      <a:prstDash val="solid"/>
-                    </a:lnB>
-                    <a:solidFill>
-                      <a:srgbClr val="FFFFFF">
-                        <a:alpha val="0"/>
-                      </a:srgbClr>
-                    </a:solidFill>
-                  </a:tcPr>
-                </a:tc>
-              </a:tr>
-              <a:tr h="363638">
-                <a:tc>
-                  <a:txBody>
-                    <a:bodyPr/>
-                    <a:lstStyle/>
-                    <a:p>
-                      <a:pPr algn="l" marL="63500" marR="63500">
-                        <a:lnSpc>
-                          <a:spcPct val="100000"/>
-                        </a:lnSpc>
-                        <a:spcBef>
-                          <a:spcPts val="500"/>
-                        </a:spcBef>
-                        <a:spcAft>
-                          <a:spcPts val="500"/>
-                        </a:spcAft>
-                        <a:buNone/>
-                      </a:pPr>
-                      <a:r>
-                        <a:rPr cap="none" sz="1100" i="0" b="0" u="none">
-                          <a:solidFill>
-                            <a:srgbClr val="000000">
-                              <a:alpha val="100000"/>
-                            </a:srgbClr>
-                          </a:solidFill>
-                          <a:latin typeface="Helvetica"/>
-                          <a:cs typeface="Helvetica"/>
-                          <a:ea typeface="Helvetica"/>
-                          <a:sym typeface="Helvetica"/>
-                        </a:rPr>
-                        <a:t>I3</a:t>
-                      </a:r>
-                    </a:p>
-                  </a:txBody>
-                  <a:tcPr anchor="ctr" marB="63500" marT="63500" marR="0" marL="0">
-                    <a:lnL algn="ctr" cmpd="sng" cap="flat" w="0">
-                      <a:noFill/>
-                      <a:prstDash val="solid"/>
-                    </a:lnL>
-                    <a:lnR algn="ctr" cmpd="sng" cap="flat" w="0">
-                      <a:noFill/>
-                      <a:prstDash val="solid"/>
-                    </a:lnR>
-                    <a:lnT algn="ctr" cmpd="sng" cap="flat" w="0">
-                      <a:noFill/>
-                      <a:prstDash val="solid"/>
-                    </a:lnT>
-                    <a:lnB algn="ctr" cmpd="sng" cap="flat" w="0">
-                      <a:noFill/>
-                      <a:prstDash val="solid"/>
-                    </a:lnB>
-                    <a:solidFill>
-                      <a:srgbClr val="FFFFFF">
-                        <a:alpha val="0"/>
-                      </a:srgbClr>
-                    </a:solidFill>
-                  </a:tcPr>
-                </a:tc>
-                <a:tc>
-                  <a:txBody>
-                    <a:bodyPr/>
-                    <a:lstStyle/>
-                    <a:p>
-                      <a:pPr algn="r" marL="63500" marR="63500">
-                        <a:lnSpc>
-                          <a:spcPct val="100000"/>
-                        </a:lnSpc>
-                        <a:spcBef>
-                          <a:spcPts val="500"/>
-                        </a:spcBef>
-                        <a:spcAft>
-                          <a:spcPts val="500"/>
-                        </a:spcAft>
-                        <a:buNone/>
-                      </a:pPr>
-                      <a:r>
-                        <a:rPr cap="none" sz="1100" i="0" b="0" u="none">
-                          <a:solidFill>
-                            <a:srgbClr val="000000">
-                              <a:alpha val="100000"/>
-                            </a:srgbClr>
-                          </a:solidFill>
-                          <a:latin typeface="Helvetica"/>
-                          <a:cs typeface="Helvetica"/>
-                          <a:ea typeface="Helvetica"/>
-                          <a:sym typeface="Helvetica"/>
-                        </a:rPr>
-                        <a:t>150.5</a:t>
-                      </a:r>
-                    </a:p>
-                  </a:txBody>
-                  <a:tcPr anchor="ctr" marB="63500" marT="63500" marR="0" marL="0">
-                    <a:lnL algn="ctr" cmpd="sng" cap="flat" w="0">
-                      <a:noFill/>
-                      <a:prstDash val="solid"/>
-                    </a:lnL>
-                    <a:lnR algn="ctr" cmpd="sng" cap="flat" w="0">
-                      <a:noFill/>
-                      <a:prstDash val="solid"/>
-                    </a:lnR>
-                    <a:lnT algn="ctr" cmpd="sng" cap="flat" w="0">
-                      <a:noFill/>
-                      <a:prstDash val="solid"/>
-                    </a:lnT>
-                    <a:lnB algn="ctr" cmpd="sng" cap="flat" w="0">
-                      <a:noFill/>
-                      <a:prstDash val="solid"/>
-                    </a:lnB>
-                    <a:solidFill>
-                      <a:srgbClr val="FFFFFF">
-                        <a:alpha val="0"/>
-                      </a:srgbClr>
-                    </a:solidFill>
-                  </a:tcPr>
-                </a:tc>
-                <a:tc>
-                  <a:txBody>
-                    <a:bodyPr/>
-                    <a:lstStyle/>
-                    <a:p>
-                      <a:pPr algn="r" marL="63500" marR="63500">
-                        <a:lnSpc>
-                          <a:spcPct val="100000"/>
-                        </a:lnSpc>
-                        <a:spcBef>
-                          <a:spcPts val="500"/>
-                        </a:spcBef>
-                        <a:spcAft>
-                          <a:spcPts val="500"/>
-                        </a:spcAft>
-                        <a:buNone/>
-                      </a:pPr>
-                      <a:r>
-                        <a:rPr cap="none" sz="1100" i="0" b="0" u="none">
-                          <a:solidFill>
-                            <a:srgbClr val="000000">
-                              <a:alpha val="100000"/>
-                            </a:srgbClr>
-                          </a:solidFill>
-                          <a:latin typeface="Helvetica"/>
-                          <a:cs typeface="Helvetica"/>
-                          <a:ea typeface="Helvetica"/>
-                          <a:sym typeface="Helvetica"/>
-                        </a:rPr>
-                        <a:t>147.0</a:t>
-                      </a:r>
-                    </a:p>
-                  </a:txBody>
-                  <a:tcPr anchor="ctr" marB="63500" marT="63500" marR="0" marL="0">
-                    <a:lnL algn="ctr" cmpd="sng" cap="flat" w="0">
-                      <a:noFill/>
-                      <a:prstDash val="solid"/>
-                    </a:lnL>
-                    <a:lnR algn="ctr" cmpd="sng" cap="flat" w="0">
-                      <a:noFill/>
-                      <a:prstDash val="solid"/>
-                    </a:lnR>
-                    <a:lnT algn="ctr" cmpd="sng" cap="flat" w="0">
-                      <a:noFill/>
-                      <a:prstDash val="solid"/>
-                    </a:lnT>
-                    <a:lnB algn="ctr" cmpd="sng" cap="flat" w="0">
-                      <a:noFill/>
-                      <a:prstDash val="solid"/>
-                    </a:lnB>
-                    <a:solidFill>
-                      <a:srgbClr val="FFFFFF">
-                        <a:alpha val="0"/>
-                      </a:srgbClr>
-                    </a:solidFill>
-                  </a:tcPr>
-                </a:tc>
-                <a:tc>
-                  <a:txBody>
-                    <a:bodyPr/>
-                    <a:lstStyle/>
-                    <a:p>
-                      <a:pPr algn="r" marL="63500" marR="63500">
-                        <a:lnSpc>
-                          <a:spcPct val="100000"/>
-                        </a:lnSpc>
-                        <a:spcBef>
-                          <a:spcPts val="500"/>
-                        </a:spcBef>
-                        <a:spcAft>
-                          <a:spcPts val="500"/>
-                        </a:spcAft>
-                        <a:buNone/>
-                      </a:pPr>
-                      <a:r>
-                        <a:rPr cap="none" sz="1100" i="0" b="0" u="none">
-                          <a:solidFill>
-                            <a:srgbClr val="000000">
-                              <a:alpha val="100000"/>
-                            </a:srgbClr>
-                          </a:solidFill>
-                          <a:latin typeface="Helvetica"/>
-                          <a:cs typeface="Helvetica"/>
-                          <a:ea typeface="Helvetica"/>
-                          <a:sym typeface="Helvetica"/>
-                        </a:rPr>
-                        <a:t>42.2</a:t>
-                      </a:r>
-                    </a:p>
-                  </a:txBody>
-                  <a:tcPr anchor="ctr" marB="63500" marT="63500" marR="0" marL="0">
-                    <a:lnL algn="ctr" cmpd="sng" cap="flat" w="0">
-                      <a:noFill/>
-                      <a:prstDash val="solid"/>
-                    </a:lnL>
-                    <a:lnR algn="ctr" cmpd="sng" cap="flat" w="0">
-                      <a:noFill/>
-                      <a:prstDash val="solid"/>
-                    </a:lnR>
-                    <a:lnT algn="ctr" cmpd="sng" cap="flat" w="0">
-                      <a:noFill/>
-                      <a:prstDash val="solid"/>
-                    </a:lnT>
-                    <a:lnB algn="ctr" cmpd="sng" cap="flat" w="0">
-                      <a:noFill/>
-                      <a:prstDash val="solid"/>
-                    </a:lnB>
-                    <a:solidFill>
-                      <a:srgbClr val="FFFFFF">
-                        <a:alpha val="0"/>
-                      </a:srgbClr>
-                    </a:solidFill>
-                  </a:tcPr>
-                </a:tc>
-                <a:tc>
-                  <a:txBody>
-                    <a:bodyPr/>
-                    <a:lstStyle/>
-                    <a:p>
-                      <a:pPr algn="r" marL="63500" marR="63500">
-                        <a:lnSpc>
-                          <a:spcPct val="100000"/>
-                        </a:lnSpc>
-                        <a:spcBef>
-                          <a:spcPts val="500"/>
-                        </a:spcBef>
-                        <a:spcAft>
-                          <a:spcPts val="500"/>
-                        </a:spcAft>
-                        <a:buNone/>
-                      </a:pPr>
-                      <a:r>
-                        <a:rPr cap="none" sz="1100" i="0" b="0" u="none">
-                          <a:solidFill>
-                            <a:srgbClr val="000000">
-                              <a:alpha val="100000"/>
-                            </a:srgbClr>
-                          </a:solidFill>
-                          <a:latin typeface="Helvetica"/>
-                          <a:cs typeface="Helvetica"/>
-                          <a:ea typeface="Helvetica"/>
-                          <a:sym typeface="Helvetica"/>
-                        </a:rPr>
-                        <a:t>0</a:t>
-                      </a:r>
-                    </a:p>
-                  </a:txBody>
-                  <a:tcPr anchor="ctr" marB="63500" marT="63500" marR="0" marL="0">
-                    <a:lnL algn="ctr" cmpd="sng" cap="flat" w="0">
-                      <a:noFill/>
-                      <a:prstDash val="solid"/>
-                    </a:lnL>
-                    <a:lnR algn="ctr" cmpd="sng" cap="flat" w="0">
-                      <a:noFill/>
-                      <a:prstDash val="solid"/>
-                    </a:lnR>
-                    <a:lnT algn="ctr" cmpd="sng" cap="flat" w="0">
-                      <a:noFill/>
-                      <a:prstDash val="solid"/>
-                    </a:lnT>
-                    <a:lnB algn="ctr" cmpd="sng" cap="flat" w="0">
-                      <a:noFill/>
-                      <a:prstDash val="solid"/>
-                    </a:lnB>
-                    <a:solidFill>
-                      <a:srgbClr val="FFFFFF">
-                        <a:alpha val="0"/>
-                      </a:srgbClr>
-                    </a:solidFill>
-                  </a:tcPr>
-                </a:tc>
-              </a:tr>
-              <a:tr h="363775">
-                <a:tc>
-                  <a:txBody>
-                    <a:bodyPr/>
-                    <a:lstStyle/>
-                    <a:p>
-                      <a:pPr algn="l" marL="63500" marR="63500">
-                        <a:lnSpc>
-                          <a:spcPct val="100000"/>
-                        </a:lnSpc>
-                        <a:spcBef>
-                          <a:spcPts val="500"/>
-                        </a:spcBef>
-                        <a:spcAft>
-                          <a:spcPts val="500"/>
-                        </a:spcAft>
-                        <a:buNone/>
-                      </a:pPr>
-                      <a:r>
-                        <a:rPr cap="none" sz="1100" i="0" b="0" u="none">
-                          <a:solidFill>
-                            <a:srgbClr val="000000">
-                              <a:alpha val="100000"/>
-                            </a:srgbClr>
-                          </a:solidFill>
-                          <a:latin typeface="Helvetica"/>
-                          <a:cs typeface="Helvetica"/>
-                          <a:ea typeface="Helvetica"/>
-                          <a:sym typeface="Helvetica"/>
-                        </a:rPr>
-                        <a:t>I8</a:t>
-                      </a:r>
-                    </a:p>
-                  </a:txBody>
-                  <a:tcPr anchor="ctr" marB="63500" marT="63500" marR="0" marL="0">
-                    <a:lnL algn="ctr" cmpd="sng" cap="flat" w="0">
-                      <a:noFill/>
-                      <a:prstDash val="solid"/>
-                    </a:lnL>
-                    <a:lnR algn="ctr" cmpd="sng" cap="flat" w="0">
-                      <a:noFill/>
-                      <a:prstDash val="solid"/>
-                    </a:lnR>
-                    <a:lnT algn="ctr" cmpd="sng" cap="flat" w="0">
-                      <a:noFill/>
-                      <a:prstDash val="solid"/>
-                    </a:lnT>
-                    <a:lnB algn="ctr" cmpd="sng" cap="flat" w="19050">
-                      <a:solidFill>
-                        <a:srgbClr val="666666">
-                          <a:alpha val="100000"/>
-                        </a:srgbClr>
-                      </a:solidFill>
-                      <a:prstDash val="solid"/>
-                    </a:lnB>
-                    <a:solidFill>
-                      <a:srgbClr val="FFFFFF">
-                        <a:alpha val="0"/>
-                      </a:srgbClr>
-                    </a:solidFill>
-                  </a:tcPr>
-                </a:tc>
-                <a:tc>
-                  <a:txBody>
-                    <a:bodyPr/>
-                    <a:lstStyle/>
-                    <a:p>
-                      <a:pPr algn="r" marL="63500" marR="63500">
-                        <a:lnSpc>
-                          <a:spcPct val="100000"/>
-                        </a:lnSpc>
-                        <a:spcBef>
-                          <a:spcPts val="500"/>
-                        </a:spcBef>
-                        <a:spcAft>
-                          <a:spcPts val="500"/>
-                        </a:spcAft>
-                        <a:buNone/>
-                      </a:pPr>
-                      <a:r>
-                        <a:rPr cap="none" sz="1100" i="0" b="0" u="none">
-                          <a:solidFill>
-                            <a:srgbClr val="000000">
-                              <a:alpha val="100000"/>
-                            </a:srgbClr>
-                          </a:solidFill>
-                          <a:latin typeface="Helvetica"/>
-                          <a:cs typeface="Helvetica"/>
-                          <a:ea typeface="Helvetica"/>
-                          <a:sym typeface="Helvetica"/>
-                        </a:rPr>
-                        <a:t>483.7</a:t>
-                      </a:r>
-                    </a:p>
-                  </a:txBody>
-                  <a:tcPr anchor="ctr" marB="63500" marT="63500" marR="0" marL="0">
-                    <a:lnL algn="ctr" cmpd="sng" cap="flat" w="0">
-                      <a:noFill/>
-                      <a:prstDash val="solid"/>
-                    </a:lnL>
-                    <a:lnR algn="ctr" cmpd="sng" cap="flat" w="0">
-                      <a:noFill/>
-                      <a:prstDash val="solid"/>
-                    </a:lnR>
-                    <a:lnT algn="ctr" cmpd="sng" cap="flat" w="0">
-                      <a:noFill/>
-                      <a:prstDash val="solid"/>
-                    </a:lnT>
-                    <a:lnB algn="ctr" cmpd="sng" cap="flat" w="19050">
-                      <a:solidFill>
-                        <a:srgbClr val="666666">
-                          <a:alpha val="100000"/>
-                        </a:srgbClr>
-                      </a:solidFill>
-                      <a:prstDash val="solid"/>
-                    </a:lnB>
-                    <a:solidFill>
-                      <a:srgbClr val="FFFFFF">
-                        <a:alpha val="0"/>
-                      </a:srgbClr>
-                    </a:solidFill>
-                  </a:tcPr>
-                </a:tc>
-                <a:tc>
-                  <a:txBody>
-                    <a:bodyPr/>
-                    <a:lstStyle/>
-                    <a:p>
-                      <a:pPr algn="r" marL="63500" marR="63500">
-                        <a:lnSpc>
-                          <a:spcPct val="100000"/>
-                        </a:lnSpc>
-                        <a:spcBef>
-                          <a:spcPts val="500"/>
-                        </a:spcBef>
-                        <a:spcAft>
-                          <a:spcPts val="500"/>
-                        </a:spcAft>
-                        <a:buNone/>
-                      </a:pPr>
-                      <a:r>
-                        <a:rPr cap="none" sz="1100" i="0" b="0" u="none">
-                          <a:solidFill>
-                            <a:srgbClr val="000000">
-                              <a:alpha val="100000"/>
-                            </a:srgbClr>
-                          </a:solidFill>
-                          <a:latin typeface="Helvetica"/>
-                          <a:cs typeface="Helvetica"/>
-                          <a:ea typeface="Helvetica"/>
-                          <a:sym typeface="Helvetica"/>
-                        </a:rPr>
-                        <a:t>490.0</a:t>
-                      </a:r>
-                    </a:p>
-                  </a:txBody>
-                  <a:tcPr anchor="ctr" marB="63500" marT="63500" marR="0" marL="0">
-                    <a:lnL algn="ctr" cmpd="sng" cap="flat" w="0">
-                      <a:noFill/>
-                      <a:prstDash val="solid"/>
-                    </a:lnL>
-                    <a:lnR algn="ctr" cmpd="sng" cap="flat" w="0">
-                      <a:noFill/>
-                      <a:prstDash val="solid"/>
-                    </a:lnR>
-                    <a:lnT algn="ctr" cmpd="sng" cap="flat" w="0">
-                      <a:noFill/>
-                      <a:prstDash val="solid"/>
-                    </a:lnT>
-                    <a:lnB algn="ctr" cmpd="sng" cap="flat" w="19050">
-                      <a:solidFill>
-                        <a:srgbClr val="666666">
-                          <a:alpha val="100000"/>
-                        </a:srgbClr>
-                      </a:solidFill>
-                      <a:prstDash val="solid"/>
-                    </a:lnB>
-                    <a:solidFill>
-                      <a:srgbClr val="FFFFFF">
-                        <a:alpha val="0"/>
-                      </a:srgbClr>
-                    </a:solidFill>
-                  </a:tcPr>
-                </a:tc>
-                <a:tc>
-                  <a:txBody>
-                    <a:bodyPr/>
-                    <a:lstStyle/>
-                    <a:p>
-                      <a:pPr algn="r" marL="63500" marR="63500">
-                        <a:lnSpc>
-                          <a:spcPct val="100000"/>
-                        </a:lnSpc>
-                        <a:spcBef>
-                          <a:spcPts val="500"/>
-                        </a:spcBef>
-                        <a:spcAft>
-                          <a:spcPts val="500"/>
-                        </a:spcAft>
-                        <a:buNone/>
-                      </a:pPr>
-                      <a:r>
-                        <a:rPr cap="none" sz="1100" i="0" b="0" u="none">
-                          <a:solidFill>
-                            <a:srgbClr val="000000">
-                              <a:alpha val="100000"/>
-                            </a:srgbClr>
-                          </a:solidFill>
-                          <a:latin typeface="Helvetica"/>
-                          <a:cs typeface="Helvetica"/>
-                          <a:ea typeface="Helvetica"/>
-                          <a:sym typeface="Helvetica"/>
-                        </a:rPr>
-                        <a:t>176.5</a:t>
-                      </a:r>
-                    </a:p>
-                  </a:txBody>
-                  <a:tcPr anchor="ctr" marB="63500" marT="63500" marR="0" marL="0">
-                    <a:lnL algn="ctr" cmpd="sng" cap="flat" w="0">
-                      <a:noFill/>
-                      <a:prstDash val="solid"/>
-                    </a:lnL>
-                    <a:lnR algn="ctr" cmpd="sng" cap="flat" w="0">
-                      <a:noFill/>
-                      <a:prstDash val="solid"/>
-                    </a:lnR>
-                    <a:lnT algn="ctr" cmpd="sng" cap="flat" w="0">
-                      <a:noFill/>
-                      <a:prstDash val="solid"/>
-                    </a:lnT>
-                    <a:lnB algn="ctr" cmpd="sng" cap="flat" w="19050">
-                      <a:solidFill>
-                        <a:srgbClr val="666666">
-                          <a:alpha val="100000"/>
-                        </a:srgbClr>
-                      </a:solidFill>
-                      <a:prstDash val="solid"/>
-                    </a:lnB>
-                    <a:solidFill>
-                      <a:srgbClr val="FFFFFF">
-                        <a:alpha val="0"/>
-                      </a:srgbClr>
-                    </a:solidFill>
-                  </a:tcPr>
-                </a:tc>
-                <a:tc>
-                  <a:txBody>
-                    <a:bodyPr/>
-                    <a:lstStyle/>
-                    <a:p>
-                      <a:pPr algn="r" marL="63500" marR="63500">
-                        <a:lnSpc>
-                          <a:spcPct val="100000"/>
-                        </a:lnSpc>
-                        <a:spcBef>
-                          <a:spcPts val="500"/>
-                        </a:spcBef>
-                        <a:spcAft>
-                          <a:spcPts val="500"/>
-                        </a:spcAft>
-                        <a:buNone/>
-                      </a:pPr>
-                      <a:r>
-                        <a:rPr cap="none" sz="1100" i="0" b="0" u="none">
-                          <a:solidFill>
-                            <a:srgbClr val="000000">
-                              <a:alpha val="100000"/>
-                            </a:srgbClr>
-                          </a:solidFill>
-                          <a:latin typeface="Helvetica"/>
-                          <a:cs typeface="Helvetica"/>
-                          <a:ea typeface="Helvetica"/>
-                          <a:sym typeface="Helvetica"/>
-                        </a:rPr>
-                        <a:t>2</a:t>
-                      </a:r>
-                    </a:p>
-                  </a:txBody>
-                  <a:tcPr anchor="ctr" marB="63500" marT="63500" marR="0" marL="0">
-                    <a:lnL algn="ctr" cmpd="sng" cap="flat" w="0">
-                      <a:noFill/>
-                      <a:prstDash val="solid"/>
-                    </a:lnL>
-                    <a:lnR algn="ctr" cmpd="sng" cap="flat" w="0">
-                      <a:noFill/>
-                      <a:prstDash val="solid"/>
-                    </a:lnR>
-                    <a:lnT algn="ctr" cmpd="sng" cap="flat" w="0">
-                      <a:noFill/>
-                      <a:prstDash val="solid"/>
-                    </a:lnT>
-                    <a:lnB algn="ctr" cmpd="sng" cap="flat" w="19050">
-                      <a:solidFill>
-                        <a:srgbClr val="666666">
-                          <a:alpha val="100000"/>
-                        </a:srgbClr>
-                      </a:solidFill>
-                      <a:prstDash val="solid"/>
-                    </a:lnB>
-                    <a:solidFill>
-                      <a:srgbClr val="FFFFFF">
-                        <a:alpha val="0"/>
-                      </a:srgbClr>
-                    </a:solidFill>
-                  </a:tcPr>
-                </a:tc>
-              </a:tr>
-            </a:tbl>
-          </a:graphicData>
-        </a:graphic>
-      </p:graphicFrame>
     </p:spTree>
   </p:cSld>
 </p:sld>
@@ -11500,129 +7922,6 @@
         <p:txBody>
           <a:bodyPr/>
           <a:lstStyle/>
-          <a:p>
-            <a:pPr lvl="0" indent="0">
-              <a:buNone/>
-            </a:pPr>
-            <a:r>
-              <a:rPr>
-                <a:solidFill>
-                  <a:srgbClr val="5E5E5E"/>
-                </a:solidFill>
-                <a:latin typeface="Courier"/>
-              </a:rPr>
-              <a:t># Display the sample means</a:t>
-            </a:r>
-            <a:br/>
-            <a:r>
-              <a:rPr>
-                <a:solidFill>
-                  <a:srgbClr val="003B4F"/>
-                </a:solidFill>
-                <a:latin typeface="Courier"/>
-              </a:rPr>
-              <a:t>samples_df</a:t>
-            </a:r>
-          </a:p>
-          <a:p>
-            <a:pPr lvl="0" indent="0">
-              <a:buNone/>
-            </a:pPr>
-            <a:r>
-              <a:rPr>
-                <a:latin typeface="Courier"/>
-              </a:rPr>
-              <a:t>   sample_number sample_mean
-1              1    269.9333
-2              2    260.6000
-3              3    255.2000
-4              4    263.4000
-5              5    275.3333
-6              6    279.2667
-7              7    263.7333
-8              8    273.6000
-9              9    264.8000
-10            10    269.8667</a:t>
-            </a:r>
-          </a:p>
-          <a:p>
-            <a:pPr lvl="0" indent="0">
-              <a:buNone/>
-            </a:pPr>
-            <a:r>
-              <a:rPr>
-                <a:solidFill>
-                  <a:srgbClr val="5E5E5E"/>
-                </a:solidFill>
-                <a:latin typeface="Courier"/>
-              </a:rPr>
-              <a:t># Calculate the mean and standard deviation of the sample means</a:t>
-            </a:r>
-            <a:br/>
-            <a:r>
-              <a:rPr>
-                <a:solidFill>
-                  <a:srgbClr val="4758AB"/>
-                </a:solidFill>
-                <a:latin typeface="Courier"/>
-              </a:rPr>
-              <a:t>mean</a:t>
-            </a:r>
-            <a:r>
-              <a:rPr>
-                <a:solidFill>
-                  <a:srgbClr val="003B4F"/>
-                </a:solidFill>
-                <a:latin typeface="Courier"/>
-              </a:rPr>
-              <a:t>(sample_means)</a:t>
-            </a:r>
-          </a:p>
-          <a:p>
-            <a:pPr lvl="0" indent="0">
-              <a:buNone/>
-            </a:pPr>
-            <a:r>
-              <a:rPr>
-                <a:latin typeface="Courier"/>
-              </a:rPr>
-              <a:t>[1] 267.5733</a:t>
-            </a:r>
-          </a:p>
-          <a:p>
-            <a:pPr lvl="0" indent="0">
-              <a:buNone/>
-            </a:pPr>
-            <a:r>
-              <a:rPr>
-                <a:solidFill>
-                  <a:srgbClr val="4758AB"/>
-                </a:solidFill>
-                <a:latin typeface="Courier"/>
-              </a:rPr>
-              <a:t>sd</a:t>
-            </a:r>
-            <a:r>
-              <a:rPr>
-                <a:solidFill>
-                  <a:srgbClr val="003B4F"/>
-                </a:solidFill>
-                <a:latin typeface="Courier"/>
-              </a:rPr>
-              <a:t>(sample_means)</a:t>
-            </a:r>
-          </a:p>
-          <a:p>
-            <a:pPr lvl="0" indent="0">
-              <a:buNone/>
-            </a:pPr>
-            <a:r>
-              <a:rPr>
-                <a:latin typeface="Courier"/>
-              </a:rPr>
-              <a:t>[1] 7.346063</a:t>
-            </a:r>
-          </a:p>
           <a:p>
             <a:pPr lvl="0" indent="0">
               <a:buNone/>
@@ -12712,7 +9011,21 @@
                 </a:pPr>
                 <a:r>
                   <a:rPr/>
-                  <a:t>Where: - s is the sample standard deviation - n is the sample size</a:t>
+                  <a:t>Where:</a:t>
+                </a:r>
+              </a:p>
+              <a:p>
+                <a:pPr lvl="0"/>
+                <a:r>
+                  <a:rPr/>
+                  <a:t>s is the sample standard deviation</a:t>
+                </a:r>
+              </a:p>
+              <a:p>
+                <a:pPr lvl="0"/>
+                <a:r>
+                  <a:rPr/>
+                  <a:t>n is the sample size</a:t>
                 </a:r>
               </a:p>
               <a:p>
@@ -12721,7 +9034,28 @@
                 </a:pPr>
                 <a:r>
                   <a:rPr/>
-                  <a:t>The standard error tells us: - How much uncertainty is in our estimate - How much sample means are expected to vary - How close our sample mean is likely to be to the true population mean</a:t>
+                  <a:t>The standard error tells us:</a:t>
+                </a:r>
+              </a:p>
+              <a:p>
+                <a:pPr lvl="0"/>
+                <a:r>
+                  <a:rPr/>
+                  <a:t>How much uncertainty is in our estimate</a:t>
+                </a:r>
+              </a:p>
+              <a:p>
+                <a:pPr lvl="0"/>
+                <a:r>
+                  <a:rPr/>
+                  <a:t>How much sample means are expected to vary</a:t>
+                </a:r>
+              </a:p>
+              <a:p>
+                <a:pPr lvl="0"/>
+                <a:r>
+                  <a:rPr/>
+                  <a:t>How close our sample mean is likely to be to the true population mean</a:t>
                 </a:r>
               </a:p>
             </p:txBody>
@@ -12750,9 +9084,26 @@
               <a:rPr b="1"/>
               <a:t>Remember:</a:t>
             </a:r>
-            <a:r>
-              <a:rPr/>
-              <a:t> - Standard deviation (s) describes the variability in the individual data points - Standard error (SE) describes the variability in the sample mean itself - As sample size increases, SE decreases (more precise estimate)</a:t>
+          </a:p>
+          <a:p>
+            <a:pPr lvl="0"/>
+            <a:r>
+              <a:rPr/>
+              <a:t>Standard deviation (s) describes the variability in the individual data points</a:t>
+            </a:r>
+          </a:p>
+          <a:p>
+            <a:pPr lvl="0"/>
+            <a:r>
+              <a:rPr/>
+              <a:t>Standard error (SE) describes the variability in the sample mean itself</a:t>
+            </a:r>
+          </a:p>
+          <a:p>
+            <a:pPr lvl="0"/>
+            <a:r>
+              <a:rPr/>
+              <a:t>As sample size increases, SE decreases (more precise estimate)</a:t>
             </a:r>
           </a:p>
         </p:txBody>
@@ -13297,11 +9648,8 @@
         <p:spPr>
           <a:xfrm>
             <a:off x="0" y="0"/>
-            <a:ext cx="9144000" cy="602780"/>
+            <a:ext cx="9144000" cy="582780"/>
           </a:xfrm>
-          <a:solidFill>
-            <a:srgbClr val="70121D"/>
-          </a:solidFill>
         </p:spPr>
         <p:txBody>
           <a:bodyPr/>
@@ -13324,7 +9672,7 @@
             <a:spLocks noGrp="1"/>
           </p:cNvSpPr>
           <p:nvPr>
-            <p:ph idx="1" sz="half"/>
+            <p:ph idx="1"/>
           </p:nvPr>
         </p:nvSpPr>
         <p:spPr/>
@@ -13397,39 +9745,23 @@
             <a:pPr lvl="0"/>
             <a:r>
               <a:rPr/>
-              <a:t>- The narrower the sampling distribution</a:t>
+              <a:t>The narrower the sampling distribution</a:t>
             </a:r>
           </a:p>
           <a:p>
             <a:pPr lvl="0"/>
             <a:r>
               <a:rPr/>
-              <a:t>- The smaller the standard error</a:t>
+              <a:t>The smaller the standard error</a:t>
             </a:r>
           </a:p>
           <a:p>
             <a:pPr lvl="0"/>
             <a:r>
               <a:rPr/>
-              <a:t>- The more precise our estimate of the population mean</a:t>
-            </a:r>
-          </a:p>
-        </p:txBody>
-      </p:sp>
-      <p:sp>
-        <p:nvSpPr>
-          <p:cNvPr id="4" name="Content Placeholder 3"/>
-          <p:cNvSpPr>
-            <a:spLocks noGrp="1"/>
-          </p:cNvSpPr>
-          <p:nvPr>
-            <p:ph idx="2" sz="half"/>
-          </p:nvPr>
-        </p:nvSpPr>
-        <p:spPr/>
-        <p:txBody>
-          <a:bodyPr/>
-          <a:lstStyle/>
+              <a:t>The more precise our estimate of the population mean</a:t>
+            </a:r>
+          </a:p>
           <a:p>
             <a:pPr lvl="0" indent="0" marL="0">
               <a:buNone/>
@@ -13697,7 +10029,7 @@
                 </a:solidFill>
                 <a:latin typeface="Courier"/>
               </a:rPr>
-              <a:t>456</a:t>
+              <a:t>46</a:t>
             </a:r>
             <a:r>
               <a:rPr>
@@ -15404,36 +11736,6 @@
             <a:r>
               <a:rPr>
                 <a:solidFill>
-                  <a:srgbClr val="003B4F"/>
-                </a:solidFill>
-                <a:latin typeface="Courier"/>
-              </a:rPr>
-              <a:t>results</a:t>
-            </a:r>
-          </a:p>
-          <a:p>
-            <a:pPr lvl="0" indent="0">
-              <a:buNone/>
-            </a:pPr>
-            <a:r>
-              <a:rPr>
-                <a:latin typeface="Courier"/>
-              </a:rPr>
-              <a:t>  sample_size empirical_se theoretical_se
-1           5    12.349407      12.657835
-2          10     8.178270       8.950441
-3          20     5.558957       6.328918
-4          30     3.792177       5.167540
-5          50     2.099744       4.002759</a:t>
-            </a:r>
-          </a:p>
-          <a:p>
-            <a:pPr lvl="0" indent="0">
-              <a:buNone/>
-            </a:pPr>
-            <a:r>
-              <a:rPr>
-                <a:solidFill>
                   <a:srgbClr val="5E5E5E"/>
                 </a:solidFill>
                 <a:latin typeface="Courier"/>
@@ -16225,11 +12527,8 @@
         <p:spPr>
           <a:xfrm>
             <a:off x="0" y="0"/>
-            <a:ext cx="9144000" cy="602780"/>
+            <a:ext cx="9144000" cy="582780"/>
           </a:xfrm>
-          <a:solidFill>
-            <a:srgbClr val="70121D"/>
-          </a:solidFill>
         </p:spPr>
         <p:txBody>
           <a:bodyPr/>
@@ -16254,7 +12553,7 @@
                 <a:spLocks noGrp="1"/>
               </p:cNvSpPr>
               <p:nvPr>
-                <p:ph idx="1" sz="half"/>
+                <p:ph idx="1"/>
               </p:nvPr>
             </p:nvSpPr>
             <p:spPr/>
@@ -16349,38 +12648,36 @@
                 </a:pPr>
                 <a:r>
                   <a:rPr/>
-                  <a:t>This “2 SE rule of thumb” means: - The interval extends 2 standard errors below and above the sample mean - About 95% of such intervals constructed from different samples would contain the true population mean</a:t>
+                  <a:t>This “2 SE rule of thumb” means:</a:t>
+                </a:r>
+              </a:p>
+              <a:p>
+                <a:pPr lvl="0"/>
+                <a:r>
+                  <a:rPr/>
+                  <a:t>The interval extends 2 standard errors below and above the sample mean</a:t>
+                </a:r>
+              </a:p>
+              <a:p>
+                <a:pPr lvl="0"/>
+                <a:r>
+                  <a:rPr/>
+                  <a:t>About 95% of such intervals constructed from different samples would contain the true population mean</a:t>
+                </a:r>
+              </a:p>
+              <a:p>
+                <a:pPr lvl="0" indent="0" marL="0">
+                  <a:buNone/>
+                </a:pPr>
+                <a:r>
+                  <a:rPr/>
+                  <a:t>Confidence intervals provide a way to express the precision of our estimates.</a:t>
                 </a:r>
               </a:p>
             </p:txBody>
           </p:sp>
         </mc:Choice>
       </mc:AlternateContent>
-      <p:sp>
-        <p:nvSpPr>
-          <p:cNvPr id="4" name="Content Placeholder 3"/>
-          <p:cNvSpPr>
-            <a:spLocks noGrp="1"/>
-          </p:cNvSpPr>
-          <p:nvPr>
-            <p:ph idx="2" sz="half"/>
-          </p:nvPr>
-        </p:nvSpPr>
-        <p:spPr/>
-        <p:txBody>
-          <a:bodyPr/>
-          <a:lstStyle/>
-          <a:p>
-            <a:pPr lvl="0" indent="0" marL="0">
-              <a:buNone/>
-            </a:pPr>
-            <a:r>
-              <a:rPr/>
-              <a:t>Confidence intervals provide a way to express the precision of our estimates.</a:t>
-            </a:r>
-          </a:p>
-        </p:txBody>
-      </p:sp>
     </p:spTree>
   </p:cSld>
 </p:sld>
@@ -20628,10 +16925,13 @@
           <a:lstStyle/>
           <a:p>
             <a:pPr lvl="0" indent="0" marL="0">
+              <a:spcBef>
+                <a:spcPts val="3000"/>
+              </a:spcBef>
               <a:buNone/>
             </a:pPr>
             <a:r>
-              <a:rPr/>
+              <a:rPr b="1"/>
               <a:t>Understanding the type of variable you’re working with is essential for selecting appropriate statistics:</a:t>
             </a:r>
           </a:p>
@@ -20794,10 +17094,13 @@
           <a:lstStyle/>
           <a:p>
             <a:pPr lvl="0" indent="0" marL="0">
+              <a:spcBef>
+                <a:spcPts val="3000"/>
+              </a:spcBef>
               <a:buNone/>
             </a:pPr>
             <a:r>
-              <a:rPr/>
+              <a:rPr b="1"/>
               <a:t>Derived Variables</a:t>
             </a:r>
           </a:p>

--- a/docs/ecostats_lectures/lecture_03/03_01_lecture_powerpoint.pptx
+++ b/docs/ecostats_lectures/lecture_03/03_01_lecture_powerpoint.pptx
@@ -3710,8 +3710,45 @@
               <a:buNone/>
             </a:pPr>
             <a:r>
-              <a:rPr/>
-              <a:t>Accuracy is a function of both precision and bias. For statisticians, bias is usually a more serious problem than low precision because:</a:t>
+              <a:rPr b="1"/>
+              <a:t>Accuracy</a:t>
+            </a:r>
+            <a:r>
+              <a:rPr/>
+              <a:t> is a </a:t>
+            </a:r>
+            <a:r>
+              <a:rPr b="1"/>
+              <a:t>function</a:t>
+            </a:r>
+            <a:r>
+              <a:rPr/>
+              <a:t> of </a:t>
+            </a:r>
+            <a:r>
+              <a:rPr b="1"/>
+              <a:t>both precision and bias</a:t>
+            </a:r>
+            <a:r>
+              <a:rPr/>
+              <a:t>.</a:t>
+            </a:r>
+          </a:p>
+          <a:p>
+            <a:pPr lvl="0" indent="0" marL="0">
+              <a:buNone/>
+            </a:pPr>
+            <a:r>
+              <a:rPr/>
+              <a:t>For statisticians, </a:t>
+            </a:r>
+            <a:r>
+              <a:rPr b="1"/>
+              <a:t>BIAS is usually a more serious problem than low precision because</a:t>
+            </a:r>
+            <a:r>
+              <a:rPr/>
+              <a:t>:</a:t>
             </a:r>
           </a:p>
           <a:p>
@@ -3832,7 +3869,7 @@
             </a:pPr>
             <a:r>
               <a:rPr sz="2000" b="1"/>
-              <a:t>Practice Exercise 1: What are potential sources of error in pine needles or fish?</a:t>
+              <a:t>Practice Exercise 1: What are potential sources of error in fish data?</a:t>
             </a:r>
           </a:p>
           <a:p>
@@ -4142,9 +4179,221 @@
             </a:pPr>
             <a:r>
               <a:rPr>
-                <a:latin typeface="Courier"/>
-              </a:rPr>
-              <a:t>Mean length of all fish: 324.5 mm</a:t>
+                <a:solidFill>
+                  <a:srgbClr val="5E5E5E"/>
+                </a:solidFill>
+                <a:latin typeface="Courier"/>
+              </a:rPr>
+              <a:t># Calculate mean length of all fish</a:t>
+            </a:r>
+            <a:br/>
+            <a:r>
+              <a:rPr>
+                <a:solidFill>
+                  <a:srgbClr val="4758AB"/>
+                </a:solidFill>
+                <a:latin typeface="Courier"/>
+              </a:rPr>
+              <a:t>mean</a:t>
+            </a:r>
+            <a:r>
+              <a:rPr>
+                <a:solidFill>
+                  <a:srgbClr val="003B4F"/>
+                </a:solidFill>
+                <a:latin typeface="Courier"/>
+              </a:rPr>
+              <a:t>(grayling_df</a:t>
+            </a:r>
+            <a:r>
+              <a:rPr>
+                <a:solidFill>
+                  <a:srgbClr val="5E5E5E"/>
+                </a:solidFill>
+                <a:latin typeface="Courier"/>
+              </a:rPr>
+              <a:t>$</a:t>
+            </a:r>
+            <a:r>
+              <a:rPr>
+                <a:solidFill>
+                  <a:srgbClr val="003B4F"/>
+                </a:solidFill>
+                <a:latin typeface="Courier"/>
+              </a:rPr>
+              <a:t>length_mm)</a:t>
+            </a:r>
+          </a:p>
+          <a:p>
+            <a:pPr lvl="0" indent="0">
+              <a:buNone/>
+            </a:pPr>
+            <a:r>
+              <a:rPr>
+                <a:latin typeface="Courier"/>
+              </a:rPr>
+              <a:t>[1] 324.494</a:t>
+            </a:r>
+          </a:p>
+          <a:p>
+            <a:pPr lvl="0" indent="0">
+              <a:buNone/>
+            </a:pPr>
+            <a:r>
+              <a:rPr>
+                <a:solidFill>
+                  <a:srgbClr val="5E5E5E"/>
+                </a:solidFill>
+                <a:latin typeface="Courier"/>
+              </a:rPr>
+              <a:t># Calculate mean by lake</a:t>
+            </a:r>
+            <a:br/>
+            <a:r>
+              <a:rPr>
+                <a:solidFill>
+                  <a:srgbClr val="003B4F"/>
+                </a:solidFill>
+                <a:latin typeface="Courier"/>
+              </a:rPr>
+              <a:t>grayling_df </a:t>
+            </a:r>
+            <a:r>
+              <a:rPr>
+                <a:solidFill>
+                  <a:srgbClr val="5E5E5E"/>
+                </a:solidFill>
+                <a:latin typeface="Courier"/>
+              </a:rPr>
+              <a:t>%&gt;%</a:t>
+            </a:r>
+            <a:br/>
+            <a:r>
+              <a:rPr>
+                <a:solidFill>
+                  <a:srgbClr val="003B4F"/>
+                </a:solidFill>
+                <a:latin typeface="Courier"/>
+              </a:rPr>
+              <a:t>  </a:t>
+            </a:r>
+            <a:r>
+              <a:rPr>
+                <a:solidFill>
+                  <a:srgbClr val="4758AB"/>
+                </a:solidFill>
+                <a:latin typeface="Courier"/>
+              </a:rPr>
+              <a:t>group_by</a:t>
+            </a:r>
+            <a:r>
+              <a:rPr>
+                <a:solidFill>
+                  <a:srgbClr val="003B4F"/>
+                </a:solidFill>
+                <a:latin typeface="Courier"/>
+              </a:rPr>
+              <a:t>(lake) </a:t>
+            </a:r>
+            <a:r>
+              <a:rPr>
+                <a:solidFill>
+                  <a:srgbClr val="5E5E5E"/>
+                </a:solidFill>
+                <a:latin typeface="Courier"/>
+              </a:rPr>
+              <a:t>%&gt;%</a:t>
+            </a:r>
+            <a:br/>
+            <a:r>
+              <a:rPr>
+                <a:solidFill>
+                  <a:srgbClr val="003B4F"/>
+                </a:solidFill>
+                <a:latin typeface="Courier"/>
+              </a:rPr>
+              <a:t>  </a:t>
+            </a:r>
+            <a:r>
+              <a:rPr>
+                <a:solidFill>
+                  <a:srgbClr val="4758AB"/>
+                </a:solidFill>
+                <a:latin typeface="Courier"/>
+              </a:rPr>
+              <a:t>summarise</a:t>
+            </a:r>
+            <a:r>
+              <a:rPr>
+                <a:solidFill>
+                  <a:srgbClr val="003B4F"/>
+                </a:solidFill>
+                <a:latin typeface="Courier"/>
+              </a:rPr>
+              <a:t>(</a:t>
+            </a:r>
+            <a:r>
+              <a:rPr>
+                <a:solidFill>
+                  <a:srgbClr val="657422"/>
+                </a:solidFill>
+                <a:latin typeface="Courier"/>
+              </a:rPr>
+              <a:t>mean_length =</a:t>
+            </a:r>
+            <a:r>
+              <a:rPr>
+                <a:solidFill>
+                  <a:srgbClr val="003B4F"/>
+                </a:solidFill>
+                <a:latin typeface="Courier"/>
+              </a:rPr>
+              <a:t> </a:t>
+            </a:r>
+            <a:r>
+              <a:rPr>
+                <a:solidFill>
+                  <a:srgbClr val="4758AB"/>
+                </a:solidFill>
+                <a:latin typeface="Courier"/>
+              </a:rPr>
+              <a:t>mean</a:t>
+            </a:r>
+            <a:r>
+              <a:rPr>
+                <a:solidFill>
+                  <a:srgbClr val="003B4F"/>
+                </a:solidFill>
+                <a:latin typeface="Courier"/>
+              </a:rPr>
+              <a:t>(length_mm, </a:t>
+            </a:r>
+            <a:r>
+              <a:rPr>
+                <a:solidFill>
+                  <a:srgbClr val="657422"/>
+                </a:solidFill>
+                <a:latin typeface="Courier"/>
+              </a:rPr>
+              <a:t>na.rm=</a:t>
+            </a:r>
+            <a:r>
+              <a:rPr>
+                <a:solidFill>
+                  <a:srgbClr val="8F5902"/>
+                </a:solidFill>
+                <a:latin typeface="Courier"/>
+              </a:rPr>
+              <a:t>TRUE</a:t>
+            </a:r>
+            <a:r>
+              <a:rPr>
+                <a:solidFill>
+                  <a:srgbClr val="003B4F"/>
+                </a:solidFill>
+                <a:latin typeface="Courier"/>
+              </a:rPr>
+              <a:t>)) </a:t>
             </a:r>
           </a:p>
           <a:p>
@@ -4259,9 +4508,194 @@
             </a:pPr>
             <a:r>
               <a:rPr>
-                <a:latin typeface="Courier"/>
-              </a:rPr>
-              <a:t>Median length of all fish: 324.5 mm</a:t>
+                <a:solidFill>
+                  <a:srgbClr val="5E5E5E"/>
+                </a:solidFill>
+                <a:latin typeface="Courier"/>
+              </a:rPr>
+              <a:t># Calculate median length of all fish</a:t>
+            </a:r>
+            <a:br/>
+            <a:r>
+              <a:rPr>
+                <a:solidFill>
+                  <a:srgbClr val="4758AB"/>
+                </a:solidFill>
+                <a:latin typeface="Courier"/>
+              </a:rPr>
+              <a:t>median</a:t>
+            </a:r>
+            <a:r>
+              <a:rPr>
+                <a:solidFill>
+                  <a:srgbClr val="003B4F"/>
+                </a:solidFill>
+                <a:latin typeface="Courier"/>
+              </a:rPr>
+              <a:t>(grayling_df</a:t>
+            </a:r>
+            <a:r>
+              <a:rPr>
+                <a:solidFill>
+                  <a:srgbClr val="5E5E5E"/>
+                </a:solidFill>
+                <a:latin typeface="Courier"/>
+              </a:rPr>
+              <a:t>$</a:t>
+            </a:r>
+            <a:r>
+              <a:rPr>
+                <a:solidFill>
+                  <a:srgbClr val="003B4F"/>
+                </a:solidFill>
+                <a:latin typeface="Courier"/>
+              </a:rPr>
+              <a:t>length_mm)</a:t>
+            </a:r>
+          </a:p>
+          <a:p>
+            <a:pPr lvl="0" indent="0">
+              <a:buNone/>
+            </a:pPr>
+            <a:r>
+              <a:rPr>
+                <a:latin typeface="Courier"/>
+              </a:rPr>
+              <a:t>[1] 324.5</a:t>
+            </a:r>
+          </a:p>
+          <a:p>
+            <a:pPr lvl="0" indent="0">
+              <a:buNone/>
+            </a:pPr>
+            <a:r>
+              <a:rPr>
+                <a:solidFill>
+                  <a:srgbClr val="5E5E5E"/>
+                </a:solidFill>
+                <a:latin typeface="Courier"/>
+              </a:rPr>
+              <a:t># Calculate median by lake</a:t>
+            </a:r>
+            <a:br/>
+            <a:r>
+              <a:rPr>
+                <a:solidFill>
+                  <a:srgbClr val="003B4F"/>
+                </a:solidFill>
+                <a:latin typeface="Courier"/>
+              </a:rPr>
+              <a:t>grayling_df </a:t>
+            </a:r>
+            <a:r>
+              <a:rPr>
+                <a:solidFill>
+                  <a:srgbClr val="5E5E5E"/>
+                </a:solidFill>
+                <a:latin typeface="Courier"/>
+              </a:rPr>
+              <a:t>%&gt;%</a:t>
+            </a:r>
+            <a:br/>
+            <a:r>
+              <a:rPr>
+                <a:solidFill>
+                  <a:srgbClr val="003B4F"/>
+                </a:solidFill>
+                <a:latin typeface="Courier"/>
+              </a:rPr>
+              <a:t>  </a:t>
+            </a:r>
+            <a:r>
+              <a:rPr>
+                <a:solidFill>
+                  <a:srgbClr val="4758AB"/>
+                </a:solidFill>
+                <a:latin typeface="Courier"/>
+              </a:rPr>
+              <a:t>group_by</a:t>
+            </a:r>
+            <a:r>
+              <a:rPr>
+                <a:solidFill>
+                  <a:srgbClr val="003B4F"/>
+                </a:solidFill>
+                <a:latin typeface="Courier"/>
+              </a:rPr>
+              <a:t>(lake) </a:t>
+            </a:r>
+            <a:r>
+              <a:rPr>
+                <a:solidFill>
+                  <a:srgbClr val="5E5E5E"/>
+                </a:solidFill>
+                <a:latin typeface="Courier"/>
+              </a:rPr>
+              <a:t>%&gt;%</a:t>
+            </a:r>
+            <a:br/>
+            <a:r>
+              <a:rPr>
+                <a:solidFill>
+                  <a:srgbClr val="003B4F"/>
+                </a:solidFill>
+                <a:latin typeface="Courier"/>
+              </a:rPr>
+              <a:t>  </a:t>
+            </a:r>
+            <a:r>
+              <a:rPr>
+                <a:solidFill>
+                  <a:srgbClr val="4758AB"/>
+                </a:solidFill>
+                <a:latin typeface="Courier"/>
+              </a:rPr>
+              <a:t>summarise</a:t>
+            </a:r>
+            <a:r>
+              <a:rPr>
+                <a:solidFill>
+                  <a:srgbClr val="003B4F"/>
+                </a:solidFill>
+                <a:latin typeface="Courier"/>
+              </a:rPr>
+              <a:t>(</a:t>
+            </a:r>
+            <a:r>
+              <a:rPr>
+                <a:solidFill>
+                  <a:srgbClr val="657422"/>
+                </a:solidFill>
+                <a:latin typeface="Courier"/>
+              </a:rPr>
+              <a:t>median_length =</a:t>
+            </a:r>
+            <a:r>
+              <a:rPr>
+                <a:solidFill>
+                  <a:srgbClr val="003B4F"/>
+                </a:solidFill>
+                <a:latin typeface="Courier"/>
+              </a:rPr>
+              <a:t> </a:t>
+            </a:r>
+            <a:r>
+              <a:rPr>
+                <a:solidFill>
+                  <a:srgbClr val="4758AB"/>
+                </a:solidFill>
+                <a:latin typeface="Courier"/>
+              </a:rPr>
+              <a:t>median</a:t>
+            </a:r>
+            <a:r>
+              <a:rPr>
+                <a:solidFill>
+                  <a:srgbClr val="003B4F"/>
+                </a:solidFill>
+                <a:latin typeface="Courier"/>
+              </a:rPr>
+              <a:t>(length_mm)) </a:t>
             </a:r>
           </a:p>
           <a:p>
@@ -4685,10 +5119,291 @@
             </a:pPr>
             <a:r>
               <a:rPr>
-                <a:latin typeface="Courier"/>
-              </a:rPr>
-              <a:t>Variance of length: 4225.9 mm²
- Standard deviation of length: 65 mm</a:t>
+                <a:solidFill>
+                  <a:srgbClr val="5E5E5E"/>
+                </a:solidFill>
+                <a:latin typeface="Courier"/>
+              </a:rPr>
+              <a:t># Calculate standard deviation of fish length</a:t>
+            </a:r>
+            <a:br/>
+            <a:r>
+              <a:rPr>
+                <a:solidFill>
+                  <a:srgbClr val="003B4F"/>
+                </a:solidFill>
+                <a:latin typeface="Courier"/>
+              </a:rPr>
+              <a:t>var_length &lt;- </a:t>
+            </a:r>
+            <a:r>
+              <a:rPr>
+                <a:solidFill>
+                  <a:srgbClr val="4758AB"/>
+                </a:solidFill>
+                <a:latin typeface="Courier"/>
+              </a:rPr>
+              <a:t>var</a:t>
+            </a:r>
+            <a:r>
+              <a:rPr>
+                <a:solidFill>
+                  <a:srgbClr val="003B4F"/>
+                </a:solidFill>
+                <a:latin typeface="Courier"/>
+              </a:rPr>
+              <a:t>(grayling_df</a:t>
+            </a:r>
+            <a:r>
+              <a:rPr>
+                <a:solidFill>
+                  <a:srgbClr val="5E5E5E"/>
+                </a:solidFill>
+                <a:latin typeface="Courier"/>
+              </a:rPr>
+              <a:t>$</a:t>
+            </a:r>
+            <a:r>
+              <a:rPr>
+                <a:solidFill>
+                  <a:srgbClr val="003B4F"/>
+                </a:solidFill>
+                <a:latin typeface="Courier"/>
+              </a:rPr>
+              <a:t>length_mm)</a:t>
+            </a:r>
+            <a:br/>
+            <a:r>
+              <a:rPr>
+                <a:solidFill>
+                  <a:srgbClr val="003B4F"/>
+                </a:solidFill>
+                <a:latin typeface="Courier"/>
+              </a:rPr>
+              <a:t>sd_length &lt;- </a:t>
+            </a:r>
+            <a:r>
+              <a:rPr>
+                <a:solidFill>
+                  <a:srgbClr val="4758AB"/>
+                </a:solidFill>
+                <a:latin typeface="Courier"/>
+              </a:rPr>
+              <a:t>sd</a:t>
+            </a:r>
+            <a:r>
+              <a:rPr>
+                <a:solidFill>
+                  <a:srgbClr val="003B4F"/>
+                </a:solidFill>
+                <a:latin typeface="Courier"/>
+              </a:rPr>
+              <a:t>(grayling_df</a:t>
+            </a:r>
+            <a:r>
+              <a:rPr>
+                <a:solidFill>
+                  <a:srgbClr val="5E5E5E"/>
+                </a:solidFill>
+                <a:latin typeface="Courier"/>
+              </a:rPr>
+              <a:t>$</a:t>
+            </a:r>
+            <a:r>
+              <a:rPr>
+                <a:solidFill>
+                  <a:srgbClr val="003B4F"/>
+                </a:solidFill>
+                <a:latin typeface="Courier"/>
+              </a:rPr>
+              <a:t>length_mm)</a:t>
+            </a:r>
+            <a:br/>
+            <a:br/>
+            <a:r>
+              <a:rPr>
+                <a:solidFill>
+                  <a:srgbClr val="5E5E5E"/>
+                </a:solidFill>
+                <a:latin typeface="Courier"/>
+              </a:rPr>
+              <a:t># Calculate by lake</a:t>
+            </a:r>
+            <a:br/>
+            <a:r>
+              <a:rPr>
+                <a:solidFill>
+                  <a:srgbClr val="003B4F"/>
+                </a:solidFill>
+                <a:latin typeface="Courier"/>
+              </a:rPr>
+              <a:t>grayling_df </a:t>
+            </a:r>
+            <a:r>
+              <a:rPr>
+                <a:solidFill>
+                  <a:srgbClr val="5E5E5E"/>
+                </a:solidFill>
+                <a:latin typeface="Courier"/>
+              </a:rPr>
+              <a:t>%&gt;%</a:t>
+            </a:r>
+            <a:br/>
+            <a:r>
+              <a:rPr>
+                <a:solidFill>
+                  <a:srgbClr val="003B4F"/>
+                </a:solidFill>
+                <a:latin typeface="Courier"/>
+              </a:rPr>
+              <a:t>  </a:t>
+            </a:r>
+            <a:r>
+              <a:rPr>
+                <a:solidFill>
+                  <a:srgbClr val="4758AB"/>
+                </a:solidFill>
+                <a:latin typeface="Courier"/>
+              </a:rPr>
+              <a:t>group_by</a:t>
+            </a:r>
+            <a:r>
+              <a:rPr>
+                <a:solidFill>
+                  <a:srgbClr val="003B4F"/>
+                </a:solidFill>
+                <a:latin typeface="Courier"/>
+              </a:rPr>
+              <a:t>(lake) </a:t>
+            </a:r>
+            <a:r>
+              <a:rPr>
+                <a:solidFill>
+                  <a:srgbClr val="5E5E5E"/>
+                </a:solidFill>
+                <a:latin typeface="Courier"/>
+              </a:rPr>
+              <a:t>%&gt;%</a:t>
+            </a:r>
+            <a:br/>
+            <a:r>
+              <a:rPr>
+                <a:solidFill>
+                  <a:srgbClr val="003B4F"/>
+                </a:solidFill>
+                <a:latin typeface="Courier"/>
+              </a:rPr>
+              <a:t>  </a:t>
+            </a:r>
+            <a:r>
+              <a:rPr>
+                <a:solidFill>
+                  <a:srgbClr val="4758AB"/>
+                </a:solidFill>
+                <a:latin typeface="Courier"/>
+              </a:rPr>
+              <a:t>summarise</a:t>
+            </a:r>
+            <a:r>
+              <a:rPr>
+                <a:solidFill>
+                  <a:srgbClr val="003B4F"/>
+                </a:solidFill>
+                <a:latin typeface="Courier"/>
+              </a:rPr>
+              <a:t>(</a:t>
+            </a:r>
+            <a:br/>
+            <a:r>
+              <a:rPr>
+                <a:solidFill>
+                  <a:srgbClr val="003B4F"/>
+                </a:solidFill>
+                <a:latin typeface="Courier"/>
+              </a:rPr>
+              <a:t>     </a:t>
+            </a:r>
+            <a:r>
+              <a:rPr>
+                <a:solidFill>
+                  <a:srgbClr val="657422"/>
+                </a:solidFill>
+                <a:latin typeface="Courier"/>
+              </a:rPr>
+              <a:t>var_length =</a:t>
+            </a:r>
+            <a:r>
+              <a:rPr>
+                <a:solidFill>
+                  <a:srgbClr val="003B4F"/>
+                </a:solidFill>
+                <a:latin typeface="Courier"/>
+              </a:rPr>
+              <a:t> </a:t>
+            </a:r>
+            <a:r>
+              <a:rPr>
+                <a:solidFill>
+                  <a:srgbClr val="4758AB"/>
+                </a:solidFill>
+                <a:latin typeface="Courier"/>
+              </a:rPr>
+              <a:t>var</a:t>
+            </a:r>
+            <a:r>
+              <a:rPr>
+                <a:solidFill>
+                  <a:srgbClr val="003B4F"/>
+                </a:solidFill>
+                <a:latin typeface="Courier"/>
+              </a:rPr>
+              <a:t>(length_mm), </a:t>
+            </a:r>
+            <a:br/>
+            <a:r>
+              <a:rPr>
+                <a:solidFill>
+                  <a:srgbClr val="003B4F"/>
+                </a:solidFill>
+                <a:latin typeface="Courier"/>
+              </a:rPr>
+              <a:t>     </a:t>
+            </a:r>
+            <a:r>
+              <a:rPr>
+                <a:solidFill>
+                  <a:srgbClr val="657422"/>
+                </a:solidFill>
+                <a:latin typeface="Courier"/>
+              </a:rPr>
+              <a:t>sd_length =</a:t>
+            </a:r>
+            <a:r>
+              <a:rPr>
+                <a:solidFill>
+                  <a:srgbClr val="003B4F"/>
+                </a:solidFill>
+                <a:latin typeface="Courier"/>
+              </a:rPr>
+              <a:t> </a:t>
+            </a:r>
+            <a:r>
+              <a:rPr>
+                <a:solidFill>
+                  <a:srgbClr val="4758AB"/>
+                </a:solidFill>
+                <a:latin typeface="Courier"/>
+              </a:rPr>
+              <a:t>sd</a:t>
+            </a:r>
+            <a:r>
+              <a:rPr>
+                <a:solidFill>
+                  <a:srgbClr val="003B4F"/>
+                </a:solidFill>
+                <a:latin typeface="Courier"/>
+              </a:rPr>
+              <a:t>(length_mm) ) </a:t>
             </a:r>
           </a:p>
           <a:p>
@@ -4783,7 +5498,7 @@
             </a:pPr>
             <a:r>
               <a:rPr/>
-              <a:t>The area under the curve of a bell shaped curve within + and - 2 Standard deviations on each side includes about 95% of the data</a:t>
+              <a:t>The area under the curve of a bell shaped curve within + and - 2 standard deviations on each side includes about 95% of the data</a:t>
             </a:r>
             <a:br/>
             <a:br/>
@@ -4793,12 +5508,17 @@
             </a:r>
           </a:p>
           <a:p>
-            <a:pPr lvl="0" indent="0" marL="0">
-              <a:buNone/>
-            </a:pPr>
-            <a:r>
-              <a:rPr/>
-              <a:t>- note the similarity to the p &lt; 0.5</a:t>
+            <a:pPr lvl="0"/>
+            <a:r>
+              <a:rPr/>
+              <a:t>note the similarity to the p &lt; 0.5</a:t>
+            </a:r>
+          </a:p>
+          <a:p>
+            <a:pPr lvl="0"/>
+            <a:r>
+              <a:rPr/>
+              <a:t>note that it is 90.91% and that is because the curve is not normal</a:t>
             </a:r>
           </a:p>
           <a:p>
@@ -5623,27 +6343,21 @@
             </a:r>
           </a:p>
           <a:p>
-            <a:pPr lvl="0" indent="0" marL="0">
-              <a:buNone/>
-            </a:pPr>
+            <a:pPr lvl="0"/>
             <a:r>
               <a:rPr/>
               <a:t>TGW - yep its a thing</a:t>
             </a:r>
           </a:p>
           <a:p>
-            <a:pPr lvl="0" indent="0" marL="0">
-              <a:buNone/>
-            </a:pPr>
+            <a:pPr lvl="0"/>
             <a:r>
               <a:rPr/>
               <a:t>ODO - what do you think it is?</a:t>
             </a:r>
           </a:p>
           <a:p>
-            <a:pPr lvl="0" indent="0" marL="0">
-              <a:buNone/>
-            </a:pPr>
+            <a:pPr lvl="0"/>
             <a:r>
               <a:rPr/>
               <a:t>NO3 - what is it? Are you sure? Why might you get in legal trouble if you used this?</a:t>
@@ -5751,6 +6465,15 @@
           <a:bodyPr/>
           <a:lstStyle/>
           <a:p>
+            <a:pPr lvl="0" indent="0" marL="0">
+              <a:buNone/>
+            </a:pPr>
+            <a:r>
+              <a:rPr/>
+              <a:t>To tranform data to a “normal” distribution we can use the following transformations…</a:t>
+            </a:r>
+          </a:p>
+          <a:p>
             <a:pPr lvl="0"/>
             <a:r>
               <a:rPr b="1"/>
@@ -7064,7 +7787,7 @@
             </a:r>
             <a:r>
               <a:rPr/>
-              <a:t>` from two different lakes to explore these concepts.. like you did in the homework</a:t>
+              <a:t> from two different lakes to explore these concepts.. like you did in the homework</a:t>
             </a:r>
           </a:p>
         </p:txBody>
@@ -7432,15 +8155,134 @@
               <a:t>)</a:t>
             </a:r>
             <a:br/>
+            <a:r>
+              <a:rPr>
+                <a:solidFill>
+                  <a:srgbClr val="5E5E5E"/>
+                </a:solidFill>
+                <a:latin typeface="Courier"/>
+              </a:rPr>
+              <a:t># Function to take a random sample and calculate the mean</a:t>
+            </a:r>
             <a:br/>
             <a:r>
               <a:rPr>
                 <a:solidFill>
+                  <a:srgbClr val="003B4F"/>
+                </a:solidFill>
+                <a:latin typeface="Courier"/>
+              </a:rPr>
+              <a:t>sample_mean &lt;- </a:t>
+            </a:r>
+            <a:r>
+              <a:rPr b="1">
+                <a:solidFill>
+                  <a:srgbClr val="003B4F"/>
+                </a:solidFill>
+                <a:latin typeface="Courier"/>
+              </a:rPr>
+              <a:t>function</a:t>
+            </a:r>
+            <a:r>
+              <a:rPr>
+                <a:solidFill>
+                  <a:srgbClr val="003B4F"/>
+                </a:solidFill>
+                <a:latin typeface="Courier"/>
+              </a:rPr>
+              <a:t>(data, sample_size) {</a:t>
+            </a:r>
+            <a:br/>
+            <a:r>
+              <a:rPr>
+                <a:solidFill>
+                  <a:srgbClr val="003B4F"/>
+                </a:solidFill>
+                <a:latin typeface="Courier"/>
+              </a:rPr>
+              <a:t>  sample_data &lt;- </a:t>
+            </a:r>
+            <a:r>
+              <a:rPr>
+                <a:solidFill>
+                  <a:srgbClr val="4758AB"/>
+                </a:solidFill>
+                <a:latin typeface="Courier"/>
+              </a:rPr>
+              <a:t>sample_n</a:t>
+            </a:r>
+            <a:r>
+              <a:rPr>
+                <a:solidFill>
+                  <a:srgbClr val="003B4F"/>
+                </a:solidFill>
+                <a:latin typeface="Courier"/>
+              </a:rPr>
+              <a:t>(data, sample_size)</a:t>
+            </a:r>
+            <a:br/>
+            <a:r>
+              <a:rPr>
+                <a:solidFill>
+                  <a:srgbClr val="003B4F"/>
+                </a:solidFill>
+                <a:latin typeface="Courier"/>
+              </a:rPr>
+              <a:t>  </a:t>
+            </a:r>
+            <a:r>
+              <a:rPr>
+                <a:solidFill>
+                  <a:srgbClr val="4758AB"/>
+                </a:solidFill>
+                <a:latin typeface="Courier"/>
+              </a:rPr>
+              <a:t>return</a:t>
+            </a:r>
+            <a:r>
+              <a:rPr>
+                <a:solidFill>
+                  <a:srgbClr val="003B4F"/>
+                </a:solidFill>
+                <a:latin typeface="Courier"/>
+              </a:rPr>
+              <a:t>(</a:t>
+            </a:r>
+            <a:r>
+              <a:rPr>
+                <a:solidFill>
+                  <a:srgbClr val="4758AB"/>
+                </a:solidFill>
+                <a:latin typeface="Courier"/>
+              </a:rPr>
+              <a:t>mean</a:t>
+            </a:r>
+            <a:r>
+              <a:rPr>
+                <a:solidFill>
+                  <a:srgbClr val="003B4F"/>
+                </a:solidFill>
+                <a:latin typeface="Courier"/>
+              </a:rPr>
+              <a:t>(sample_data</a:t>
+            </a:r>
+            <a:r>
+              <a:rPr>
+                <a:solidFill>
                   <a:srgbClr val="5E5E5E"/>
                 </a:solidFill>
                 <a:latin typeface="Courier"/>
               </a:rPr>
-              <a:t># Function to take a random sample and calculate the mean</a:t>
+              <a:t>$</a:t>
+            </a:r>
+            <a:r>
+              <a:rPr>
+                <a:solidFill>
+                  <a:srgbClr val="003B4F"/>
+                </a:solidFill>
+                <a:latin typeface="Courier"/>
+              </a:rPr>
+              <a:t>length_mm))</a:t>
             </a:r>
             <a:br/>
             <a:r>
@@ -7450,36 +8292,19 @@
                 </a:solidFill>
                 <a:latin typeface="Courier"/>
               </a:rPr>
-              <a:t>sample_mean &lt;- </a:t>
-            </a:r>
-            <a:r>
-              <a:rPr b="1">
-                <a:solidFill>
-                  <a:srgbClr val="003B4F"/>
-                </a:solidFill>
-                <a:latin typeface="Courier"/>
-              </a:rPr>
-              <a:t>function</a:t>
-            </a:r>
-            <a:r>
-              <a:rPr>
-                <a:solidFill>
-                  <a:srgbClr val="003B4F"/>
-                </a:solidFill>
-                <a:latin typeface="Courier"/>
-              </a:rPr>
-              <a:t>(data, sample_size) {</a:t>
+              <a:t>}</a:t>
             </a:r>
             <a:br/>
             <a:r>
               <a:rPr>
                 <a:solidFill>
-                  <a:srgbClr val="003B4F"/>
-                </a:solidFill>
-                <a:latin typeface="Courier"/>
-              </a:rPr>
-              <a:t>  sample_data &lt;- </a:t>
-            </a:r>
+                  <a:srgbClr val="5E5E5E"/>
+                </a:solidFill>
+                <a:latin typeface="Courier"/>
+              </a:rPr>
+              <a:t># Take 10 different samples of size 15 from Lake I3</a:t>
+            </a:r>
+            <a:br/>
             <a:r>
               <a:rPr>
                 <a:solidFill>
@@ -7487,16 +8312,43 @@
                 </a:solidFill>
                 <a:latin typeface="Courier"/>
               </a:rPr>
-              <a:t>sample_n</a:t>
-            </a:r>
-            <a:r>
-              <a:rPr>
-                <a:solidFill>
-                  <a:srgbClr val="003B4F"/>
-                </a:solidFill>
-                <a:latin typeface="Courier"/>
-              </a:rPr>
-              <a:t>(data, sample_size)</a:t>
+              <a:t>set.seed</a:t>
+            </a:r>
+            <a:r>
+              <a:rPr>
+                <a:solidFill>
+                  <a:srgbClr val="003B4F"/>
+                </a:solidFill>
+                <a:latin typeface="Courier"/>
+              </a:rPr>
+              <a:t>(</a:t>
+            </a:r>
+            <a:r>
+              <a:rPr>
+                <a:solidFill>
+                  <a:srgbClr val="AD0000"/>
+                </a:solidFill>
+                <a:latin typeface="Courier"/>
+              </a:rPr>
+              <a:t>123</a:t>
+            </a:r>
+            <a:r>
+              <a:rPr>
+                <a:solidFill>
+                  <a:srgbClr val="003B4F"/>
+                </a:solidFill>
+                <a:latin typeface="Courier"/>
+              </a:rPr>
+              <a:t>) </a:t>
+            </a:r>
+            <a:r>
+              <a:rPr>
+                <a:solidFill>
+                  <a:srgbClr val="5E5E5E"/>
+                </a:solidFill>
+                <a:latin typeface="Courier"/>
+              </a:rPr>
+              <a:t># For reproducibility</a:t>
             </a:r>
             <a:br/>
             <a:r>
@@ -7506,43 +8358,155 @@
                 </a:solidFill>
                 <a:latin typeface="Courier"/>
               </a:rPr>
+              <a:t>sample_size &lt;- </a:t>
+            </a:r>
+            <a:r>
+              <a:rPr>
+                <a:solidFill>
+                  <a:srgbClr val="AD0000"/>
+                </a:solidFill>
+                <a:latin typeface="Courier"/>
+              </a:rPr>
+              <a:t>15</a:t>
+            </a:r>
+            <a:br/>
+            <a:r>
+              <a:rPr>
+                <a:solidFill>
+                  <a:srgbClr val="003B4F"/>
+                </a:solidFill>
+                <a:latin typeface="Courier"/>
+              </a:rPr>
+              <a:t>sample_means &lt;- </a:t>
+            </a:r>
+            <a:r>
+              <a:rPr>
+                <a:solidFill>
+                  <a:srgbClr val="4758AB"/>
+                </a:solidFill>
+                <a:latin typeface="Courier"/>
+              </a:rPr>
+              <a:t>replicate</a:t>
+            </a:r>
+            <a:r>
+              <a:rPr>
+                <a:solidFill>
+                  <a:srgbClr val="003B4F"/>
+                </a:solidFill>
+                <a:latin typeface="Courier"/>
+              </a:rPr>
+              <a:t>(</a:t>
+            </a:r>
+            <a:r>
+              <a:rPr>
+                <a:solidFill>
+                  <a:srgbClr val="AD0000"/>
+                </a:solidFill>
+                <a:latin typeface="Courier"/>
+              </a:rPr>
+              <a:t>50</a:t>
+            </a:r>
+            <a:r>
+              <a:rPr>
+                <a:solidFill>
+                  <a:srgbClr val="003B4F"/>
+                </a:solidFill>
+                <a:latin typeface="Courier"/>
+              </a:rPr>
+              <a:t>, </a:t>
+            </a:r>
+            <a:r>
+              <a:rPr>
+                <a:solidFill>
+                  <a:srgbClr val="4758AB"/>
+                </a:solidFill>
+                <a:latin typeface="Courier"/>
+              </a:rPr>
+              <a:t>sample_mean</a:t>
+            </a:r>
+            <a:r>
+              <a:rPr>
+                <a:solidFill>
+                  <a:srgbClr val="003B4F"/>
+                </a:solidFill>
+                <a:latin typeface="Courier"/>
+              </a:rPr>
+              <a:t>(i3_data, sample_size))</a:t>
+            </a:r>
+            <a:br/>
+            <a:r>
+              <a:rPr>
+                <a:solidFill>
+                  <a:srgbClr val="5E5E5E"/>
+                </a:solidFill>
+                <a:latin typeface="Courier"/>
+              </a:rPr>
+              <a:t># Create a data frame with sample numbers and means</a:t>
+            </a:r>
+            <a:br/>
+            <a:r>
+              <a:rPr>
+                <a:solidFill>
+                  <a:srgbClr val="003B4F"/>
+                </a:solidFill>
+                <a:latin typeface="Courier"/>
+              </a:rPr>
+              <a:t>samples_df &lt;- </a:t>
+            </a:r>
+            <a:r>
+              <a:rPr>
+                <a:solidFill>
+                  <a:srgbClr val="4758AB"/>
+                </a:solidFill>
+                <a:latin typeface="Courier"/>
+              </a:rPr>
+              <a:t>data.frame</a:t>
+            </a:r>
+            <a:r>
+              <a:rPr>
+                <a:solidFill>
+                  <a:srgbClr val="003B4F"/>
+                </a:solidFill>
+                <a:latin typeface="Courier"/>
+              </a:rPr>
+              <a:t>(</a:t>
+            </a:r>
+            <a:br/>
+            <a:r>
+              <a:rPr>
+                <a:solidFill>
+                  <a:srgbClr val="003B4F"/>
+                </a:solidFill>
+                <a:latin typeface="Courier"/>
+              </a:rPr>
               <a:t>  </a:t>
             </a:r>
             <a:r>
               <a:rPr>
                 <a:solidFill>
-                  <a:srgbClr val="4758AB"/>
-                </a:solidFill>
-                <a:latin typeface="Courier"/>
-              </a:rPr>
-              <a:t>return</a:t>
-            </a:r>
-            <a:r>
-              <a:rPr>
-                <a:solidFill>
-                  <a:srgbClr val="003B4F"/>
-                </a:solidFill>
-                <a:latin typeface="Courier"/>
-              </a:rPr>
-              <a:t>(</a:t>
-            </a:r>
-            <a:r>
-              <a:rPr>
-                <a:solidFill>
-                  <a:srgbClr val="4758AB"/>
-                </a:solidFill>
-                <a:latin typeface="Courier"/>
-              </a:rPr>
-              <a:t>mean</a:t>
-            </a:r>
-            <a:r>
-              <a:rPr>
-                <a:solidFill>
-                  <a:srgbClr val="003B4F"/>
-                </a:solidFill>
-                <a:latin typeface="Courier"/>
-              </a:rPr>
-              <a:t>(sample_data</a:t>
+                  <a:srgbClr val="657422"/>
+                </a:solidFill>
+                <a:latin typeface="Courier"/>
+              </a:rPr>
+              <a:t>sample_number =</a:t>
+            </a:r>
+            <a:r>
+              <a:rPr>
+                <a:solidFill>
+                  <a:srgbClr val="003B4F"/>
+                </a:solidFill>
+                <a:latin typeface="Courier"/>
+              </a:rPr>
+              <a:t> </a:t>
+            </a:r>
+            <a:r>
+              <a:rPr>
+                <a:solidFill>
+                  <a:srgbClr val="AD0000"/>
+                </a:solidFill>
+                <a:latin typeface="Courier"/>
+              </a:rPr>
+              <a:t>1</a:t>
             </a:r>
             <a:r>
               <a:rPr>
@@ -7551,56 +8515,7 @@
                 </a:solidFill>
                 <a:latin typeface="Courier"/>
               </a:rPr>
-              <a:t>$</a:t>
-            </a:r>
-            <a:r>
-              <a:rPr>
-                <a:solidFill>
-                  <a:srgbClr val="003B4F"/>
-                </a:solidFill>
-                <a:latin typeface="Courier"/>
-              </a:rPr>
-              <a:t>length_mm))</a:t>
-            </a:r>
-            <a:br/>
-            <a:r>
-              <a:rPr>
-                <a:solidFill>
-                  <a:srgbClr val="003B4F"/>
-                </a:solidFill>
-                <a:latin typeface="Courier"/>
-              </a:rPr>
-              <a:t>}</a:t>
-            </a:r>
-            <a:br/>
-            <a:br/>
-            <a:r>
-              <a:rPr>
-                <a:solidFill>
-                  <a:srgbClr val="5E5E5E"/>
-                </a:solidFill>
-                <a:latin typeface="Courier"/>
-              </a:rPr>
-              <a:t># Take 10 different samples of size 15 from Lake I3</a:t>
-            </a:r>
-            <a:br/>
-            <a:r>
-              <a:rPr>
-                <a:solidFill>
-                  <a:srgbClr val="4758AB"/>
-                </a:solidFill>
-                <a:latin typeface="Courier"/>
-              </a:rPr>
-              <a:t>set.seed</a:t>
-            </a:r>
-            <a:r>
-              <a:rPr>
-                <a:solidFill>
-                  <a:srgbClr val="003B4F"/>
-                </a:solidFill>
-                <a:latin typeface="Courier"/>
-              </a:rPr>
-              <a:t>(</a:t>
+              <a:t>:</a:t>
             </a:r>
             <a:r>
               <a:rPr>
@@ -7609,202 +8524,7 @@
                 </a:solidFill>
                 <a:latin typeface="Courier"/>
               </a:rPr>
-              <a:t>123</a:t>
-            </a:r>
-            <a:r>
-              <a:rPr>
-                <a:solidFill>
-                  <a:srgbClr val="003B4F"/>
-                </a:solidFill>
-                <a:latin typeface="Courier"/>
-              </a:rPr>
-              <a:t>) </a:t>
-            </a:r>
-            <a:r>
-              <a:rPr>
-                <a:solidFill>
-                  <a:srgbClr val="5E5E5E"/>
-                </a:solidFill>
-                <a:latin typeface="Courier"/>
-              </a:rPr>
-              <a:t># For reproducibility</a:t>
-            </a:r>
-            <a:br/>
-            <a:r>
-              <a:rPr>
-                <a:solidFill>
-                  <a:srgbClr val="003B4F"/>
-                </a:solidFill>
-                <a:latin typeface="Courier"/>
-              </a:rPr>
-              <a:t>sample_size &lt;- </a:t>
-            </a:r>
-            <a:r>
-              <a:rPr>
-                <a:solidFill>
-                  <a:srgbClr val="AD0000"/>
-                </a:solidFill>
-                <a:latin typeface="Courier"/>
-              </a:rPr>
-              <a:t>15</a:t>
-            </a:r>
-            <a:br/>
-            <a:r>
-              <a:rPr>
-                <a:solidFill>
-                  <a:srgbClr val="003B4F"/>
-                </a:solidFill>
-                <a:latin typeface="Courier"/>
-              </a:rPr>
-              <a:t>sample_means &lt;- </a:t>
-            </a:r>
-            <a:r>
-              <a:rPr>
-                <a:solidFill>
-                  <a:srgbClr val="4758AB"/>
-                </a:solidFill>
-                <a:latin typeface="Courier"/>
-              </a:rPr>
-              <a:t>replicate</a:t>
-            </a:r>
-            <a:r>
-              <a:rPr>
-                <a:solidFill>
-                  <a:srgbClr val="003B4F"/>
-                </a:solidFill>
-                <a:latin typeface="Courier"/>
-              </a:rPr>
-              <a:t>(</a:t>
-            </a:r>
-            <a:r>
-              <a:rPr>
-                <a:solidFill>
-                  <a:srgbClr val="AD0000"/>
-                </a:solidFill>
-                <a:latin typeface="Courier"/>
-              </a:rPr>
-              <a:t>10</a:t>
-            </a:r>
-            <a:r>
-              <a:rPr>
-                <a:solidFill>
-                  <a:srgbClr val="003B4F"/>
-                </a:solidFill>
-                <a:latin typeface="Courier"/>
-              </a:rPr>
-              <a:t>, </a:t>
-            </a:r>
-            <a:r>
-              <a:rPr>
-                <a:solidFill>
-                  <a:srgbClr val="4758AB"/>
-                </a:solidFill>
-                <a:latin typeface="Courier"/>
-              </a:rPr>
-              <a:t>sample_mean</a:t>
-            </a:r>
-            <a:r>
-              <a:rPr>
-                <a:solidFill>
-                  <a:srgbClr val="003B4F"/>
-                </a:solidFill>
-                <a:latin typeface="Courier"/>
-              </a:rPr>
-              <a:t>(i3_data, sample_size))</a:t>
-            </a:r>
-            <a:br/>
-            <a:br/>
-            <a:r>
-              <a:rPr>
-                <a:solidFill>
-                  <a:srgbClr val="5E5E5E"/>
-                </a:solidFill>
-                <a:latin typeface="Courier"/>
-              </a:rPr>
-              <a:t># Create a data frame with sample numbers and means</a:t>
-            </a:r>
-            <a:br/>
-            <a:r>
-              <a:rPr>
-                <a:solidFill>
-                  <a:srgbClr val="003B4F"/>
-                </a:solidFill>
-                <a:latin typeface="Courier"/>
-              </a:rPr>
-              <a:t>samples_df &lt;- </a:t>
-            </a:r>
-            <a:r>
-              <a:rPr>
-                <a:solidFill>
-                  <a:srgbClr val="4758AB"/>
-                </a:solidFill>
-                <a:latin typeface="Courier"/>
-              </a:rPr>
-              <a:t>data.frame</a:t>
-            </a:r>
-            <a:r>
-              <a:rPr>
-                <a:solidFill>
-                  <a:srgbClr val="003B4F"/>
-                </a:solidFill>
-                <a:latin typeface="Courier"/>
-              </a:rPr>
-              <a:t>(</a:t>
-            </a:r>
-            <a:br/>
-            <a:r>
-              <a:rPr>
-                <a:solidFill>
-                  <a:srgbClr val="003B4F"/>
-                </a:solidFill>
-                <a:latin typeface="Courier"/>
-              </a:rPr>
-              <a:t>  </a:t>
-            </a:r>
-            <a:r>
-              <a:rPr>
-                <a:solidFill>
-                  <a:srgbClr val="657422"/>
-                </a:solidFill>
-                <a:latin typeface="Courier"/>
-              </a:rPr>
-              <a:t>sample_number =</a:t>
-            </a:r>
-            <a:r>
-              <a:rPr>
-                <a:solidFill>
-                  <a:srgbClr val="003B4F"/>
-                </a:solidFill>
-                <a:latin typeface="Courier"/>
-              </a:rPr>
-              <a:t> </a:t>
-            </a:r>
-            <a:r>
-              <a:rPr>
-                <a:solidFill>
-                  <a:srgbClr val="AD0000"/>
-                </a:solidFill>
-                <a:latin typeface="Courier"/>
-              </a:rPr>
-              <a:t>1</a:t>
-            </a:r>
-            <a:r>
-              <a:rPr>
-                <a:solidFill>
-                  <a:srgbClr val="5E5E5E"/>
-                </a:solidFill>
-                <a:latin typeface="Courier"/>
-              </a:rPr>
-              <a:t>:</a:t>
-            </a:r>
-            <a:r>
-              <a:rPr>
-                <a:solidFill>
-                  <a:srgbClr val="AD0000"/>
-                </a:solidFill>
-                <a:latin typeface="Courier"/>
-              </a:rPr>
-              <a:t>10</a:t>
+              <a:t>50</a:t>
             </a:r>
             <a:r>
               <a:rPr>
@@ -11340,7 +12060,7 @@
             </a:pPr>
             <a:r>
               <a:rPr/>
-              <a:t>Lecture 3: Why Statistics is Vital in Biology</a:t>
+              <a:t>Lecture 3: Populations and Samples</a:t>
             </a:r>
           </a:p>
         </p:txBody>
@@ -11365,116 +12085,129 @@
             </a:pPr>
             <a:r>
               <a:rPr/>
-              <a:t>Biology is fundamentally different from fields like physics/chemistry in that:</a:t>
+              <a:t>Before we dive into descriptive statistics, let’s clarify some fundamental concepts:</a:t>
             </a:r>
           </a:p>
           <a:p>
             <a:pPr lvl="0"/>
             <a:r>
-              <a:rPr/>
-              <a:t>Most biological phenomena are </a:t>
-            </a:r>
-            <a:r>
               <a:rPr b="1"/>
-              <a:t>probabilistic</a:t>
-            </a:r>
-            <a:r>
-              <a:rPr/>
-              <a:t> rather than </a:t>
-            </a:r>
+              <a:t>Population</a:t>
+            </a:r>
+            <a:r>
+              <a:rPr/>
+              <a:t>: entire group of things under consideration</a:t>
+            </a:r>
+          </a:p>
+          <a:p>
+            <a:pPr lvl="0"/>
             <a:r>
               <a:rPr b="1"/>
-              <a:t>deterministic</a:t>
-            </a:r>
-          </a:p>
-          <a:p>
-            <a:pPr lvl="1"/>
-            <a:r>
-              <a:rPr/>
-              <a:t>Responses occur with some characteristic probability, not with certainty</a:t>
+              <a:t>Sample</a:t>
+            </a:r>
+            <a:r>
+              <a:rPr/>
+              <a:t>: A subset of the population that is actually measured</a:t>
             </a:r>
           </a:p>
           <a:p>
             <a:pPr lvl="0"/>
             <a:r>
-              <a:rPr/>
-              <a:t>All biological material varies, which is essential for evolution (recall Darwin’s postulates):</a:t>
-            </a:r>
-          </a:p>
-          <a:p>
-            <a:pPr lvl="1"/>
-            <a:r>
-              <a:rPr/>
-              <a:t>Variation exists within populations</a:t>
-            </a:r>
-          </a:p>
-          <a:p>
-            <a:pPr lvl="1"/>
-            <a:r>
-              <a:rPr/>
-              <a:t>Some variation is heritable</a:t>
-            </a:r>
-          </a:p>
-          <a:p>
-            <a:pPr lvl="1"/>
-            <a:r>
-              <a:rPr/>
-              <a:t>Some heritable variation affects survival/reproduction</a:t>
+              <a:rPr b="1"/>
+              <a:t>Sample unit</a:t>
+            </a:r>
+            <a:r>
+              <a:rPr/>
+              <a:t>: The individual thing drawn from the population</a:t>
+            </a:r>
+          </a:p>
+          <a:p>
+            <a:pPr lvl="0" indent="0" marL="0">
+              <a:buNone/>
+            </a:pPr>
+            <a:r>
+              <a:rPr/>
+              <a:t>Types of populations:</a:t>
             </a:r>
           </a:p>
           <a:p>
             <a:pPr lvl="0"/>
             <a:r>
-              <a:rPr/>
-              <a:t>Environmental conditions (in nature, lab, or greenhouse) always vary</a:t>
+              <a:rPr b="1"/>
+              <a:t>Observational population</a:t>
+            </a:r>
+            <a:r>
+              <a:rPr/>
+              <a:t>: </a:t>
+            </a:r>
+            <a:r>
+              <a:rPr b="1"/>
+              <a:t>group whose characteristics are studied passively</a:t>
+            </a:r>
+            <a:r>
+              <a:rPr/>
+              <a:t> (e.g., head width of all corn earworms in a field)</a:t>
             </a:r>
           </a:p>
           <a:p>
             <a:pPr lvl="0"/>
             <a:r>
-              <a:rPr/>
-              <a:t>Measurements include error</a:t>
+              <a:rPr b="1"/>
+              <a:t>Experimental population</a:t>
+            </a:r>
+            <a:r>
+              <a:rPr/>
+              <a:t>: </a:t>
+            </a:r>
+            <a:r>
+              <a:rPr b="1"/>
+              <a:t>actively manipulate variables to observe effects and establish cause-and-effect relationships (e.g.,</a:t>
+            </a:r>
+            <a:r>
+              <a:rPr/>
+              <a:t> manipulate temperature and monitor head width)</a:t>
+            </a:r>
+          </a:p>
+          <a:p>
+            <a:pPr lvl="0" indent="0" marL="0">
+              <a:buNone/>
+            </a:pPr>
+            <a:r>
+              <a:rPr/>
+              <a:t>Sampling involves</a:t>
             </a:r>
           </a:p>
           <a:p>
             <a:pPr lvl="0"/>
             <a:r>
-              <a:rPr/>
-              <a:t>Multiple unmeasured causal factors influence nearly all biological systems</a:t>
-            </a:r>
-          </a:p>
-          <a:p>
-            <a:pPr lvl="0" indent="0" marL="0">
-              <a:buNone/>
-            </a:pPr>
-            <a:r>
-              <a:rPr/>
-              <a:t>Statistics helps us understand biological processes in this variable world by:</a:t>
-            </a:r>
-          </a:p>
-          <a:p>
-            <a:pPr lvl="0" indent="-342900" marL="342900">
-              <a:buAutoNum type="arabicPeriod"/>
-            </a:pPr>
-            <a:r>
-              <a:rPr/>
-              <a:t>Condensing variation into summary form (Descriptive statistics)</a:t>
-            </a:r>
-          </a:p>
-          <a:p>
-            <a:pPr lvl="0" indent="-342900" marL="342900">
-              <a:buAutoNum type="arabicPeriod"/>
-            </a:pPr>
-            <a:r>
-              <a:rPr/>
-              <a:t>Testing whether observations are consistent with predictions (Inferential statistics)</a:t>
+              <a:rPr b="1"/>
+              <a:t>inference</a:t>
+            </a:r>
+            <a:r>
+              <a:rPr/>
+              <a:t> - generalizing from what is observed in the sample to what is present in the population.</a:t>
+            </a:r>
+          </a:p>
+          <a:p>
+            <a:pPr lvl="0"/>
+            <a:r>
+              <a:rPr/>
+              <a:t>Valid inference requires </a:t>
+            </a:r>
+            <a:r>
+              <a:rPr b="1"/>
+              <a:t>random sampling</a:t>
+            </a:r>
+            <a:r>
+              <a:rPr/>
+              <a:t>.</a:t>
             </a:r>
           </a:p>
         </p:txBody>
       </p:sp>
       <p:pic>
         <p:nvPicPr>
-          <p:cNvPr descr="03_01_lecture_powerpoint_files/figure-pptx/unnamed-chunk-1-1.png" id="0" name="Picture 1"/>
+          <p:cNvPr descr="images/pop_sample_stats.png" id="0" name="Picture 1"/>
           <p:cNvPicPr>
             <a:picLocks noGrp="1" noChangeAspect="1"/>
           </p:cNvPicPr>
@@ -11488,8 +12221,8 @@
         </p:blipFill>
         <p:spPr bwMode="auto">
           <a:xfrm>
-            <a:off x="6121400" y="2044700"/>
-            <a:ext cx="2781300" cy="1714500"/>
+            <a:off x="6121400" y="889000"/>
+            <a:ext cx="2781300" cy="4013200"/>
           </a:xfrm>
           <a:prstGeom prst="rect">
             <a:avLst/>
@@ -16390,132 +17123,6 @@
         <p:spPr>
           <a:xfrm>
             <a:off x="0" y="0"/>
-            <a:ext cx="9144000" cy="582780"/>
-          </a:xfrm>
-        </p:spPr>
-        <p:txBody>
-          <a:bodyPr/>
-          <a:lstStyle/>
-          <a:p>
-            <a:pPr lvl="0" indent="0" marL="0">
-              <a:buNone/>
-            </a:pPr>
-            <a:r>
-              <a:rPr/>
-              <a:t>Practice Exercise 1: Fish Data</a:t>
-            </a:r>
-          </a:p>
-        </p:txBody>
-      </p:sp>
-      <p:sp>
-        <p:nvSpPr>
-          <p:cNvPr id="3" name="Content Placeholder 2"/>
-          <p:cNvSpPr>
-            <a:spLocks noGrp="1"/>
-          </p:cNvSpPr>
-          <p:nvPr>
-            <p:ph idx="1"/>
-          </p:nvPr>
-        </p:nvSpPr>
-        <p:spPr/>
-        <p:txBody>
-          <a:bodyPr/>
-          <a:lstStyle/>
-          <a:p>
-            <a:pPr lvl="0" indent="0" marL="1270000">
-              <a:buNone/>
-            </a:pPr>
-            <a:r>
-              <a:rPr sz="2000" b="1"/>
-              <a:t>Practice Exercise 1: Can you open the fish data </a:t>
-            </a:r>
-            <a:r>
-              <a:rPr sz="2000" b="1">
-                <a:latin typeface="Courier"/>
-              </a:rPr>
-              <a:t>gray_I3_I8.csv</a:t>
-            </a:r>
-            <a:r>
-              <a:rPr sz="2000" b="1"/>
-              <a:t> and look at the structure and make a histogram?- see activity</a:t>
-            </a:r>
-          </a:p>
-          <a:p>
-            <a:pPr lvl="0" indent="0" marL="1270000">
-              <a:buNone/>
-            </a:pPr>
-            <a:r>
-              <a:rPr sz="2000"/>
-              <a:t>Let’s recreate the basic histogram of fish lengths using </a:t>
-            </a:r>
-            <a:r>
-              <a:rPr sz="2000">
-                <a:latin typeface="Courier"/>
-              </a:rPr>
-              <a:t>gray_I3_I8.csv</a:t>
-            </a:r>
-          </a:p>
-          <a:p>
-            <a:pPr lvl="0" indent="0">
-              <a:buNone/>
-            </a:pPr>
-            <a:r>
-              <a:rPr>
-                <a:solidFill>
-                  <a:srgbClr val="5E5E5E"/>
-                </a:solidFill>
-                <a:latin typeface="Courier"/>
-              </a:rPr>
-              <a:t># Write your code here to read in the file</a:t>
-            </a:r>
-            <a:br/>
-            <a:r>
-              <a:rPr>
-                <a:solidFill>
-                  <a:srgbClr val="5E5E5E"/>
-                </a:solidFill>
-                <a:latin typeface="Courier"/>
-              </a:rPr>
-              <a:t># How do you examine the data - what are the ways you think and lets try it!</a:t>
-            </a:r>
-          </a:p>
-        </p:txBody>
-      </p:sp>
-    </p:spTree>
-  </p:cSld>
-</p:sld>
-</file>
-
-<file path=ppt/slides/slide6.xml><?xml version="1.0" encoding="utf-8"?>
-<p:sld xmlns:a="http://schemas.openxmlformats.org/drawingml/2006/main" xmlns:r="http://schemas.openxmlformats.org/officeDocument/2006/relationships" xmlns:p="http://schemas.openxmlformats.org/presentationml/2006/main">
-  <p:cSld>
-    <p:spTree>
-      <p:nvGrpSpPr>
-        <p:cNvPr id="1" name=""/>
-        <p:cNvGrpSpPr/>
-        <p:nvPr/>
-      </p:nvGrpSpPr>
-      <p:grpSpPr>
-        <a:xfrm>
-          <a:off x="0" y="0"/>
-          <a:ext cx="0" cy="0"/>
-          <a:chOff x="0" y="0"/>
-          <a:chExt cx="0" cy="0"/>
-        </a:xfrm>
-      </p:grpSpPr>
-      <p:sp>
-        <p:nvSpPr>
-          <p:cNvPr id="2" name="Title 1"/>
-          <p:cNvSpPr>
-            <a:spLocks noGrp="1"/>
-          </p:cNvSpPr>
-          <p:nvPr>
-            <p:ph type="title"/>
-          </p:nvPr>
-        </p:nvSpPr>
-        <p:spPr>
-          <a:xfrm>
-            <a:off x="0" y="0"/>
             <a:ext cx="9144000" cy="602780"/>
           </a:xfrm>
           <a:solidFill>
@@ -16531,7 +17138,7 @@
             </a:pPr>
             <a:r>
               <a:rPr/>
-              <a:t>Lecture 3: Populations and Samples</a:t>
+              <a:t>Lecture 3: Parameters vs. Statistics</a:t>
             </a:r>
           </a:p>
         </p:txBody>
@@ -16556,106 +17163,52 @@
             </a:pPr>
             <a:r>
               <a:rPr/>
-              <a:t>Before we dive into descriptive statistics, let’s clarify some fundamental concepts:</a:t>
+              <a:t>It’s important to distinguish between:</a:t>
             </a:r>
           </a:p>
           <a:p>
             <a:pPr lvl="0"/>
             <a:r>
               <a:rPr b="1"/>
-              <a:t>Population</a:t>
-            </a:r>
-            <a:r>
-              <a:rPr/>
-              <a:t>: The entire group of things under consideration; the group for which answers obtained from measurements and statistical analysis are pertinent.</a:t>
+              <a:t>Parameters</a:t>
+            </a:r>
+            <a:r>
+              <a:rPr/>
+              <a:t>: True numerical values for a population (usually denoted by Greek letters)</a:t>
             </a:r>
           </a:p>
           <a:p>
             <a:pPr lvl="0"/>
             <a:r>
               <a:rPr b="1"/>
-              <a:t>Sample</a:t>
-            </a:r>
-            <a:r>
-              <a:rPr/>
-              <a:t>: A subset of the population that is actually measured.</a:t>
+              <a:t>Statistics</a:t>
+            </a:r>
+            <a:r>
+              <a:rPr/>
+              <a:t>: Estimates of parameters based on samples (usually denoted by Roman letters)</a:t>
+            </a:r>
+          </a:p>
+          <a:p>
+            <a:pPr lvl="0" indent="0" marL="0">
+              <a:buNone/>
+            </a:pPr>
+            <a:r>
+              <a:rPr/>
+              <a:t>For example:</a:t>
             </a:r>
           </a:p>
           <a:p>
             <a:pPr lvl="0"/>
             <a:r>
-              <a:rPr b="1"/>
-              <a:t>Sample unit</a:t>
-            </a:r>
-            <a:r>
-              <a:rPr/>
-              <a:t>: The individual thing drawn from the population.</a:t>
-            </a:r>
-          </a:p>
-          <a:p>
-            <a:pPr lvl="0" indent="0" marL="0">
-              <a:buNone/>
-            </a:pPr>
-            <a:r>
-              <a:rPr/>
-              <a:t>Types of populations:</a:t>
+              <a:rPr/>
+              <a:t>Population mean (μ) is estimated by sample mean (Y̅)</a:t>
             </a:r>
           </a:p>
           <a:p>
             <a:pPr lvl="0"/>
             <a:r>
-              <a:rPr b="1"/>
-              <a:t>Observational population</a:t>
-            </a:r>
-            <a:r>
-              <a:rPr/>
-              <a:t>: Usually finite but may be very large (e.g., head width of all corn earworms in a field)</a:t>
-            </a:r>
-          </a:p>
-          <a:p>
-            <a:pPr lvl="0"/>
-            <a:r>
-              <a:rPr b="1"/>
-              <a:t>Experimental population</a:t>
-            </a:r>
-            <a:r>
-              <a:rPr/>
-              <a:t>: Often conceptually infinite (e.g., all possible goldenrod plants that could receive a specific fertilizer treatment)</a:t>
-            </a:r>
-          </a:p>
-          <a:p>
-            <a:pPr lvl="0" indent="0" marL="0">
-              <a:buNone/>
-            </a:pPr>
-            <a:r>
-              <a:rPr/>
-              <a:t>Sampling involves</a:t>
-            </a:r>
-          </a:p>
-          <a:p>
-            <a:pPr lvl="0"/>
-            <a:r>
-              <a:rPr b="1"/>
-              <a:t>inference</a:t>
-            </a:r>
-            <a:r>
-              <a:rPr/>
-              <a:t> - generalizing from what is observed in the sample to what is present in the population.</a:t>
-            </a:r>
-          </a:p>
-          <a:p>
-            <a:pPr lvl="0"/>
-            <a:r>
-              <a:rPr/>
-              <a:t>Valid inference requires </a:t>
-            </a:r>
-            <a:r>
-              <a:rPr b="1"/>
-              <a:t>random sampling</a:t>
-            </a:r>
-            <a:r>
-              <a:rPr/>
-              <a:t>.</a:t>
+              <a:rPr/>
+              <a:t>Population standard deviation (σ) is estimated by sample standard deviation (s)</a:t>
             </a:r>
           </a:p>
         </p:txBody>
@@ -16695,6 +17248,172 @@
 </p:sld>
 </file>
 
+<file path=ppt/slides/slide6.xml><?xml version="1.0" encoding="utf-8"?>
+<p:sld xmlns:a="http://schemas.openxmlformats.org/drawingml/2006/main" xmlns:r="http://schemas.openxmlformats.org/officeDocument/2006/relationships" xmlns:p="http://schemas.openxmlformats.org/presentationml/2006/main">
+  <p:cSld>
+    <p:spTree>
+      <p:nvGrpSpPr>
+        <p:cNvPr id="1" name=""/>
+        <p:cNvGrpSpPr/>
+        <p:nvPr/>
+      </p:nvGrpSpPr>
+      <p:grpSpPr>
+        <a:xfrm>
+          <a:off x="0" y="0"/>
+          <a:ext cx="0" cy="0"/>
+          <a:chOff x="0" y="0"/>
+          <a:chExt cx="0" cy="0"/>
+        </a:xfrm>
+      </p:grpSpPr>
+      <p:sp>
+        <p:nvSpPr>
+          <p:cNvPr id="2" name="Title 1"/>
+          <p:cNvSpPr>
+            <a:spLocks noGrp="1"/>
+          </p:cNvSpPr>
+          <p:nvPr>
+            <p:ph type="title"/>
+          </p:nvPr>
+        </p:nvSpPr>
+        <p:spPr>
+          <a:xfrm>
+            <a:off x="0" y="0"/>
+            <a:ext cx="9144000" cy="582780"/>
+          </a:xfrm>
+        </p:spPr>
+        <p:txBody>
+          <a:bodyPr/>
+          <a:lstStyle/>
+          <a:p>
+            <a:pPr lvl="0" indent="0" marL="0">
+              <a:buNone/>
+            </a:pPr>
+            <a:r>
+              <a:rPr/>
+              <a:t>Lecture 3: Kinds of Biological Variables</a:t>
+            </a:r>
+          </a:p>
+        </p:txBody>
+      </p:sp>
+      <p:sp>
+        <p:nvSpPr>
+          <p:cNvPr id="3" name="Content Placeholder 2"/>
+          <p:cNvSpPr>
+            <a:spLocks noGrp="1"/>
+          </p:cNvSpPr>
+          <p:nvPr>
+            <p:ph idx="1"/>
+          </p:nvPr>
+        </p:nvSpPr>
+        <p:spPr/>
+        <p:txBody>
+          <a:bodyPr/>
+          <a:lstStyle/>
+          <a:p>
+            <a:pPr lvl="0" indent="0" marL="0">
+              <a:spcBef>
+                <a:spcPts val="3000"/>
+              </a:spcBef>
+              <a:buNone/>
+            </a:pPr>
+            <a:r>
+              <a:rPr b="1"/>
+              <a:t>Understanding the type of variable you’re working with is essential for selecting appropriate statistics:</a:t>
+            </a:r>
+          </a:p>
+          <a:p>
+            <a:pPr lvl="0" indent="0" marL="0">
+              <a:spcBef>
+                <a:spcPts val="3000"/>
+              </a:spcBef>
+              <a:buNone/>
+            </a:pPr>
+            <a:r>
+              <a:rPr b="1"/>
+              <a:t>Measurement or Quantitative Variables</a:t>
+            </a:r>
+          </a:p>
+          <a:p>
+            <a:pPr lvl="0"/>
+            <a:r>
+              <a:rPr b="1"/>
+              <a:t>Continuous</a:t>
+            </a:r>
+            <a:r>
+              <a:rPr/>
+              <a:t>: Any value between extremes of scale is possible (e.g., mass, length)</a:t>
+            </a:r>
+          </a:p>
+          <a:p>
+            <a:pPr lvl="0"/>
+            <a:r>
+              <a:rPr b="1"/>
+              <a:t>Discrete (meristic)</a:t>
+            </a:r>
+            <a:r>
+              <a:rPr/>
+              <a:t>: Only fixed values (usually integers) between extremes are possible (e.g., bristle number, egg count)</a:t>
+            </a:r>
+          </a:p>
+          <a:p>
+            <a:pPr lvl="0" indent="0" marL="0">
+              <a:spcBef>
+                <a:spcPts val="3000"/>
+              </a:spcBef>
+              <a:buNone/>
+            </a:pPr>
+            <a:r>
+              <a:rPr b="1"/>
+              <a:t>Rank Variables (Ordinal)</a:t>
+            </a:r>
+          </a:p>
+          <a:p>
+            <a:pPr lvl="0"/>
+            <a:r>
+              <a:rPr/>
+              <a:t>Assign only order, not quantity - student rank - 1 2 3</a:t>
+            </a:r>
+          </a:p>
+          <a:p>
+            <a:pPr lvl="0"/>
+            <a:r>
+              <a:rPr/>
+              <a:t>Nothing implied about relative distance between values</a:t>
+            </a:r>
+          </a:p>
+          <a:p>
+            <a:pPr lvl="0" indent="0" marL="0">
+              <a:spcBef>
+                <a:spcPts val="3000"/>
+              </a:spcBef>
+              <a:buNone/>
+            </a:pPr>
+            <a:r>
+              <a:rPr b="1"/>
+              <a:t>Categorical Variables (Qualitative)</a:t>
+            </a:r>
+          </a:p>
+          <a:p>
+            <a:pPr lvl="0"/>
+            <a:r>
+              <a:rPr/>
+              <a:t>No quantitative information (e.g., male/female, living/dead)</a:t>
+            </a:r>
+          </a:p>
+          <a:p>
+            <a:pPr lvl="0"/>
+            <a:r>
+              <a:rPr/>
+              <a:t>Some are simplifications of quantitative variables (e.g., color instead of wavelength)</a:t>
+            </a:r>
+          </a:p>
+        </p:txBody>
+      </p:sp>
+    </p:spTree>
+  </p:cSld>
+</p:sld>
+</file>
+
 <file path=ppt/slides/slide7.xml><?xml version="1.0" encoding="utf-8"?>
 <p:sld xmlns:a="http://schemas.openxmlformats.org/drawingml/2006/main" xmlns:r="http://schemas.openxmlformats.org/officeDocument/2006/relationships" xmlns:p="http://schemas.openxmlformats.org/presentationml/2006/main">
   <p:cSld>
@@ -16725,11 +17444,8 @@
         <p:spPr>
           <a:xfrm>
             <a:off x="0" y="0"/>
-            <a:ext cx="9144000" cy="602780"/>
+            <a:ext cx="9144000" cy="582780"/>
           </a:xfrm>
-          <a:solidFill>
-            <a:srgbClr val="70121D"/>
-          </a:solidFill>
         </p:spPr>
         <p:txBody>
           <a:bodyPr/>
@@ -16740,7 +17456,7 @@
             </a:pPr>
             <a:r>
               <a:rPr/>
-              <a:t>Lecture 3: Parameters vs. Statistics</a:t>
+              <a:t>Lecture 3: Derived Variables</a:t>
             </a:r>
           </a:p>
         </p:txBody>
@@ -16752,7 +17468,7 @@
             <a:spLocks noGrp="1"/>
           </p:cNvSpPr>
           <p:nvPr>
-            <p:ph idx="1" sz="half"/>
+            <p:ph idx="1"/>
           </p:nvPr>
         </p:nvSpPr>
         <p:spPr/>
@@ -16761,33 +17477,58 @@
           <a:lstStyle/>
           <a:p>
             <a:pPr lvl="0" indent="0" marL="0">
+              <a:spcBef>
+                <a:spcPts val="3000"/>
+              </a:spcBef>
               <a:buNone/>
             </a:pPr>
             <a:r>
-              <a:rPr/>
-              <a:t>It’s important to distinguish between:</a:t>
+              <a:rPr b="1"/>
+              <a:t>Derived Variables</a:t>
             </a:r>
           </a:p>
           <a:p>
             <a:pPr lvl="0"/>
             <a:r>
               <a:rPr b="1"/>
-              <a:t>Parameters</a:t>
-            </a:r>
-            <a:r>
-              <a:rPr/>
-              <a:t>: True numerical values for a population (usually denoted by Greek letters)</a:t>
+              <a:t>Percentages, Proportions</a:t>
+            </a:r>
+            <a:r>
+              <a:rPr/>
+              <a:t>: Ratio of some component to total</a:t>
             </a:r>
           </a:p>
           <a:p>
             <a:pPr lvl="0"/>
             <a:r>
               <a:rPr b="1"/>
-              <a:t>Statistics</a:t>
-            </a:r>
-            <a:r>
-              <a:rPr/>
-              <a:t>: Estimates of parameters based on samples (usually denoted by Roman letters)</a:t>
+              <a:t>Ratios</a:t>
+            </a:r>
+            <a:r>
+              <a:rPr/>
+              <a:t>: Relation of two variables</a:t>
+            </a:r>
+          </a:p>
+          <a:p>
+            <a:pPr lvl="0"/>
+            <a:r>
+              <a:rPr b="1"/>
+              <a:t>Rates</a:t>
+            </a:r>
+            <a:r>
+              <a:rPr/>
+              <a:t>: Quantity per unit (time, mass, etc.)</a:t>
+            </a:r>
+          </a:p>
+          <a:p>
+            <a:pPr lvl="0"/>
+            <a:r>
+              <a:rPr b="1"/>
+              <a:t>Indices</a:t>
+            </a:r>
+            <a:r>
+              <a:rPr/>
+              <a:t>: More complex derived variables (e.g., condition index)</a:t>
             </a:r>
           </a:p>
           <a:p>
@@ -16796,64 +17537,11 @@
             </a:pPr>
             <a:r>
               <a:rPr/>
-              <a:t>For example:</a:t>
-            </a:r>
-          </a:p>
-          <a:p>
-            <a:pPr lvl="0"/>
-            <a:r>
-              <a:rPr/>
-              <a:t>Population mean (μ) is estimated by sample mean (Y̅)</a:t>
-            </a:r>
-          </a:p>
-          <a:p>
-            <a:pPr lvl="0"/>
-            <a:r>
-              <a:rPr/>
-              <a:t>Population standard deviation (σ) is estimated by sample standard deviation (s)</a:t>
-            </a:r>
-          </a:p>
-          <a:p>
-            <a:pPr lvl="0" indent="0" marL="0">
-              <a:buNone/>
-            </a:pPr>
-            <a:r>
-              <a:rPr/>
-              <a:t>The standard deviation formula above includes n-1 in the denominator (rather than n) to provide an unbiased estimate of the population parameter.</a:t>
+              <a:t>Let’s explore our grayling dataset and identify the types of variables it contains.</a:t>
             </a:r>
           </a:p>
         </p:txBody>
       </p:sp>
-      <p:pic>
-        <p:nvPicPr>
-          <p:cNvPr descr="images/pop_sample_stats.png" id="0" name="Picture 1"/>
-          <p:cNvPicPr>
-            <a:picLocks noGrp="1" noChangeAspect="1"/>
-          </p:cNvPicPr>
-          <p:nvPr/>
-        </p:nvPicPr>
-        <p:blipFill>
-          <a:blip r:embed="rId2"/>
-          <a:stretch>
-            <a:fillRect/>
-          </a:stretch>
-        </p:blipFill>
-        <p:spPr bwMode="auto">
-          <a:xfrm>
-            <a:off x="6121400" y="889000"/>
-            <a:ext cx="2781300" cy="4013200"/>
-          </a:xfrm>
-          <a:prstGeom prst="rect">
-            <a:avLst/>
-          </a:prstGeom>
-          <a:noFill/>
-          <a:ln w="9525">
-            <a:noFill/>
-            <a:headEnd/>
-            <a:tailEnd/>
-          </a:ln>
-        </p:spPr>
-      </p:pic>
     </p:spTree>
   </p:cSld>
 </p:sld>
@@ -16904,7 +17592,7 @@
             </a:pPr>
             <a:r>
               <a:rPr/>
-              <a:t>Lecture 3: Kinds of Biological Variables</a:t>
+              <a:t>Lecture 3: Why Statistics is Vital in Biology</a:t>
             </a:r>
           </a:p>
         </p:txBody>
@@ -16925,104 +17613,151 @@
           <a:lstStyle/>
           <a:p>
             <a:pPr lvl="0" indent="0" marL="0">
-              <a:spcBef>
-                <a:spcPts val="3000"/>
-              </a:spcBef>
               <a:buNone/>
             </a:pPr>
             <a:r>
+              <a:rPr/>
+              <a:t>Biology is fundamentally different from fields like physics/chemistry in that:</a:t>
+            </a:r>
+          </a:p>
+          <a:p>
+            <a:pPr lvl="0"/>
+            <a:r>
+              <a:rPr/>
+              <a:t>Most biological phenomena are </a:t>
+            </a:r>
+            <a:r>
               <a:rPr b="1"/>
-              <a:t>Understanding the type of variable you’re working with is essential for selecting appropriate statistics:</a:t>
+              <a:t>probabilistic</a:t>
+            </a:r>
+            <a:r>
+              <a:rPr/>
+              <a:t> rather than </a:t>
+            </a:r>
+            <a:r>
+              <a:rPr b="1"/>
+              <a:t>deterministic</a:t>
+            </a:r>
+          </a:p>
+          <a:p>
+            <a:pPr lvl="1"/>
+            <a:r>
+              <a:rPr/>
+              <a:t>Responses occur with some characteristic probability, </a:t>
+            </a:r>
+            <a:r>
+              <a:rPr b="1"/>
+              <a:t>not with certainty</a:t>
+            </a:r>
+          </a:p>
+          <a:p>
+            <a:pPr lvl="0"/>
+            <a:r>
+              <a:rPr/>
+              <a:t>All biological material varies, which is essential for evolution (recall Darwin’s postulates):</a:t>
+            </a:r>
+          </a:p>
+          <a:p>
+            <a:pPr lvl="1"/>
+            <a:r>
+              <a:rPr/>
+              <a:t>Variation exists within populations</a:t>
+            </a:r>
+          </a:p>
+          <a:p>
+            <a:pPr lvl="1"/>
+            <a:r>
+              <a:rPr/>
+              <a:t>Some variation is heritable</a:t>
+            </a:r>
+          </a:p>
+          <a:p>
+            <a:pPr lvl="1"/>
+            <a:r>
+              <a:rPr/>
+              <a:t>Some heritable variation affects survival/reproduction</a:t>
+            </a:r>
+          </a:p>
+          <a:p>
+            <a:pPr lvl="0"/>
+            <a:r>
+              <a:rPr/>
+              <a:t>Environmental conditions (in nature, lab, or greenhouse) always vary</a:t>
+            </a:r>
+          </a:p>
+          <a:p>
+            <a:pPr lvl="0"/>
+            <a:r>
+              <a:rPr/>
+              <a:t>Measurements include error</a:t>
+            </a:r>
+          </a:p>
+          <a:p>
+            <a:pPr lvl="0"/>
+            <a:r>
+              <a:rPr/>
+              <a:t>Multiple unmeasured causal factors influence nearly all biological systems</a:t>
             </a:r>
           </a:p>
           <a:p>
             <a:pPr lvl="0" indent="0" marL="0">
-              <a:spcBef>
-                <a:spcPts val="3000"/>
-              </a:spcBef>
               <a:buNone/>
             </a:pPr>
             <a:r>
-              <a:rPr b="1"/>
-              <a:t>Measurement or Quantitative Variables</a:t>
-            </a:r>
-          </a:p>
-          <a:p>
-            <a:pPr lvl="0"/>
-            <a:r>
-              <a:rPr b="1"/>
-              <a:t>Continuous</a:t>
-            </a:r>
-            <a:r>
-              <a:rPr/>
-              <a:t>: Any value between extremes of scale is possible (e.g., mass, length)</a:t>
-            </a:r>
-          </a:p>
-          <a:p>
-            <a:pPr lvl="0"/>
-            <a:r>
-              <a:rPr b="1"/>
-              <a:t>Discrete (meristic)</a:t>
-            </a:r>
-            <a:r>
-              <a:rPr/>
-              <a:t>: Only fixed values (usually integers) between extremes are possible (e.g., bristle number, egg count)</a:t>
-            </a:r>
-          </a:p>
-          <a:p>
-            <a:pPr lvl="0" indent="0" marL="0">
-              <a:spcBef>
-                <a:spcPts val="3000"/>
-              </a:spcBef>
-              <a:buNone/>
+              <a:rPr/>
+              <a:t>Statistics helps us understand biological processes in this variable world by:</a:t>
+            </a:r>
+          </a:p>
+          <a:p>
+            <a:pPr lvl="0" indent="-342900" marL="342900">
+              <a:buAutoNum type="arabicPeriod"/>
             </a:pPr>
             <a:r>
-              <a:rPr b="1"/>
-              <a:t>Rank Variables (Ordinal)</a:t>
-            </a:r>
-          </a:p>
-          <a:p>
-            <a:pPr lvl="0"/>
-            <a:r>
-              <a:rPr/>
-              <a:t>Assign only order, not quantity</a:t>
-            </a:r>
-          </a:p>
-          <a:p>
-            <a:pPr lvl="0"/>
-            <a:r>
-              <a:rPr/>
-              <a:t>Nothing implied about relative distance between values</a:t>
-            </a:r>
-          </a:p>
-          <a:p>
-            <a:pPr lvl="0" indent="0" marL="0">
-              <a:spcBef>
-                <a:spcPts val="3000"/>
-              </a:spcBef>
-              <a:buNone/>
+              <a:rPr/>
+              <a:t>Condensing variation into summary form (Descriptive statistics)</a:t>
+            </a:r>
+          </a:p>
+          <a:p>
+            <a:pPr lvl="0" indent="-342900" marL="342900">
+              <a:buAutoNum type="arabicPeriod"/>
             </a:pPr>
             <a:r>
-              <a:rPr b="1"/>
-              <a:t>Categorical Variables (Qualitative)</a:t>
-            </a:r>
-          </a:p>
-          <a:p>
-            <a:pPr lvl="0"/>
-            <a:r>
-              <a:rPr/>
-              <a:t>No quantitative information (e.g., male/female, living/dead)</a:t>
-            </a:r>
-          </a:p>
-          <a:p>
-            <a:pPr lvl="0"/>
-            <a:r>
-              <a:rPr/>
-              <a:t>Some are simplifications of quantitative variables (e.g., color instead of wavelength)</a:t>
+              <a:rPr/>
+              <a:t>Testing whether observations are consistent with predictions (Inferential statistics)</a:t>
             </a:r>
           </a:p>
         </p:txBody>
       </p:sp>
+      <p:pic>
+        <p:nvPicPr>
+          <p:cNvPr descr="03_01_lecture_powerpoint_files/figure-pptx/unnamed-chunk-1-1.png" id="0" name="Picture 1"/>
+          <p:cNvPicPr>
+            <a:picLocks noGrp="1" noChangeAspect="1"/>
+          </p:cNvPicPr>
+          <p:nvPr/>
+        </p:nvPicPr>
+        <p:blipFill>
+          <a:blip r:embed="rId2"/>
+          <a:stretch>
+            <a:fillRect/>
+          </a:stretch>
+        </p:blipFill>
+        <p:spPr bwMode="auto">
+          <a:xfrm>
+            <a:off x="6121400" y="2044700"/>
+            <a:ext cx="2781300" cy="1714500"/>
+          </a:xfrm>
+          <a:prstGeom prst="rect">
+            <a:avLst/>
+          </a:prstGeom>
+          <a:noFill/>
+          <a:ln w="9525">
+            <a:noFill/>
+            <a:headEnd/>
+            <a:tailEnd/>
+          </a:ln>
+        </p:spPr>
+      </p:pic>
     </p:spTree>
   </p:cSld>
 </p:sld>
@@ -17058,11 +17793,8 @@
         <p:spPr>
           <a:xfrm>
             <a:off x="0" y="0"/>
-            <a:ext cx="9144000" cy="602780"/>
+            <a:ext cx="9144000" cy="582780"/>
           </a:xfrm>
-          <a:solidFill>
-            <a:srgbClr val="70121D"/>
-          </a:solidFill>
         </p:spPr>
         <p:txBody>
           <a:bodyPr/>
@@ -17073,7 +17805,7 @@
             </a:pPr>
             <a:r>
               <a:rPr/>
-              <a:t>Lecture 3: Derived Variables</a:t>
+              <a:t>Practice Exercise 1: Fish Data</a:t>
             </a:r>
           </a:p>
         </p:txBody>
@@ -17085,7 +17817,7 @@
             <a:spLocks noGrp="1"/>
           </p:cNvSpPr>
           <p:nvPr>
-            <p:ph idx="1" sz="half"/>
+            <p:ph idx="1"/>
           </p:nvPr>
         </p:nvSpPr>
         <p:spPr/>
@@ -17093,68 +17825,70 @@
           <a:bodyPr/>
           <a:lstStyle/>
           <a:p>
-            <a:pPr lvl="0" indent="0" marL="0">
-              <a:spcBef>
-                <a:spcPts val="3000"/>
-              </a:spcBef>
+            <a:pPr lvl="0" indent="0" marL="1270000">
               <a:buNone/>
             </a:pPr>
             <a:r>
-              <a:rPr b="1"/>
-              <a:t>Derived Variables</a:t>
-            </a:r>
-          </a:p>
-          <a:p>
-            <a:pPr lvl="0"/>
-            <a:r>
-              <a:rPr b="1"/>
-              <a:t>Percentages, Proportions</a:t>
-            </a:r>
-            <a:r>
-              <a:rPr/>
-              <a:t>: Ratio of some component to total</a:t>
-            </a:r>
-          </a:p>
-          <a:p>
-            <a:pPr lvl="0"/>
-            <a:r>
-              <a:rPr b="1"/>
-              <a:t>Ratios</a:t>
-            </a:r>
-            <a:r>
-              <a:rPr/>
-              <a:t>: Relation of two variables</a:t>
-            </a:r>
-          </a:p>
-          <a:p>
-            <a:pPr lvl="0"/>
-            <a:r>
-              <a:rPr b="1"/>
-              <a:t>Rates</a:t>
-            </a:r>
-            <a:r>
-              <a:rPr/>
-              <a:t>: Quantity per unit (time, mass, etc.)</a:t>
-            </a:r>
-          </a:p>
-          <a:p>
-            <a:pPr lvl="0"/>
-            <a:r>
-              <a:rPr b="1"/>
-              <a:t>Indices</a:t>
-            </a:r>
-            <a:r>
-              <a:rPr/>
-              <a:t>: More complex derived variables (e.g., condition index)</a:t>
-            </a:r>
-          </a:p>
-          <a:p>
-            <a:pPr lvl="0" indent="0" marL="0">
+              <a:rPr sz="2000" b="1"/>
+              <a:t>Practice Exercise 1: Can you open the fish data </a:t>
+            </a:r>
+            <a:r>
+              <a:rPr sz="2000" b="1">
+                <a:latin typeface="Courier"/>
+              </a:rPr>
+              <a:t>gray_I3_I8.csv</a:t>
+            </a:r>
+            <a:r>
+              <a:rPr sz="2000" b="1"/>
+              <a:t> and look at the structure and make a histogram?</a:t>
+            </a:r>
+          </a:p>
+          <a:p>
+            <a:pPr lvl="0" indent="0" marL="1270000">
               <a:buNone/>
             </a:pPr>
             <a:r>
-              <a:rPr/>
-              <a:t>Let’s explore our grayling dataset and identify the types of variables it contains.</a:t>
+              <a:rPr sz="2000"/>
+              <a:t>Note the variation around the mean… some could be due to measurement error</a:t>
+            </a:r>
+          </a:p>
+          <a:p>
+            <a:pPr lvl="0" indent="0" marL="1270000">
+              <a:buNone/>
+            </a:pPr>
+            <a:r>
+              <a:rPr sz="2000"/>
+              <a:t>Let’s recreate the basic histogram of fish lengths using </a:t>
+            </a:r>
+            <a:r>
+              <a:rPr sz="2000">
+                <a:latin typeface="Courier"/>
+              </a:rPr>
+              <a:t>gray_I3_I8.csv</a:t>
+            </a:r>
+          </a:p>
+          <a:p>
+            <a:pPr lvl="0" indent="0">
+              <a:buNone/>
+            </a:pPr>
+            <a:r>
+              <a:rPr>
+                <a:solidFill>
+                  <a:srgbClr val="5E5E5E"/>
+                </a:solidFill>
+                <a:latin typeface="Courier"/>
+              </a:rPr>
+              <a:t># Write your code here to read in the file</a:t>
+            </a:r>
+            <a:br/>
+            <a:r>
+              <a:rPr>
+                <a:solidFill>
+                  <a:srgbClr val="5E5E5E"/>
+                </a:solidFill>
+                <a:latin typeface="Courier"/>
+              </a:rPr>
+              <a:t># How do you examine the data - what are the ways you think and lets try it!</a:t>
             </a:r>
           </a:p>
         </p:txBody>

--- a/docs/ecostats_lectures/lecture_03/03_01_lecture_powerpoint.pptx
+++ b/docs/ecostats_lectures/lecture_03/03_01_lecture_powerpoint.pptx
@@ -51,9 +51,6 @@
     <p:sldId id="299" r:id="rId45"/>
     <p:sldId id="300" r:id="rId46"/>
     <p:sldId id="301" r:id="rId47"/>
-    <p:sldId id="302" r:id="rId48"/>
-    <p:sldId id="303" r:id="rId49"/>
-    <p:sldId id="304" r:id="rId50"/>
   </p:sldIdLst>
   <p:sldSz cx="9144000" cy="5143500" type="screen16x9"/>
   <p:notesSz cx="6858000" cy="9144000"/>
@@ -6061,11 +6058,8 @@
         <p:spPr>
           <a:xfrm>
             <a:off x="0" y="0"/>
-            <a:ext cx="9144000" cy="602780"/>
+            <a:ext cx="9144000" cy="582780"/>
           </a:xfrm>
-          <a:solidFill>
-            <a:srgbClr val="70121D"/>
-          </a:solidFill>
         </p:spPr>
         <p:txBody>
           <a:bodyPr/>
@@ -6076,7 +6070,7 @@
             </a:pPr>
             <a:r>
               <a:rPr/>
-              <a:t>Lecture 3: Data Transformations for Skewed Distributions</a:t>
+              <a:t>Lecture 3: Understanding Percentiles</a:t>
             </a:r>
           </a:p>
         </p:txBody>
@@ -6088,7 +6082,7 @@
             <a:spLocks noGrp="1"/>
           </p:cNvSpPr>
           <p:nvPr>
-            <p:ph idx="1" sz="half"/>
+            <p:ph idx="1"/>
           </p:nvPr>
         </p:nvSpPr>
         <p:spPr/>
@@ -6097,15 +6091,6 @@
           <a:lstStyle/>
           <a:p>
             <a:pPr lvl="0" indent="0" marL="0">
-              <a:buNone/>
-            </a:pPr>
-            <a:r>
-              <a:rPr/>
-              <a:t>Biological data are often skewed (asymmetrical), which can make the arithmetic mean less representative of central tendency. Data transformations can help address this issue.</a:t>
-            </a:r>
-          </a:p>
-          <a:p>
-            <a:pPr lvl="0" indent="0" marL="0">
               <a:spcBef>
                 <a:spcPts val="3000"/>
               </a:spcBef>
@@ -6113,88 +6098,11 @@
             </a:pPr>
             <a:r>
               <a:rPr b="1"/>
-              <a:t>Logarithmic Transformation</a:t>
-            </a:r>
-          </a:p>
-          <a:p>
-            <a:pPr lvl="0" indent="0" marL="0">
-              <a:buNone/>
-            </a:pPr>
-            <a:r>
-              <a:rPr/>
-              <a:t>The logarithmic transformation is one of the most common for right-skewed biological data:</a:t>
-            </a:r>
-          </a:p>
-          <a:p>
-            <a:pPr lvl="0" indent="0" marL="0">
-              <a:buNone/>
-            </a:pPr>
-            <a:r>
-              <a:rPr/>
-              <a:t>When data are log-normally distributed, the geometric mean often provides a better measure of central tendency than the arithmetic mean.</a:t>
-            </a:r>
-          </a:p>
-          <a:p>
-            <a:pPr lvl="0"/>
-            <a:r>
-              <a:rPr/>
-              <a:t>But there are issues and it might not be good…</a:t>
-            </a:r>
-          </a:p>
-          <a:p>
-            <a:pPr lvl="1"/>
-            <a:r>
-              <a:rPr/>
-              <a:t>detecting differences in geometric means, not arithmetic means</a:t>
-            </a:r>
-          </a:p>
-          <a:p>
-            <a:pPr lvl="2"/>
-            <a:r>
-              <a:rPr/>
-              <a:t>geometric is all values multiplied taken to the nth root</a:t>
-            </a:r>
-          </a:p>
-          <a:p>
-            <a:pPr lvl="1"/>
-            <a:r>
-              <a:rPr/>
-              <a:t>Can’t handle zeros without adding arbitrary constants (log(x+1) transformations), which can bias results</a:t>
-            </a:r>
-            <a:br/>
+              <a:t>- it is the same as quartiles but more finely divided and will come into play later on</a:t>
+            </a:r>
           </a:p>
         </p:txBody>
       </p:sp>
-      <p:pic>
-        <p:nvPicPr>
-          <p:cNvPr descr="03_01_lecture_powerpoint_files/figure-pptx/log-transform-1.png" id="0" name="Picture 1"/>
-          <p:cNvPicPr>
-            <a:picLocks noGrp="1" noChangeAspect="1"/>
-          </p:cNvPicPr>
-          <p:nvPr/>
-        </p:nvPicPr>
-        <p:blipFill>
-          <a:blip r:embed="rId2"/>
-          <a:stretch>
-            <a:fillRect/>
-          </a:stretch>
-        </p:blipFill>
-        <p:spPr bwMode="auto">
-          <a:xfrm>
-            <a:off x="6121400" y="2044700"/>
-            <a:ext cx="2781300" cy="1714500"/>
-          </a:xfrm>
-          <a:prstGeom prst="rect">
-            <a:avLst/>
-          </a:prstGeom>
-          <a:noFill/>
-          <a:ln w="9525">
-            <a:noFill/>
-            <a:headEnd/>
-            <a:tailEnd/>
-          </a:ln>
-        </p:spPr>
-      </p:pic>
     </p:spTree>
   </p:cSld>
 </p:sld>
@@ -6419,39 +6327,6 @@
       </p:grpSpPr>
       <p:sp>
         <p:nvSpPr>
-          <p:cNvPr id="2" name="Title 1"/>
-          <p:cNvSpPr>
-            <a:spLocks noGrp="1"/>
-          </p:cNvSpPr>
-          <p:nvPr>
-            <p:ph type="title"/>
-          </p:nvPr>
-        </p:nvSpPr>
-        <p:spPr>
-          <a:xfrm>
-            <a:off x="0" y="0"/>
-            <a:ext cx="9144000" cy="602780"/>
-          </a:xfrm>
-          <a:solidFill>
-            <a:srgbClr val="70121D"/>
-          </a:solidFill>
-        </p:spPr>
-        <p:txBody>
-          <a:bodyPr/>
-          <a:lstStyle/>
-          <a:p>
-            <a:pPr lvl="0" indent="0" marL="0">
-              <a:buNone/>
-            </a:pPr>
-            <a:r>
-              <a:rPr/>
-              <a:t>Lecture 3: When to Use Transformations</a:t>
-            </a:r>
-          </a:p>
-        </p:txBody>
-      </p:sp>
-      <p:sp>
-        <p:nvSpPr>
           <p:cNvPr id="3" name="Content Placeholder 2"/>
           <p:cNvSpPr>
             <a:spLocks noGrp="1"/>
@@ -6470,102 +6345,251 @@
             </a:pPr>
             <a:r>
               <a:rPr/>
-              <a:t>To tranform data to a “normal” distribution we can use the following transformations…</a:t>
+              <a:t>Percentiles are values that divide a dataset into 100 equal parts.</a:t>
             </a:r>
           </a:p>
           <a:p>
             <a:pPr lvl="0"/>
             <a:r>
-              <a:rPr b="1"/>
-              <a:t>Log transformation</a:t>
-            </a:r>
-            <a:r>
-              <a:rPr/>
-              <a:t>: When data are right-skewed or follow multiplicative rather than additive processes</a:t>
+              <a:rPr/>
+              <a:t>The 25th percentile is the first quartile (Q1)</a:t>
             </a:r>
           </a:p>
           <a:p>
             <a:pPr lvl="0"/>
             <a:r>
-              <a:rPr b="1"/>
-              <a:t>Square root transformation</a:t>
-            </a:r>
-            <a:r>
-              <a:rPr/>
-              <a:t>: For count data or data where variance increases with the mean</a:t>
+              <a:rPr/>
+              <a:t>The 50th percentile is the median</a:t>
             </a:r>
           </a:p>
           <a:p>
             <a:pPr lvl="0"/>
             <a:r>
-              <a:rPr b="1"/>
-              <a:t>Inverse transformation</a:t>
-            </a:r>
-            <a:r>
-              <a:rPr/>
-              <a:t>: For strongly right-skewed data</a:t>
+              <a:rPr/>
+              <a:t>The 75th percentile is the third quartile (Q3)</a:t>
             </a:r>
           </a:p>
           <a:p>
             <a:pPr lvl="0"/>
             <a:r>
-              <a:rPr b="1"/>
-              <a:t>Arcsine square root transformation</a:t>
-            </a:r>
-            <a:r>
-              <a:rPr/>
-              <a:t>: For proportions or percentages (though logistic regression is often preferred now)</a:t>
-            </a:r>
-          </a:p>
-          <a:p>
-            <a:pPr lvl="0" indent="0" marL="0">
-              <a:buNone/>
-            </a:pPr>
-            <a:r>
-              <a:rPr/>
-              <a:t>In a reflection the parameter </a:t>
-            </a:r>
-            <a:r>
-              <a:rPr b="1"/>
-              <a:t>k</a:t>
-            </a:r>
-            <a:r>
-              <a:rPr/>
-              <a:t> is typically chosen to be a value that’s larger than the maximum value</a:t>
+              <a:rPr/>
+              <a:t>The IQR is the difference between Q3 and Q1.</a:t>
             </a:r>
           </a:p>
         </p:txBody>
       </p:sp>
-      <p:pic>
-        <p:nvPicPr>
-          <p:cNvPr descr="images/clipboard-2483693250.png" id="0" name="Picture 1"/>
-          <p:cNvPicPr>
-            <a:picLocks noGrp="1" noChangeAspect="1"/>
-          </p:cNvPicPr>
-          <p:nvPr/>
-        </p:nvPicPr>
-        <p:blipFill>
-          <a:blip r:embed="rId2"/>
-          <a:stretch>
-            <a:fillRect/>
-          </a:stretch>
-        </p:blipFill>
-        <p:spPr bwMode="auto">
-          <a:xfrm>
-            <a:off x="6121400" y="2159000"/>
-            <a:ext cx="2781300" cy="1473200"/>
-          </a:xfrm>
-          <a:prstGeom prst="rect">
-            <a:avLst/>
-          </a:prstGeom>
-          <a:noFill/>
-          <a:ln w="9525">
-            <a:noFill/>
-            <a:headEnd/>
-            <a:tailEnd/>
-          </a:ln>
-        </p:spPr>
-      </p:pic>
+      <p:sp>
+        <p:nvSpPr>
+          <p:cNvPr id="4" name="Content Placeholder 3"/>
+          <p:cNvSpPr>
+            <a:spLocks noGrp="1"/>
+          </p:cNvSpPr>
+          <p:nvPr>
+            <p:ph idx="2" sz="half"/>
+          </p:nvPr>
+        </p:nvSpPr>
+        <p:spPr/>
+        <p:txBody>
+          <a:bodyPr/>
+          <a:lstStyle/>
+          <a:p>
+            <a:pPr lvl="0" indent="0">
+              <a:buNone/>
+            </a:pPr>
+            <a:r>
+              <a:rPr>
+                <a:solidFill>
+                  <a:srgbClr val="5E5E5E"/>
+                </a:solidFill>
+                <a:latin typeface="Courier"/>
+              </a:rPr>
+              <a:t># Calculate percentiles</a:t>
+            </a:r>
+            <a:br/>
+            <a:r>
+              <a:rPr>
+                <a:solidFill>
+                  <a:srgbClr val="003B4F"/>
+                </a:solidFill>
+                <a:latin typeface="Courier"/>
+              </a:rPr>
+              <a:t>percentiles &lt;- </a:t>
+            </a:r>
+            <a:r>
+              <a:rPr>
+                <a:solidFill>
+                  <a:srgbClr val="4758AB"/>
+                </a:solidFill>
+                <a:latin typeface="Courier"/>
+              </a:rPr>
+              <a:t>quantile</a:t>
+            </a:r>
+            <a:r>
+              <a:rPr>
+                <a:solidFill>
+                  <a:srgbClr val="003B4F"/>
+                </a:solidFill>
+                <a:latin typeface="Courier"/>
+              </a:rPr>
+              <a:t>(grayling_df</a:t>
+            </a:r>
+            <a:r>
+              <a:rPr>
+                <a:solidFill>
+                  <a:srgbClr val="5E5E5E"/>
+                </a:solidFill>
+                <a:latin typeface="Courier"/>
+              </a:rPr>
+              <a:t>$</a:t>
+            </a:r>
+            <a:r>
+              <a:rPr>
+                <a:solidFill>
+                  <a:srgbClr val="003B4F"/>
+                </a:solidFill>
+                <a:latin typeface="Courier"/>
+              </a:rPr>
+              <a:t>length_mm, </a:t>
+            </a:r>
+            <a:br/>
+            <a:r>
+              <a:rPr>
+                <a:solidFill>
+                  <a:srgbClr val="003B4F"/>
+                </a:solidFill>
+                <a:latin typeface="Courier"/>
+              </a:rPr>
+              <a:t>                       </a:t>
+            </a:r>
+            <a:r>
+              <a:rPr>
+                <a:solidFill>
+                  <a:srgbClr val="657422"/>
+                </a:solidFill>
+                <a:latin typeface="Courier"/>
+              </a:rPr>
+              <a:t>probs =</a:t>
+            </a:r>
+            <a:r>
+              <a:rPr>
+                <a:solidFill>
+                  <a:srgbClr val="003B4F"/>
+                </a:solidFill>
+                <a:latin typeface="Courier"/>
+              </a:rPr>
+              <a:t> </a:t>
+            </a:r>
+            <a:r>
+              <a:rPr>
+                <a:solidFill>
+                  <a:srgbClr val="4758AB"/>
+                </a:solidFill>
+                <a:latin typeface="Courier"/>
+              </a:rPr>
+              <a:t>c</a:t>
+            </a:r>
+            <a:r>
+              <a:rPr>
+                <a:solidFill>
+                  <a:srgbClr val="003B4F"/>
+                </a:solidFill>
+                <a:latin typeface="Courier"/>
+              </a:rPr>
+              <a:t>(</a:t>
+            </a:r>
+            <a:r>
+              <a:rPr>
+                <a:solidFill>
+                  <a:srgbClr val="AD0000"/>
+                </a:solidFill>
+                <a:latin typeface="Courier"/>
+              </a:rPr>
+              <a:t>0.1</a:t>
+            </a:r>
+            <a:r>
+              <a:rPr>
+                <a:solidFill>
+                  <a:srgbClr val="003B4F"/>
+                </a:solidFill>
+                <a:latin typeface="Courier"/>
+              </a:rPr>
+              <a:t>, </a:t>
+            </a:r>
+            <a:r>
+              <a:rPr>
+                <a:solidFill>
+                  <a:srgbClr val="AD0000"/>
+                </a:solidFill>
+                <a:latin typeface="Courier"/>
+              </a:rPr>
+              <a:t>0.25</a:t>
+            </a:r>
+            <a:r>
+              <a:rPr>
+                <a:solidFill>
+                  <a:srgbClr val="003B4F"/>
+                </a:solidFill>
+                <a:latin typeface="Courier"/>
+              </a:rPr>
+              <a:t>, </a:t>
+            </a:r>
+            <a:r>
+              <a:rPr>
+                <a:solidFill>
+                  <a:srgbClr val="AD0000"/>
+                </a:solidFill>
+                <a:latin typeface="Courier"/>
+              </a:rPr>
+              <a:t>0.5</a:t>
+            </a:r>
+            <a:r>
+              <a:rPr>
+                <a:solidFill>
+                  <a:srgbClr val="003B4F"/>
+                </a:solidFill>
+                <a:latin typeface="Courier"/>
+              </a:rPr>
+              <a:t>, </a:t>
+            </a:r>
+            <a:r>
+              <a:rPr>
+                <a:solidFill>
+                  <a:srgbClr val="AD0000"/>
+                </a:solidFill>
+                <a:latin typeface="Courier"/>
+              </a:rPr>
+              <a:t>0.75</a:t>
+            </a:r>
+            <a:r>
+              <a:rPr>
+                <a:solidFill>
+                  <a:srgbClr val="003B4F"/>
+                </a:solidFill>
+                <a:latin typeface="Courier"/>
+              </a:rPr>
+              <a:t>, </a:t>
+            </a:r>
+            <a:r>
+              <a:rPr>
+                <a:solidFill>
+                  <a:srgbClr val="AD0000"/>
+                </a:solidFill>
+                <a:latin typeface="Courier"/>
+              </a:rPr>
+              <a:t>0.9</a:t>
+            </a:r>
+            <a:r>
+              <a:rPr>
+                <a:solidFill>
+                  <a:srgbClr val="003B4F"/>
+                </a:solidFill>
+                <a:latin typeface="Courier"/>
+              </a:rPr>
+              <a:t>))</a:t>
+            </a:r>
+          </a:p>
+        </p:txBody>
+      </p:sp>
     </p:spTree>
   </p:cSld>
 </p:sld>
@@ -6601,8 +6625,11 @@
         <p:spPr>
           <a:xfrm>
             <a:off x="0" y="0"/>
-            <a:ext cx="9144000" cy="871538"/>
+            <a:ext cx="9144000" cy="602780"/>
           </a:xfrm>
+          <a:solidFill>
+            <a:srgbClr val="70121D"/>
+          </a:solidFill>
         </p:spPr>
         <p:txBody>
           <a:bodyPr/>
@@ -6613,19 +6640,19 @@
             </a:pPr>
             <a:r>
               <a:rPr/>
-              <a:t>Lecture 3: Visualizing Distributions - Histograms</a:t>
+              <a:t>Lecture 3: Standard Deviation vs. Interquartile Range</a:t>
             </a:r>
           </a:p>
         </p:txBody>
       </p:sp>
       <p:sp>
         <p:nvSpPr>
-          <p:cNvPr id="4" name="Text Placeholder 3"/>
+          <p:cNvPr id="3" name="Content Placeholder 2"/>
           <p:cNvSpPr>
             <a:spLocks noGrp="1"/>
           </p:cNvSpPr>
           <p:nvPr>
-            <p:ph idx="2" sz="half" type="body"/>
+            <p:ph idx="1" sz="half"/>
           </p:nvPr>
         </p:nvSpPr>
         <p:spPr/>
@@ -6638,7 +6665,7 @@
             </a:pPr>
             <a:r>
               <a:rPr/>
-              <a:t>Histograms</a:t>
+              <a:t>The standard deviation and interquartile range both measure spread, but:</a:t>
             </a:r>
           </a:p>
           <a:p>
@@ -6646,42 +6673,69 @@
               <a:buNone/>
             </a:pPr>
             <a:r>
-              <a:rPr/>
-              <a:t>Histograms show the frequency distribution of our data.</a:t>
+              <a:rPr b="1"/>
+              <a:t>Standard deviation</a:t>
+            </a:r>
+            <a:r>
+              <a:rPr/>
+              <a:t>: Sensitive to outliers</a:t>
+            </a:r>
+          </a:p>
+          <a:p>
+            <a:pPr lvl="0" indent="0" marL="0">
+              <a:buNone/>
+            </a:pPr>
+            <a:r>
+              <a:rPr b="1"/>
+              <a:t>Interquartile range</a:t>
+            </a:r>
+            <a:r>
+              <a:rPr/>
+              <a:t>: Robust against outliers</a:t>
+            </a:r>
+          </a:p>
+          <a:p>
+            <a:pPr lvl="0" indent="0" marL="0">
+              <a:buNone/>
+            </a:pPr>
+            <a:r>
+              <a:rPr/>
+              <a:t>When the data is approximately normal, the IQR ≈ 1.35 × standard deviation.</a:t>
             </a:r>
           </a:p>
         </p:txBody>
       </p:sp>
-      <p:pic>
-        <p:nvPicPr>
-          <p:cNvPr descr="03_01_lecture_powerpoint_files/figure-pptx/histogram-1.png" id="0" name="Picture 1"/>
-          <p:cNvPicPr>
-            <a:picLocks noGrp="1" noChangeAspect="1"/>
-          </p:cNvPicPr>
-          <p:nvPr/>
-        </p:nvPicPr>
-        <p:blipFill>
-          <a:blip r:embed="rId2"/>
-          <a:stretch>
-            <a:fillRect/>
-          </a:stretch>
-        </p:blipFill>
-        <p:spPr bwMode="auto">
-          <a:xfrm>
-            <a:off x="3657600" y="1219200"/>
-            <a:ext cx="5232400" cy="3276600"/>
-          </a:xfrm>
-          <a:prstGeom prst="rect">
-            <a:avLst/>
-          </a:prstGeom>
-          <a:noFill/>
-          <a:ln w="9525">
-            <a:noFill/>
-            <a:headEnd/>
-            <a:tailEnd/>
-          </a:ln>
-        </p:spPr>
-      </p:pic>
+      <p:sp>
+        <p:nvSpPr>
+          <p:cNvPr id="4" name="Content Placeholder 3"/>
+          <p:cNvSpPr>
+            <a:spLocks noGrp="1"/>
+          </p:cNvSpPr>
+          <p:nvPr>
+            <p:ph idx="2" sz="half"/>
+          </p:nvPr>
+        </p:nvSpPr>
+        <p:spPr/>
+        <p:txBody>
+          <a:bodyPr/>
+          <a:lstStyle/>
+          <a:p>
+            <a:pPr lvl="0" indent="0">
+              <a:buNone/>
+            </a:pPr>
+            <a:r>
+              <a:rPr>
+                <a:latin typeface="Courier"/>
+              </a:rPr>
+              <a:t># A tibble: 2 × 4
+  lake     sd   iqr ratio_iqr_sd
+  &lt;chr&gt; &lt;dbl&gt; &lt;dbl&gt;        &lt;dbl&gt;
+1 I3     28.3    24        0.848
+2 I8     52.3    61        1.17 </a:t>
+            </a:r>
+          </a:p>
+        </p:txBody>
+      </p:sp>
     </p:spTree>
   </p:cSld>
 </p:sld>
@@ -6717,8 +6771,11 @@
         <p:spPr>
           <a:xfrm>
             <a:off x="0" y="0"/>
-            <a:ext cx="9144000" cy="871538"/>
+            <a:ext cx="9144000" cy="602780"/>
           </a:xfrm>
+          <a:solidFill>
+            <a:srgbClr val="70121D"/>
+          </a:solidFill>
         </p:spPr>
         <p:txBody>
           <a:bodyPr/>
@@ -6729,19 +6786,19 @@
             </a:pPr>
             <a:r>
               <a:rPr/>
-              <a:t>Lecture 3: Visualizing Distributions - Box Plots</a:t>
+              <a:t>Lecture 3: Data Transformations for Skewed Distributions</a:t>
             </a:r>
           </a:p>
         </p:txBody>
       </p:sp>
       <p:sp>
         <p:nvSpPr>
-          <p:cNvPr id="4" name="Text Placeholder 3"/>
+          <p:cNvPr id="3" name="Content Placeholder 2"/>
           <p:cNvSpPr>
             <a:spLocks noGrp="1"/>
           </p:cNvSpPr>
           <p:nvPr>
-            <p:ph idx="2" sz="half" type="body"/>
+            <p:ph idx="1" sz="half"/>
           </p:nvPr>
         </p:nvSpPr>
         <p:spPr/>
@@ -6754,23 +6811,85 @@
             </a:pPr>
             <a:r>
               <a:rPr/>
-              <a:t>Box Plots</a:t>
+              <a:t>Biological data are often skewed (asymmetrical), which can make the arithmetic mean less representative of central tendency. Data transformations can help address this issue.</a:t>
             </a:r>
           </a:p>
           <a:p>
             <a:pPr lvl="0" indent="0" marL="0">
+              <a:spcBef>
+                <a:spcPts val="3000"/>
+              </a:spcBef>
               <a:buNone/>
             </a:pPr>
             <a:r>
-              <a:rPr/>
-              <a:t>Box plots show the median, quartiles, and potential outliers.</a:t>
+              <a:rPr b="1"/>
+              <a:t>Logarithmic Transformation</a:t>
+            </a:r>
+          </a:p>
+          <a:p>
+            <a:pPr lvl="0" indent="0" marL="0">
+              <a:buNone/>
+            </a:pPr>
+            <a:r>
+              <a:rPr/>
+              <a:t>The logarithmic transformation is one of the most common for right-skewed biological data:</a:t>
+            </a:r>
+          </a:p>
+          <a:p>
+            <a:pPr lvl="0" indent="0" marL="0">
+              <a:buNone/>
+            </a:pPr>
+            <a:r>
+              <a:rPr/>
+              <a:t>When data are log-normally distributed, the geometric mean often provides a better measure of central tendency than the arithmetic mean.</a:t>
+            </a:r>
+          </a:p>
+          <a:p>
+            <a:pPr lvl="0"/>
+            <a:r>
+              <a:rPr/>
+              <a:t>But there are issues and it might not be good…</a:t>
+            </a:r>
+          </a:p>
+          <a:p>
+            <a:pPr lvl="1"/>
+            <a:r>
+              <a:rPr/>
+              <a:t>detecting differences in geometric means, not arithmetic means</a:t>
+            </a:r>
+          </a:p>
+          <a:p>
+            <a:pPr lvl="2"/>
+            <a:r>
+              <a:rPr/>
+              <a:t>geometric is all values multiplied taken to the nth root</a:t>
+            </a:r>
+          </a:p>
+          <a:p>
+            <a:pPr lvl="1"/>
+            <a:r>
+              <a:rPr/>
+              <a:t>Can’t handle zeros without adding arbitrary constants (log(x+1) transformations), which can bias results</a:t>
+            </a:r>
+            <a:br/>
+          </a:p>
+          <a:p>
+            <a:pPr lvl="0" indent="0">
+              <a:buNone/>
+            </a:pPr>
+            <a:r>
+              <a:rPr>
+                <a:latin typeface="Courier"/>
+              </a:rPr>
+              <a:t>Arithmetic mean of original data: 265.6 mm
+ Geometric mean (back-transformed mean of logs): NA mm</a:t>
             </a:r>
           </a:p>
         </p:txBody>
       </p:sp>
       <p:pic>
         <p:nvPicPr>
-          <p:cNvPr descr="03_01_lecture_powerpoint_files/figure-pptx/boxplot-1.png" id="0" name="Picture 1"/>
+          <p:cNvPr descr="03_01_lecture_powerpoint_files/figure-pptx/log-transform-1.png" id="0" name="Picture 1"/>
           <p:cNvPicPr>
             <a:picLocks noGrp="1" noChangeAspect="1"/>
           </p:cNvPicPr>
@@ -6784,8 +6903,8 @@
         </p:blipFill>
         <p:spPr bwMode="auto">
           <a:xfrm>
-            <a:off x="3657600" y="1219200"/>
-            <a:ext cx="5232400" cy="3276600"/>
+            <a:off x="6121400" y="2044700"/>
+            <a:ext cx="2781300" cy="1714500"/>
           </a:xfrm>
           <a:prstGeom prst="rect">
             <a:avLst/>
@@ -6848,7 +6967,7 @@
             </a:pPr>
             <a:r>
               <a:rPr/>
-              <a:t>Lecture 3: Comparing Mean vs. Median</a:t>
+              <a:t>Lecture 3: When to Use Transformations</a:t>
             </a:r>
           </a:p>
         </p:txBody>
@@ -6873,7 +6992,51 @@
             </a:pPr>
             <a:r>
               <a:rPr/>
-              <a:t>The mean and median measure different aspects of a distribution:</a:t>
+              <a:t>To tranform data to a “normal” distribution we can use the following transformations…</a:t>
+            </a:r>
+          </a:p>
+          <a:p>
+            <a:pPr lvl="0"/>
+            <a:r>
+              <a:rPr b="1"/>
+              <a:t>Log transformation</a:t>
+            </a:r>
+            <a:r>
+              <a:rPr/>
+              <a:t>: When data are right-skewed or follow multiplicative rather than additive processes</a:t>
+            </a:r>
+          </a:p>
+          <a:p>
+            <a:pPr lvl="0"/>
+            <a:r>
+              <a:rPr b="1"/>
+              <a:t>Square root transformation</a:t>
+            </a:r>
+            <a:r>
+              <a:rPr/>
+              <a:t>: For count data or data where variance increases with the mean</a:t>
+            </a:r>
+          </a:p>
+          <a:p>
+            <a:pPr lvl="0"/>
+            <a:r>
+              <a:rPr b="1"/>
+              <a:t>Inverse transformation</a:t>
+            </a:r>
+            <a:r>
+              <a:rPr/>
+              <a:t>: For strongly right-skewed data</a:t>
+            </a:r>
+          </a:p>
+          <a:p>
+            <a:pPr lvl="0"/>
+            <a:r>
+              <a:rPr b="1"/>
+              <a:t>Arcsine square root transformation</a:t>
+            </a:r>
+            <a:r>
+              <a:rPr/>
+              <a:t>: For proportions or percentages (though logistic regression is often preferred now)</a:t>
             </a:r>
           </a:p>
           <a:p>
@@ -6881,69 +7044,50 @@
               <a:buNone/>
             </a:pPr>
             <a:r>
+              <a:rPr/>
+              <a:t>In a reflection the parameter </a:t>
+            </a:r>
+            <a:r>
               <a:rPr b="1"/>
-              <a:t>Mean</a:t>
-            </a:r>
-            <a:r>
-              <a:rPr/>
-              <a:t>: Center of gravity of the distribution</a:t>
-            </a:r>
-          </a:p>
-          <a:p>
-            <a:pPr lvl="0" indent="0" marL="0">
-              <a:buNone/>
-            </a:pPr>
-            <a:r>
-              <a:rPr b="1"/>
-              <a:t>Median</a:t>
-            </a:r>
-            <a:r>
-              <a:rPr/>
-              <a:t>: Middle value of the data</a:t>
-            </a:r>
-          </a:p>
-          <a:p>
-            <a:pPr lvl="0" indent="0" marL="0">
-              <a:buNone/>
-            </a:pPr>
-            <a:r>
-              <a:rPr/>
-              <a:t>When a distribution is symmetric, the mean and median are similar. When it’s skewed or has outliers, they can differ significantly.</a:t>
+              <a:t>k</a:t>
+            </a:r>
+            <a:r>
+              <a:rPr/>
+              <a:t> is typically chosen to be a value that’s larger than the maximum value</a:t>
             </a:r>
           </a:p>
         </p:txBody>
       </p:sp>
-      <p:sp>
-        <p:nvSpPr>
-          <p:cNvPr id="4" name="Content Placeholder 3"/>
-          <p:cNvSpPr>
-            <a:spLocks noGrp="1"/>
-          </p:cNvSpPr>
-          <p:nvPr>
-            <p:ph idx="2" sz="half"/>
-          </p:nvPr>
-        </p:nvSpPr>
-        <p:spPr/>
-        <p:txBody>
-          <a:bodyPr/>
-          <a:lstStyle/>
-          <a:p>
-            <a:pPr lvl="0" indent="0">
-              <a:buNone/>
-            </a:pPr>
-            <a:r>
-              <a:rPr>
-                <a:latin typeface="Courier"/>
-              </a:rPr>
-              <a:t># A tibble: 2 × 6
-  lake   mean median    sd   iqr skewness
-  &lt;chr&gt; &lt;dbl&gt;  &lt;dbl&gt; &lt;dbl&gt; &lt;dbl&gt;    &lt;dbl&gt;
-1 I3     266.    266  28.3    24   -0.883
-2 I8     363.    373  52.3    61   -1.09 </a:t>
-            </a:r>
-          </a:p>
-        </p:txBody>
-      </p:sp>
+      <p:pic>
+        <p:nvPicPr>
+          <p:cNvPr descr="images/clipboard-2483693250.png" id="0" name="Picture 1"/>
+          <p:cNvPicPr>
+            <a:picLocks noGrp="1" noChangeAspect="1"/>
+          </p:cNvPicPr>
+          <p:nvPr/>
+        </p:nvPicPr>
+        <p:blipFill>
+          <a:blip r:embed="rId2"/>
+          <a:stretch>
+            <a:fillRect/>
+          </a:stretch>
+        </p:blipFill>
+        <p:spPr bwMode="auto">
+          <a:xfrm>
+            <a:off x="6121400" y="2159000"/>
+            <a:ext cx="2781300" cy="1473200"/>
+          </a:xfrm>
+          <a:prstGeom prst="rect">
+            <a:avLst/>
+          </a:prstGeom>
+          <a:noFill/>
+          <a:ln w="9525">
+            <a:noFill/>
+            <a:headEnd/>
+            <a:tailEnd/>
+          </a:ln>
+        </p:spPr>
+      </p:pic>
     </p:spTree>
   </p:cSld>
 </p:sld>
@@ -6994,7 +7138,7 @@
             </a:pPr>
             <a:r>
               <a:rPr/>
-              <a:t>Lecture 3: Density Plot - Mean vs. Median</a:t>
+              <a:t>Lecture 3: Visualizing Distributions - Histograms</a:t>
             </a:r>
           </a:p>
         </p:txBody>
@@ -7019,7 +7163,7 @@
             </a:pPr>
             <a:r>
               <a:rPr/>
-              <a:t>The mean and median measure different aspects of a distribution:</a:t>
+              <a:t>Histograms</a:t>
             </a:r>
           </a:p>
           <a:p>
@@ -7027,41 +7171,15 @@
               <a:buNone/>
             </a:pPr>
             <a:r>
-              <a:rPr b="1"/>
-              <a:t>Mean</a:t>
-            </a:r>
-            <a:r>
-              <a:rPr/>
-              <a:t>: Center of gravity of the distribution</a:t>
-            </a:r>
-          </a:p>
-          <a:p>
-            <a:pPr lvl="0" indent="0" marL="0">
-              <a:buNone/>
-            </a:pPr>
-            <a:r>
-              <a:rPr b="1"/>
-              <a:t>Median</a:t>
-            </a:r>
-            <a:r>
-              <a:rPr/>
-              <a:t>: Middle value of the data</a:t>
-            </a:r>
-          </a:p>
-          <a:p>
-            <a:pPr lvl="0" indent="0" marL="0">
-              <a:buNone/>
-            </a:pPr>
-            <a:r>
-              <a:rPr/>
-              <a:t>When a distribution is symmetric, the mean and median are similar. When it’s skewed or has outliers, they can differ significantly.</a:t>
+              <a:rPr/>
+              <a:t>Histograms show the frequency distribution of our data.</a:t>
             </a:r>
           </a:p>
         </p:txBody>
       </p:sp>
       <p:pic>
         <p:nvPicPr>
-          <p:cNvPr descr="03_01_lecture_powerpoint_files/figure-pptx/mean-vs-median-plot-1.png" id="0" name="Picture 1"/>
+          <p:cNvPr descr="03_01_lecture_powerpoint_files/figure-pptx/histogram-1.png" id="0" name="Picture 1"/>
           <p:cNvPicPr>
             <a:picLocks noGrp="1" noChangeAspect="1"/>
           </p:cNvPicPr>
@@ -7075,8 +7193,8 @@
         </p:blipFill>
         <p:spPr bwMode="auto">
           <a:xfrm>
-            <a:off x="6121400" y="1739900"/>
-            <a:ext cx="2781300" cy="2311400"/>
+            <a:off x="6121400" y="2032000"/>
+            <a:ext cx="2781300" cy="1739900"/>
           </a:xfrm>
           <a:prstGeom prst="rect">
             <a:avLst/>
@@ -7139,7 +7257,7 @@
             </a:pPr>
             <a:r>
               <a:rPr/>
-              <a:t>Lecture 3: Standard Deviation vs. Interquartile Range</a:t>
+              <a:t>Lecture 3: Visualizing Distributions - Box Plots</a:t>
             </a:r>
           </a:p>
         </p:txBody>
@@ -7164,7 +7282,7 @@
             </a:pPr>
             <a:r>
               <a:rPr/>
-              <a:t>The standard deviation and interquartile range both measure spread, but:</a:t>
+              <a:t>Box Plots</a:t>
             </a:r>
           </a:p>
           <a:p>
@@ -7172,69 +7290,42 @@
               <a:buNone/>
             </a:pPr>
             <a:r>
-              <a:rPr b="1"/>
-              <a:t>Standard deviation</a:t>
-            </a:r>
-            <a:r>
-              <a:rPr/>
-              <a:t>: Sensitive to outliers</a:t>
-            </a:r>
-          </a:p>
-          <a:p>
-            <a:pPr lvl="0" indent="0" marL="0">
-              <a:buNone/>
-            </a:pPr>
-            <a:r>
-              <a:rPr b="1"/>
-              <a:t>Interquartile range</a:t>
-            </a:r>
-            <a:r>
-              <a:rPr/>
-              <a:t>: Robust against outliers</a:t>
-            </a:r>
-          </a:p>
-          <a:p>
-            <a:pPr lvl="0" indent="0" marL="0">
-              <a:buNone/>
-            </a:pPr>
-            <a:r>
-              <a:rPr/>
-              <a:t>When the data is approximately normal, the IQR ≈ 1.35 × standard deviation.</a:t>
+              <a:rPr/>
+              <a:t>Box plots show the median, quartiles, and potential outliers.</a:t>
             </a:r>
           </a:p>
         </p:txBody>
       </p:sp>
-      <p:sp>
-        <p:nvSpPr>
-          <p:cNvPr id="4" name="Content Placeholder 3"/>
-          <p:cNvSpPr>
-            <a:spLocks noGrp="1"/>
-          </p:cNvSpPr>
-          <p:nvPr>
-            <p:ph idx="2" sz="half"/>
-          </p:nvPr>
-        </p:nvSpPr>
-        <p:spPr/>
-        <p:txBody>
-          <a:bodyPr/>
-          <a:lstStyle/>
-          <a:p>
-            <a:pPr lvl="0" indent="0">
-              <a:buNone/>
-            </a:pPr>
-            <a:r>
-              <a:rPr>
-                <a:latin typeface="Courier"/>
-              </a:rPr>
-              <a:t># A tibble: 2 × 4
-  lake     sd   iqr ratio_iqr_sd
-  &lt;chr&gt; &lt;dbl&gt; &lt;dbl&gt;        &lt;dbl&gt;
-1 I3     28.3    24        0.848
-2 I8     52.3    61        1.17 </a:t>
-            </a:r>
-          </a:p>
-        </p:txBody>
-      </p:sp>
+      <p:pic>
+        <p:nvPicPr>
+          <p:cNvPr descr="03_01_lecture_powerpoint_files/figure-pptx/boxplot-1.png" id="0" name="Picture 1"/>
+          <p:cNvPicPr>
+            <a:picLocks noGrp="1" noChangeAspect="1"/>
+          </p:cNvPicPr>
+          <p:nvPr/>
+        </p:nvPicPr>
+        <p:blipFill>
+          <a:blip r:embed="rId2"/>
+          <a:stretch>
+            <a:fillRect/>
+          </a:stretch>
+        </p:blipFill>
+        <p:spPr bwMode="auto">
+          <a:xfrm>
+            <a:off x="6121400" y="2032000"/>
+            <a:ext cx="2781300" cy="1739900"/>
+          </a:xfrm>
+          <a:prstGeom prst="rect">
+            <a:avLst/>
+          </a:prstGeom>
+          <a:noFill/>
+          <a:ln w="9525">
+            <a:noFill/>
+            <a:headEnd/>
+            <a:tailEnd/>
+          </a:ln>
+        </p:spPr>
+      </p:pic>
     </p:spTree>
   </p:cSld>
 </p:sld>
@@ -7285,7 +7376,7 @@
             </a:pPr>
             <a:r>
               <a:rPr/>
-              <a:t>Lecture 3: Understanding Percentiles</a:t>
+              <a:t>Lecture 3: Comparing Mean vs. Median</a:t>
             </a:r>
           </a:p>
         </p:txBody>
@@ -7310,7 +7401,7 @@
             </a:pPr>
             <a:r>
               <a:rPr/>
-              <a:t>Percentiles are values that divide a dataset into 100 equal parts.</a:t>
+              <a:t>The mean and median measure different aspects of a distribution:</a:t>
             </a:r>
           </a:p>
           <a:p>
@@ -7318,8 +7409,12 @@
               <a:buNone/>
             </a:pPr>
             <a:r>
-              <a:rPr/>
-              <a:t>The 25th percentile is the first quartile (Q1)</a:t>
+              <a:rPr b="1"/>
+              <a:t>Mean</a:t>
+            </a:r>
+            <a:r>
+              <a:rPr/>
+              <a:t>: Center of gravity of the distribution</a:t>
             </a:r>
           </a:p>
           <a:p>
@@ -7327,8 +7422,12 @@
               <a:buNone/>
             </a:pPr>
             <a:r>
-              <a:rPr/>
-              <a:t>The 50th percentile is the median</a:t>
+              <a:rPr b="1"/>
+              <a:t>Median</a:t>
+            </a:r>
+            <a:r>
+              <a:rPr/>
+              <a:t>: Middle value of the data</a:t>
             </a:r>
           </a:p>
           <a:p>
@@ -7337,16 +7436,38 @@
             </a:pPr>
             <a:r>
               <a:rPr/>
-              <a:t>The 75th percentile is the third quartile (Q3)</a:t>
-            </a:r>
-          </a:p>
-          <a:p>
-            <a:pPr lvl="0" indent="0" marL="0">
+              <a:t>When a distribution is symmetric, the mean and median are similar. When it’s skewed or has outliers, they can differ significantly.</a:t>
+            </a:r>
+          </a:p>
+        </p:txBody>
+      </p:sp>
+      <p:sp>
+        <p:nvSpPr>
+          <p:cNvPr id="4" name="Content Placeholder 3"/>
+          <p:cNvSpPr>
+            <a:spLocks noGrp="1"/>
+          </p:cNvSpPr>
+          <p:nvPr>
+            <p:ph idx="2" sz="half"/>
+          </p:nvPr>
+        </p:nvSpPr>
+        <p:spPr/>
+        <p:txBody>
+          <a:bodyPr/>
+          <a:lstStyle/>
+          <a:p>
+            <a:pPr lvl="0" indent="0">
               <a:buNone/>
             </a:pPr>
             <a:r>
-              <a:rPr/>
-              <a:t>The IQR is the difference between Q3 and Q1.</a:t>
+              <a:rPr>
+                <a:latin typeface="Courier"/>
+              </a:rPr>
+              <a:t># A tibble: 2 × 6
+  lake   mean median    sd   iqr skewness
+  &lt;chr&gt; &lt;dbl&gt;  &lt;dbl&gt; &lt;dbl&gt; &lt;dbl&gt;    &lt;dbl&gt;
+1 I3     266.    266  28.3    24   -0.883
+2 I8     363.    373  52.3    61   -1.09 </a:t>
             </a:r>
           </a:p>
         </p:txBody>
@@ -7386,8 +7507,11 @@
         <p:spPr>
           <a:xfrm>
             <a:off x="0" y="0"/>
-            <a:ext cx="9144000" cy="582780"/>
+            <a:ext cx="9144000" cy="602780"/>
           </a:xfrm>
+          <a:solidFill>
+            <a:srgbClr val="70121D"/>
+          </a:solidFill>
         </p:spPr>
         <p:txBody>
           <a:bodyPr/>
@@ -7398,7 +7522,7 @@
             </a:pPr>
             <a:r>
               <a:rPr/>
-              <a:t>Lecture 3: Handling Missing Values</a:t>
+              <a:t>Lecture 3: Histogram Plot - Mean vs. Median</a:t>
             </a:r>
           </a:p>
         </p:txBody>
@@ -7410,7 +7534,7 @@
             <a:spLocks noGrp="1"/>
           </p:cNvSpPr>
           <p:nvPr>
-            <p:ph idx="1"/>
+            <p:ph idx="1" sz="half"/>
           </p:nvPr>
         </p:nvSpPr>
         <p:spPr/>
@@ -7423,49 +7547,76 @@
             </a:pPr>
             <a:r>
               <a:rPr/>
-              <a:t>Let’s examine how missing values affect our descriptive statistics by looking at the mass variable, which has some missing data.</a:t>
-            </a:r>
-          </a:p>
-          <a:p>
-            <a:pPr lvl="0" indent="0">
+              <a:t>The mean and median measure different aspects of a distribution:</a:t>
+            </a:r>
+          </a:p>
+          <a:p>
+            <a:pPr lvl="0" indent="0" marL="0">
               <a:buNone/>
             </a:pPr>
             <a:r>
-              <a:rPr>
-                <a:latin typeface="Courier"/>
-              </a:rPr>
-              <a:t>[1] 2</a:t>
-            </a:r>
-          </a:p>
-          <a:p>
-            <a:pPr lvl="0" indent="0">
+              <a:rPr b="1"/>
+              <a:t>Mean</a:t>
+            </a:r>
+            <a:r>
+              <a:rPr/>
+              <a:t>: Center of gravity of the distribution</a:t>
+            </a:r>
+          </a:p>
+          <a:p>
+            <a:pPr lvl="0" indent="0" marL="0">
               <a:buNone/>
             </a:pPr>
             <a:r>
-              <a:rPr>
-                <a:latin typeface="Courier"/>
-              </a:rPr>
-              <a:t>Mean mass without handling NAs: NA g
- Mean mass with na.rm=TRUE: 351.2289 g</a:t>
-            </a:r>
-          </a:p>
-          <a:p>
-            <a:pPr lvl="0" indent="0">
+              <a:rPr b="1"/>
+              <a:t>Median</a:t>
+            </a:r>
+            <a:r>
+              <a:rPr/>
+              <a:t>: Middle value of the data</a:t>
+            </a:r>
+          </a:p>
+          <a:p>
+            <a:pPr lvl="0" indent="0" marL="0">
               <a:buNone/>
             </a:pPr>
             <a:r>
-              <a:rPr>
-                <a:latin typeface="Courier"/>
-              </a:rPr>
-              <a:t># A tibble: 2 × 5
-  lake  mean_mass median_mass sd_mass n_missing
-  &lt;chr&gt;     &lt;dbl&gt;       &lt;dbl&gt;   &lt;dbl&gt;     &lt;int&gt;
-1 I3         150.         147    42.2         0
-2 I8         484.         490   176.          2</a:t>
+              <a:rPr/>
+              <a:t>When a distribution is symmetric, the mean and median are similar. When it’s skewed or has outliers, they can differ significantly.</a:t>
             </a:r>
           </a:p>
         </p:txBody>
       </p:sp>
+      <p:pic>
+        <p:nvPicPr>
+          <p:cNvPr descr="03_01_lecture_powerpoint_files/figure-pptx/mean-vs-median-plot-1.png" id="0" name="Picture 1"/>
+          <p:cNvPicPr>
+            <a:picLocks noGrp="1" noChangeAspect="1"/>
+          </p:cNvPicPr>
+          <p:nvPr/>
+        </p:nvPicPr>
+        <p:blipFill>
+          <a:blip r:embed="rId2"/>
+          <a:stretch>
+            <a:fillRect/>
+          </a:stretch>
+        </p:blipFill>
+        <p:spPr bwMode="auto">
+          <a:xfrm>
+            <a:off x="6121400" y="1739900"/>
+            <a:ext cx="2781300" cy="2311400"/>
+          </a:xfrm>
+          <a:prstGeom prst="rect">
+            <a:avLst/>
+          </a:prstGeom>
+          <a:noFill/>
+          <a:ln w="9525">
+            <a:noFill/>
+            <a:headEnd/>
+            <a:tailEnd/>
+          </a:ln>
+        </p:spPr>
+      </p:pic>
     </p:spTree>
   </p:cSld>
 </p:sld>
@@ -7513,7 +7664,7 @@
             </a:pPr>
             <a:r>
               <a:rPr/>
-              <a:t>Lecture 3: Best Practices for Missing Values</a:t>
+              <a:t>Lecture 3: Handling Missing Values</a:t>
             </a:r>
           </a:p>
         </p:txBody>
@@ -7533,39 +7684,50 @@
           <a:bodyPr/>
           <a:lstStyle/>
           <a:p>
-            <a:pPr lvl="0" indent="-342900" marL="342900">
-              <a:buAutoNum type="arabicPeriod"/>
+            <a:pPr lvl="0" indent="0" marL="0">
+              <a:buNone/>
             </a:pPr>
             <a:r>
               <a:rPr/>
-              <a:t>Always check for missing values in your data before calculating statistics.</a:t>
-            </a:r>
-          </a:p>
-          <a:p>
-            <a:pPr lvl="0" indent="-342900" marL="342900">
-              <a:buAutoNum type="arabicPeriod"/>
+              <a:t>Let’s examine how missing values affect our descriptive statistics by looking at the mass variable, which has some missing data.</a:t>
+            </a:r>
+          </a:p>
+          <a:p>
+            <a:pPr lvl="0" indent="0">
+              <a:buNone/>
             </a:pPr>
             <a:r>
-              <a:rPr/>
-              <a:t>Use na.rm = TRUE when calculating summary statistics to handle missing values.</a:t>
-            </a:r>
-          </a:p>
-          <a:p>
-            <a:pPr lvl="0" indent="-342900" marL="342900">
-              <a:buAutoNum type="arabicPeriod"/>
+              <a:rPr>
+                <a:latin typeface="Courier"/>
+              </a:rPr>
+              <a:t>[1] 2</a:t>
+            </a:r>
+          </a:p>
+          <a:p>
+            <a:pPr lvl="0" indent="0">
+              <a:buNone/>
             </a:pPr>
             <a:r>
-              <a:rPr/>
-              <a:t>Report the number of missing values along with your statistics.</a:t>
-            </a:r>
-          </a:p>
-          <a:p>
-            <a:pPr lvl="0" indent="-342900" marL="342900">
-              <a:buAutoNum type="arabicPeriod"/>
+              <a:rPr>
+                <a:latin typeface="Courier"/>
+              </a:rPr>
+              <a:t>Mean mass without handling NAs: NA g
+ Mean mass with na.rm=TRUE: 351.2289 g</a:t>
+            </a:r>
+          </a:p>
+          <a:p>
+            <a:pPr lvl="0" indent="0">
+              <a:buNone/>
             </a:pPr>
             <a:r>
-              <a:rPr/>
-              <a:t>Consider whether the missing values are random or might introduce bias.</a:t>
+              <a:rPr>
+                <a:latin typeface="Courier"/>
+              </a:rPr>
+              <a:t># A tibble: 2 × 5
+  lake  mean_mass median_mass sd_mass n_missing
+  &lt;chr&gt;     &lt;dbl&gt;       &lt;dbl&gt;   &lt;dbl&gt;     &lt;int&gt;
+1 I3         150.         147    42.2         0
+2 I8         484.         490   176.          2</a:t>
             </a:r>
           </a:p>
         </p:txBody>
@@ -7616,8 +7778,8 @@
               <a:buNone/>
             </a:pPr>
             <a:r>
-              <a:rPr b="1"/>
-              <a:t>Sampling from a Population</a:t>
+              <a:rPr/>
+              <a:t>Lecture 3: Best Practices for Missing Values</a:t>
             </a:r>
           </a:p>
         </p:txBody>
@@ -7637,12 +7799,39 @@
           <a:bodyPr/>
           <a:lstStyle/>
           <a:p>
-            <a:pPr lvl="0" indent="0" marL="0">
-              <a:buNone/>
+            <a:pPr lvl="0" indent="-342900" marL="342900">
+              <a:buAutoNum type="arabicPeriod"/>
             </a:pPr>
             <a:r>
               <a:rPr/>
-              <a:t>Now that we have estimates of the sample we need to relate that to the population</a:t>
+              <a:t>Always check for missing values in your data before calculating statistics.</a:t>
+            </a:r>
+          </a:p>
+          <a:p>
+            <a:pPr lvl="0" indent="-342900" marL="342900">
+              <a:buAutoNum type="arabicPeriod"/>
+            </a:pPr>
+            <a:r>
+              <a:rPr/>
+              <a:t>Use na.rm = TRUE when calculating summary statistics to handle missing values.</a:t>
+            </a:r>
+          </a:p>
+          <a:p>
+            <a:pPr lvl="0" indent="-342900" marL="342900">
+              <a:buAutoNum type="arabicPeriod"/>
+            </a:pPr>
+            <a:r>
+              <a:rPr/>
+              <a:t>Report the number of missing values along with your statistics.</a:t>
+            </a:r>
+          </a:p>
+          <a:p>
+            <a:pPr lvl="0" indent="-342900" marL="342900">
+              <a:buAutoNum type="arabicPeriod"/>
+            </a:pPr>
+            <a:r>
+              <a:rPr/>
+              <a:t>Consider whether the missing values are random or might introduce bias.</a:t>
             </a:r>
           </a:p>
         </p:txBody>
@@ -7876,12 +8065,42 @@
       </p:grpSpPr>
       <p:sp>
         <p:nvSpPr>
+          <p:cNvPr id="2" name="Title 1"/>
+          <p:cNvSpPr>
+            <a:spLocks noGrp="1"/>
+          </p:cNvSpPr>
+          <p:nvPr>
+            <p:ph type="title"/>
+          </p:nvPr>
+        </p:nvSpPr>
+        <p:spPr>
+          <a:xfrm>
+            <a:off x="0" y="0"/>
+            <a:ext cx="9144000" cy="582780"/>
+          </a:xfrm>
+        </p:spPr>
+        <p:txBody>
+          <a:bodyPr/>
+          <a:lstStyle/>
+          <a:p>
+            <a:pPr lvl="0" indent="0" marL="0">
+              <a:buNone/>
+            </a:pPr>
+            <a:r>
+              <a:rPr b="1"/>
+              <a:t>Sampling from a Population</a:t>
+            </a:r>
+          </a:p>
+        </p:txBody>
+      </p:sp>
+      <p:sp>
+        <p:nvSpPr>
           <p:cNvPr id="3" name="Content Placeholder 2"/>
           <p:cNvSpPr>
             <a:spLocks noGrp="1"/>
           </p:cNvSpPr>
           <p:nvPr>
-            <p:ph idx="1" sz="half"/>
+            <p:ph idx="1"/>
           </p:nvPr>
         </p:nvSpPr>
         <p:spPr/>
@@ -7894,6 +8113,15 @@
             </a:pPr>
             <a:r>
               <a:rPr/>
+              <a:t>Now that we have estimates of the sample we need to relate that to the population</a:t>
+            </a:r>
+          </a:p>
+          <a:p>
+            <a:pPr lvl="0" indent="0" marL="0">
+              <a:buNone/>
+            </a:pPr>
+            <a:r>
+              <a:rPr/>
               <a:t>In reality, we rarely know the true population parameters. When studying fish in lakes I3 and I8:</a:t>
             </a:r>
           </a:p>
@@ -7957,22 +8185,6 @@
               <a:t>Let’s demonstrate how different samples from the same population can give different estimates.</a:t>
             </a:r>
           </a:p>
-        </p:txBody>
-      </p:sp>
-      <p:sp>
-        <p:nvSpPr>
-          <p:cNvPr id="4" name="Content Placeholder 3"/>
-          <p:cNvSpPr>
-            <a:spLocks noGrp="1"/>
-          </p:cNvSpPr>
-          <p:nvPr>
-            <p:ph idx="2" sz="half"/>
-          </p:nvPr>
-        </p:nvSpPr>
-        <p:spPr/>
-        <p:txBody>
-          <a:bodyPr/>
-          <a:lstStyle/>
           <a:p>
             <a:pPr lvl="0" indent="0" marL="0">
               <a:buNone/>
@@ -8295,6 +8507,7 @@
               <a:t>}</a:t>
             </a:r>
             <a:br/>
+            <a:br/>
             <a:r>
               <a:rPr>
                 <a:solidFill>
@@ -8611,7 +8824,7 @@
         <p:spPr>
           <a:xfrm>
             <a:off x="0" y="0"/>
-            <a:ext cx="9144000" cy="871538"/>
+            <a:ext cx="9144000" cy="582780"/>
           </a:xfrm>
         </p:spPr>
         <p:txBody>
@@ -8624,874 +8837,6 @@
             <a:r>
               <a:rPr b="1"/>
               <a:t>Plotting Sample Variation</a:t>
-            </a:r>
-          </a:p>
-        </p:txBody>
-      </p:sp>
-      <p:sp>
-        <p:nvSpPr>
-          <p:cNvPr id="4" name="Text Placeholder 3"/>
-          <p:cNvSpPr>
-            <a:spLocks noGrp="1"/>
-          </p:cNvSpPr>
-          <p:nvPr>
-            <p:ph idx="2" sz="half" type="body"/>
-          </p:nvPr>
-        </p:nvSpPr>
-        <p:spPr/>
-        <p:txBody>
-          <a:bodyPr/>
-          <a:lstStyle/>
-          <a:p>
-            <a:pPr lvl="0" indent="0">
-              <a:buNone/>
-            </a:pPr>
-            <a:r>
-              <a:rPr>
-                <a:solidFill>
-                  <a:srgbClr val="5E5E5E"/>
-                </a:solidFill>
-                <a:latin typeface="Courier"/>
-              </a:rPr>
-              <a:t># Plot the different sample means</a:t>
-            </a:r>
-            <a:br/>
-            <a:r>
-              <a:rPr>
-                <a:solidFill>
-                  <a:srgbClr val="4758AB"/>
-                </a:solidFill>
-                <a:latin typeface="Courier"/>
-              </a:rPr>
-              <a:t>ggplot</a:t>
-            </a:r>
-            <a:r>
-              <a:rPr>
-                <a:solidFill>
-                  <a:srgbClr val="003B4F"/>
-                </a:solidFill>
-                <a:latin typeface="Courier"/>
-              </a:rPr>
-              <a:t>(samples_df, </a:t>
-            </a:r>
-            <a:r>
-              <a:rPr>
-                <a:solidFill>
-                  <a:srgbClr val="4758AB"/>
-                </a:solidFill>
-                <a:latin typeface="Courier"/>
-              </a:rPr>
-              <a:t>aes</a:t>
-            </a:r>
-            <a:r>
-              <a:rPr>
-                <a:solidFill>
-                  <a:srgbClr val="003B4F"/>
-                </a:solidFill>
-                <a:latin typeface="Courier"/>
-              </a:rPr>
-              <a:t>(</a:t>
-            </a:r>
-            <a:r>
-              <a:rPr>
-                <a:solidFill>
-                  <a:srgbClr val="657422"/>
-                </a:solidFill>
-                <a:latin typeface="Courier"/>
-              </a:rPr>
-              <a:t>x =</a:t>
-            </a:r>
-            <a:r>
-              <a:rPr>
-                <a:solidFill>
-                  <a:srgbClr val="003B4F"/>
-                </a:solidFill>
-                <a:latin typeface="Courier"/>
-              </a:rPr>
-              <a:t> </a:t>
-            </a:r>
-            <a:r>
-              <a:rPr>
-                <a:solidFill>
-                  <a:srgbClr val="4758AB"/>
-                </a:solidFill>
-                <a:latin typeface="Courier"/>
-              </a:rPr>
-              <a:t>factor</a:t>
-            </a:r>
-            <a:r>
-              <a:rPr>
-                <a:solidFill>
-                  <a:srgbClr val="003B4F"/>
-                </a:solidFill>
-                <a:latin typeface="Courier"/>
-              </a:rPr>
-              <a:t>(sample_number), </a:t>
-            </a:r>
-            <a:r>
-              <a:rPr>
-                <a:solidFill>
-                  <a:srgbClr val="657422"/>
-                </a:solidFill>
-                <a:latin typeface="Courier"/>
-              </a:rPr>
-              <a:t>y =</a:t>
-            </a:r>
-            <a:r>
-              <a:rPr>
-                <a:solidFill>
-                  <a:srgbClr val="003B4F"/>
-                </a:solidFill>
-                <a:latin typeface="Courier"/>
-              </a:rPr>
-              <a:t> sample_mean)) </a:t>
-            </a:r>
-            <a:r>
-              <a:rPr>
-                <a:solidFill>
-                  <a:srgbClr val="5E5E5E"/>
-                </a:solidFill>
-                <a:latin typeface="Courier"/>
-              </a:rPr>
-              <a:t>+</a:t>
-            </a:r>
-            <a:br/>
-            <a:r>
-              <a:rPr>
-                <a:solidFill>
-                  <a:srgbClr val="003B4F"/>
-                </a:solidFill>
-                <a:latin typeface="Courier"/>
-              </a:rPr>
-              <a:t>  </a:t>
-            </a:r>
-            <a:r>
-              <a:rPr>
-                <a:solidFill>
-                  <a:srgbClr val="4758AB"/>
-                </a:solidFill>
-                <a:latin typeface="Courier"/>
-              </a:rPr>
-              <a:t>geom_point</a:t>
-            </a:r>
-            <a:r>
-              <a:rPr>
-                <a:solidFill>
-                  <a:srgbClr val="003B4F"/>
-                </a:solidFill>
-                <a:latin typeface="Courier"/>
-              </a:rPr>
-              <a:t>(</a:t>
-            </a:r>
-            <a:r>
-              <a:rPr>
-                <a:solidFill>
-                  <a:srgbClr val="657422"/>
-                </a:solidFill>
-                <a:latin typeface="Courier"/>
-              </a:rPr>
-              <a:t>size =</a:t>
-            </a:r>
-            <a:r>
-              <a:rPr>
-                <a:solidFill>
-                  <a:srgbClr val="003B4F"/>
-                </a:solidFill>
-                <a:latin typeface="Courier"/>
-              </a:rPr>
-              <a:t> </a:t>
-            </a:r>
-            <a:r>
-              <a:rPr>
-                <a:solidFill>
-                  <a:srgbClr val="AD0000"/>
-                </a:solidFill>
-                <a:latin typeface="Courier"/>
-              </a:rPr>
-              <a:t>3</a:t>
-            </a:r>
-            <a:r>
-              <a:rPr>
-                <a:solidFill>
-                  <a:srgbClr val="003B4F"/>
-                </a:solidFill>
-                <a:latin typeface="Courier"/>
-              </a:rPr>
-              <a:t>, </a:t>
-            </a:r>
-            <a:r>
-              <a:rPr>
-                <a:solidFill>
-                  <a:srgbClr val="657422"/>
-                </a:solidFill>
-                <a:latin typeface="Courier"/>
-              </a:rPr>
-              <a:t>color =</a:t>
-            </a:r>
-            <a:r>
-              <a:rPr>
-                <a:solidFill>
-                  <a:srgbClr val="003B4F"/>
-                </a:solidFill>
-                <a:latin typeface="Courier"/>
-              </a:rPr>
-              <a:t> </a:t>
-            </a:r>
-            <a:r>
-              <a:rPr>
-                <a:solidFill>
-                  <a:srgbClr val="20794D"/>
-                </a:solidFill>
-                <a:latin typeface="Courier"/>
-              </a:rPr>
-              <a:t>"blue"</a:t>
-            </a:r>
-            <a:r>
-              <a:rPr>
-                <a:solidFill>
-                  <a:srgbClr val="003B4F"/>
-                </a:solidFill>
-                <a:latin typeface="Courier"/>
-              </a:rPr>
-              <a:t>) </a:t>
-            </a:r>
-            <a:r>
-              <a:rPr>
-                <a:solidFill>
-                  <a:srgbClr val="5E5E5E"/>
-                </a:solidFill>
-                <a:latin typeface="Courier"/>
-              </a:rPr>
-              <a:t>+</a:t>
-            </a:r>
-            <a:br/>
-            <a:r>
-              <a:rPr>
-                <a:solidFill>
-                  <a:srgbClr val="003B4F"/>
-                </a:solidFill>
-                <a:latin typeface="Courier"/>
-              </a:rPr>
-              <a:t>  </a:t>
-            </a:r>
-            <a:r>
-              <a:rPr>
-                <a:solidFill>
-                  <a:srgbClr val="4758AB"/>
-                </a:solidFill>
-                <a:latin typeface="Courier"/>
-              </a:rPr>
-              <a:t>geom_hline</a:t>
-            </a:r>
-            <a:r>
-              <a:rPr>
-                <a:solidFill>
-                  <a:srgbClr val="003B4F"/>
-                </a:solidFill>
-                <a:latin typeface="Courier"/>
-              </a:rPr>
-              <a:t>(</a:t>
-            </a:r>
-            <a:r>
-              <a:rPr>
-                <a:solidFill>
-                  <a:srgbClr val="657422"/>
-                </a:solidFill>
-                <a:latin typeface="Courier"/>
-              </a:rPr>
-              <a:t>yintercept =</a:t>
-            </a:r>
-            <a:r>
-              <a:rPr>
-                <a:solidFill>
-                  <a:srgbClr val="003B4F"/>
-                </a:solidFill>
-                <a:latin typeface="Courier"/>
-              </a:rPr>
-              <a:t> </a:t>
-            </a:r>
-            <a:r>
-              <a:rPr>
-                <a:solidFill>
-                  <a:srgbClr val="4758AB"/>
-                </a:solidFill>
-                <a:latin typeface="Courier"/>
-              </a:rPr>
-              <a:t>mean</a:t>
-            </a:r>
-            <a:r>
-              <a:rPr>
-                <a:solidFill>
-                  <a:srgbClr val="003B4F"/>
-                </a:solidFill>
-                <a:latin typeface="Courier"/>
-              </a:rPr>
-              <a:t>(i3_data</a:t>
-            </a:r>
-            <a:r>
-              <a:rPr>
-                <a:solidFill>
-                  <a:srgbClr val="5E5E5E"/>
-                </a:solidFill>
-                <a:latin typeface="Courier"/>
-              </a:rPr>
-              <a:t>$</a:t>
-            </a:r>
-            <a:r>
-              <a:rPr>
-                <a:solidFill>
-                  <a:srgbClr val="003B4F"/>
-                </a:solidFill>
-                <a:latin typeface="Courier"/>
-              </a:rPr>
-              <a:t>length_mm), </a:t>
-            </a:r>
-            <a:br/>
-            <a:r>
-              <a:rPr>
-                <a:solidFill>
-                  <a:srgbClr val="003B4F"/>
-                </a:solidFill>
-                <a:latin typeface="Courier"/>
-              </a:rPr>
-              <a:t>             </a:t>
-            </a:r>
-            <a:r>
-              <a:rPr>
-                <a:solidFill>
-                  <a:srgbClr val="657422"/>
-                </a:solidFill>
-                <a:latin typeface="Courier"/>
-              </a:rPr>
-              <a:t>linetype =</a:t>
-            </a:r>
-            <a:r>
-              <a:rPr>
-                <a:solidFill>
-                  <a:srgbClr val="003B4F"/>
-                </a:solidFill>
-                <a:latin typeface="Courier"/>
-              </a:rPr>
-              <a:t> </a:t>
-            </a:r>
-            <a:r>
-              <a:rPr>
-                <a:solidFill>
-                  <a:srgbClr val="20794D"/>
-                </a:solidFill>
-                <a:latin typeface="Courier"/>
-              </a:rPr>
-              <a:t>"dashed"</a:t>
-            </a:r>
-            <a:r>
-              <a:rPr>
-                <a:solidFill>
-                  <a:srgbClr val="003B4F"/>
-                </a:solidFill>
-                <a:latin typeface="Courier"/>
-              </a:rPr>
-              <a:t>, </a:t>
-            </a:r>
-            <a:r>
-              <a:rPr>
-                <a:solidFill>
-                  <a:srgbClr val="657422"/>
-                </a:solidFill>
-                <a:latin typeface="Courier"/>
-              </a:rPr>
-              <a:t>color =</a:t>
-            </a:r>
-            <a:r>
-              <a:rPr>
-                <a:solidFill>
-                  <a:srgbClr val="003B4F"/>
-                </a:solidFill>
-                <a:latin typeface="Courier"/>
-              </a:rPr>
-              <a:t> </a:t>
-            </a:r>
-            <a:r>
-              <a:rPr>
-                <a:solidFill>
-                  <a:srgbClr val="20794D"/>
-                </a:solidFill>
-                <a:latin typeface="Courier"/>
-              </a:rPr>
-              <a:t>"red"</a:t>
-            </a:r>
-            <a:r>
-              <a:rPr>
-                <a:solidFill>
-                  <a:srgbClr val="003B4F"/>
-                </a:solidFill>
-                <a:latin typeface="Courier"/>
-              </a:rPr>
-              <a:t>) </a:t>
-            </a:r>
-            <a:r>
-              <a:rPr>
-                <a:solidFill>
-                  <a:srgbClr val="5E5E5E"/>
-                </a:solidFill>
-                <a:latin typeface="Courier"/>
-              </a:rPr>
-              <a:t>+</a:t>
-            </a:r>
-            <a:br/>
-            <a:r>
-              <a:rPr>
-                <a:solidFill>
-                  <a:srgbClr val="003B4F"/>
-                </a:solidFill>
-                <a:latin typeface="Courier"/>
-              </a:rPr>
-              <a:t>  </a:t>
-            </a:r>
-            <a:r>
-              <a:rPr>
-                <a:solidFill>
-                  <a:srgbClr val="4758AB"/>
-                </a:solidFill>
-                <a:latin typeface="Courier"/>
-              </a:rPr>
-              <a:t>annotate</a:t>
-            </a:r>
-            <a:r>
-              <a:rPr>
-                <a:solidFill>
-                  <a:srgbClr val="003B4F"/>
-                </a:solidFill>
-                <a:latin typeface="Courier"/>
-              </a:rPr>
-              <a:t>(</a:t>
-            </a:r>
-            <a:r>
-              <a:rPr>
-                <a:solidFill>
-                  <a:srgbClr val="20794D"/>
-                </a:solidFill>
-                <a:latin typeface="Courier"/>
-              </a:rPr>
-              <a:t>"text"</a:t>
-            </a:r>
-            <a:r>
-              <a:rPr>
-                <a:solidFill>
-                  <a:srgbClr val="003B4F"/>
-                </a:solidFill>
-                <a:latin typeface="Courier"/>
-              </a:rPr>
-              <a:t>, </a:t>
-            </a:r>
-            <a:r>
-              <a:rPr>
-                <a:solidFill>
-                  <a:srgbClr val="657422"/>
-                </a:solidFill>
-                <a:latin typeface="Courier"/>
-              </a:rPr>
-              <a:t>x =</a:t>
-            </a:r>
-            <a:r>
-              <a:rPr>
-                <a:solidFill>
-                  <a:srgbClr val="003B4F"/>
-                </a:solidFill>
-                <a:latin typeface="Courier"/>
-              </a:rPr>
-              <a:t> </a:t>
-            </a:r>
-            <a:r>
-              <a:rPr>
-                <a:solidFill>
-                  <a:srgbClr val="AD0000"/>
-                </a:solidFill>
-                <a:latin typeface="Courier"/>
-              </a:rPr>
-              <a:t>5</a:t>
-            </a:r>
-            <a:r>
-              <a:rPr>
-                <a:solidFill>
-                  <a:srgbClr val="003B4F"/>
-                </a:solidFill>
-                <a:latin typeface="Courier"/>
-              </a:rPr>
-              <a:t>, </a:t>
-            </a:r>
-            <a:r>
-              <a:rPr>
-                <a:solidFill>
-                  <a:srgbClr val="657422"/>
-                </a:solidFill>
-                <a:latin typeface="Courier"/>
-              </a:rPr>
-              <a:t>y =</a:t>
-            </a:r>
-            <a:r>
-              <a:rPr>
-                <a:solidFill>
-                  <a:srgbClr val="003B4F"/>
-                </a:solidFill>
-                <a:latin typeface="Courier"/>
-              </a:rPr>
-              <a:t> </a:t>
-            </a:r>
-            <a:r>
-              <a:rPr>
-                <a:solidFill>
-                  <a:srgbClr val="4758AB"/>
-                </a:solidFill>
-                <a:latin typeface="Courier"/>
-              </a:rPr>
-              <a:t>mean</a:t>
-            </a:r>
-            <a:r>
-              <a:rPr>
-                <a:solidFill>
-                  <a:srgbClr val="003B4F"/>
-                </a:solidFill>
-                <a:latin typeface="Courier"/>
-              </a:rPr>
-              <a:t>(i3_data</a:t>
-            </a:r>
-            <a:r>
-              <a:rPr>
-                <a:solidFill>
-                  <a:srgbClr val="5E5E5E"/>
-                </a:solidFill>
-                <a:latin typeface="Courier"/>
-              </a:rPr>
-              <a:t>$</a:t>
-            </a:r>
-            <a:r>
-              <a:rPr>
-                <a:solidFill>
-                  <a:srgbClr val="003B4F"/>
-                </a:solidFill>
-                <a:latin typeface="Courier"/>
-              </a:rPr>
-              <a:t>length_mm) </a:t>
-            </a:r>
-            <a:r>
-              <a:rPr>
-                <a:solidFill>
-                  <a:srgbClr val="5E5E5E"/>
-                </a:solidFill>
-                <a:latin typeface="Courier"/>
-              </a:rPr>
-              <a:t>+</a:t>
-            </a:r>
-            <a:r>
-              <a:rPr>
-                <a:solidFill>
-                  <a:srgbClr val="003B4F"/>
-                </a:solidFill>
-                <a:latin typeface="Courier"/>
-              </a:rPr>
-              <a:t> </a:t>
-            </a:r>
-            <a:r>
-              <a:rPr>
-                <a:solidFill>
-                  <a:srgbClr val="AD0000"/>
-                </a:solidFill>
-                <a:latin typeface="Courier"/>
-              </a:rPr>
-              <a:t>2</a:t>
-            </a:r>
-            <a:r>
-              <a:rPr>
-                <a:solidFill>
-                  <a:srgbClr val="003B4F"/>
-                </a:solidFill>
-                <a:latin typeface="Courier"/>
-              </a:rPr>
-              <a:t>, </a:t>
-            </a:r>
-            <a:br/>
-            <a:r>
-              <a:rPr>
-                <a:solidFill>
-                  <a:srgbClr val="003B4F"/>
-                </a:solidFill>
-                <a:latin typeface="Courier"/>
-              </a:rPr>
-              <a:t>           </a:t>
-            </a:r>
-            <a:r>
-              <a:rPr>
-                <a:solidFill>
-                  <a:srgbClr val="657422"/>
-                </a:solidFill>
-                <a:latin typeface="Courier"/>
-              </a:rPr>
-              <a:t>label =</a:t>
-            </a:r>
-            <a:r>
-              <a:rPr>
-                <a:solidFill>
-                  <a:srgbClr val="003B4F"/>
-                </a:solidFill>
-                <a:latin typeface="Courier"/>
-              </a:rPr>
-              <a:t> </a:t>
-            </a:r>
-            <a:r>
-              <a:rPr>
-                <a:solidFill>
-                  <a:srgbClr val="20794D"/>
-                </a:solidFill>
-                <a:latin typeface="Courier"/>
-              </a:rPr>
-              <a:t>"Overall sample mean"</a:t>
-            </a:r>
-            <a:r>
-              <a:rPr>
-                <a:solidFill>
-                  <a:srgbClr val="003B4F"/>
-                </a:solidFill>
-                <a:latin typeface="Courier"/>
-              </a:rPr>
-              <a:t>, </a:t>
-            </a:r>
-            <a:r>
-              <a:rPr>
-                <a:solidFill>
-                  <a:srgbClr val="657422"/>
-                </a:solidFill>
-                <a:latin typeface="Courier"/>
-              </a:rPr>
-              <a:t>color =</a:t>
-            </a:r>
-            <a:r>
-              <a:rPr>
-                <a:solidFill>
-                  <a:srgbClr val="003B4F"/>
-                </a:solidFill>
-                <a:latin typeface="Courier"/>
-              </a:rPr>
-              <a:t> </a:t>
-            </a:r>
-            <a:r>
-              <a:rPr>
-                <a:solidFill>
-                  <a:srgbClr val="20794D"/>
-                </a:solidFill>
-                <a:latin typeface="Courier"/>
-              </a:rPr>
-              <a:t>"red"</a:t>
-            </a:r>
-            <a:r>
-              <a:rPr>
-                <a:solidFill>
-                  <a:srgbClr val="003B4F"/>
-                </a:solidFill>
-                <a:latin typeface="Courier"/>
-              </a:rPr>
-              <a:t>) </a:t>
-            </a:r>
-            <a:r>
-              <a:rPr>
-                <a:solidFill>
-                  <a:srgbClr val="5E5E5E"/>
-                </a:solidFill>
-                <a:latin typeface="Courier"/>
-              </a:rPr>
-              <a:t>+</a:t>
-            </a:r>
-            <a:br/>
-            <a:r>
-              <a:rPr>
-                <a:solidFill>
-                  <a:srgbClr val="003B4F"/>
-                </a:solidFill>
-                <a:latin typeface="Courier"/>
-              </a:rPr>
-              <a:t>  </a:t>
-            </a:r>
-            <a:r>
-              <a:rPr>
-                <a:solidFill>
-                  <a:srgbClr val="4758AB"/>
-                </a:solidFill>
-                <a:latin typeface="Courier"/>
-              </a:rPr>
-              <a:t>labs</a:t>
-            </a:r>
-            <a:r>
-              <a:rPr>
-                <a:solidFill>
-                  <a:srgbClr val="003B4F"/>
-                </a:solidFill>
-                <a:latin typeface="Courier"/>
-              </a:rPr>
-              <a:t>(</a:t>
-            </a:r>
-            <a:r>
-              <a:rPr>
-                <a:solidFill>
-                  <a:srgbClr val="657422"/>
-                </a:solidFill>
-                <a:latin typeface="Courier"/>
-              </a:rPr>
-              <a:t>title =</a:t>
-            </a:r>
-            <a:r>
-              <a:rPr>
-                <a:solidFill>
-                  <a:srgbClr val="003B4F"/>
-                </a:solidFill>
-                <a:latin typeface="Courier"/>
-              </a:rPr>
-              <a:t> </a:t>
-            </a:r>
-            <a:r>
-              <a:rPr>
-                <a:solidFill>
-                  <a:srgbClr val="20794D"/>
-                </a:solidFill>
-                <a:latin typeface="Courier"/>
-              </a:rPr>
-              <a:t>"Means of 10 Random Samples from Lake I3"</a:t>
-            </a:r>
-            <a:r>
-              <a:rPr>
-                <a:solidFill>
-                  <a:srgbClr val="003B4F"/>
-                </a:solidFill>
-                <a:latin typeface="Courier"/>
-              </a:rPr>
-              <a:t>,</a:t>
-            </a:r>
-            <a:br/>
-            <a:r>
-              <a:rPr>
-                <a:solidFill>
-                  <a:srgbClr val="003B4F"/>
-                </a:solidFill>
-                <a:latin typeface="Courier"/>
-              </a:rPr>
-              <a:t>       </a:t>
-            </a:r>
-            <a:r>
-              <a:rPr>
-                <a:solidFill>
-                  <a:srgbClr val="657422"/>
-                </a:solidFill>
-                <a:latin typeface="Courier"/>
-              </a:rPr>
-              <a:t>x =</a:t>
-            </a:r>
-            <a:r>
-              <a:rPr>
-                <a:solidFill>
-                  <a:srgbClr val="003B4F"/>
-                </a:solidFill>
-                <a:latin typeface="Courier"/>
-              </a:rPr>
-              <a:t> </a:t>
-            </a:r>
-            <a:r>
-              <a:rPr>
-                <a:solidFill>
-                  <a:srgbClr val="20794D"/>
-                </a:solidFill>
-                <a:latin typeface="Courier"/>
-              </a:rPr>
-              <a:t>"Sample Number"</a:t>
-            </a:r>
-            <a:r>
-              <a:rPr>
-                <a:solidFill>
-                  <a:srgbClr val="003B4F"/>
-                </a:solidFill>
-                <a:latin typeface="Courier"/>
-              </a:rPr>
-              <a:t>,</a:t>
-            </a:r>
-            <a:br/>
-            <a:r>
-              <a:rPr>
-                <a:solidFill>
-                  <a:srgbClr val="003B4F"/>
-                </a:solidFill>
-                <a:latin typeface="Courier"/>
-              </a:rPr>
-              <a:t>       </a:t>
-            </a:r>
-            <a:r>
-              <a:rPr>
-                <a:solidFill>
-                  <a:srgbClr val="657422"/>
-                </a:solidFill>
-                <a:latin typeface="Courier"/>
-              </a:rPr>
-              <a:t>y =</a:t>
-            </a:r>
-            <a:r>
-              <a:rPr>
-                <a:solidFill>
-                  <a:srgbClr val="003B4F"/>
-                </a:solidFill>
-                <a:latin typeface="Courier"/>
-              </a:rPr>
-              <a:t> </a:t>
-            </a:r>
-            <a:r>
-              <a:rPr>
-                <a:solidFill>
-                  <a:srgbClr val="20794D"/>
-                </a:solidFill>
-                <a:latin typeface="Courier"/>
-              </a:rPr>
-              <a:t>"Sample Mean (mm)"</a:t>
-            </a:r>
-            <a:r>
-              <a:rPr>
-                <a:solidFill>
-                  <a:srgbClr val="003B4F"/>
-                </a:solidFill>
-                <a:latin typeface="Courier"/>
-              </a:rPr>
-              <a:t>) </a:t>
-            </a:r>
-            <a:r>
-              <a:rPr>
-                <a:solidFill>
-                  <a:srgbClr val="5E5E5E"/>
-                </a:solidFill>
-                <a:latin typeface="Courier"/>
-              </a:rPr>
-              <a:t>+</a:t>
-            </a:r>
-            <a:br/>
-            <a:r>
-              <a:rPr>
-                <a:solidFill>
-                  <a:srgbClr val="003B4F"/>
-                </a:solidFill>
-                <a:latin typeface="Courier"/>
-              </a:rPr>
-              <a:t>  </a:t>
-            </a:r>
-            <a:r>
-              <a:rPr>
-                <a:solidFill>
-                  <a:srgbClr val="4758AB"/>
-                </a:solidFill>
-                <a:latin typeface="Courier"/>
-              </a:rPr>
-              <a:t>theme_minimal</a:t>
-            </a:r>
-            <a:r>
-              <a:rPr>
-                <a:solidFill>
-                  <a:srgbClr val="003B4F"/>
-                </a:solidFill>
-                <a:latin typeface="Courier"/>
-              </a:rPr>
-              <a:t>()</a:t>
             </a:r>
           </a:p>
         </p:txBody>
@@ -9512,8 +8857,8 @@
         </p:blipFill>
         <p:spPr bwMode="auto">
           <a:xfrm>
-            <a:off x="3657600" y="1244600"/>
-            <a:ext cx="5232400" cy="3225800"/>
+            <a:off x="1358900" y="609600"/>
+            <a:ext cx="6350000" cy="3911600"/>
           </a:xfrm>
           <a:prstGeom prst="rect">
             <a:avLst/>
@@ -9778,6 +9123,36 @@
                   <a:t>How close our sample mean is likely to be to the true population mean</a:t>
                 </a:r>
               </a:p>
+              <a:p>
+                <a:pPr lvl="0" indent="0" marL="0">
+                  <a:buNone/>
+                </a:pPr>
+                <a:r>
+                  <a:rPr b="1"/>
+                  <a:t>Remember:</a:t>
+                </a:r>
+              </a:p>
+              <a:p>
+                <a:pPr lvl="0"/>
+                <a:r>
+                  <a:rPr/>
+                  <a:t>Standard deviation (s) describes the variability in the individual data points</a:t>
+                </a:r>
+              </a:p>
+              <a:p>
+                <a:pPr lvl="0"/>
+                <a:r>
+                  <a:rPr/>
+                  <a:t>Standard error (SE) describes the variability in the sample mean itself</a:t>
+                </a:r>
+              </a:p>
+              <a:p>
+                <a:pPr lvl="0"/>
+                <a:r>
+                  <a:rPr/>
+                  <a:t>As sample size increases, SE decreases (more precise estimate)</a:t>
+                </a:r>
+              </a:p>
             </p:txBody>
           </p:sp>
         </mc:Choice>
@@ -9797,33 +9172,376 @@
           <a:bodyPr/>
           <a:lstStyle/>
           <a:p>
-            <a:pPr lvl="0" indent="0" marL="0">
+            <a:pPr lvl="0" indent="0">
               <a:buNone/>
             </a:pPr>
             <a:r>
-              <a:rPr b="1"/>
-              <a:t>Remember:</a:t>
-            </a:r>
-          </a:p>
-          <a:p>
-            <a:pPr lvl="0"/>
-            <a:r>
-              <a:rPr/>
-              <a:t>Standard deviation (s) describes the variability in the individual data points</a:t>
-            </a:r>
-          </a:p>
-          <a:p>
-            <a:pPr lvl="0"/>
-            <a:r>
-              <a:rPr/>
-              <a:t>Standard error (SE) describes the variability in the sample mean itself</a:t>
-            </a:r>
-          </a:p>
-          <a:p>
-            <a:pPr lvl="0"/>
-            <a:r>
-              <a:rPr/>
-              <a:t>As sample size increases, SE decreases (more precise estimate)</a:t>
+              <a:rPr>
+                <a:solidFill>
+                  <a:srgbClr val="5E5E5E"/>
+                </a:solidFill>
+                <a:latin typeface="Courier"/>
+              </a:rPr>
+              <a:t># Calculate mean, SD, and SE for each lake</a:t>
+            </a:r>
+            <a:br/>
+            <a:r>
+              <a:rPr>
+                <a:solidFill>
+                  <a:srgbClr val="003B4F"/>
+                </a:solidFill>
+                <a:latin typeface="Courier"/>
+              </a:rPr>
+              <a:t>grayling_stats &lt;- grayling_df </a:t>
+            </a:r>
+            <a:r>
+              <a:rPr>
+                <a:solidFill>
+                  <a:srgbClr val="5E5E5E"/>
+                </a:solidFill>
+                <a:latin typeface="Courier"/>
+              </a:rPr>
+              <a:t>%&gt;%</a:t>
+            </a:r>
+            <a:br/>
+            <a:r>
+              <a:rPr>
+                <a:solidFill>
+                  <a:srgbClr val="003B4F"/>
+                </a:solidFill>
+                <a:latin typeface="Courier"/>
+              </a:rPr>
+              <a:t>  </a:t>
+            </a:r>
+            <a:r>
+              <a:rPr>
+                <a:solidFill>
+                  <a:srgbClr val="4758AB"/>
+                </a:solidFill>
+                <a:latin typeface="Courier"/>
+              </a:rPr>
+              <a:t>group_by</a:t>
+            </a:r>
+            <a:r>
+              <a:rPr>
+                <a:solidFill>
+                  <a:srgbClr val="003B4F"/>
+                </a:solidFill>
+                <a:latin typeface="Courier"/>
+              </a:rPr>
+              <a:t>(lake) </a:t>
+            </a:r>
+            <a:r>
+              <a:rPr>
+                <a:solidFill>
+                  <a:srgbClr val="5E5E5E"/>
+                </a:solidFill>
+                <a:latin typeface="Courier"/>
+              </a:rPr>
+              <a:t>%&gt;%</a:t>
+            </a:r>
+            <a:br/>
+            <a:r>
+              <a:rPr>
+                <a:solidFill>
+                  <a:srgbClr val="003B4F"/>
+                </a:solidFill>
+                <a:latin typeface="Courier"/>
+              </a:rPr>
+              <a:t>  </a:t>
+            </a:r>
+            <a:r>
+              <a:rPr>
+                <a:solidFill>
+                  <a:srgbClr val="4758AB"/>
+                </a:solidFill>
+                <a:latin typeface="Courier"/>
+              </a:rPr>
+              <a:t>summarize</a:t>
+            </a:r>
+            <a:r>
+              <a:rPr>
+                <a:solidFill>
+                  <a:srgbClr val="003B4F"/>
+                </a:solidFill>
+                <a:latin typeface="Courier"/>
+              </a:rPr>
+              <a:t>(</a:t>
+            </a:r>
+            <a:br/>
+            <a:r>
+              <a:rPr>
+                <a:solidFill>
+                  <a:srgbClr val="003B4F"/>
+                </a:solidFill>
+                <a:latin typeface="Courier"/>
+              </a:rPr>
+              <a:t>    </a:t>
+            </a:r>
+            <a:r>
+              <a:rPr>
+                <a:solidFill>
+                  <a:srgbClr val="657422"/>
+                </a:solidFill>
+                <a:latin typeface="Courier"/>
+              </a:rPr>
+              <a:t>mean_length =</a:t>
+            </a:r>
+            <a:r>
+              <a:rPr>
+                <a:solidFill>
+                  <a:srgbClr val="003B4F"/>
+                </a:solidFill>
+                <a:latin typeface="Courier"/>
+              </a:rPr>
+              <a:t> </a:t>
+            </a:r>
+            <a:r>
+              <a:rPr>
+                <a:solidFill>
+                  <a:srgbClr val="4758AB"/>
+                </a:solidFill>
+                <a:latin typeface="Courier"/>
+              </a:rPr>
+              <a:t>mean</a:t>
+            </a:r>
+            <a:r>
+              <a:rPr>
+                <a:solidFill>
+                  <a:srgbClr val="003B4F"/>
+                </a:solidFill>
+                <a:latin typeface="Courier"/>
+              </a:rPr>
+              <a:t>(length_mm),</a:t>
+            </a:r>
+            <a:br/>
+            <a:r>
+              <a:rPr>
+                <a:solidFill>
+                  <a:srgbClr val="003B4F"/>
+                </a:solidFill>
+                <a:latin typeface="Courier"/>
+              </a:rPr>
+              <a:t>    </a:t>
+            </a:r>
+            <a:r>
+              <a:rPr>
+                <a:solidFill>
+                  <a:srgbClr val="657422"/>
+                </a:solidFill>
+                <a:latin typeface="Courier"/>
+              </a:rPr>
+              <a:t>sd_length =</a:t>
+            </a:r>
+            <a:r>
+              <a:rPr>
+                <a:solidFill>
+                  <a:srgbClr val="003B4F"/>
+                </a:solidFill>
+                <a:latin typeface="Courier"/>
+              </a:rPr>
+              <a:t> </a:t>
+            </a:r>
+            <a:r>
+              <a:rPr>
+                <a:solidFill>
+                  <a:srgbClr val="4758AB"/>
+                </a:solidFill>
+                <a:latin typeface="Courier"/>
+              </a:rPr>
+              <a:t>sd</a:t>
+            </a:r>
+            <a:r>
+              <a:rPr>
+                <a:solidFill>
+                  <a:srgbClr val="003B4F"/>
+                </a:solidFill>
+                <a:latin typeface="Courier"/>
+              </a:rPr>
+              <a:t>(length_mm),</a:t>
+            </a:r>
+            <a:br/>
+            <a:r>
+              <a:rPr>
+                <a:solidFill>
+                  <a:srgbClr val="003B4F"/>
+                </a:solidFill>
+                <a:latin typeface="Courier"/>
+              </a:rPr>
+              <a:t>    </a:t>
+            </a:r>
+            <a:r>
+              <a:rPr>
+                <a:solidFill>
+                  <a:srgbClr val="657422"/>
+                </a:solidFill>
+                <a:latin typeface="Courier"/>
+              </a:rPr>
+              <a:t>n =</a:t>
+            </a:r>
+            <a:r>
+              <a:rPr>
+                <a:solidFill>
+                  <a:srgbClr val="003B4F"/>
+                </a:solidFill>
+                <a:latin typeface="Courier"/>
+              </a:rPr>
+              <a:t> </a:t>
+            </a:r>
+            <a:r>
+              <a:rPr>
+                <a:solidFill>
+                  <a:srgbClr val="4758AB"/>
+                </a:solidFill>
+                <a:latin typeface="Courier"/>
+              </a:rPr>
+              <a:t>n</a:t>
+            </a:r>
+            <a:r>
+              <a:rPr>
+                <a:solidFill>
+                  <a:srgbClr val="003B4F"/>
+                </a:solidFill>
+                <a:latin typeface="Courier"/>
+              </a:rPr>
+              <a:t>(),</a:t>
+            </a:r>
+            <a:br/>
+            <a:r>
+              <a:rPr>
+                <a:solidFill>
+                  <a:srgbClr val="003B4F"/>
+                </a:solidFill>
+                <a:latin typeface="Courier"/>
+              </a:rPr>
+              <a:t>    </a:t>
+            </a:r>
+            <a:r>
+              <a:rPr>
+                <a:solidFill>
+                  <a:srgbClr val="657422"/>
+                </a:solidFill>
+                <a:latin typeface="Courier"/>
+              </a:rPr>
+              <a:t>se_length =</a:t>
+            </a:r>
+            <a:r>
+              <a:rPr>
+                <a:solidFill>
+                  <a:srgbClr val="003B4F"/>
+                </a:solidFill>
+                <a:latin typeface="Courier"/>
+              </a:rPr>
+              <a:t> sd_length </a:t>
+            </a:r>
+            <a:r>
+              <a:rPr>
+                <a:solidFill>
+                  <a:srgbClr val="5E5E5E"/>
+                </a:solidFill>
+                <a:latin typeface="Courier"/>
+              </a:rPr>
+              <a:t>/</a:t>
+            </a:r>
+            <a:r>
+              <a:rPr>
+                <a:solidFill>
+                  <a:srgbClr val="003B4F"/>
+                </a:solidFill>
+                <a:latin typeface="Courier"/>
+              </a:rPr>
+              <a:t> </a:t>
+            </a:r>
+            <a:r>
+              <a:rPr>
+                <a:solidFill>
+                  <a:srgbClr val="4758AB"/>
+                </a:solidFill>
+                <a:latin typeface="Courier"/>
+              </a:rPr>
+              <a:t>sum</a:t>
+            </a:r>
+            <a:r>
+              <a:rPr>
+                <a:solidFill>
+                  <a:srgbClr val="003B4F"/>
+                </a:solidFill>
+                <a:latin typeface="Courier"/>
+              </a:rPr>
+              <a:t>(</a:t>
+            </a:r>
+            <a:r>
+              <a:rPr>
+                <a:solidFill>
+                  <a:srgbClr val="5E5E5E"/>
+                </a:solidFill>
+                <a:latin typeface="Courier"/>
+              </a:rPr>
+              <a:t>!</a:t>
+            </a:r>
+            <a:r>
+              <a:rPr>
+                <a:solidFill>
+                  <a:srgbClr val="4758AB"/>
+                </a:solidFill>
+                <a:latin typeface="Courier"/>
+              </a:rPr>
+              <a:t>is.na</a:t>
+            </a:r>
+            <a:r>
+              <a:rPr>
+                <a:solidFill>
+                  <a:srgbClr val="003B4F"/>
+                </a:solidFill>
+                <a:latin typeface="Courier"/>
+              </a:rPr>
+              <a:t>(length_mm))</a:t>
+            </a:r>
+            <a:br/>
+            <a:r>
+              <a:rPr>
+                <a:solidFill>
+                  <a:srgbClr val="003B4F"/>
+                </a:solidFill>
+                <a:latin typeface="Courier"/>
+              </a:rPr>
+              <a:t>  )</a:t>
+            </a:r>
+            <a:br/>
+            <a:br/>
+            <a:r>
+              <a:rPr>
+                <a:solidFill>
+                  <a:srgbClr val="5E5E5E"/>
+                </a:solidFill>
+                <a:latin typeface="Courier"/>
+              </a:rPr>
+              <a:t># Display the statistics</a:t>
+            </a:r>
+            <a:br/>
+            <a:r>
+              <a:rPr>
+                <a:solidFill>
+                  <a:srgbClr val="003B4F"/>
+                </a:solidFill>
+                <a:latin typeface="Courier"/>
+              </a:rPr>
+              <a:t>grayling_stats</a:t>
+            </a:r>
+          </a:p>
+          <a:p>
+            <a:pPr lvl="0" indent="0">
+              <a:buNone/>
+            </a:pPr>
+            <a:r>
+              <a:rPr>
+                <a:latin typeface="Courier"/>
+              </a:rPr>
+              <a:t># A tibble: 2 × 5
+  lake  mean_length sd_length     n se_length
+  &lt;chr&gt;       &lt;dbl&gt;     &lt;dbl&gt; &lt;int&gt;     &lt;dbl&gt;
+1 I3           266.      28.3    66     0.429
+2 I8           363.      52.3   102     0.513</a:t>
             </a:r>
           </a:p>
         </p:txBody>
@@ -9875,7 +9593,7 @@
             </a:pPr>
             <a:r>
               <a:rPr b="1"/>
-              <a:t>Standard Error for Our Grayling Data</a:t>
+              <a:t>Sampling Distribution of the Mean</a:t>
             </a:r>
           </a:p>
         </p:txBody>
@@ -9900,353 +9618,90 @@
             </a:pPr>
             <a:r>
               <a:rPr/>
-              <a:t>Let’s calculate and visualize the standard error for both lakes:</a:t>
-            </a:r>
-          </a:p>
-          <a:p>
-            <a:pPr lvl="0" indent="0">
+              <a:t>The </a:t>
+            </a:r>
+            <a:r>
+              <a:rPr b="1"/>
+              <a:t>sampling distribution of the mean</a:t>
+            </a:r>
+            <a:r>
+              <a:rPr/>
+              <a:t> is the theoretical distribution of all possible sample means of a given sample size from a population.</a:t>
+            </a:r>
+          </a:p>
+          <a:p>
+            <a:pPr lvl="0" indent="0" marL="0">
               <a:buNone/>
             </a:pPr>
             <a:r>
-              <a:rPr>
-                <a:solidFill>
-                  <a:srgbClr val="5E5E5E"/>
-                </a:solidFill>
-                <a:latin typeface="Courier"/>
-              </a:rPr>
-              <a:t># Calculate mean, SD, and SE for each lake</a:t>
-            </a:r>
-            <a:br/>
-            <a:r>
-              <a:rPr>
-                <a:solidFill>
-                  <a:srgbClr val="003B4F"/>
-                </a:solidFill>
-                <a:latin typeface="Courier"/>
-              </a:rPr>
-              <a:t>grayling_stats &lt;- grayling_df </a:t>
-            </a:r>
-            <a:r>
-              <a:rPr>
-                <a:solidFill>
-                  <a:srgbClr val="5E5E5E"/>
-                </a:solidFill>
-                <a:latin typeface="Courier"/>
-              </a:rPr>
-              <a:t>%&gt;%</a:t>
-            </a:r>
-            <a:br/>
-            <a:r>
-              <a:rPr>
-                <a:solidFill>
-                  <a:srgbClr val="003B4F"/>
-                </a:solidFill>
-                <a:latin typeface="Courier"/>
-              </a:rPr>
-              <a:t>  </a:t>
-            </a:r>
-            <a:r>
-              <a:rPr>
-                <a:solidFill>
-                  <a:srgbClr val="4758AB"/>
-                </a:solidFill>
-                <a:latin typeface="Courier"/>
-              </a:rPr>
-              <a:t>group_by</a:t>
-            </a:r>
-            <a:r>
-              <a:rPr>
-                <a:solidFill>
-                  <a:srgbClr val="003B4F"/>
-                </a:solidFill>
-                <a:latin typeface="Courier"/>
-              </a:rPr>
-              <a:t>(lake) </a:t>
-            </a:r>
-            <a:r>
-              <a:rPr>
-                <a:solidFill>
-                  <a:srgbClr val="5E5E5E"/>
-                </a:solidFill>
-                <a:latin typeface="Courier"/>
-              </a:rPr>
-              <a:t>%&gt;%</a:t>
-            </a:r>
-            <a:br/>
-            <a:r>
-              <a:rPr>
-                <a:solidFill>
-                  <a:srgbClr val="003B4F"/>
-                </a:solidFill>
-                <a:latin typeface="Courier"/>
-              </a:rPr>
-              <a:t>  </a:t>
-            </a:r>
-            <a:r>
-              <a:rPr>
-                <a:solidFill>
-                  <a:srgbClr val="4758AB"/>
-                </a:solidFill>
-                <a:latin typeface="Courier"/>
-              </a:rPr>
-              <a:t>summarize</a:t>
-            </a:r>
-            <a:r>
-              <a:rPr>
-                <a:solidFill>
-                  <a:srgbClr val="003B4F"/>
-                </a:solidFill>
-                <a:latin typeface="Courier"/>
-              </a:rPr>
-              <a:t>(</a:t>
-            </a:r>
-            <a:br/>
-            <a:r>
-              <a:rPr>
-                <a:solidFill>
-                  <a:srgbClr val="003B4F"/>
-                </a:solidFill>
-                <a:latin typeface="Courier"/>
-              </a:rPr>
-              <a:t>    </a:t>
-            </a:r>
-            <a:r>
-              <a:rPr>
-                <a:solidFill>
-                  <a:srgbClr val="657422"/>
-                </a:solidFill>
-                <a:latin typeface="Courier"/>
-              </a:rPr>
-              <a:t>mean_length =</a:t>
-            </a:r>
-            <a:r>
-              <a:rPr>
-                <a:solidFill>
-                  <a:srgbClr val="003B4F"/>
-                </a:solidFill>
-                <a:latin typeface="Courier"/>
-              </a:rPr>
-              <a:t> </a:t>
-            </a:r>
-            <a:r>
-              <a:rPr>
-                <a:solidFill>
-                  <a:srgbClr val="4758AB"/>
-                </a:solidFill>
-                <a:latin typeface="Courier"/>
-              </a:rPr>
-              <a:t>mean</a:t>
-            </a:r>
-            <a:r>
-              <a:rPr>
-                <a:solidFill>
-                  <a:srgbClr val="003B4F"/>
-                </a:solidFill>
-                <a:latin typeface="Courier"/>
-              </a:rPr>
-              <a:t>(length_mm),</a:t>
-            </a:r>
-            <a:br/>
-            <a:r>
-              <a:rPr>
-                <a:solidFill>
-                  <a:srgbClr val="003B4F"/>
-                </a:solidFill>
-                <a:latin typeface="Courier"/>
-              </a:rPr>
-              <a:t>    </a:t>
-            </a:r>
-            <a:r>
-              <a:rPr>
-                <a:solidFill>
-                  <a:srgbClr val="657422"/>
-                </a:solidFill>
-                <a:latin typeface="Courier"/>
-              </a:rPr>
-              <a:t>sd_length =</a:t>
-            </a:r>
-            <a:r>
-              <a:rPr>
-                <a:solidFill>
-                  <a:srgbClr val="003B4F"/>
-                </a:solidFill>
-                <a:latin typeface="Courier"/>
-              </a:rPr>
-              <a:t> </a:t>
-            </a:r>
-            <a:r>
-              <a:rPr>
-                <a:solidFill>
-                  <a:srgbClr val="4758AB"/>
-                </a:solidFill>
-                <a:latin typeface="Courier"/>
-              </a:rPr>
-              <a:t>sd</a:t>
-            </a:r>
-            <a:r>
-              <a:rPr>
-                <a:solidFill>
-                  <a:srgbClr val="003B4F"/>
-                </a:solidFill>
-                <a:latin typeface="Courier"/>
-              </a:rPr>
-              <a:t>(length_mm),</a:t>
-            </a:r>
-            <a:br/>
-            <a:r>
-              <a:rPr>
-                <a:solidFill>
-                  <a:srgbClr val="003B4F"/>
-                </a:solidFill>
-                <a:latin typeface="Courier"/>
-              </a:rPr>
-              <a:t>    </a:t>
-            </a:r>
-            <a:r>
-              <a:rPr>
-                <a:solidFill>
-                  <a:srgbClr val="657422"/>
-                </a:solidFill>
-                <a:latin typeface="Courier"/>
-              </a:rPr>
-              <a:t>n =</a:t>
-            </a:r>
-            <a:r>
-              <a:rPr>
-                <a:solidFill>
-                  <a:srgbClr val="003B4F"/>
-                </a:solidFill>
-                <a:latin typeface="Courier"/>
-              </a:rPr>
-              <a:t> </a:t>
-            </a:r>
-            <a:r>
-              <a:rPr>
-                <a:solidFill>
-                  <a:srgbClr val="4758AB"/>
-                </a:solidFill>
-                <a:latin typeface="Courier"/>
-              </a:rPr>
-              <a:t>n</a:t>
-            </a:r>
-            <a:r>
-              <a:rPr>
-                <a:solidFill>
-                  <a:srgbClr val="003B4F"/>
-                </a:solidFill>
-                <a:latin typeface="Courier"/>
-              </a:rPr>
-              <a:t>(),</a:t>
-            </a:r>
-            <a:br/>
-            <a:r>
-              <a:rPr>
-                <a:solidFill>
-                  <a:srgbClr val="003B4F"/>
-                </a:solidFill>
-                <a:latin typeface="Courier"/>
-              </a:rPr>
-              <a:t>    </a:t>
-            </a:r>
-            <a:r>
-              <a:rPr>
-                <a:solidFill>
-                  <a:srgbClr val="657422"/>
-                </a:solidFill>
-                <a:latin typeface="Courier"/>
-              </a:rPr>
-              <a:t>se_length =</a:t>
-            </a:r>
-            <a:r>
-              <a:rPr>
-                <a:solidFill>
-                  <a:srgbClr val="003B4F"/>
-                </a:solidFill>
-                <a:latin typeface="Courier"/>
-              </a:rPr>
-              <a:t> sd_length </a:t>
-            </a:r>
-            <a:r>
-              <a:rPr>
-                <a:solidFill>
-                  <a:srgbClr val="5E5E5E"/>
-                </a:solidFill>
-                <a:latin typeface="Courier"/>
-              </a:rPr>
-              <a:t>/</a:t>
-            </a:r>
-            <a:r>
-              <a:rPr>
-                <a:solidFill>
-                  <a:srgbClr val="003B4F"/>
-                </a:solidFill>
-                <a:latin typeface="Courier"/>
-              </a:rPr>
-              <a:t> </a:t>
-            </a:r>
-            <a:r>
-              <a:rPr>
-                <a:solidFill>
-                  <a:srgbClr val="4758AB"/>
-                </a:solidFill>
-                <a:latin typeface="Courier"/>
-              </a:rPr>
-              <a:t>sqrt</a:t>
-            </a:r>
-            <a:r>
-              <a:rPr>
-                <a:solidFill>
-                  <a:srgbClr val="003B4F"/>
-                </a:solidFill>
-                <a:latin typeface="Courier"/>
-              </a:rPr>
-              <a:t>(n)</a:t>
-            </a:r>
-            <a:br/>
-            <a:r>
-              <a:rPr>
-                <a:solidFill>
-                  <a:srgbClr val="003B4F"/>
-                </a:solidFill>
-                <a:latin typeface="Courier"/>
-              </a:rPr>
-              <a:t>  )</a:t>
-            </a:r>
-            <a:br/>
-            <a:br/>
-            <a:r>
-              <a:rPr>
-                <a:solidFill>
-                  <a:srgbClr val="5E5E5E"/>
-                </a:solidFill>
-                <a:latin typeface="Courier"/>
-              </a:rPr>
-              <a:t># Display the statistics</a:t>
-            </a:r>
-            <a:br/>
-            <a:r>
-              <a:rPr>
-                <a:solidFill>
-                  <a:srgbClr val="003B4F"/>
-                </a:solidFill>
-                <a:latin typeface="Courier"/>
-              </a:rPr>
-              <a:t>grayling_stats</a:t>
-            </a:r>
-          </a:p>
-          <a:p>
-            <a:pPr lvl="0" indent="0">
-              <a:buNone/>
+              <a:rPr/>
+              <a:t>Important properties:</a:t>
+            </a:r>
+          </a:p>
+          <a:p>
+            <a:pPr lvl="0" indent="-342900" marL="342900">
+              <a:buAutoNum type="arabicPeriod"/>
             </a:pPr>
             <a:r>
-              <a:rPr>
-                <a:latin typeface="Courier"/>
-              </a:rPr>
-              <a:t># A tibble: 2 × 5
-  lake  mean_length sd_length     n se_length
-  &lt;chr&gt;       &lt;dbl&gt;     &lt;dbl&gt; &lt;int&gt;     &lt;dbl&gt;
-1 I3           266.      28.3    66      3.48
-2 I8           363.      52.3   102      5.18</a:t>
+              <a:rPr/>
+              <a:t>It is centered at the population mean (μ)</a:t>
+            </a:r>
+          </a:p>
+          <a:p>
+            <a:pPr lvl="0" indent="-342900" marL="342900">
+              <a:buAutoNum type="arabicPeriod"/>
+            </a:pPr>
+            <a:r>
+              <a:rPr/>
+              <a:t>Its standard deviation is the standard error (σ/√n)</a:t>
+            </a:r>
+          </a:p>
+          <a:p>
+            <a:pPr lvl="0" indent="-342900" marL="342900">
+              <a:buAutoNum type="arabicPeriod"/>
+            </a:pPr>
+            <a:r>
+              <a:rPr/>
+              <a:t>For large sample sizes, it approaches a normal distribution (Central Limit Theorem)</a:t>
+            </a:r>
+          </a:p>
+          <a:p>
+            <a:pPr lvl="0" indent="0" marL="0">
+              <a:buNone/>
+            </a:pPr>
+            <a:r>
+              <a:rPr/>
+              <a:t>The larger the sample size:</a:t>
+            </a:r>
+          </a:p>
+          <a:p>
+            <a:pPr lvl="0"/>
+            <a:r>
+              <a:rPr/>
+              <a:t>The narrower the sampling distribution</a:t>
+            </a:r>
+          </a:p>
+          <a:p>
+            <a:pPr lvl="0"/>
+            <a:r>
+              <a:rPr/>
+              <a:t>The smaller the standard error</a:t>
+            </a:r>
+          </a:p>
+          <a:p>
+            <a:pPr lvl="0"/>
+            <a:r>
+              <a:rPr/>
+              <a:t>The more precise our estimate of the population mean</a:t>
+            </a:r>
+          </a:p>
+          <a:p>
+            <a:pPr lvl="0" indent="0" marL="0">
+              <a:buNone/>
+            </a:pPr>
+            <a:r>
+              <a:rPr/>
+              <a:t>Let’s simulate the sampling distribution for Lake I3 fish data.</a:t>
             </a:r>
           </a:p>
         </p:txBody>
@@ -10286,7 +9741,7 @@
         <p:spPr>
           <a:xfrm>
             <a:off x="0" y="0"/>
-            <a:ext cx="9144000" cy="582780"/>
+            <a:ext cx="9144000" cy="871538"/>
           </a:xfrm>
         </p:spPr>
         <p:txBody>
@@ -10298,14 +9753,1396 @@
             </a:pPr>
             <a:r>
               <a:rPr b="1"/>
-              <a:t>Visualizing Standard Error</a:t>
+              <a:t>Simulating the Sampling Distribution</a:t>
+            </a:r>
+          </a:p>
+        </p:txBody>
+      </p:sp>
+      <p:sp>
+        <p:nvSpPr>
+          <p:cNvPr id="4" name="Text Placeholder 3"/>
+          <p:cNvSpPr>
+            <a:spLocks noGrp="1"/>
+          </p:cNvSpPr>
+          <p:nvPr>
+            <p:ph idx="2" sz="half" type="body"/>
+          </p:nvPr>
+        </p:nvSpPr>
+        <p:spPr/>
+        <p:txBody>
+          <a:bodyPr/>
+          <a:lstStyle/>
+          <a:p>
+            <a:pPr lvl="0" indent="0" marL="0">
+              <a:buNone/>
+            </a:pPr>
+            <a:r>
+              <a:rPr/>
+              <a:t>Let’s simulate taking many samples from Lake I3 to visualize the sampling distribution:</a:t>
+            </a:r>
+          </a:p>
+          <a:p>
+            <a:pPr lvl="0" indent="0">
+              <a:buNone/>
+            </a:pPr>
+            <a:r>
+              <a:rPr>
+                <a:solidFill>
+                  <a:srgbClr val="5E5E5E"/>
+                </a:solidFill>
+                <a:latin typeface="Courier"/>
+              </a:rPr>
+              <a:t># Filter for Lake I3</a:t>
+            </a:r>
+            <a:br/>
+            <a:r>
+              <a:rPr>
+                <a:solidFill>
+                  <a:srgbClr val="003B4F"/>
+                </a:solidFill>
+                <a:latin typeface="Courier"/>
+              </a:rPr>
+              <a:t>i3_data &lt;- grayling_df </a:t>
+            </a:r>
+            <a:r>
+              <a:rPr>
+                <a:solidFill>
+                  <a:srgbClr val="5E5E5E"/>
+                </a:solidFill>
+                <a:latin typeface="Courier"/>
+              </a:rPr>
+              <a:t>%&gt;%</a:t>
+            </a:r>
+            <a:r>
+              <a:rPr>
+                <a:solidFill>
+                  <a:srgbClr val="003B4F"/>
+                </a:solidFill>
+                <a:latin typeface="Courier"/>
+              </a:rPr>
+              <a:t> </a:t>
+            </a:r>
+            <a:r>
+              <a:rPr>
+                <a:solidFill>
+                  <a:srgbClr val="4758AB"/>
+                </a:solidFill>
+                <a:latin typeface="Courier"/>
+              </a:rPr>
+              <a:t>filter</a:t>
+            </a:r>
+            <a:r>
+              <a:rPr>
+                <a:solidFill>
+                  <a:srgbClr val="003B4F"/>
+                </a:solidFill>
+                <a:latin typeface="Courier"/>
+              </a:rPr>
+              <a:t>(lake </a:t>
+            </a:r>
+            <a:r>
+              <a:rPr>
+                <a:solidFill>
+                  <a:srgbClr val="5E5E5E"/>
+                </a:solidFill>
+                <a:latin typeface="Courier"/>
+              </a:rPr>
+              <a:t>==</a:t>
+            </a:r>
+            <a:r>
+              <a:rPr>
+                <a:solidFill>
+                  <a:srgbClr val="003B4F"/>
+                </a:solidFill>
+                <a:latin typeface="Courier"/>
+              </a:rPr>
+              <a:t> </a:t>
+            </a:r>
+            <a:r>
+              <a:rPr>
+                <a:solidFill>
+                  <a:srgbClr val="20794D"/>
+                </a:solidFill>
+                <a:latin typeface="Courier"/>
+              </a:rPr>
+              <a:t>"I3"</a:t>
+            </a:r>
+            <a:r>
+              <a:rPr>
+                <a:solidFill>
+                  <a:srgbClr val="003B4F"/>
+                </a:solidFill>
+                <a:latin typeface="Courier"/>
+              </a:rPr>
+              <a:t>)</a:t>
+            </a:r>
+            <a:br/>
+            <a:br/>
+            <a:r>
+              <a:rPr>
+                <a:solidFill>
+                  <a:srgbClr val="5E5E5E"/>
+                </a:solidFill>
+                <a:latin typeface="Courier"/>
+              </a:rPr>
+              <a:t># Number of samples to simulate</a:t>
+            </a:r>
+            <a:br/>
+            <a:r>
+              <a:rPr>
+                <a:solidFill>
+                  <a:srgbClr val="003B4F"/>
+                </a:solidFill>
+                <a:latin typeface="Courier"/>
+              </a:rPr>
+              <a:t>num_simulations &lt;- </a:t>
+            </a:r>
+            <a:r>
+              <a:rPr>
+                <a:solidFill>
+                  <a:srgbClr val="AD0000"/>
+                </a:solidFill>
+                <a:latin typeface="Courier"/>
+              </a:rPr>
+              <a:t>1000</a:t>
+            </a:r>
+            <a:br/>
+            <a:r>
+              <a:rPr>
+                <a:solidFill>
+                  <a:srgbClr val="003B4F"/>
+                </a:solidFill>
+                <a:latin typeface="Courier"/>
+              </a:rPr>
+              <a:t>sample_size &lt;- </a:t>
+            </a:r>
+            <a:r>
+              <a:rPr>
+                <a:solidFill>
+                  <a:srgbClr val="AD0000"/>
+                </a:solidFill>
+                <a:latin typeface="Courier"/>
+              </a:rPr>
+              <a:t>20</a:t>
+            </a:r>
+            <a:r>
+              <a:rPr>
+                <a:solidFill>
+                  <a:srgbClr val="003B4F"/>
+                </a:solidFill>
+                <a:latin typeface="Courier"/>
+              </a:rPr>
+              <a:t> </a:t>
+            </a:r>
+            <a:r>
+              <a:rPr>
+                <a:solidFill>
+                  <a:srgbClr val="5E5E5E"/>
+                </a:solidFill>
+                <a:latin typeface="Courier"/>
+              </a:rPr>
+              <a:t># change the number and examine the range of values </a:t>
+            </a:r>
+            <a:br/>
+            <a:br/>
+            <a:r>
+              <a:rPr>
+                <a:solidFill>
+                  <a:srgbClr val="5E5E5E"/>
+                </a:solidFill>
+                <a:latin typeface="Courier"/>
+              </a:rPr>
+              <a:t># Simulate many samples and calculate means</a:t>
+            </a:r>
+            <a:br/>
+            <a:r>
+              <a:rPr>
+                <a:solidFill>
+                  <a:srgbClr val="4758AB"/>
+                </a:solidFill>
+                <a:latin typeface="Courier"/>
+              </a:rPr>
+              <a:t>set.seed</a:t>
+            </a:r>
+            <a:r>
+              <a:rPr>
+                <a:solidFill>
+                  <a:srgbClr val="003B4F"/>
+                </a:solidFill>
+                <a:latin typeface="Courier"/>
+              </a:rPr>
+              <a:t>(</a:t>
+            </a:r>
+            <a:r>
+              <a:rPr>
+                <a:solidFill>
+                  <a:srgbClr val="AD0000"/>
+                </a:solidFill>
+                <a:latin typeface="Courier"/>
+              </a:rPr>
+              <a:t>46</a:t>
+            </a:r>
+            <a:r>
+              <a:rPr>
+                <a:solidFill>
+                  <a:srgbClr val="003B4F"/>
+                </a:solidFill>
+                <a:latin typeface="Courier"/>
+              </a:rPr>
+              <a:t>) </a:t>
+            </a:r>
+            <a:r>
+              <a:rPr>
+                <a:solidFill>
+                  <a:srgbClr val="5E5E5E"/>
+                </a:solidFill>
+                <a:latin typeface="Courier"/>
+              </a:rPr>
+              <a:t># For reproducibility</a:t>
+            </a:r>
+            <a:br/>
+            <a:r>
+              <a:rPr>
+                <a:solidFill>
+                  <a:srgbClr val="003B4F"/>
+                </a:solidFill>
+                <a:latin typeface="Courier"/>
+              </a:rPr>
+              <a:t>simulated_means &lt;- </a:t>
+            </a:r>
+            <a:r>
+              <a:rPr>
+                <a:solidFill>
+                  <a:srgbClr val="4758AB"/>
+                </a:solidFill>
+                <a:latin typeface="Courier"/>
+              </a:rPr>
+              <a:t>replicate</a:t>
+            </a:r>
+            <a:r>
+              <a:rPr>
+                <a:solidFill>
+                  <a:srgbClr val="003B4F"/>
+                </a:solidFill>
+                <a:latin typeface="Courier"/>
+              </a:rPr>
+              <a:t>(num_simulations, </a:t>
+            </a:r>
+            <a:r>
+              <a:rPr>
+                <a:solidFill>
+                  <a:srgbClr val="4758AB"/>
+                </a:solidFill>
+                <a:latin typeface="Courier"/>
+              </a:rPr>
+              <a:t>sample_mean</a:t>
+            </a:r>
+            <a:r>
+              <a:rPr>
+                <a:solidFill>
+                  <a:srgbClr val="003B4F"/>
+                </a:solidFill>
+                <a:latin typeface="Courier"/>
+              </a:rPr>
+              <a:t>(i3_data, sample_size))</a:t>
+            </a:r>
+            <a:br/>
+            <a:br/>
+            <a:r>
+              <a:rPr>
+                <a:solidFill>
+                  <a:srgbClr val="5E5E5E"/>
+                </a:solidFill>
+                <a:latin typeface="Courier"/>
+              </a:rPr>
+              <a:t># Calculate the mean and standard deviation of the simulated means</a:t>
+            </a:r>
+            <a:br/>
+            <a:r>
+              <a:rPr>
+                <a:solidFill>
+                  <a:srgbClr val="003B4F"/>
+                </a:solidFill>
+                <a:latin typeface="Courier"/>
+              </a:rPr>
+              <a:t>mean_of_means &lt;- </a:t>
+            </a:r>
+            <a:r>
+              <a:rPr>
+                <a:solidFill>
+                  <a:srgbClr val="4758AB"/>
+                </a:solidFill>
+                <a:latin typeface="Courier"/>
+              </a:rPr>
+              <a:t>mean</a:t>
+            </a:r>
+            <a:r>
+              <a:rPr>
+                <a:solidFill>
+                  <a:srgbClr val="003B4F"/>
+                </a:solidFill>
+                <a:latin typeface="Courier"/>
+              </a:rPr>
+              <a:t>(simulated_means)</a:t>
+            </a:r>
+            <a:br/>
+            <a:r>
+              <a:rPr>
+                <a:solidFill>
+                  <a:srgbClr val="003B4F"/>
+                </a:solidFill>
+                <a:latin typeface="Courier"/>
+              </a:rPr>
+              <a:t>sd_of_means &lt;- </a:t>
+            </a:r>
+            <a:r>
+              <a:rPr>
+                <a:solidFill>
+                  <a:srgbClr val="4758AB"/>
+                </a:solidFill>
+                <a:latin typeface="Courier"/>
+              </a:rPr>
+              <a:t>sd</a:t>
+            </a:r>
+            <a:r>
+              <a:rPr>
+                <a:solidFill>
+                  <a:srgbClr val="003B4F"/>
+                </a:solidFill>
+                <a:latin typeface="Courier"/>
+              </a:rPr>
+              <a:t>(simulated_means)</a:t>
+            </a:r>
+            <a:br/>
+            <a:br/>
+            <a:r>
+              <a:rPr>
+                <a:solidFill>
+                  <a:srgbClr val="5E5E5E"/>
+                </a:solidFill>
+                <a:latin typeface="Courier"/>
+              </a:rPr>
+              <a:t># Create a data frame with the simulated means</a:t>
+            </a:r>
+            <a:br/>
+            <a:r>
+              <a:rPr>
+                <a:solidFill>
+                  <a:srgbClr val="003B4F"/>
+                </a:solidFill>
+                <a:latin typeface="Courier"/>
+              </a:rPr>
+              <a:t>simulated_df &lt;- </a:t>
+            </a:r>
+            <a:r>
+              <a:rPr>
+                <a:solidFill>
+                  <a:srgbClr val="4758AB"/>
+                </a:solidFill>
+                <a:latin typeface="Courier"/>
+              </a:rPr>
+              <a:t>data.frame</a:t>
+            </a:r>
+            <a:r>
+              <a:rPr>
+                <a:solidFill>
+                  <a:srgbClr val="003B4F"/>
+                </a:solidFill>
+                <a:latin typeface="Courier"/>
+              </a:rPr>
+              <a:t>(</a:t>
+            </a:r>
+            <a:r>
+              <a:rPr>
+                <a:solidFill>
+                  <a:srgbClr val="657422"/>
+                </a:solidFill>
+                <a:latin typeface="Courier"/>
+              </a:rPr>
+              <a:t>sample_mean =</a:t>
+            </a:r>
+            <a:r>
+              <a:rPr>
+                <a:solidFill>
+                  <a:srgbClr val="003B4F"/>
+                </a:solidFill>
+                <a:latin typeface="Courier"/>
+              </a:rPr>
+              <a:t> simulated_means)</a:t>
+            </a:r>
+            <a:br/>
+            <a:br/>
+            <a:r>
+              <a:rPr>
+                <a:solidFill>
+                  <a:srgbClr val="5E5E5E"/>
+                </a:solidFill>
+                <a:latin typeface="Courier"/>
+              </a:rPr>
+              <a:t># Plot the sampling distribution</a:t>
+            </a:r>
+            <a:br/>
+            <a:r>
+              <a:rPr>
+                <a:solidFill>
+                  <a:srgbClr val="4758AB"/>
+                </a:solidFill>
+                <a:latin typeface="Courier"/>
+              </a:rPr>
+              <a:t>ggplot</a:t>
+            </a:r>
+            <a:r>
+              <a:rPr>
+                <a:solidFill>
+                  <a:srgbClr val="003B4F"/>
+                </a:solidFill>
+                <a:latin typeface="Courier"/>
+              </a:rPr>
+              <a:t>(simulated_df, </a:t>
+            </a:r>
+            <a:r>
+              <a:rPr>
+                <a:solidFill>
+                  <a:srgbClr val="4758AB"/>
+                </a:solidFill>
+                <a:latin typeface="Courier"/>
+              </a:rPr>
+              <a:t>aes</a:t>
+            </a:r>
+            <a:r>
+              <a:rPr>
+                <a:solidFill>
+                  <a:srgbClr val="003B4F"/>
+                </a:solidFill>
+                <a:latin typeface="Courier"/>
+              </a:rPr>
+              <a:t>(</a:t>
+            </a:r>
+            <a:r>
+              <a:rPr>
+                <a:solidFill>
+                  <a:srgbClr val="657422"/>
+                </a:solidFill>
+                <a:latin typeface="Courier"/>
+              </a:rPr>
+              <a:t>x =</a:t>
+            </a:r>
+            <a:r>
+              <a:rPr>
+                <a:solidFill>
+                  <a:srgbClr val="003B4F"/>
+                </a:solidFill>
+                <a:latin typeface="Courier"/>
+              </a:rPr>
+              <a:t> sample_mean)) </a:t>
+            </a:r>
+            <a:r>
+              <a:rPr>
+                <a:solidFill>
+                  <a:srgbClr val="5E5E5E"/>
+                </a:solidFill>
+                <a:latin typeface="Courier"/>
+              </a:rPr>
+              <a:t>+</a:t>
+            </a:r>
+            <a:br/>
+            <a:r>
+              <a:rPr>
+                <a:solidFill>
+                  <a:srgbClr val="003B4F"/>
+                </a:solidFill>
+                <a:latin typeface="Courier"/>
+              </a:rPr>
+              <a:t>  </a:t>
+            </a:r>
+            <a:r>
+              <a:rPr>
+                <a:solidFill>
+                  <a:srgbClr val="4758AB"/>
+                </a:solidFill>
+                <a:latin typeface="Courier"/>
+              </a:rPr>
+              <a:t>geom_histogram</a:t>
+            </a:r>
+            <a:r>
+              <a:rPr>
+                <a:solidFill>
+                  <a:srgbClr val="003B4F"/>
+                </a:solidFill>
+                <a:latin typeface="Courier"/>
+              </a:rPr>
+              <a:t>(</a:t>
+            </a:r>
+            <a:r>
+              <a:rPr>
+                <a:solidFill>
+                  <a:srgbClr val="657422"/>
+                </a:solidFill>
+                <a:latin typeface="Courier"/>
+              </a:rPr>
+              <a:t>bins =</a:t>
+            </a:r>
+            <a:r>
+              <a:rPr>
+                <a:solidFill>
+                  <a:srgbClr val="003B4F"/>
+                </a:solidFill>
+                <a:latin typeface="Courier"/>
+              </a:rPr>
+              <a:t> </a:t>
+            </a:r>
+            <a:r>
+              <a:rPr>
+                <a:solidFill>
+                  <a:srgbClr val="AD0000"/>
+                </a:solidFill>
+                <a:latin typeface="Courier"/>
+              </a:rPr>
+              <a:t>30</a:t>
+            </a:r>
+            <a:r>
+              <a:rPr>
+                <a:solidFill>
+                  <a:srgbClr val="003B4F"/>
+                </a:solidFill>
+                <a:latin typeface="Courier"/>
+              </a:rPr>
+              <a:t>, </a:t>
+            </a:r>
+            <a:r>
+              <a:rPr>
+                <a:solidFill>
+                  <a:srgbClr val="657422"/>
+                </a:solidFill>
+                <a:latin typeface="Courier"/>
+              </a:rPr>
+              <a:t>fill =</a:t>
+            </a:r>
+            <a:r>
+              <a:rPr>
+                <a:solidFill>
+                  <a:srgbClr val="003B4F"/>
+                </a:solidFill>
+                <a:latin typeface="Courier"/>
+              </a:rPr>
+              <a:t> </a:t>
+            </a:r>
+            <a:r>
+              <a:rPr>
+                <a:solidFill>
+                  <a:srgbClr val="20794D"/>
+                </a:solidFill>
+                <a:latin typeface="Courier"/>
+              </a:rPr>
+              <a:t>"blue"</a:t>
+            </a:r>
+            <a:r>
+              <a:rPr>
+                <a:solidFill>
+                  <a:srgbClr val="003B4F"/>
+                </a:solidFill>
+                <a:latin typeface="Courier"/>
+              </a:rPr>
+              <a:t>, </a:t>
+            </a:r>
+            <a:r>
+              <a:rPr>
+                <a:solidFill>
+                  <a:srgbClr val="657422"/>
+                </a:solidFill>
+                <a:latin typeface="Courier"/>
+              </a:rPr>
+              <a:t>alpha =</a:t>
+            </a:r>
+            <a:r>
+              <a:rPr>
+                <a:solidFill>
+                  <a:srgbClr val="003B4F"/>
+                </a:solidFill>
+                <a:latin typeface="Courier"/>
+              </a:rPr>
+              <a:t> </a:t>
+            </a:r>
+            <a:r>
+              <a:rPr>
+                <a:solidFill>
+                  <a:srgbClr val="AD0000"/>
+                </a:solidFill>
+                <a:latin typeface="Courier"/>
+              </a:rPr>
+              <a:t>0.7</a:t>
+            </a:r>
+            <a:r>
+              <a:rPr>
+                <a:solidFill>
+                  <a:srgbClr val="003B4F"/>
+                </a:solidFill>
+                <a:latin typeface="Courier"/>
+              </a:rPr>
+              <a:t>) </a:t>
+            </a:r>
+            <a:r>
+              <a:rPr>
+                <a:solidFill>
+                  <a:srgbClr val="5E5E5E"/>
+                </a:solidFill>
+                <a:latin typeface="Courier"/>
+              </a:rPr>
+              <a:t>+</a:t>
+            </a:r>
+            <a:br/>
+            <a:r>
+              <a:rPr>
+                <a:solidFill>
+                  <a:srgbClr val="003B4F"/>
+                </a:solidFill>
+                <a:latin typeface="Courier"/>
+              </a:rPr>
+              <a:t>  </a:t>
+            </a:r>
+            <a:r>
+              <a:rPr>
+                <a:solidFill>
+                  <a:srgbClr val="4758AB"/>
+                </a:solidFill>
+                <a:latin typeface="Courier"/>
+              </a:rPr>
+              <a:t>geom_vline</a:t>
+            </a:r>
+            <a:r>
+              <a:rPr>
+                <a:solidFill>
+                  <a:srgbClr val="003B4F"/>
+                </a:solidFill>
+                <a:latin typeface="Courier"/>
+              </a:rPr>
+              <a:t>(</a:t>
+            </a:r>
+            <a:r>
+              <a:rPr>
+                <a:solidFill>
+                  <a:srgbClr val="657422"/>
+                </a:solidFill>
+                <a:latin typeface="Courier"/>
+              </a:rPr>
+              <a:t>xintercept =</a:t>
+            </a:r>
+            <a:r>
+              <a:rPr>
+                <a:solidFill>
+                  <a:srgbClr val="003B4F"/>
+                </a:solidFill>
+                <a:latin typeface="Courier"/>
+              </a:rPr>
+              <a:t> </a:t>
+            </a:r>
+            <a:r>
+              <a:rPr>
+                <a:solidFill>
+                  <a:srgbClr val="4758AB"/>
+                </a:solidFill>
+                <a:latin typeface="Courier"/>
+              </a:rPr>
+              <a:t>mean</a:t>
+            </a:r>
+            <a:r>
+              <a:rPr>
+                <a:solidFill>
+                  <a:srgbClr val="003B4F"/>
+                </a:solidFill>
+                <a:latin typeface="Courier"/>
+              </a:rPr>
+              <a:t>(i3_data</a:t>
+            </a:r>
+            <a:r>
+              <a:rPr>
+                <a:solidFill>
+                  <a:srgbClr val="5E5E5E"/>
+                </a:solidFill>
+                <a:latin typeface="Courier"/>
+              </a:rPr>
+              <a:t>$</a:t>
+            </a:r>
+            <a:r>
+              <a:rPr>
+                <a:solidFill>
+                  <a:srgbClr val="003B4F"/>
+                </a:solidFill>
+                <a:latin typeface="Courier"/>
+              </a:rPr>
+              <a:t>length_mm), </a:t>
+            </a:r>
+            <a:br/>
+            <a:r>
+              <a:rPr>
+                <a:solidFill>
+                  <a:srgbClr val="003B4F"/>
+                </a:solidFill>
+                <a:latin typeface="Courier"/>
+              </a:rPr>
+              <a:t>             </a:t>
+            </a:r>
+            <a:r>
+              <a:rPr>
+                <a:solidFill>
+                  <a:srgbClr val="657422"/>
+                </a:solidFill>
+                <a:latin typeface="Courier"/>
+              </a:rPr>
+              <a:t>linetype =</a:t>
+            </a:r>
+            <a:r>
+              <a:rPr>
+                <a:solidFill>
+                  <a:srgbClr val="003B4F"/>
+                </a:solidFill>
+                <a:latin typeface="Courier"/>
+              </a:rPr>
+              <a:t> </a:t>
+            </a:r>
+            <a:r>
+              <a:rPr>
+                <a:solidFill>
+                  <a:srgbClr val="20794D"/>
+                </a:solidFill>
+                <a:latin typeface="Courier"/>
+              </a:rPr>
+              <a:t>"dashed"</a:t>
+            </a:r>
+            <a:r>
+              <a:rPr>
+                <a:solidFill>
+                  <a:srgbClr val="003B4F"/>
+                </a:solidFill>
+                <a:latin typeface="Courier"/>
+              </a:rPr>
+              <a:t>, </a:t>
+            </a:r>
+            <a:r>
+              <a:rPr>
+                <a:solidFill>
+                  <a:srgbClr val="657422"/>
+                </a:solidFill>
+                <a:latin typeface="Courier"/>
+              </a:rPr>
+              <a:t>color =</a:t>
+            </a:r>
+            <a:r>
+              <a:rPr>
+                <a:solidFill>
+                  <a:srgbClr val="003B4F"/>
+                </a:solidFill>
+                <a:latin typeface="Courier"/>
+              </a:rPr>
+              <a:t> </a:t>
+            </a:r>
+            <a:r>
+              <a:rPr>
+                <a:solidFill>
+                  <a:srgbClr val="20794D"/>
+                </a:solidFill>
+                <a:latin typeface="Courier"/>
+              </a:rPr>
+              <a:t>"red"</a:t>
+            </a:r>
+            <a:r>
+              <a:rPr>
+                <a:solidFill>
+                  <a:srgbClr val="003B4F"/>
+                </a:solidFill>
+                <a:latin typeface="Courier"/>
+              </a:rPr>
+              <a:t>, </a:t>
+            </a:r>
+            <a:r>
+              <a:rPr>
+                <a:solidFill>
+                  <a:srgbClr val="657422"/>
+                </a:solidFill>
+                <a:latin typeface="Courier"/>
+              </a:rPr>
+              <a:t>linewidth =</a:t>
+            </a:r>
+            <a:r>
+              <a:rPr>
+                <a:solidFill>
+                  <a:srgbClr val="003B4F"/>
+                </a:solidFill>
+                <a:latin typeface="Courier"/>
+              </a:rPr>
+              <a:t> </a:t>
+            </a:r>
+            <a:r>
+              <a:rPr>
+                <a:solidFill>
+                  <a:srgbClr val="AD0000"/>
+                </a:solidFill>
+                <a:latin typeface="Courier"/>
+              </a:rPr>
+              <a:t>1</a:t>
+            </a:r>
+            <a:r>
+              <a:rPr>
+                <a:solidFill>
+                  <a:srgbClr val="003B4F"/>
+                </a:solidFill>
+                <a:latin typeface="Courier"/>
+              </a:rPr>
+              <a:t>) </a:t>
+            </a:r>
+            <a:r>
+              <a:rPr>
+                <a:solidFill>
+                  <a:srgbClr val="5E5E5E"/>
+                </a:solidFill>
+                <a:latin typeface="Courier"/>
+              </a:rPr>
+              <a:t>+</a:t>
+            </a:r>
+            <a:br/>
+            <a:r>
+              <a:rPr>
+                <a:solidFill>
+                  <a:srgbClr val="003B4F"/>
+                </a:solidFill>
+                <a:latin typeface="Courier"/>
+              </a:rPr>
+              <a:t>  </a:t>
+            </a:r>
+            <a:r>
+              <a:rPr>
+                <a:solidFill>
+                  <a:srgbClr val="4758AB"/>
+                </a:solidFill>
+                <a:latin typeface="Courier"/>
+              </a:rPr>
+              <a:t>annotate</a:t>
+            </a:r>
+            <a:r>
+              <a:rPr>
+                <a:solidFill>
+                  <a:srgbClr val="003B4F"/>
+                </a:solidFill>
+                <a:latin typeface="Courier"/>
+              </a:rPr>
+              <a:t>(</a:t>
+            </a:r>
+            <a:r>
+              <a:rPr>
+                <a:solidFill>
+                  <a:srgbClr val="20794D"/>
+                </a:solidFill>
+                <a:latin typeface="Courier"/>
+              </a:rPr>
+              <a:t>"text"</a:t>
+            </a:r>
+            <a:r>
+              <a:rPr>
+                <a:solidFill>
+                  <a:srgbClr val="003B4F"/>
+                </a:solidFill>
+                <a:latin typeface="Courier"/>
+              </a:rPr>
+              <a:t>, </a:t>
+            </a:r>
+            <a:r>
+              <a:rPr>
+                <a:solidFill>
+                  <a:srgbClr val="657422"/>
+                </a:solidFill>
+                <a:latin typeface="Courier"/>
+              </a:rPr>
+              <a:t>x =</a:t>
+            </a:r>
+            <a:r>
+              <a:rPr>
+                <a:solidFill>
+                  <a:srgbClr val="003B4F"/>
+                </a:solidFill>
+                <a:latin typeface="Courier"/>
+              </a:rPr>
+              <a:t> </a:t>
+            </a:r>
+            <a:r>
+              <a:rPr>
+                <a:solidFill>
+                  <a:srgbClr val="4758AB"/>
+                </a:solidFill>
+                <a:latin typeface="Courier"/>
+              </a:rPr>
+              <a:t>mean</a:t>
+            </a:r>
+            <a:r>
+              <a:rPr>
+                <a:solidFill>
+                  <a:srgbClr val="003B4F"/>
+                </a:solidFill>
+                <a:latin typeface="Courier"/>
+              </a:rPr>
+              <a:t>(i3_data</a:t>
+            </a:r>
+            <a:r>
+              <a:rPr>
+                <a:solidFill>
+                  <a:srgbClr val="5E5E5E"/>
+                </a:solidFill>
+                <a:latin typeface="Courier"/>
+              </a:rPr>
+              <a:t>$</a:t>
+            </a:r>
+            <a:r>
+              <a:rPr>
+                <a:solidFill>
+                  <a:srgbClr val="003B4F"/>
+                </a:solidFill>
+                <a:latin typeface="Courier"/>
+              </a:rPr>
+              <a:t>length_mm) </a:t>
+            </a:r>
+            <a:r>
+              <a:rPr>
+                <a:solidFill>
+                  <a:srgbClr val="5E5E5E"/>
+                </a:solidFill>
+                <a:latin typeface="Courier"/>
+              </a:rPr>
+              <a:t>+</a:t>
+            </a:r>
+            <a:r>
+              <a:rPr>
+                <a:solidFill>
+                  <a:srgbClr val="003B4F"/>
+                </a:solidFill>
+                <a:latin typeface="Courier"/>
+              </a:rPr>
+              <a:t> </a:t>
+            </a:r>
+            <a:r>
+              <a:rPr>
+                <a:solidFill>
+                  <a:srgbClr val="AD0000"/>
+                </a:solidFill>
+                <a:latin typeface="Courier"/>
+              </a:rPr>
+              <a:t>2</a:t>
+            </a:r>
+            <a:r>
+              <a:rPr>
+                <a:solidFill>
+                  <a:srgbClr val="003B4F"/>
+                </a:solidFill>
+                <a:latin typeface="Courier"/>
+              </a:rPr>
+              <a:t>, </a:t>
+            </a:r>
+            <a:r>
+              <a:rPr>
+                <a:solidFill>
+                  <a:srgbClr val="657422"/>
+                </a:solidFill>
+                <a:latin typeface="Courier"/>
+              </a:rPr>
+              <a:t>y =</a:t>
+            </a:r>
+            <a:r>
+              <a:rPr>
+                <a:solidFill>
+                  <a:srgbClr val="003B4F"/>
+                </a:solidFill>
+                <a:latin typeface="Courier"/>
+              </a:rPr>
+              <a:t> </a:t>
+            </a:r>
+            <a:r>
+              <a:rPr>
+                <a:solidFill>
+                  <a:srgbClr val="AD0000"/>
+                </a:solidFill>
+                <a:latin typeface="Courier"/>
+              </a:rPr>
+              <a:t>50</a:t>
+            </a:r>
+            <a:r>
+              <a:rPr>
+                <a:solidFill>
+                  <a:srgbClr val="003B4F"/>
+                </a:solidFill>
+                <a:latin typeface="Courier"/>
+              </a:rPr>
+              <a:t>, </a:t>
+            </a:r>
+            <a:br/>
+            <a:r>
+              <a:rPr>
+                <a:solidFill>
+                  <a:srgbClr val="003B4F"/>
+                </a:solidFill>
+                <a:latin typeface="Courier"/>
+              </a:rPr>
+              <a:t>           </a:t>
+            </a:r>
+            <a:r>
+              <a:rPr>
+                <a:solidFill>
+                  <a:srgbClr val="657422"/>
+                </a:solidFill>
+                <a:latin typeface="Courier"/>
+              </a:rPr>
+              <a:t>label =</a:t>
+            </a:r>
+            <a:r>
+              <a:rPr>
+                <a:solidFill>
+                  <a:srgbClr val="003B4F"/>
+                </a:solidFill>
+                <a:latin typeface="Courier"/>
+              </a:rPr>
+              <a:t> </a:t>
+            </a:r>
+            <a:r>
+              <a:rPr>
+                <a:solidFill>
+                  <a:srgbClr val="20794D"/>
+                </a:solidFill>
+                <a:latin typeface="Courier"/>
+              </a:rPr>
+              <a:t>"Full sample mean"</a:t>
+            </a:r>
+            <a:r>
+              <a:rPr>
+                <a:solidFill>
+                  <a:srgbClr val="003B4F"/>
+                </a:solidFill>
+                <a:latin typeface="Courier"/>
+              </a:rPr>
+              <a:t>, </a:t>
+            </a:r>
+            <a:r>
+              <a:rPr>
+                <a:solidFill>
+                  <a:srgbClr val="657422"/>
+                </a:solidFill>
+                <a:latin typeface="Courier"/>
+              </a:rPr>
+              <a:t>color =</a:t>
+            </a:r>
+            <a:r>
+              <a:rPr>
+                <a:solidFill>
+                  <a:srgbClr val="003B4F"/>
+                </a:solidFill>
+                <a:latin typeface="Courier"/>
+              </a:rPr>
+              <a:t> </a:t>
+            </a:r>
+            <a:r>
+              <a:rPr>
+                <a:solidFill>
+                  <a:srgbClr val="20794D"/>
+                </a:solidFill>
+                <a:latin typeface="Courier"/>
+              </a:rPr>
+              <a:t>"red"</a:t>
+            </a:r>
+            <a:r>
+              <a:rPr>
+                <a:solidFill>
+                  <a:srgbClr val="003B4F"/>
+                </a:solidFill>
+                <a:latin typeface="Courier"/>
+              </a:rPr>
+              <a:t>) </a:t>
+            </a:r>
+            <a:r>
+              <a:rPr>
+                <a:solidFill>
+                  <a:srgbClr val="5E5E5E"/>
+                </a:solidFill>
+                <a:latin typeface="Courier"/>
+              </a:rPr>
+              <a:t>+</a:t>
+            </a:r>
+            <a:br/>
+            <a:r>
+              <a:rPr>
+                <a:solidFill>
+                  <a:srgbClr val="003B4F"/>
+                </a:solidFill>
+                <a:latin typeface="Courier"/>
+              </a:rPr>
+              <a:t>  </a:t>
+            </a:r>
+            <a:r>
+              <a:rPr>
+                <a:solidFill>
+                  <a:srgbClr val="4758AB"/>
+                </a:solidFill>
+                <a:latin typeface="Courier"/>
+              </a:rPr>
+              <a:t>labs</a:t>
+            </a:r>
+            <a:r>
+              <a:rPr>
+                <a:solidFill>
+                  <a:srgbClr val="003B4F"/>
+                </a:solidFill>
+                <a:latin typeface="Courier"/>
+              </a:rPr>
+              <a:t>(</a:t>
+            </a:r>
+            <a:r>
+              <a:rPr>
+                <a:solidFill>
+                  <a:srgbClr val="657422"/>
+                </a:solidFill>
+                <a:latin typeface="Courier"/>
+              </a:rPr>
+              <a:t>title =</a:t>
+            </a:r>
+            <a:r>
+              <a:rPr>
+                <a:solidFill>
+                  <a:srgbClr val="003B4F"/>
+                </a:solidFill>
+                <a:latin typeface="Courier"/>
+              </a:rPr>
+              <a:t> </a:t>
+            </a:r>
+            <a:r>
+              <a:rPr>
+                <a:solidFill>
+                  <a:srgbClr val="20794D"/>
+                </a:solidFill>
+                <a:latin typeface="Courier"/>
+              </a:rPr>
+              <a:t>"Simulated Sampling Distribution of the Mean"</a:t>
+            </a:r>
+            <a:r>
+              <a:rPr>
+                <a:solidFill>
+                  <a:srgbClr val="003B4F"/>
+                </a:solidFill>
+                <a:latin typeface="Courier"/>
+              </a:rPr>
+              <a:t>,</a:t>
+            </a:r>
+            <a:br/>
+            <a:r>
+              <a:rPr>
+                <a:solidFill>
+                  <a:srgbClr val="003B4F"/>
+                </a:solidFill>
+                <a:latin typeface="Courier"/>
+              </a:rPr>
+              <a:t>       </a:t>
+            </a:r>
+            <a:r>
+              <a:rPr>
+                <a:solidFill>
+                  <a:srgbClr val="657422"/>
+                </a:solidFill>
+                <a:latin typeface="Courier"/>
+              </a:rPr>
+              <a:t>subtitle =</a:t>
+            </a:r>
+            <a:r>
+              <a:rPr>
+                <a:solidFill>
+                  <a:srgbClr val="003B4F"/>
+                </a:solidFill>
+                <a:latin typeface="Courier"/>
+              </a:rPr>
+              <a:t> </a:t>
+            </a:r>
+            <a:r>
+              <a:rPr>
+                <a:solidFill>
+                  <a:srgbClr val="4758AB"/>
+                </a:solidFill>
+                <a:latin typeface="Courier"/>
+              </a:rPr>
+              <a:t>paste</a:t>
+            </a:r>
+            <a:r>
+              <a:rPr>
+                <a:solidFill>
+                  <a:srgbClr val="003B4F"/>
+                </a:solidFill>
+                <a:latin typeface="Courier"/>
+              </a:rPr>
+              <a:t>(</a:t>
+            </a:r>
+            <a:r>
+              <a:rPr>
+                <a:solidFill>
+                  <a:srgbClr val="20794D"/>
+                </a:solidFill>
+                <a:latin typeface="Courier"/>
+              </a:rPr>
+              <a:t>"Based on"</a:t>
+            </a:r>
+            <a:r>
+              <a:rPr>
+                <a:solidFill>
+                  <a:srgbClr val="003B4F"/>
+                </a:solidFill>
+                <a:latin typeface="Courier"/>
+              </a:rPr>
+              <a:t>, num_simulations, </a:t>
+            </a:r>
+            <a:r>
+              <a:rPr>
+                <a:solidFill>
+                  <a:srgbClr val="20794D"/>
+                </a:solidFill>
+                <a:latin typeface="Courier"/>
+              </a:rPr>
+              <a:t>"samples of size"</a:t>
+            </a:r>
+            <a:r>
+              <a:rPr>
+                <a:solidFill>
+                  <a:srgbClr val="003B4F"/>
+                </a:solidFill>
+                <a:latin typeface="Courier"/>
+              </a:rPr>
+              <a:t>, sample_size),</a:t>
+            </a:r>
+            <a:br/>
+            <a:r>
+              <a:rPr>
+                <a:solidFill>
+                  <a:srgbClr val="003B4F"/>
+                </a:solidFill>
+                <a:latin typeface="Courier"/>
+              </a:rPr>
+              <a:t>       </a:t>
+            </a:r>
+            <a:r>
+              <a:rPr>
+                <a:solidFill>
+                  <a:srgbClr val="657422"/>
+                </a:solidFill>
+                <a:latin typeface="Courier"/>
+              </a:rPr>
+              <a:t>x =</a:t>
+            </a:r>
+            <a:r>
+              <a:rPr>
+                <a:solidFill>
+                  <a:srgbClr val="003B4F"/>
+                </a:solidFill>
+                <a:latin typeface="Courier"/>
+              </a:rPr>
+              <a:t> </a:t>
+            </a:r>
+            <a:r>
+              <a:rPr>
+                <a:solidFill>
+                  <a:srgbClr val="20794D"/>
+                </a:solidFill>
+                <a:latin typeface="Courier"/>
+              </a:rPr>
+              <a:t>"Sample Mean (mm)"</a:t>
+            </a:r>
+            <a:r>
+              <a:rPr>
+                <a:solidFill>
+                  <a:srgbClr val="003B4F"/>
+                </a:solidFill>
+                <a:latin typeface="Courier"/>
+              </a:rPr>
+              <a:t>,</a:t>
+            </a:r>
+            <a:br/>
+            <a:r>
+              <a:rPr>
+                <a:solidFill>
+                  <a:srgbClr val="003B4F"/>
+                </a:solidFill>
+                <a:latin typeface="Courier"/>
+              </a:rPr>
+              <a:t>       </a:t>
+            </a:r>
+            <a:r>
+              <a:rPr>
+                <a:solidFill>
+                  <a:srgbClr val="657422"/>
+                </a:solidFill>
+                <a:latin typeface="Courier"/>
+              </a:rPr>
+              <a:t>y =</a:t>
+            </a:r>
+            <a:r>
+              <a:rPr>
+                <a:solidFill>
+                  <a:srgbClr val="003B4F"/>
+                </a:solidFill>
+                <a:latin typeface="Courier"/>
+              </a:rPr>
+              <a:t> </a:t>
+            </a:r>
+            <a:r>
+              <a:rPr>
+                <a:solidFill>
+                  <a:srgbClr val="20794D"/>
+                </a:solidFill>
+                <a:latin typeface="Courier"/>
+              </a:rPr>
+              <a:t>"Frequency"</a:t>
+            </a:r>
+            <a:r>
+              <a:rPr>
+                <a:solidFill>
+                  <a:srgbClr val="003B4F"/>
+                </a:solidFill>
+                <a:latin typeface="Courier"/>
+              </a:rPr>
+              <a:t>) </a:t>
+            </a:r>
+            <a:r>
+              <a:rPr>
+                <a:solidFill>
+                  <a:srgbClr val="5E5E5E"/>
+                </a:solidFill>
+                <a:latin typeface="Courier"/>
+              </a:rPr>
+              <a:t>+</a:t>
+            </a:r>
+            <a:br/>
+            <a:r>
+              <a:rPr>
+                <a:solidFill>
+                  <a:srgbClr val="003B4F"/>
+                </a:solidFill>
+                <a:latin typeface="Courier"/>
+              </a:rPr>
+              <a:t>  </a:t>
+            </a:r>
+            <a:r>
+              <a:rPr>
+                <a:solidFill>
+                  <a:srgbClr val="4758AB"/>
+                </a:solidFill>
+                <a:latin typeface="Courier"/>
+              </a:rPr>
+              <a:t>theme_minimal</a:t>
+            </a:r>
+            <a:r>
+              <a:rPr>
+                <a:solidFill>
+                  <a:srgbClr val="003B4F"/>
+                </a:solidFill>
+                <a:latin typeface="Courier"/>
+              </a:rPr>
+              <a:t>()</a:t>
             </a:r>
           </a:p>
         </p:txBody>
       </p:sp>
       <p:pic>
         <p:nvPicPr>
-          <p:cNvPr descr="03_01_lecture_powerpoint_files/figure-pptx/unnamed-chunk-7-1.png" id="0" name="Picture 1"/>
+          <p:cNvPr descr="03_01_lecture_powerpoint_files/figure-pptx/unnamed-chunk-6-1.png" id="0" name="Picture 1"/>
           <p:cNvPicPr>
             <a:picLocks noGrp="1" noChangeAspect="1"/>
           </p:cNvPicPr>
@@ -10319,8 +11156,8 @@
         </p:blipFill>
         <p:spPr bwMode="auto">
           <a:xfrm>
-            <a:off x="2197100" y="609600"/>
-            <a:ext cx="4699000" cy="3911600"/>
+            <a:off x="3657600" y="977900"/>
+            <a:ext cx="5232400" cy="3733800"/>
           </a:xfrm>
           <a:prstGeom prst="rect">
             <a:avLst/>
@@ -10357,36 +11194,6 @@
       </p:grpSpPr>
       <p:sp>
         <p:nvSpPr>
-          <p:cNvPr id="2" name="Title 1"/>
-          <p:cNvSpPr>
-            <a:spLocks noGrp="1"/>
-          </p:cNvSpPr>
-          <p:nvPr>
-            <p:ph type="title"/>
-          </p:nvPr>
-        </p:nvSpPr>
-        <p:spPr>
-          <a:xfrm>
-            <a:off x="0" y="0"/>
-            <a:ext cx="9144000" cy="582780"/>
-          </a:xfrm>
-        </p:spPr>
-        <p:txBody>
-          <a:bodyPr/>
-          <a:lstStyle/>
-          <a:p>
-            <a:pPr lvl="0" indent="0" marL="0">
-              <a:buNone/>
-            </a:pPr>
-            <a:r>
-              <a:rPr b="1"/>
-              <a:t>Sampling Distribution of the Mean</a:t>
-            </a:r>
-          </a:p>
-        </p:txBody>
-      </p:sp>
-      <p:sp>
-        <p:nvSpPr>
           <p:cNvPr id="3" name="Content Placeholder 2"/>
           <p:cNvSpPr>
             <a:spLocks noGrp="1"/>
@@ -10405,24 +11212,7 @@
             </a:pPr>
             <a:r>
               <a:rPr/>
-              <a:t>The </a:t>
-            </a:r>
-            <a:r>
-              <a:rPr b="1"/>
-              <a:t>sampling distribution of the mean</a:t>
-            </a:r>
-            <a:r>
-              <a:rPr/>
-              <a:t> is the theoretical distribution of all possible sample means of a given sample size from a population.</a:t>
-            </a:r>
-          </a:p>
-          <a:p>
-            <a:pPr lvl="0" indent="0" marL="0">
-              <a:buNone/>
-            </a:pPr>
-            <a:r>
-              <a:rPr/>
-              <a:t>Important properties:</a:t>
+              <a:t>Notice that the simulated sampling distribution:</a:t>
             </a:r>
           </a:p>
           <a:p>
@@ -10431,7 +11221,7 @@
             </a:pPr>
             <a:r>
               <a:rPr/>
-              <a:t>It is centered at the population mean (μ)</a:t>
+              <a:t>Is approximately normally distributed</a:t>
             </a:r>
           </a:p>
           <a:p>
@@ -10440,7 +11230,7 @@
             </a:pPr>
             <a:r>
               <a:rPr/>
-              <a:t>Its standard deviation is the standard error (σ/√n)</a:t>
+              <a:t>Is centered around the overall sample mean</a:t>
             </a:r>
           </a:p>
           <a:p>
@@ -10449,46 +11239,7 @@
             </a:pPr>
             <a:r>
               <a:rPr/>
-              <a:t>For large sample sizes, it approaches a normal distribution (Central Limit Theorem)</a:t>
-            </a:r>
-          </a:p>
-          <a:p>
-            <a:pPr lvl="0" indent="0" marL="0">
-              <a:buNone/>
-            </a:pPr>
-            <a:r>
-              <a:rPr/>
-              <a:t>The larger the sample size:</a:t>
-            </a:r>
-          </a:p>
-          <a:p>
-            <a:pPr lvl="0"/>
-            <a:r>
-              <a:rPr/>
-              <a:t>The narrower the sampling distribution</a:t>
-            </a:r>
-          </a:p>
-          <a:p>
-            <a:pPr lvl="0"/>
-            <a:r>
-              <a:rPr/>
-              <a:t>The smaller the standard error</a:t>
-            </a:r>
-          </a:p>
-          <a:p>
-            <a:pPr lvl="0"/>
-            <a:r>
-              <a:rPr/>
-              <a:t>The more precise our estimate of the population mean</a:t>
-            </a:r>
-          </a:p>
-          <a:p>
-            <a:pPr lvl="0" indent="0" marL="0">
-              <a:buNone/>
-            </a:pPr>
-            <a:r>
-              <a:rPr/>
-              <a:t>Let’s simulate the sampling distribution for Lake I3 fish data.</a:t>
+              <a:t>Has a spread that is related to the standard error</a:t>
             </a:r>
           </a:p>
         </p:txBody>
@@ -10540,7 +11291,7 @@
             </a:pPr>
             <a:r>
               <a:rPr b="1"/>
-              <a:t>Simulating the Sampling Distribution</a:t>
+              <a:t>Standard Error and Sample Size</a:t>
             </a:r>
           </a:p>
         </p:txBody>
@@ -10565,379 +11316,7 @@
             </a:pPr>
             <a:r>
               <a:rPr/>
-              <a:t>Let’s simulate taking many samples from Lake I3 to visualize the sampling distribution:</a:t>
-            </a:r>
-          </a:p>
-          <a:p>
-            <a:pPr lvl="0" indent="0">
-              <a:buNone/>
-            </a:pPr>
-            <a:r>
-              <a:rPr>
-                <a:solidFill>
-                  <a:srgbClr val="5E5E5E"/>
-                </a:solidFill>
-                <a:latin typeface="Courier"/>
-              </a:rPr>
-              <a:t># Filter for Lake I3</a:t>
-            </a:r>
-            <a:br/>
-            <a:r>
-              <a:rPr>
-                <a:solidFill>
-                  <a:srgbClr val="003B4F"/>
-                </a:solidFill>
-                <a:latin typeface="Courier"/>
-              </a:rPr>
-              <a:t>i3_data &lt;- grayling_df </a:t>
-            </a:r>
-            <a:r>
-              <a:rPr>
-                <a:solidFill>
-                  <a:srgbClr val="5E5E5E"/>
-                </a:solidFill>
-                <a:latin typeface="Courier"/>
-              </a:rPr>
-              <a:t>%&gt;%</a:t>
-            </a:r>
-            <a:r>
-              <a:rPr>
-                <a:solidFill>
-                  <a:srgbClr val="003B4F"/>
-                </a:solidFill>
-                <a:latin typeface="Courier"/>
-              </a:rPr>
-              <a:t> </a:t>
-            </a:r>
-            <a:r>
-              <a:rPr>
-                <a:solidFill>
-                  <a:srgbClr val="4758AB"/>
-                </a:solidFill>
-                <a:latin typeface="Courier"/>
-              </a:rPr>
-              <a:t>filter</a:t>
-            </a:r>
-            <a:r>
-              <a:rPr>
-                <a:solidFill>
-                  <a:srgbClr val="003B4F"/>
-                </a:solidFill>
-                <a:latin typeface="Courier"/>
-              </a:rPr>
-              <a:t>(lake </a:t>
-            </a:r>
-            <a:r>
-              <a:rPr>
-                <a:solidFill>
-                  <a:srgbClr val="5E5E5E"/>
-                </a:solidFill>
-                <a:latin typeface="Courier"/>
-              </a:rPr>
-              <a:t>==</a:t>
-            </a:r>
-            <a:r>
-              <a:rPr>
-                <a:solidFill>
-                  <a:srgbClr val="003B4F"/>
-                </a:solidFill>
-                <a:latin typeface="Courier"/>
-              </a:rPr>
-              <a:t> </a:t>
-            </a:r>
-            <a:r>
-              <a:rPr>
-                <a:solidFill>
-                  <a:srgbClr val="20794D"/>
-                </a:solidFill>
-                <a:latin typeface="Courier"/>
-              </a:rPr>
-              <a:t>"I3"</a:t>
-            </a:r>
-            <a:r>
-              <a:rPr>
-                <a:solidFill>
-                  <a:srgbClr val="003B4F"/>
-                </a:solidFill>
-                <a:latin typeface="Courier"/>
-              </a:rPr>
-              <a:t>)</a:t>
-            </a:r>
-            <a:br/>
-            <a:br/>
-            <a:r>
-              <a:rPr>
-                <a:solidFill>
-                  <a:srgbClr val="5E5E5E"/>
-                </a:solidFill>
-                <a:latin typeface="Courier"/>
-              </a:rPr>
-              <a:t># Number of samples to simulate</a:t>
-            </a:r>
-            <a:br/>
-            <a:r>
-              <a:rPr>
-                <a:solidFill>
-                  <a:srgbClr val="003B4F"/>
-                </a:solidFill>
-                <a:latin typeface="Courier"/>
-              </a:rPr>
-              <a:t>num_simulations &lt;- </a:t>
-            </a:r>
-            <a:r>
-              <a:rPr>
-                <a:solidFill>
-                  <a:srgbClr val="AD0000"/>
-                </a:solidFill>
-                <a:latin typeface="Courier"/>
-              </a:rPr>
-              <a:t>1000</a:t>
-            </a:r>
-            <a:br/>
-            <a:r>
-              <a:rPr>
-                <a:solidFill>
-                  <a:srgbClr val="003B4F"/>
-                </a:solidFill>
-                <a:latin typeface="Courier"/>
-              </a:rPr>
-              <a:t>sample_size &lt;- </a:t>
-            </a:r>
-            <a:r>
-              <a:rPr>
-                <a:solidFill>
-                  <a:srgbClr val="AD0000"/>
-                </a:solidFill>
-                <a:latin typeface="Courier"/>
-              </a:rPr>
-              <a:t>20</a:t>
-            </a:r>
-            <a:br/>
-            <a:br/>
-            <a:r>
-              <a:rPr>
-                <a:solidFill>
-                  <a:srgbClr val="5E5E5E"/>
-                </a:solidFill>
-                <a:latin typeface="Courier"/>
-              </a:rPr>
-              <a:t># Simulate many samples and calculate means</a:t>
-            </a:r>
-            <a:br/>
-            <a:r>
-              <a:rPr>
-                <a:solidFill>
-                  <a:srgbClr val="4758AB"/>
-                </a:solidFill>
-                <a:latin typeface="Courier"/>
-              </a:rPr>
-              <a:t>set.seed</a:t>
-            </a:r>
-            <a:r>
-              <a:rPr>
-                <a:solidFill>
-                  <a:srgbClr val="003B4F"/>
-                </a:solidFill>
-                <a:latin typeface="Courier"/>
-              </a:rPr>
-              <a:t>(</a:t>
-            </a:r>
-            <a:r>
-              <a:rPr>
-                <a:solidFill>
-                  <a:srgbClr val="AD0000"/>
-                </a:solidFill>
-                <a:latin typeface="Courier"/>
-              </a:rPr>
-              <a:t>46</a:t>
-            </a:r>
-            <a:r>
-              <a:rPr>
-                <a:solidFill>
-                  <a:srgbClr val="003B4F"/>
-                </a:solidFill>
-                <a:latin typeface="Courier"/>
-              </a:rPr>
-              <a:t>) </a:t>
-            </a:r>
-            <a:r>
-              <a:rPr>
-                <a:solidFill>
-                  <a:srgbClr val="5E5E5E"/>
-                </a:solidFill>
-                <a:latin typeface="Courier"/>
-              </a:rPr>
-              <a:t># For reproducibility</a:t>
-            </a:r>
-            <a:br/>
-            <a:r>
-              <a:rPr>
-                <a:solidFill>
-                  <a:srgbClr val="003B4F"/>
-                </a:solidFill>
-                <a:latin typeface="Courier"/>
-              </a:rPr>
-              <a:t>simulated_means &lt;- </a:t>
-            </a:r>
-            <a:r>
-              <a:rPr>
-                <a:solidFill>
-                  <a:srgbClr val="4758AB"/>
-                </a:solidFill>
-                <a:latin typeface="Courier"/>
-              </a:rPr>
-              <a:t>replicate</a:t>
-            </a:r>
-            <a:r>
-              <a:rPr>
-                <a:solidFill>
-                  <a:srgbClr val="003B4F"/>
-                </a:solidFill>
-                <a:latin typeface="Courier"/>
-              </a:rPr>
-              <a:t>(num_simulations, </a:t>
-            </a:r>
-            <a:r>
-              <a:rPr>
-                <a:solidFill>
-                  <a:srgbClr val="4758AB"/>
-                </a:solidFill>
-                <a:latin typeface="Courier"/>
-              </a:rPr>
-              <a:t>sample_mean</a:t>
-            </a:r>
-            <a:r>
-              <a:rPr>
-                <a:solidFill>
-                  <a:srgbClr val="003B4F"/>
-                </a:solidFill>
-                <a:latin typeface="Courier"/>
-              </a:rPr>
-              <a:t>(i3_data, sample_size))</a:t>
-            </a:r>
-            <a:br/>
-            <a:br/>
-            <a:r>
-              <a:rPr>
-                <a:solidFill>
-                  <a:srgbClr val="5E5E5E"/>
-                </a:solidFill>
-                <a:latin typeface="Courier"/>
-              </a:rPr>
-              <a:t># Calculate the mean and standard deviation of the simulated means</a:t>
-            </a:r>
-            <a:br/>
-            <a:r>
-              <a:rPr>
-                <a:solidFill>
-                  <a:srgbClr val="003B4F"/>
-                </a:solidFill>
-                <a:latin typeface="Courier"/>
-              </a:rPr>
-              <a:t>mean_of_means &lt;- </a:t>
-            </a:r>
-            <a:r>
-              <a:rPr>
-                <a:solidFill>
-                  <a:srgbClr val="4758AB"/>
-                </a:solidFill>
-                <a:latin typeface="Courier"/>
-              </a:rPr>
-              <a:t>mean</a:t>
-            </a:r>
-            <a:r>
-              <a:rPr>
-                <a:solidFill>
-                  <a:srgbClr val="003B4F"/>
-                </a:solidFill>
-                <a:latin typeface="Courier"/>
-              </a:rPr>
-              <a:t>(simulated_means)</a:t>
-            </a:r>
-            <a:br/>
-            <a:r>
-              <a:rPr>
-                <a:solidFill>
-                  <a:srgbClr val="003B4F"/>
-                </a:solidFill>
-                <a:latin typeface="Courier"/>
-              </a:rPr>
-              <a:t>sd_of_means &lt;- </a:t>
-            </a:r>
-            <a:r>
-              <a:rPr>
-                <a:solidFill>
-                  <a:srgbClr val="4758AB"/>
-                </a:solidFill>
-                <a:latin typeface="Courier"/>
-              </a:rPr>
-              <a:t>sd</a:t>
-            </a:r>
-            <a:r>
-              <a:rPr>
-                <a:solidFill>
-                  <a:srgbClr val="003B4F"/>
-                </a:solidFill>
-                <a:latin typeface="Courier"/>
-              </a:rPr>
-              <a:t>(simulated_means)</a:t>
-            </a:r>
-            <a:br/>
-            <a:br/>
-            <a:r>
-              <a:rPr>
-                <a:solidFill>
-                  <a:srgbClr val="5E5E5E"/>
-                </a:solidFill>
-                <a:latin typeface="Courier"/>
-              </a:rPr>
-              <a:t># Create a data frame with the simulated means</a:t>
-            </a:r>
-            <a:br/>
-            <a:r>
-              <a:rPr>
-                <a:solidFill>
-                  <a:srgbClr val="003B4F"/>
-                </a:solidFill>
-                <a:latin typeface="Courier"/>
-              </a:rPr>
-              <a:t>simulated_df &lt;- </a:t>
-            </a:r>
-            <a:r>
-              <a:rPr>
-                <a:solidFill>
-                  <a:srgbClr val="4758AB"/>
-                </a:solidFill>
-                <a:latin typeface="Courier"/>
-              </a:rPr>
-              <a:t>data.frame</a:t>
-            </a:r>
-            <a:r>
-              <a:rPr>
-                <a:solidFill>
-                  <a:srgbClr val="003B4F"/>
-                </a:solidFill>
-                <a:latin typeface="Courier"/>
-              </a:rPr>
-              <a:t>(</a:t>
-            </a:r>
-            <a:r>
-              <a:rPr>
-                <a:solidFill>
-                  <a:srgbClr val="657422"/>
-                </a:solidFill>
-                <a:latin typeface="Courier"/>
-              </a:rPr>
-              <a:t>sample_mean =</a:t>
-            </a:r>
-            <a:r>
-              <a:rPr>
-                <a:solidFill>
-                  <a:srgbClr val="003B4F"/>
-                </a:solidFill>
-                <a:latin typeface="Courier"/>
-              </a:rPr>
-              <a:t> simulated_means)</a:t>
+              <a:t>Let’s see how the standard error changes with different sample sizes:</a:t>
             </a:r>
           </a:p>
         </p:txBody>
@@ -10989,7 +11368,7 @@
             </a:pPr>
             <a:r>
               <a:rPr b="1"/>
-              <a:t>Plotting Sampling Distribution</a:t>
+              <a:t>Sample Size vs. Standard Error</a:t>
             </a:r>
           </a:p>
         </p:txBody>
@@ -11019,16 +11398,193 @@
                 </a:solidFill>
                 <a:latin typeface="Courier"/>
               </a:rPr>
-              <a:t># Plot the sampling distribution</a:t>
+              <a:t># Display the results</a:t>
             </a:r>
             <a:br/>
             <a:r>
               <a:rPr>
                 <a:solidFill>
+                  <a:srgbClr val="5E5E5E"/>
+                </a:solidFill>
+                <a:latin typeface="Courier"/>
+              </a:rPr>
+              <a:t># Plot how SE changes with sample size</a:t>
+            </a:r>
+            <a:br/>
+            <a:r>
+              <a:rPr>
+                <a:solidFill>
+                  <a:srgbClr val="003B4F"/>
+                </a:solidFill>
+                <a:latin typeface="Courier"/>
+              </a:rPr>
+              <a:t>results_long &lt;- </a:t>
+            </a:r>
+            <a:r>
+              <a:rPr>
+                <a:solidFill>
                   <a:srgbClr val="4758AB"/>
                 </a:solidFill>
                 <a:latin typeface="Courier"/>
               </a:rPr>
+              <a:t>pivot_longer</a:t>
+            </a:r>
+            <a:r>
+              <a:rPr>
+                <a:solidFill>
+                  <a:srgbClr val="003B4F"/>
+                </a:solidFill>
+                <a:latin typeface="Courier"/>
+              </a:rPr>
+              <a:t>(results, </a:t>
+            </a:r>
+            <a:br/>
+            <a:r>
+              <a:rPr>
+                <a:solidFill>
+                  <a:srgbClr val="003B4F"/>
+                </a:solidFill>
+                <a:latin typeface="Courier"/>
+              </a:rPr>
+              <a:t>                             </a:t>
+            </a:r>
+            <a:r>
+              <a:rPr>
+                <a:solidFill>
+                  <a:srgbClr val="657422"/>
+                </a:solidFill>
+                <a:latin typeface="Courier"/>
+              </a:rPr>
+              <a:t>cols =</a:t>
+            </a:r>
+            <a:r>
+              <a:rPr>
+                <a:solidFill>
+                  <a:srgbClr val="003B4F"/>
+                </a:solidFill>
+                <a:latin typeface="Courier"/>
+              </a:rPr>
+              <a:t> </a:t>
+            </a:r>
+            <a:r>
+              <a:rPr>
+                <a:solidFill>
+                  <a:srgbClr val="4758AB"/>
+                </a:solidFill>
+                <a:latin typeface="Courier"/>
+              </a:rPr>
+              <a:t>c</a:t>
+            </a:r>
+            <a:r>
+              <a:rPr>
+                <a:solidFill>
+                  <a:srgbClr val="003B4F"/>
+                </a:solidFill>
+                <a:latin typeface="Courier"/>
+              </a:rPr>
+              <a:t>(empirical_se, theoretical_se),</a:t>
+            </a:r>
+            <a:br/>
+            <a:r>
+              <a:rPr>
+                <a:solidFill>
+                  <a:srgbClr val="003B4F"/>
+                </a:solidFill>
+                <a:latin typeface="Courier"/>
+              </a:rPr>
+              <a:t>                             </a:t>
+            </a:r>
+            <a:r>
+              <a:rPr>
+                <a:solidFill>
+                  <a:srgbClr val="657422"/>
+                </a:solidFill>
+                <a:latin typeface="Courier"/>
+              </a:rPr>
+              <a:t>names_to =</a:t>
+            </a:r>
+            <a:r>
+              <a:rPr>
+                <a:solidFill>
+                  <a:srgbClr val="003B4F"/>
+                </a:solidFill>
+                <a:latin typeface="Courier"/>
+              </a:rPr>
+              <a:t> </a:t>
+            </a:r>
+            <a:r>
+              <a:rPr>
+                <a:solidFill>
+                  <a:srgbClr val="20794D"/>
+                </a:solidFill>
+                <a:latin typeface="Courier"/>
+              </a:rPr>
+              <a:t>"se_type"</a:t>
+            </a:r>
+            <a:r>
+              <a:rPr>
+                <a:solidFill>
+                  <a:srgbClr val="003B4F"/>
+                </a:solidFill>
+                <a:latin typeface="Courier"/>
+              </a:rPr>
+              <a:t>, </a:t>
+            </a:r>
+            <a:br/>
+            <a:r>
+              <a:rPr>
+                <a:solidFill>
+                  <a:srgbClr val="003B4F"/>
+                </a:solidFill>
+                <a:latin typeface="Courier"/>
+              </a:rPr>
+              <a:t>                             </a:t>
+            </a:r>
+            <a:r>
+              <a:rPr>
+                <a:solidFill>
+                  <a:srgbClr val="657422"/>
+                </a:solidFill>
+                <a:latin typeface="Courier"/>
+              </a:rPr>
+              <a:t>values_to =</a:t>
+            </a:r>
+            <a:r>
+              <a:rPr>
+                <a:solidFill>
+                  <a:srgbClr val="003B4F"/>
+                </a:solidFill>
+                <a:latin typeface="Courier"/>
+              </a:rPr>
+              <a:t> </a:t>
+            </a:r>
+            <a:r>
+              <a:rPr>
+                <a:solidFill>
+                  <a:srgbClr val="20794D"/>
+                </a:solidFill>
+                <a:latin typeface="Courier"/>
+              </a:rPr>
+              <a:t>"standard_error"</a:t>
+            </a:r>
+            <a:r>
+              <a:rPr>
+                <a:solidFill>
+                  <a:srgbClr val="003B4F"/>
+                </a:solidFill>
+                <a:latin typeface="Courier"/>
+              </a:rPr>
+              <a:t>)</a:t>
+            </a:r>
+            <a:br/>
+            <a:br/>
+            <a:r>
+              <a:rPr>
+                <a:solidFill>
+                  <a:srgbClr val="4758AB"/>
+                </a:solidFill>
+                <a:latin typeface="Courier"/>
+              </a:rPr>
               <a:t>ggplot</a:t>
             </a:r>
             <a:r>
@@ -11038,7 +11594,7 @@
                 </a:solidFill>
                 <a:latin typeface="Courier"/>
               </a:rPr>
-              <a:t>(simulated_df, </a:t>
+              <a:t>(results_long, </a:t>
             </a:r>
             <a:r>
               <a:rPr>
@@ -11074,7 +11630,43 @@
                 </a:solidFill>
                 <a:latin typeface="Courier"/>
               </a:rPr>
-              <a:t> sample_mean)) </a:t>
+              <a:t> sample_size, </a:t>
+            </a:r>
+            <a:r>
+              <a:rPr>
+                <a:solidFill>
+                  <a:srgbClr val="657422"/>
+                </a:solidFill>
+                <a:latin typeface="Courier"/>
+              </a:rPr>
+              <a:t>y =</a:t>
+            </a:r>
+            <a:r>
+              <a:rPr>
+                <a:solidFill>
+                  <a:srgbClr val="003B4F"/>
+                </a:solidFill>
+                <a:latin typeface="Courier"/>
+              </a:rPr>
+              <a:t> standard_error, </a:t>
+            </a:r>
+            <a:r>
+              <a:rPr>
+                <a:solidFill>
+                  <a:srgbClr val="657422"/>
+                </a:solidFill>
+                <a:latin typeface="Courier"/>
+              </a:rPr>
+              <a:t>color =</a:t>
+            </a:r>
+            <a:r>
+              <a:rPr>
+                <a:solidFill>
+                  <a:srgbClr val="003B4F"/>
+                </a:solidFill>
+                <a:latin typeface="Courier"/>
+              </a:rPr>
+              <a:t> se_type)) </a:t>
             </a:r>
             <a:r>
               <a:rPr>
@@ -11102,7 +11694,44 @@
                 </a:solidFill>
                 <a:latin typeface="Courier"/>
               </a:rPr>
-              <a:t>geom_histogram</a:t>
+              <a:t>geom_line</a:t>
+            </a:r>
+            <a:r>
+              <a:rPr>
+                <a:solidFill>
+                  <a:srgbClr val="003B4F"/>
+                </a:solidFill>
+                <a:latin typeface="Courier"/>
+              </a:rPr>
+              <a:t>() </a:t>
+            </a:r>
+            <a:r>
+              <a:rPr>
+                <a:solidFill>
+                  <a:srgbClr val="5E5E5E"/>
+                </a:solidFill>
+                <a:latin typeface="Courier"/>
+              </a:rPr>
+              <a:t>+</a:t>
+            </a:r>
+            <a:br/>
+            <a:r>
+              <a:rPr>
+                <a:solidFill>
+                  <a:srgbClr val="003B4F"/>
+                </a:solidFill>
+                <a:latin typeface="Courier"/>
+              </a:rPr>
+              <a:t>  </a:t>
+            </a:r>
+            <a:r>
+              <a:rPr>
+                <a:solidFill>
+                  <a:srgbClr val="4758AB"/>
+                </a:solidFill>
+                <a:latin typeface="Courier"/>
+              </a:rPr>
+              <a:t>geom_point</a:t>
             </a:r>
             <a:r>
               <a:rPr>
@@ -11120,7 +11749,7 @@
                 </a:solidFill>
                 <a:latin typeface="Courier"/>
               </a:rPr>
-              <a:t>bins =</a:t>
+              <a:t>size =</a:t>
             </a:r>
             <a:r>
               <a:rPr>
@@ -11138,16 +11767,53 @@
                 </a:solidFill>
                 <a:latin typeface="Courier"/>
               </a:rPr>
-              <a:t>30</a:t>
-            </a:r>
-            <a:r>
-              <a:rPr>
-                <a:solidFill>
-                  <a:srgbClr val="003B4F"/>
-                </a:solidFill>
-                <a:latin typeface="Courier"/>
-              </a:rPr>
-              <a:t>, </a:t>
+              <a:t>3</a:t>
+            </a:r>
+            <a:r>
+              <a:rPr>
+                <a:solidFill>
+                  <a:srgbClr val="003B4F"/>
+                </a:solidFill>
+                <a:latin typeface="Courier"/>
+              </a:rPr>
+              <a:t>) </a:t>
+            </a:r>
+            <a:r>
+              <a:rPr>
+                <a:solidFill>
+                  <a:srgbClr val="5E5E5E"/>
+                </a:solidFill>
+                <a:latin typeface="Courier"/>
+              </a:rPr>
+              <a:t>+</a:t>
+            </a:r>
+            <a:br/>
+            <a:r>
+              <a:rPr>
+                <a:solidFill>
+                  <a:srgbClr val="003B4F"/>
+                </a:solidFill>
+                <a:latin typeface="Courier"/>
+              </a:rPr>
+              <a:t>  </a:t>
+            </a:r>
+            <a:r>
+              <a:rPr>
+                <a:solidFill>
+                  <a:srgbClr val="4758AB"/>
+                </a:solidFill>
+                <a:latin typeface="Courier"/>
+              </a:rPr>
+              <a:t>scale_x_continuous</a:t>
+            </a:r>
+            <a:r>
+              <a:rPr>
+                <a:solidFill>
+                  <a:srgbClr val="003B4F"/>
+                </a:solidFill>
+                <a:latin typeface="Courier"/>
+              </a:rPr>
+              <a:t>(</a:t>
             </a:r>
             <a:r>
               <a:rPr>
@@ -11156,7 +11822,62 @@
                 </a:solidFill>
                 <a:latin typeface="Courier"/>
               </a:rPr>
-              <a:t>fill =</a:t>
+              <a:t>breaks =</a:t>
+            </a:r>
+            <a:r>
+              <a:rPr>
+                <a:solidFill>
+                  <a:srgbClr val="003B4F"/>
+                </a:solidFill>
+                <a:latin typeface="Courier"/>
+              </a:rPr>
+              <a:t> sample_sizes) </a:t>
+            </a:r>
+            <a:r>
+              <a:rPr>
+                <a:solidFill>
+                  <a:srgbClr val="5E5E5E"/>
+                </a:solidFill>
+                <a:latin typeface="Courier"/>
+              </a:rPr>
+              <a:t>+</a:t>
+            </a:r>
+            <a:br/>
+            <a:r>
+              <a:rPr>
+                <a:solidFill>
+                  <a:srgbClr val="003B4F"/>
+                </a:solidFill>
+                <a:latin typeface="Courier"/>
+              </a:rPr>
+              <a:t>  </a:t>
+            </a:r>
+            <a:r>
+              <a:rPr>
+                <a:solidFill>
+                  <a:srgbClr val="4758AB"/>
+                </a:solidFill>
+                <a:latin typeface="Courier"/>
+              </a:rPr>
+              <a:t>labs</a:t>
+            </a:r>
+            <a:r>
+              <a:rPr>
+                <a:solidFill>
+                  <a:srgbClr val="003B4F"/>
+                </a:solidFill>
+                <a:latin typeface="Courier"/>
+              </a:rPr>
+              <a:t>(</a:t>
+            </a:r>
+            <a:r>
+              <a:rPr>
+                <a:solidFill>
+                  <a:srgbClr val="657422"/>
+                </a:solidFill>
+                <a:latin typeface="Courier"/>
+              </a:rPr>
+              <a:t>title =</a:t>
             </a:r>
             <a:r>
               <a:rPr>
@@ -11174,16 +11895,26 @@
                 </a:solidFill>
                 <a:latin typeface="Courier"/>
               </a:rPr>
-              <a:t>"blue"</a:t>
-            </a:r>
-            <a:r>
-              <a:rPr>
-                <a:solidFill>
-                  <a:srgbClr val="003B4F"/>
-                </a:solidFill>
-                <a:latin typeface="Courier"/>
-              </a:rPr>
-              <a:t>, </a:t>
+              <a:t>"Standard Error vs. Sample Size"</a:t>
+            </a:r>
+            <a:r>
+              <a:rPr>
+                <a:solidFill>
+                  <a:srgbClr val="003B4F"/>
+                </a:solidFill>
+                <a:latin typeface="Courier"/>
+              </a:rPr>
+              <a:t>,</a:t>
+            </a:r>
+            <a:br/>
+            <a:r>
+              <a:rPr>
+                <a:solidFill>
+                  <a:srgbClr val="003B4F"/>
+                </a:solidFill>
+                <a:latin typeface="Courier"/>
+              </a:rPr>
+              <a:t>       </a:t>
             </a:r>
             <a:r>
               <a:rPr>
@@ -11192,7 +11923,7 @@
                 </a:solidFill>
                 <a:latin typeface="Courier"/>
               </a:rPr>
-              <a:t>alpha =</a:t>
+              <a:t>subtitle =</a:t>
             </a:r>
             <a:r>
               <a:rPr>
@@ -11206,29 +11937,20 @@
             <a:r>
               <a:rPr>
                 <a:solidFill>
-                  <a:srgbClr val="AD0000"/>
-                </a:solidFill>
-                <a:latin typeface="Courier"/>
-              </a:rPr>
-              <a:t>0.7</a:t>
-            </a:r>
-            <a:r>
-              <a:rPr>
-                <a:solidFill>
-                  <a:srgbClr val="003B4F"/>
-                </a:solidFill>
-                <a:latin typeface="Courier"/>
-              </a:rPr>
-              <a:t>) </a:t>
-            </a:r>
-            <a:r>
-              <a:rPr>
-                <a:solidFill>
-                  <a:srgbClr val="5E5E5E"/>
-                </a:solidFill>
-                <a:latin typeface="Courier"/>
-              </a:rPr>
-              <a:t>+</a:t>
+                  <a:srgbClr val="20794D"/>
+                </a:solidFill>
+                <a:latin typeface="Courier"/>
+              </a:rPr>
+              <a:t>"Standard error decreases as sample size increases"</a:t>
+            </a:r>
+            <a:r>
+              <a:rPr>
+                <a:solidFill>
+                  <a:srgbClr val="003B4F"/>
+                </a:solidFill>
+                <a:latin typeface="Courier"/>
+              </a:rPr>
+              <a:t>,</a:t>
             </a:r>
             <a:br/>
             <a:r>
@@ -11238,25 +11960,7 @@
                 </a:solidFill>
                 <a:latin typeface="Courier"/>
               </a:rPr>
-              <a:t>  </a:t>
-            </a:r>
-            <a:r>
-              <a:rPr>
-                <a:solidFill>
-                  <a:srgbClr val="4758AB"/>
-                </a:solidFill>
-                <a:latin typeface="Courier"/>
-              </a:rPr>
-              <a:t>geom_vline</a:t>
-            </a:r>
-            <a:r>
-              <a:rPr>
-                <a:solidFill>
-                  <a:srgbClr val="003B4F"/>
-                </a:solidFill>
-                <a:latin typeface="Courier"/>
-              </a:rPr>
-              <a:t>(</a:t>
+              <a:t>       </a:t>
             </a:r>
             <a:r>
               <a:rPr>
@@ -11265,7 +11969,7 @@
                 </a:solidFill>
                 <a:latin typeface="Courier"/>
               </a:rPr>
-              <a:t>xintercept =</a:t>
+              <a:t>x =</a:t>
             </a:r>
             <a:r>
               <a:rPr>
@@ -11279,38 +11983,20 @@
             <a:r>
               <a:rPr>
                 <a:solidFill>
-                  <a:srgbClr val="4758AB"/>
-                </a:solidFill>
-                <a:latin typeface="Courier"/>
-              </a:rPr>
-              <a:t>mean</a:t>
-            </a:r>
-            <a:r>
-              <a:rPr>
-                <a:solidFill>
-                  <a:srgbClr val="003B4F"/>
-                </a:solidFill>
-                <a:latin typeface="Courier"/>
-              </a:rPr>
-              <a:t>(i3_data</a:t>
-            </a:r>
-            <a:r>
-              <a:rPr>
-                <a:solidFill>
-                  <a:srgbClr val="5E5E5E"/>
-                </a:solidFill>
-                <a:latin typeface="Courier"/>
-              </a:rPr>
-              <a:t>$</a:t>
-            </a:r>
-            <a:r>
-              <a:rPr>
-                <a:solidFill>
-                  <a:srgbClr val="003B4F"/>
-                </a:solidFill>
-                <a:latin typeface="Courier"/>
-              </a:rPr>
-              <a:t>length_mm), </a:t>
+                  <a:srgbClr val="20794D"/>
+                </a:solidFill>
+                <a:latin typeface="Courier"/>
+              </a:rPr>
+              <a:t>"Sample Size"</a:t>
+            </a:r>
+            <a:r>
+              <a:rPr>
+                <a:solidFill>
+                  <a:srgbClr val="003B4F"/>
+                </a:solidFill>
+                <a:latin typeface="Courier"/>
+              </a:rPr>
+              <a:t>,</a:t>
             </a:r>
             <a:br/>
             <a:r>
@@ -11320,7 +12006,7 @@
                 </a:solidFill>
                 <a:latin typeface="Courier"/>
               </a:rPr>
-              <a:t>             </a:t>
+              <a:t>       </a:t>
             </a:r>
             <a:r>
               <a:rPr>
@@ -11329,7 +12015,7 @@
                 </a:solidFill>
                 <a:latin typeface="Courier"/>
               </a:rPr>
-              <a:t>linetype =</a:t>
+              <a:t>y =</a:t>
             </a:r>
             <a:r>
               <a:rPr>
@@ -11347,16 +12033,26 @@
                 </a:solidFill>
                 <a:latin typeface="Courier"/>
               </a:rPr>
-              <a:t>"dashed"</a:t>
-            </a:r>
-            <a:r>
-              <a:rPr>
-                <a:solidFill>
-                  <a:srgbClr val="003B4F"/>
-                </a:solidFill>
-                <a:latin typeface="Courier"/>
-              </a:rPr>
-              <a:t>, </a:t>
+              <a:t>"Standard Error"</a:t>
+            </a:r>
+            <a:r>
+              <a:rPr>
+                <a:solidFill>
+                  <a:srgbClr val="003B4F"/>
+                </a:solidFill>
+                <a:latin typeface="Courier"/>
+              </a:rPr>
+              <a:t>,</a:t>
+            </a:r>
+            <a:br/>
+            <a:r>
+              <a:rPr>
+                <a:solidFill>
+                  <a:srgbClr val="003B4F"/>
+                </a:solidFill>
+                <a:latin typeface="Courier"/>
+              </a:rPr>
+              <a:t>       </a:t>
             </a:r>
             <a:r>
               <a:rPr>
@@ -11383,553 +12079,7 @@
                 </a:solidFill>
                 <a:latin typeface="Courier"/>
               </a:rPr>
-              <a:t>"red"</a:t>
-            </a:r>
-            <a:r>
-              <a:rPr>
-                <a:solidFill>
-                  <a:srgbClr val="003B4F"/>
-                </a:solidFill>
-                <a:latin typeface="Courier"/>
-              </a:rPr>
-              <a:t>, </a:t>
-            </a:r>
-            <a:r>
-              <a:rPr>
-                <a:solidFill>
-                  <a:srgbClr val="657422"/>
-                </a:solidFill>
-                <a:latin typeface="Courier"/>
-              </a:rPr>
-              <a:t>linewidth =</a:t>
-            </a:r>
-            <a:r>
-              <a:rPr>
-                <a:solidFill>
-                  <a:srgbClr val="003B4F"/>
-                </a:solidFill>
-                <a:latin typeface="Courier"/>
-              </a:rPr>
-              <a:t> </a:t>
-            </a:r>
-            <a:r>
-              <a:rPr>
-                <a:solidFill>
-                  <a:srgbClr val="AD0000"/>
-                </a:solidFill>
-                <a:latin typeface="Courier"/>
-              </a:rPr>
-              <a:t>1</a:t>
-            </a:r>
-            <a:r>
-              <a:rPr>
-                <a:solidFill>
-                  <a:srgbClr val="003B4F"/>
-                </a:solidFill>
-                <a:latin typeface="Courier"/>
-              </a:rPr>
-              <a:t>) </a:t>
-            </a:r>
-            <a:r>
-              <a:rPr>
-                <a:solidFill>
-                  <a:srgbClr val="5E5E5E"/>
-                </a:solidFill>
-                <a:latin typeface="Courier"/>
-              </a:rPr>
-              <a:t>+</a:t>
-            </a:r>
-            <a:br/>
-            <a:r>
-              <a:rPr>
-                <a:solidFill>
-                  <a:srgbClr val="003B4F"/>
-                </a:solidFill>
-                <a:latin typeface="Courier"/>
-              </a:rPr>
-              <a:t>  </a:t>
-            </a:r>
-            <a:r>
-              <a:rPr>
-                <a:solidFill>
-                  <a:srgbClr val="4758AB"/>
-                </a:solidFill>
-                <a:latin typeface="Courier"/>
-              </a:rPr>
-              <a:t>annotate</a:t>
-            </a:r>
-            <a:r>
-              <a:rPr>
-                <a:solidFill>
-                  <a:srgbClr val="003B4F"/>
-                </a:solidFill>
-                <a:latin typeface="Courier"/>
-              </a:rPr>
-              <a:t>(</a:t>
-            </a:r>
-            <a:r>
-              <a:rPr>
-                <a:solidFill>
-                  <a:srgbClr val="20794D"/>
-                </a:solidFill>
-                <a:latin typeface="Courier"/>
-              </a:rPr>
-              <a:t>"text"</a:t>
-            </a:r>
-            <a:r>
-              <a:rPr>
-                <a:solidFill>
-                  <a:srgbClr val="003B4F"/>
-                </a:solidFill>
-                <a:latin typeface="Courier"/>
-              </a:rPr>
-              <a:t>, </a:t>
-            </a:r>
-            <a:r>
-              <a:rPr>
-                <a:solidFill>
-                  <a:srgbClr val="657422"/>
-                </a:solidFill>
-                <a:latin typeface="Courier"/>
-              </a:rPr>
-              <a:t>x =</a:t>
-            </a:r>
-            <a:r>
-              <a:rPr>
-                <a:solidFill>
-                  <a:srgbClr val="003B4F"/>
-                </a:solidFill>
-                <a:latin typeface="Courier"/>
-              </a:rPr>
-              <a:t> </a:t>
-            </a:r>
-            <a:r>
-              <a:rPr>
-                <a:solidFill>
-                  <a:srgbClr val="4758AB"/>
-                </a:solidFill>
-                <a:latin typeface="Courier"/>
-              </a:rPr>
-              <a:t>mean</a:t>
-            </a:r>
-            <a:r>
-              <a:rPr>
-                <a:solidFill>
-                  <a:srgbClr val="003B4F"/>
-                </a:solidFill>
-                <a:latin typeface="Courier"/>
-              </a:rPr>
-              <a:t>(i3_data</a:t>
-            </a:r>
-            <a:r>
-              <a:rPr>
-                <a:solidFill>
-                  <a:srgbClr val="5E5E5E"/>
-                </a:solidFill>
-                <a:latin typeface="Courier"/>
-              </a:rPr>
-              <a:t>$</a:t>
-            </a:r>
-            <a:r>
-              <a:rPr>
-                <a:solidFill>
-                  <a:srgbClr val="003B4F"/>
-                </a:solidFill>
-                <a:latin typeface="Courier"/>
-              </a:rPr>
-              <a:t>length_mm) </a:t>
-            </a:r>
-            <a:r>
-              <a:rPr>
-                <a:solidFill>
-                  <a:srgbClr val="5E5E5E"/>
-                </a:solidFill>
-                <a:latin typeface="Courier"/>
-              </a:rPr>
-              <a:t>+</a:t>
-            </a:r>
-            <a:r>
-              <a:rPr>
-                <a:solidFill>
-                  <a:srgbClr val="003B4F"/>
-                </a:solidFill>
-                <a:latin typeface="Courier"/>
-              </a:rPr>
-              <a:t> </a:t>
-            </a:r>
-            <a:r>
-              <a:rPr>
-                <a:solidFill>
-                  <a:srgbClr val="AD0000"/>
-                </a:solidFill>
-                <a:latin typeface="Courier"/>
-              </a:rPr>
-              <a:t>2</a:t>
-            </a:r>
-            <a:r>
-              <a:rPr>
-                <a:solidFill>
-                  <a:srgbClr val="003B4F"/>
-                </a:solidFill>
-                <a:latin typeface="Courier"/>
-              </a:rPr>
-              <a:t>, </a:t>
-            </a:r>
-            <a:r>
-              <a:rPr>
-                <a:solidFill>
-                  <a:srgbClr val="657422"/>
-                </a:solidFill>
-                <a:latin typeface="Courier"/>
-              </a:rPr>
-              <a:t>y =</a:t>
-            </a:r>
-            <a:r>
-              <a:rPr>
-                <a:solidFill>
-                  <a:srgbClr val="003B4F"/>
-                </a:solidFill>
-                <a:latin typeface="Courier"/>
-              </a:rPr>
-              <a:t> </a:t>
-            </a:r>
-            <a:r>
-              <a:rPr>
-                <a:solidFill>
-                  <a:srgbClr val="AD0000"/>
-                </a:solidFill>
-                <a:latin typeface="Courier"/>
-              </a:rPr>
-              <a:t>50</a:t>
-            </a:r>
-            <a:r>
-              <a:rPr>
-                <a:solidFill>
-                  <a:srgbClr val="003B4F"/>
-                </a:solidFill>
-                <a:latin typeface="Courier"/>
-              </a:rPr>
-              <a:t>, </a:t>
-            </a:r>
-            <a:br/>
-            <a:r>
-              <a:rPr>
-                <a:solidFill>
-                  <a:srgbClr val="003B4F"/>
-                </a:solidFill>
-                <a:latin typeface="Courier"/>
-              </a:rPr>
-              <a:t>           </a:t>
-            </a:r>
-            <a:r>
-              <a:rPr>
-                <a:solidFill>
-                  <a:srgbClr val="657422"/>
-                </a:solidFill>
-                <a:latin typeface="Courier"/>
-              </a:rPr>
-              <a:t>label =</a:t>
-            </a:r>
-            <a:r>
-              <a:rPr>
-                <a:solidFill>
-                  <a:srgbClr val="003B4F"/>
-                </a:solidFill>
-                <a:latin typeface="Courier"/>
-              </a:rPr>
-              <a:t> </a:t>
-            </a:r>
-            <a:r>
-              <a:rPr>
-                <a:solidFill>
-                  <a:srgbClr val="20794D"/>
-                </a:solidFill>
-                <a:latin typeface="Courier"/>
-              </a:rPr>
-              <a:t>"Full sample mean"</a:t>
-            </a:r>
-            <a:r>
-              <a:rPr>
-                <a:solidFill>
-                  <a:srgbClr val="003B4F"/>
-                </a:solidFill>
-                <a:latin typeface="Courier"/>
-              </a:rPr>
-              <a:t>, </a:t>
-            </a:r>
-            <a:r>
-              <a:rPr>
-                <a:solidFill>
-                  <a:srgbClr val="657422"/>
-                </a:solidFill>
-                <a:latin typeface="Courier"/>
-              </a:rPr>
-              <a:t>color =</a:t>
-            </a:r>
-            <a:r>
-              <a:rPr>
-                <a:solidFill>
-                  <a:srgbClr val="003B4F"/>
-                </a:solidFill>
-                <a:latin typeface="Courier"/>
-              </a:rPr>
-              <a:t> </a:t>
-            </a:r>
-            <a:r>
-              <a:rPr>
-                <a:solidFill>
-                  <a:srgbClr val="20794D"/>
-                </a:solidFill>
-                <a:latin typeface="Courier"/>
-              </a:rPr>
-              <a:t>"red"</a:t>
-            </a:r>
-            <a:r>
-              <a:rPr>
-                <a:solidFill>
-                  <a:srgbClr val="003B4F"/>
-                </a:solidFill>
-                <a:latin typeface="Courier"/>
-              </a:rPr>
-              <a:t>) </a:t>
-            </a:r>
-            <a:r>
-              <a:rPr>
-                <a:solidFill>
-                  <a:srgbClr val="5E5E5E"/>
-                </a:solidFill>
-                <a:latin typeface="Courier"/>
-              </a:rPr>
-              <a:t>+</a:t>
-            </a:r>
-            <a:br/>
-            <a:r>
-              <a:rPr>
-                <a:solidFill>
-                  <a:srgbClr val="003B4F"/>
-                </a:solidFill>
-                <a:latin typeface="Courier"/>
-              </a:rPr>
-              <a:t>  </a:t>
-            </a:r>
-            <a:r>
-              <a:rPr>
-                <a:solidFill>
-                  <a:srgbClr val="4758AB"/>
-                </a:solidFill>
-                <a:latin typeface="Courier"/>
-              </a:rPr>
-              <a:t>labs</a:t>
-            </a:r>
-            <a:r>
-              <a:rPr>
-                <a:solidFill>
-                  <a:srgbClr val="003B4F"/>
-                </a:solidFill>
-                <a:latin typeface="Courier"/>
-              </a:rPr>
-              <a:t>(</a:t>
-            </a:r>
-            <a:r>
-              <a:rPr>
-                <a:solidFill>
-                  <a:srgbClr val="657422"/>
-                </a:solidFill>
-                <a:latin typeface="Courier"/>
-              </a:rPr>
-              <a:t>title =</a:t>
-            </a:r>
-            <a:r>
-              <a:rPr>
-                <a:solidFill>
-                  <a:srgbClr val="003B4F"/>
-                </a:solidFill>
-                <a:latin typeface="Courier"/>
-              </a:rPr>
-              <a:t> </a:t>
-            </a:r>
-            <a:r>
-              <a:rPr>
-                <a:solidFill>
-                  <a:srgbClr val="20794D"/>
-                </a:solidFill>
-                <a:latin typeface="Courier"/>
-              </a:rPr>
-              <a:t>"Simulated Sampling Distribution of the Mean"</a:t>
-            </a:r>
-            <a:r>
-              <a:rPr>
-                <a:solidFill>
-                  <a:srgbClr val="003B4F"/>
-                </a:solidFill>
-                <a:latin typeface="Courier"/>
-              </a:rPr>
-              <a:t>,</a:t>
-            </a:r>
-            <a:br/>
-            <a:r>
-              <a:rPr>
-                <a:solidFill>
-                  <a:srgbClr val="003B4F"/>
-                </a:solidFill>
-                <a:latin typeface="Courier"/>
-              </a:rPr>
-              <a:t>       </a:t>
-            </a:r>
-            <a:r>
-              <a:rPr>
-                <a:solidFill>
-                  <a:srgbClr val="657422"/>
-                </a:solidFill>
-                <a:latin typeface="Courier"/>
-              </a:rPr>
-              <a:t>subtitle =</a:t>
-            </a:r>
-            <a:r>
-              <a:rPr>
-                <a:solidFill>
-                  <a:srgbClr val="003B4F"/>
-                </a:solidFill>
-                <a:latin typeface="Courier"/>
-              </a:rPr>
-              <a:t> </a:t>
-            </a:r>
-            <a:r>
-              <a:rPr>
-                <a:solidFill>
-                  <a:srgbClr val="4758AB"/>
-                </a:solidFill>
-                <a:latin typeface="Courier"/>
-              </a:rPr>
-              <a:t>paste</a:t>
-            </a:r>
-            <a:r>
-              <a:rPr>
-                <a:solidFill>
-                  <a:srgbClr val="003B4F"/>
-                </a:solidFill>
-                <a:latin typeface="Courier"/>
-              </a:rPr>
-              <a:t>(</a:t>
-            </a:r>
-            <a:r>
-              <a:rPr>
-                <a:solidFill>
-                  <a:srgbClr val="20794D"/>
-                </a:solidFill>
-                <a:latin typeface="Courier"/>
-              </a:rPr>
-              <a:t>"Based on"</a:t>
-            </a:r>
-            <a:r>
-              <a:rPr>
-                <a:solidFill>
-                  <a:srgbClr val="003B4F"/>
-                </a:solidFill>
-                <a:latin typeface="Courier"/>
-              </a:rPr>
-              <a:t>, num_simulations, </a:t>
-            </a:r>
-            <a:r>
-              <a:rPr>
-                <a:solidFill>
-                  <a:srgbClr val="20794D"/>
-                </a:solidFill>
-                <a:latin typeface="Courier"/>
-              </a:rPr>
-              <a:t>"samples of size"</a:t>
-            </a:r>
-            <a:r>
-              <a:rPr>
-                <a:solidFill>
-                  <a:srgbClr val="003B4F"/>
-                </a:solidFill>
-                <a:latin typeface="Courier"/>
-              </a:rPr>
-              <a:t>, sample_size),</a:t>
-            </a:r>
-            <a:br/>
-            <a:r>
-              <a:rPr>
-                <a:solidFill>
-                  <a:srgbClr val="003B4F"/>
-                </a:solidFill>
-                <a:latin typeface="Courier"/>
-              </a:rPr>
-              <a:t>       </a:t>
-            </a:r>
-            <a:r>
-              <a:rPr>
-                <a:solidFill>
-                  <a:srgbClr val="657422"/>
-                </a:solidFill>
-                <a:latin typeface="Courier"/>
-              </a:rPr>
-              <a:t>x =</a:t>
-            </a:r>
-            <a:r>
-              <a:rPr>
-                <a:solidFill>
-                  <a:srgbClr val="003B4F"/>
-                </a:solidFill>
-                <a:latin typeface="Courier"/>
-              </a:rPr>
-              <a:t> </a:t>
-            </a:r>
-            <a:r>
-              <a:rPr>
-                <a:solidFill>
-                  <a:srgbClr val="20794D"/>
-                </a:solidFill>
-                <a:latin typeface="Courier"/>
-              </a:rPr>
-              <a:t>"Sample Mean (mm)"</a:t>
-            </a:r>
-            <a:r>
-              <a:rPr>
-                <a:solidFill>
-                  <a:srgbClr val="003B4F"/>
-                </a:solidFill>
-                <a:latin typeface="Courier"/>
-              </a:rPr>
-              <a:t>,</a:t>
-            </a:r>
-            <a:br/>
-            <a:r>
-              <a:rPr>
-                <a:solidFill>
-                  <a:srgbClr val="003B4F"/>
-                </a:solidFill>
-                <a:latin typeface="Courier"/>
-              </a:rPr>
-              <a:t>       </a:t>
-            </a:r>
-            <a:r>
-              <a:rPr>
-                <a:solidFill>
-                  <a:srgbClr val="657422"/>
-                </a:solidFill>
-                <a:latin typeface="Courier"/>
-              </a:rPr>
-              <a:t>y =</a:t>
-            </a:r>
-            <a:r>
-              <a:rPr>
-                <a:solidFill>
-                  <a:srgbClr val="003B4F"/>
-                </a:solidFill>
-                <a:latin typeface="Courier"/>
-              </a:rPr>
-              <a:t> </a:t>
-            </a:r>
-            <a:r>
-              <a:rPr>
-                <a:solidFill>
-                  <a:srgbClr val="20794D"/>
-                </a:solidFill>
-                <a:latin typeface="Courier"/>
-              </a:rPr>
-              <a:t>"Frequency"</a:t>
+              <a:t>"SE Type"</a:t>
             </a:r>
             <a:r>
               <a:rPr>
@@ -11982,7 +12132,7 @@
       </p:sp>
       <p:pic>
         <p:nvPicPr>
-          <p:cNvPr descr="03_01_lecture_powerpoint_files/figure-pptx/unnamed-chunk-9-1.png" id="0" name="Picture 1"/>
+          <p:cNvPr descr="03_01_lecture_powerpoint_files/figure-pptx/unnamed-chunk-8-1.png" id="0" name="Picture 1"/>
           <p:cNvPicPr>
             <a:picLocks noGrp="1" noChangeAspect="1"/>
           </p:cNvPicPr>
@@ -12241,996 +12391,6 @@
 </file>
 
 <file path=ppt/slides/slide40.xml><?xml version="1.0" encoding="utf-8"?>
-<p:sld xmlns:a="http://schemas.openxmlformats.org/drawingml/2006/main" xmlns:r="http://schemas.openxmlformats.org/officeDocument/2006/relationships" xmlns:p="http://schemas.openxmlformats.org/presentationml/2006/main">
-  <p:cSld>
-    <p:spTree>
-      <p:nvGrpSpPr>
-        <p:cNvPr id="1" name=""/>
-        <p:cNvGrpSpPr/>
-        <p:nvPr/>
-      </p:nvGrpSpPr>
-      <p:grpSpPr>
-        <a:xfrm>
-          <a:off x="0" y="0"/>
-          <a:ext cx="0" cy="0"/>
-          <a:chOff x="0" y="0"/>
-          <a:chExt cx="0" cy="0"/>
-        </a:xfrm>
-      </p:grpSpPr>
-      <p:sp>
-        <p:nvSpPr>
-          <p:cNvPr id="3" name="Content Placeholder 2"/>
-          <p:cNvSpPr>
-            <a:spLocks noGrp="1"/>
-          </p:cNvSpPr>
-          <p:nvPr>
-            <p:ph idx="1"/>
-          </p:nvPr>
-        </p:nvSpPr>
-        <p:spPr/>
-        <p:txBody>
-          <a:bodyPr/>
-          <a:lstStyle/>
-          <a:p>
-            <a:pPr lvl="0" indent="0" marL="0">
-              <a:buNone/>
-            </a:pPr>
-            <a:r>
-              <a:rPr/>
-              <a:t>Notice that the simulated sampling distribution:</a:t>
-            </a:r>
-          </a:p>
-          <a:p>
-            <a:pPr lvl="0" indent="-342900" marL="342900">
-              <a:buAutoNum type="arabicPeriod"/>
-            </a:pPr>
-            <a:r>
-              <a:rPr/>
-              <a:t>Is approximately normally distributed</a:t>
-            </a:r>
-          </a:p>
-          <a:p>
-            <a:pPr lvl="0" indent="-342900" marL="342900">
-              <a:buAutoNum type="arabicPeriod"/>
-            </a:pPr>
-            <a:r>
-              <a:rPr/>
-              <a:t>Is centered around the overall sample mean</a:t>
-            </a:r>
-          </a:p>
-          <a:p>
-            <a:pPr lvl="0" indent="-342900" marL="342900">
-              <a:buAutoNum type="arabicPeriod"/>
-            </a:pPr>
-            <a:r>
-              <a:rPr/>
-              <a:t>Has a spread that is related to the standard error</a:t>
-            </a:r>
-          </a:p>
-        </p:txBody>
-      </p:sp>
-    </p:spTree>
-  </p:cSld>
-</p:sld>
-</file>
-
-<file path=ppt/slides/slide41.xml><?xml version="1.0" encoding="utf-8"?>
-<p:sld xmlns:a="http://schemas.openxmlformats.org/drawingml/2006/main" xmlns:r="http://schemas.openxmlformats.org/officeDocument/2006/relationships" xmlns:p="http://schemas.openxmlformats.org/presentationml/2006/main">
-  <p:cSld>
-    <p:spTree>
-      <p:nvGrpSpPr>
-        <p:cNvPr id="1" name=""/>
-        <p:cNvGrpSpPr/>
-        <p:nvPr/>
-      </p:nvGrpSpPr>
-      <p:grpSpPr>
-        <a:xfrm>
-          <a:off x="0" y="0"/>
-          <a:ext cx="0" cy="0"/>
-          <a:chOff x="0" y="0"/>
-          <a:chExt cx="0" cy="0"/>
-        </a:xfrm>
-      </p:grpSpPr>
-      <p:sp>
-        <p:nvSpPr>
-          <p:cNvPr id="2" name="Title 1"/>
-          <p:cNvSpPr>
-            <a:spLocks noGrp="1"/>
-          </p:cNvSpPr>
-          <p:nvPr>
-            <p:ph type="title"/>
-          </p:nvPr>
-        </p:nvSpPr>
-        <p:spPr>
-          <a:xfrm>
-            <a:off x="0" y="0"/>
-            <a:ext cx="9144000" cy="582780"/>
-          </a:xfrm>
-        </p:spPr>
-        <p:txBody>
-          <a:bodyPr/>
-          <a:lstStyle/>
-          <a:p>
-            <a:pPr lvl="0" indent="0" marL="0">
-              <a:buNone/>
-            </a:pPr>
-            <a:r>
-              <a:rPr b="1"/>
-              <a:t>Standard Error and Sample Size</a:t>
-            </a:r>
-          </a:p>
-        </p:txBody>
-      </p:sp>
-      <p:sp>
-        <p:nvSpPr>
-          <p:cNvPr id="3" name="Content Placeholder 2"/>
-          <p:cNvSpPr>
-            <a:spLocks noGrp="1"/>
-          </p:cNvSpPr>
-          <p:nvPr>
-            <p:ph idx="1"/>
-          </p:nvPr>
-        </p:nvSpPr>
-        <p:spPr/>
-        <p:txBody>
-          <a:bodyPr/>
-          <a:lstStyle/>
-          <a:p>
-            <a:pPr lvl="0" indent="0" marL="0">
-              <a:buNone/>
-            </a:pPr>
-            <a:r>
-              <a:rPr/>
-              <a:t>Let’s see how the standard error changes with different sample sizes:</a:t>
-            </a:r>
-          </a:p>
-        </p:txBody>
-      </p:sp>
-    </p:spTree>
-  </p:cSld>
-</p:sld>
-</file>
-
-<file path=ppt/slides/slide42.xml><?xml version="1.0" encoding="utf-8"?>
-<p:sld xmlns:a="http://schemas.openxmlformats.org/drawingml/2006/main" xmlns:r="http://schemas.openxmlformats.org/officeDocument/2006/relationships" xmlns:p="http://schemas.openxmlformats.org/presentationml/2006/main">
-  <p:cSld>
-    <p:spTree>
-      <p:nvGrpSpPr>
-        <p:cNvPr id="1" name=""/>
-        <p:cNvGrpSpPr/>
-        <p:nvPr/>
-      </p:nvGrpSpPr>
-      <p:grpSpPr>
-        <a:xfrm>
-          <a:off x="0" y="0"/>
-          <a:ext cx="0" cy="0"/>
-          <a:chOff x="0" y="0"/>
-          <a:chExt cx="0" cy="0"/>
-        </a:xfrm>
-      </p:grpSpPr>
-      <p:sp>
-        <p:nvSpPr>
-          <p:cNvPr id="2" name="Title 1"/>
-          <p:cNvSpPr>
-            <a:spLocks noGrp="1"/>
-          </p:cNvSpPr>
-          <p:nvPr>
-            <p:ph type="title"/>
-          </p:nvPr>
-        </p:nvSpPr>
-        <p:spPr>
-          <a:xfrm>
-            <a:off x="0" y="0"/>
-            <a:ext cx="9144000" cy="871538"/>
-          </a:xfrm>
-        </p:spPr>
-        <p:txBody>
-          <a:bodyPr/>
-          <a:lstStyle/>
-          <a:p>
-            <a:pPr lvl="0" indent="0" marL="0">
-              <a:buNone/>
-            </a:pPr>
-            <a:r>
-              <a:rPr b="1"/>
-              <a:t>Sample Size vs. Standard Error</a:t>
-            </a:r>
-          </a:p>
-        </p:txBody>
-      </p:sp>
-      <p:sp>
-        <p:nvSpPr>
-          <p:cNvPr id="4" name="Text Placeholder 3"/>
-          <p:cNvSpPr>
-            <a:spLocks noGrp="1"/>
-          </p:cNvSpPr>
-          <p:nvPr>
-            <p:ph idx="2" sz="half" type="body"/>
-          </p:nvPr>
-        </p:nvSpPr>
-        <p:spPr/>
-        <p:txBody>
-          <a:bodyPr/>
-          <a:lstStyle/>
-          <a:p>
-            <a:pPr lvl="0" indent="0">
-              <a:buNone/>
-            </a:pPr>
-            <a:r>
-              <a:rPr>
-                <a:solidFill>
-                  <a:srgbClr val="5E5E5E"/>
-                </a:solidFill>
-                <a:latin typeface="Courier"/>
-              </a:rPr>
-              <a:t># Display the results</a:t>
-            </a:r>
-            <a:br/>
-            <a:r>
-              <a:rPr>
-                <a:solidFill>
-                  <a:srgbClr val="5E5E5E"/>
-                </a:solidFill>
-                <a:latin typeface="Courier"/>
-              </a:rPr>
-              <a:t># Plot how SE changes with sample size</a:t>
-            </a:r>
-            <a:br/>
-            <a:r>
-              <a:rPr>
-                <a:solidFill>
-                  <a:srgbClr val="003B4F"/>
-                </a:solidFill>
-                <a:latin typeface="Courier"/>
-              </a:rPr>
-              <a:t>results_long &lt;- </a:t>
-            </a:r>
-            <a:r>
-              <a:rPr>
-                <a:solidFill>
-                  <a:srgbClr val="4758AB"/>
-                </a:solidFill>
-                <a:latin typeface="Courier"/>
-              </a:rPr>
-              <a:t>pivot_longer</a:t>
-            </a:r>
-            <a:r>
-              <a:rPr>
-                <a:solidFill>
-                  <a:srgbClr val="003B4F"/>
-                </a:solidFill>
-                <a:latin typeface="Courier"/>
-              </a:rPr>
-              <a:t>(results, </a:t>
-            </a:r>
-            <a:br/>
-            <a:r>
-              <a:rPr>
-                <a:solidFill>
-                  <a:srgbClr val="003B4F"/>
-                </a:solidFill>
-                <a:latin typeface="Courier"/>
-              </a:rPr>
-              <a:t>                             </a:t>
-            </a:r>
-            <a:r>
-              <a:rPr>
-                <a:solidFill>
-                  <a:srgbClr val="657422"/>
-                </a:solidFill>
-                <a:latin typeface="Courier"/>
-              </a:rPr>
-              <a:t>cols =</a:t>
-            </a:r>
-            <a:r>
-              <a:rPr>
-                <a:solidFill>
-                  <a:srgbClr val="003B4F"/>
-                </a:solidFill>
-                <a:latin typeface="Courier"/>
-              </a:rPr>
-              <a:t> </a:t>
-            </a:r>
-            <a:r>
-              <a:rPr>
-                <a:solidFill>
-                  <a:srgbClr val="4758AB"/>
-                </a:solidFill>
-                <a:latin typeface="Courier"/>
-              </a:rPr>
-              <a:t>c</a:t>
-            </a:r>
-            <a:r>
-              <a:rPr>
-                <a:solidFill>
-                  <a:srgbClr val="003B4F"/>
-                </a:solidFill>
-                <a:latin typeface="Courier"/>
-              </a:rPr>
-              <a:t>(empirical_se, theoretical_se),</a:t>
-            </a:r>
-            <a:br/>
-            <a:r>
-              <a:rPr>
-                <a:solidFill>
-                  <a:srgbClr val="003B4F"/>
-                </a:solidFill>
-                <a:latin typeface="Courier"/>
-              </a:rPr>
-              <a:t>                             </a:t>
-            </a:r>
-            <a:r>
-              <a:rPr>
-                <a:solidFill>
-                  <a:srgbClr val="657422"/>
-                </a:solidFill>
-                <a:latin typeface="Courier"/>
-              </a:rPr>
-              <a:t>names_to =</a:t>
-            </a:r>
-            <a:r>
-              <a:rPr>
-                <a:solidFill>
-                  <a:srgbClr val="003B4F"/>
-                </a:solidFill>
-                <a:latin typeface="Courier"/>
-              </a:rPr>
-              <a:t> </a:t>
-            </a:r>
-            <a:r>
-              <a:rPr>
-                <a:solidFill>
-                  <a:srgbClr val="20794D"/>
-                </a:solidFill>
-                <a:latin typeface="Courier"/>
-              </a:rPr>
-              <a:t>"se_type"</a:t>
-            </a:r>
-            <a:r>
-              <a:rPr>
-                <a:solidFill>
-                  <a:srgbClr val="003B4F"/>
-                </a:solidFill>
-                <a:latin typeface="Courier"/>
-              </a:rPr>
-              <a:t>, </a:t>
-            </a:r>
-            <a:br/>
-            <a:r>
-              <a:rPr>
-                <a:solidFill>
-                  <a:srgbClr val="003B4F"/>
-                </a:solidFill>
-                <a:latin typeface="Courier"/>
-              </a:rPr>
-              <a:t>                             </a:t>
-            </a:r>
-            <a:r>
-              <a:rPr>
-                <a:solidFill>
-                  <a:srgbClr val="657422"/>
-                </a:solidFill>
-                <a:latin typeface="Courier"/>
-              </a:rPr>
-              <a:t>values_to =</a:t>
-            </a:r>
-            <a:r>
-              <a:rPr>
-                <a:solidFill>
-                  <a:srgbClr val="003B4F"/>
-                </a:solidFill>
-                <a:latin typeface="Courier"/>
-              </a:rPr>
-              <a:t> </a:t>
-            </a:r>
-            <a:r>
-              <a:rPr>
-                <a:solidFill>
-                  <a:srgbClr val="20794D"/>
-                </a:solidFill>
-                <a:latin typeface="Courier"/>
-              </a:rPr>
-              <a:t>"standard_error"</a:t>
-            </a:r>
-            <a:r>
-              <a:rPr>
-                <a:solidFill>
-                  <a:srgbClr val="003B4F"/>
-                </a:solidFill>
-                <a:latin typeface="Courier"/>
-              </a:rPr>
-              <a:t>)</a:t>
-            </a:r>
-            <a:br/>
-            <a:br/>
-            <a:r>
-              <a:rPr>
-                <a:solidFill>
-                  <a:srgbClr val="4758AB"/>
-                </a:solidFill>
-                <a:latin typeface="Courier"/>
-              </a:rPr>
-              <a:t>ggplot</a:t>
-            </a:r>
-            <a:r>
-              <a:rPr>
-                <a:solidFill>
-                  <a:srgbClr val="003B4F"/>
-                </a:solidFill>
-                <a:latin typeface="Courier"/>
-              </a:rPr>
-              <a:t>(results_long, </a:t>
-            </a:r>
-            <a:r>
-              <a:rPr>
-                <a:solidFill>
-                  <a:srgbClr val="4758AB"/>
-                </a:solidFill>
-                <a:latin typeface="Courier"/>
-              </a:rPr>
-              <a:t>aes</a:t>
-            </a:r>
-            <a:r>
-              <a:rPr>
-                <a:solidFill>
-                  <a:srgbClr val="003B4F"/>
-                </a:solidFill>
-                <a:latin typeface="Courier"/>
-              </a:rPr>
-              <a:t>(</a:t>
-            </a:r>
-            <a:r>
-              <a:rPr>
-                <a:solidFill>
-                  <a:srgbClr val="657422"/>
-                </a:solidFill>
-                <a:latin typeface="Courier"/>
-              </a:rPr>
-              <a:t>x =</a:t>
-            </a:r>
-            <a:r>
-              <a:rPr>
-                <a:solidFill>
-                  <a:srgbClr val="003B4F"/>
-                </a:solidFill>
-                <a:latin typeface="Courier"/>
-              </a:rPr>
-              <a:t> sample_size, </a:t>
-            </a:r>
-            <a:r>
-              <a:rPr>
-                <a:solidFill>
-                  <a:srgbClr val="657422"/>
-                </a:solidFill>
-                <a:latin typeface="Courier"/>
-              </a:rPr>
-              <a:t>y =</a:t>
-            </a:r>
-            <a:r>
-              <a:rPr>
-                <a:solidFill>
-                  <a:srgbClr val="003B4F"/>
-                </a:solidFill>
-                <a:latin typeface="Courier"/>
-              </a:rPr>
-              <a:t> standard_error, </a:t>
-            </a:r>
-            <a:r>
-              <a:rPr>
-                <a:solidFill>
-                  <a:srgbClr val="657422"/>
-                </a:solidFill>
-                <a:latin typeface="Courier"/>
-              </a:rPr>
-              <a:t>color =</a:t>
-            </a:r>
-            <a:r>
-              <a:rPr>
-                <a:solidFill>
-                  <a:srgbClr val="003B4F"/>
-                </a:solidFill>
-                <a:latin typeface="Courier"/>
-              </a:rPr>
-              <a:t> se_type)) </a:t>
-            </a:r>
-            <a:r>
-              <a:rPr>
-                <a:solidFill>
-                  <a:srgbClr val="5E5E5E"/>
-                </a:solidFill>
-                <a:latin typeface="Courier"/>
-              </a:rPr>
-              <a:t>+</a:t>
-            </a:r>
-            <a:br/>
-            <a:r>
-              <a:rPr>
-                <a:solidFill>
-                  <a:srgbClr val="003B4F"/>
-                </a:solidFill>
-                <a:latin typeface="Courier"/>
-              </a:rPr>
-              <a:t>  </a:t>
-            </a:r>
-            <a:r>
-              <a:rPr>
-                <a:solidFill>
-                  <a:srgbClr val="4758AB"/>
-                </a:solidFill>
-                <a:latin typeface="Courier"/>
-              </a:rPr>
-              <a:t>geom_line</a:t>
-            </a:r>
-            <a:r>
-              <a:rPr>
-                <a:solidFill>
-                  <a:srgbClr val="003B4F"/>
-                </a:solidFill>
-                <a:latin typeface="Courier"/>
-              </a:rPr>
-              <a:t>() </a:t>
-            </a:r>
-            <a:r>
-              <a:rPr>
-                <a:solidFill>
-                  <a:srgbClr val="5E5E5E"/>
-                </a:solidFill>
-                <a:latin typeface="Courier"/>
-              </a:rPr>
-              <a:t>+</a:t>
-            </a:r>
-            <a:br/>
-            <a:r>
-              <a:rPr>
-                <a:solidFill>
-                  <a:srgbClr val="003B4F"/>
-                </a:solidFill>
-                <a:latin typeface="Courier"/>
-              </a:rPr>
-              <a:t>  </a:t>
-            </a:r>
-            <a:r>
-              <a:rPr>
-                <a:solidFill>
-                  <a:srgbClr val="4758AB"/>
-                </a:solidFill>
-                <a:latin typeface="Courier"/>
-              </a:rPr>
-              <a:t>geom_point</a:t>
-            </a:r>
-            <a:r>
-              <a:rPr>
-                <a:solidFill>
-                  <a:srgbClr val="003B4F"/>
-                </a:solidFill>
-                <a:latin typeface="Courier"/>
-              </a:rPr>
-              <a:t>(</a:t>
-            </a:r>
-            <a:r>
-              <a:rPr>
-                <a:solidFill>
-                  <a:srgbClr val="657422"/>
-                </a:solidFill>
-                <a:latin typeface="Courier"/>
-              </a:rPr>
-              <a:t>size =</a:t>
-            </a:r>
-            <a:r>
-              <a:rPr>
-                <a:solidFill>
-                  <a:srgbClr val="003B4F"/>
-                </a:solidFill>
-                <a:latin typeface="Courier"/>
-              </a:rPr>
-              <a:t> </a:t>
-            </a:r>
-            <a:r>
-              <a:rPr>
-                <a:solidFill>
-                  <a:srgbClr val="AD0000"/>
-                </a:solidFill>
-                <a:latin typeface="Courier"/>
-              </a:rPr>
-              <a:t>3</a:t>
-            </a:r>
-            <a:r>
-              <a:rPr>
-                <a:solidFill>
-                  <a:srgbClr val="003B4F"/>
-                </a:solidFill>
-                <a:latin typeface="Courier"/>
-              </a:rPr>
-              <a:t>) </a:t>
-            </a:r>
-            <a:r>
-              <a:rPr>
-                <a:solidFill>
-                  <a:srgbClr val="5E5E5E"/>
-                </a:solidFill>
-                <a:latin typeface="Courier"/>
-              </a:rPr>
-              <a:t>+</a:t>
-            </a:r>
-            <a:br/>
-            <a:r>
-              <a:rPr>
-                <a:solidFill>
-                  <a:srgbClr val="003B4F"/>
-                </a:solidFill>
-                <a:latin typeface="Courier"/>
-              </a:rPr>
-              <a:t>  </a:t>
-            </a:r>
-            <a:r>
-              <a:rPr>
-                <a:solidFill>
-                  <a:srgbClr val="4758AB"/>
-                </a:solidFill>
-                <a:latin typeface="Courier"/>
-              </a:rPr>
-              <a:t>scale_x_continuous</a:t>
-            </a:r>
-            <a:r>
-              <a:rPr>
-                <a:solidFill>
-                  <a:srgbClr val="003B4F"/>
-                </a:solidFill>
-                <a:latin typeface="Courier"/>
-              </a:rPr>
-              <a:t>(</a:t>
-            </a:r>
-            <a:r>
-              <a:rPr>
-                <a:solidFill>
-                  <a:srgbClr val="657422"/>
-                </a:solidFill>
-                <a:latin typeface="Courier"/>
-              </a:rPr>
-              <a:t>breaks =</a:t>
-            </a:r>
-            <a:r>
-              <a:rPr>
-                <a:solidFill>
-                  <a:srgbClr val="003B4F"/>
-                </a:solidFill>
-                <a:latin typeface="Courier"/>
-              </a:rPr>
-              <a:t> sample_sizes) </a:t>
-            </a:r>
-            <a:r>
-              <a:rPr>
-                <a:solidFill>
-                  <a:srgbClr val="5E5E5E"/>
-                </a:solidFill>
-                <a:latin typeface="Courier"/>
-              </a:rPr>
-              <a:t>+</a:t>
-            </a:r>
-            <a:br/>
-            <a:r>
-              <a:rPr>
-                <a:solidFill>
-                  <a:srgbClr val="003B4F"/>
-                </a:solidFill>
-                <a:latin typeface="Courier"/>
-              </a:rPr>
-              <a:t>  </a:t>
-            </a:r>
-            <a:r>
-              <a:rPr>
-                <a:solidFill>
-                  <a:srgbClr val="4758AB"/>
-                </a:solidFill>
-                <a:latin typeface="Courier"/>
-              </a:rPr>
-              <a:t>labs</a:t>
-            </a:r>
-            <a:r>
-              <a:rPr>
-                <a:solidFill>
-                  <a:srgbClr val="003B4F"/>
-                </a:solidFill>
-                <a:latin typeface="Courier"/>
-              </a:rPr>
-              <a:t>(</a:t>
-            </a:r>
-            <a:r>
-              <a:rPr>
-                <a:solidFill>
-                  <a:srgbClr val="657422"/>
-                </a:solidFill>
-                <a:latin typeface="Courier"/>
-              </a:rPr>
-              <a:t>title =</a:t>
-            </a:r>
-            <a:r>
-              <a:rPr>
-                <a:solidFill>
-                  <a:srgbClr val="003B4F"/>
-                </a:solidFill>
-                <a:latin typeface="Courier"/>
-              </a:rPr>
-              <a:t> </a:t>
-            </a:r>
-            <a:r>
-              <a:rPr>
-                <a:solidFill>
-                  <a:srgbClr val="20794D"/>
-                </a:solidFill>
-                <a:latin typeface="Courier"/>
-              </a:rPr>
-              <a:t>"Standard Error vs. Sample Size"</a:t>
-            </a:r>
-            <a:r>
-              <a:rPr>
-                <a:solidFill>
-                  <a:srgbClr val="003B4F"/>
-                </a:solidFill>
-                <a:latin typeface="Courier"/>
-              </a:rPr>
-              <a:t>,</a:t>
-            </a:r>
-            <a:br/>
-            <a:r>
-              <a:rPr>
-                <a:solidFill>
-                  <a:srgbClr val="003B4F"/>
-                </a:solidFill>
-                <a:latin typeface="Courier"/>
-              </a:rPr>
-              <a:t>       </a:t>
-            </a:r>
-            <a:r>
-              <a:rPr>
-                <a:solidFill>
-                  <a:srgbClr val="657422"/>
-                </a:solidFill>
-                <a:latin typeface="Courier"/>
-              </a:rPr>
-              <a:t>subtitle =</a:t>
-            </a:r>
-            <a:r>
-              <a:rPr>
-                <a:solidFill>
-                  <a:srgbClr val="003B4F"/>
-                </a:solidFill>
-                <a:latin typeface="Courier"/>
-              </a:rPr>
-              <a:t> </a:t>
-            </a:r>
-            <a:r>
-              <a:rPr>
-                <a:solidFill>
-                  <a:srgbClr val="20794D"/>
-                </a:solidFill>
-                <a:latin typeface="Courier"/>
-              </a:rPr>
-              <a:t>"Standard error decreases as sample size increases"</a:t>
-            </a:r>
-            <a:r>
-              <a:rPr>
-                <a:solidFill>
-                  <a:srgbClr val="003B4F"/>
-                </a:solidFill>
-                <a:latin typeface="Courier"/>
-              </a:rPr>
-              <a:t>,</a:t>
-            </a:r>
-            <a:br/>
-            <a:r>
-              <a:rPr>
-                <a:solidFill>
-                  <a:srgbClr val="003B4F"/>
-                </a:solidFill>
-                <a:latin typeface="Courier"/>
-              </a:rPr>
-              <a:t>       </a:t>
-            </a:r>
-            <a:r>
-              <a:rPr>
-                <a:solidFill>
-                  <a:srgbClr val="657422"/>
-                </a:solidFill>
-                <a:latin typeface="Courier"/>
-              </a:rPr>
-              <a:t>x =</a:t>
-            </a:r>
-            <a:r>
-              <a:rPr>
-                <a:solidFill>
-                  <a:srgbClr val="003B4F"/>
-                </a:solidFill>
-                <a:latin typeface="Courier"/>
-              </a:rPr>
-              <a:t> </a:t>
-            </a:r>
-            <a:r>
-              <a:rPr>
-                <a:solidFill>
-                  <a:srgbClr val="20794D"/>
-                </a:solidFill>
-                <a:latin typeface="Courier"/>
-              </a:rPr>
-              <a:t>"Sample Size"</a:t>
-            </a:r>
-            <a:r>
-              <a:rPr>
-                <a:solidFill>
-                  <a:srgbClr val="003B4F"/>
-                </a:solidFill>
-                <a:latin typeface="Courier"/>
-              </a:rPr>
-              <a:t>,</a:t>
-            </a:r>
-            <a:br/>
-            <a:r>
-              <a:rPr>
-                <a:solidFill>
-                  <a:srgbClr val="003B4F"/>
-                </a:solidFill>
-                <a:latin typeface="Courier"/>
-              </a:rPr>
-              <a:t>       </a:t>
-            </a:r>
-            <a:r>
-              <a:rPr>
-                <a:solidFill>
-                  <a:srgbClr val="657422"/>
-                </a:solidFill>
-                <a:latin typeface="Courier"/>
-              </a:rPr>
-              <a:t>y =</a:t>
-            </a:r>
-            <a:r>
-              <a:rPr>
-                <a:solidFill>
-                  <a:srgbClr val="003B4F"/>
-                </a:solidFill>
-                <a:latin typeface="Courier"/>
-              </a:rPr>
-              <a:t> </a:t>
-            </a:r>
-            <a:r>
-              <a:rPr>
-                <a:solidFill>
-                  <a:srgbClr val="20794D"/>
-                </a:solidFill>
-                <a:latin typeface="Courier"/>
-              </a:rPr>
-              <a:t>"Standard Error"</a:t>
-            </a:r>
-            <a:r>
-              <a:rPr>
-                <a:solidFill>
-                  <a:srgbClr val="003B4F"/>
-                </a:solidFill>
-                <a:latin typeface="Courier"/>
-              </a:rPr>
-              <a:t>,</a:t>
-            </a:r>
-            <a:br/>
-            <a:r>
-              <a:rPr>
-                <a:solidFill>
-                  <a:srgbClr val="003B4F"/>
-                </a:solidFill>
-                <a:latin typeface="Courier"/>
-              </a:rPr>
-              <a:t>       </a:t>
-            </a:r>
-            <a:r>
-              <a:rPr>
-                <a:solidFill>
-                  <a:srgbClr val="657422"/>
-                </a:solidFill>
-                <a:latin typeface="Courier"/>
-              </a:rPr>
-              <a:t>color =</a:t>
-            </a:r>
-            <a:r>
-              <a:rPr>
-                <a:solidFill>
-                  <a:srgbClr val="003B4F"/>
-                </a:solidFill>
-                <a:latin typeface="Courier"/>
-              </a:rPr>
-              <a:t> </a:t>
-            </a:r>
-            <a:r>
-              <a:rPr>
-                <a:solidFill>
-                  <a:srgbClr val="20794D"/>
-                </a:solidFill>
-                <a:latin typeface="Courier"/>
-              </a:rPr>
-              <a:t>"SE Type"</a:t>
-            </a:r>
-            <a:r>
-              <a:rPr>
-                <a:solidFill>
-                  <a:srgbClr val="003B4F"/>
-                </a:solidFill>
-                <a:latin typeface="Courier"/>
-              </a:rPr>
-              <a:t>) </a:t>
-            </a:r>
-            <a:r>
-              <a:rPr>
-                <a:solidFill>
-                  <a:srgbClr val="5E5E5E"/>
-                </a:solidFill>
-                <a:latin typeface="Courier"/>
-              </a:rPr>
-              <a:t>+</a:t>
-            </a:r>
-            <a:br/>
-            <a:r>
-              <a:rPr>
-                <a:solidFill>
-                  <a:srgbClr val="003B4F"/>
-                </a:solidFill>
-                <a:latin typeface="Courier"/>
-              </a:rPr>
-              <a:t>  </a:t>
-            </a:r>
-            <a:r>
-              <a:rPr>
-                <a:solidFill>
-                  <a:srgbClr val="4758AB"/>
-                </a:solidFill>
-                <a:latin typeface="Courier"/>
-              </a:rPr>
-              <a:t>theme_minimal</a:t>
-            </a:r>
-            <a:r>
-              <a:rPr>
-                <a:solidFill>
-                  <a:srgbClr val="003B4F"/>
-                </a:solidFill>
-                <a:latin typeface="Courier"/>
-              </a:rPr>
-              <a:t>()</a:t>
-            </a:r>
-          </a:p>
-        </p:txBody>
-      </p:sp>
-      <p:pic>
-        <p:nvPicPr>
-          <p:cNvPr descr="03_01_lecture_powerpoint_files/figure-pptx/unnamed-chunk-11-1.png" id="0" name="Picture 1"/>
-          <p:cNvPicPr>
-            <a:picLocks noGrp="1" noChangeAspect="1"/>
-          </p:cNvPicPr>
-          <p:nvPr/>
-        </p:nvPicPr>
-        <p:blipFill>
-          <a:blip r:embed="rId2"/>
-          <a:stretch>
-            <a:fillRect/>
-          </a:stretch>
-        </p:blipFill>
-        <p:spPr bwMode="auto">
-          <a:xfrm>
-            <a:off x="3657600" y="977900"/>
-            <a:ext cx="5232400" cy="3733800"/>
-          </a:xfrm>
-          <a:prstGeom prst="rect">
-            <a:avLst/>
-          </a:prstGeom>
-          <a:noFill/>
-          <a:ln w="9525">
-            <a:noFill/>
-            <a:headEnd/>
-            <a:tailEnd/>
-          </a:ln>
-        </p:spPr>
-      </p:pic>
-    </p:spTree>
-  </p:cSld>
-</p:sld>
-</file>
-
-<file path=ppt/slides/slide43.xml><?xml version="1.0" encoding="utf-8"?>
 <p:sld xmlns:a="http://schemas.openxmlformats.org/drawingml/2006/main" xmlns:r="http://schemas.openxmlformats.org/officeDocument/2006/relationships" xmlns:p="http://schemas.openxmlformats.org/presentationml/2006/main">
   <p:cSld>
     <p:spTree>
@@ -13416,7 +12576,7 @@
 </p:sld>
 </file>
 
-<file path=ppt/slides/slide44.xml><?xml version="1.0" encoding="utf-8"?>
+<file path=ppt/slides/slide41.xml><?xml version="1.0" encoding="utf-8"?>
 <p:sld xmlns:a="http://schemas.openxmlformats.org/drawingml/2006/main" xmlns:r="http://schemas.openxmlformats.org/officeDocument/2006/relationships" xmlns:p="http://schemas.openxmlformats.org/presentationml/2006/main">
   <p:cSld>
     <p:spTree>
@@ -14003,7 +13163,7 @@
 </p:sld>
 </file>
 
-<file path=ppt/slides/slide45.xml><?xml version="1.0" encoding="utf-8"?>
+<file path=ppt/slides/slide42.xml><?xml version="1.0" encoding="utf-8"?>
 <p:sld xmlns:a="http://schemas.openxmlformats.org/drawingml/2006/main" xmlns:r="http://schemas.openxmlformats.org/officeDocument/2006/relationships" xmlns:p="http://schemas.openxmlformats.org/presentationml/2006/main">
   <p:cSld>
     <p:spTree>
@@ -14667,7 +13827,7 @@
       </p:sp>
       <p:pic>
         <p:nvPicPr>
-          <p:cNvPr descr="03_01_lecture_powerpoint_files/figure-pptx/unnamed-chunk-13-1.png" id="0" name="Picture 1"/>
+          <p:cNvPr descr="03_01_lecture_powerpoint_files/figure-pptx/unnamed-chunk-10-1.png" id="0" name="Picture 1"/>
           <p:cNvPicPr>
             <a:picLocks noGrp="1" noChangeAspect="1"/>
           </p:cNvPicPr>
@@ -14700,7 +13860,7 @@
 </p:sld>
 </file>
 
-<file path=ppt/slides/slide46.xml><?xml version="1.0" encoding="utf-8"?>
+<file path=ppt/slides/slide43.xml><?xml version="1.0" encoding="utf-8"?>
 <p:sld xmlns:a="http://schemas.openxmlformats.org/drawingml/2006/main" xmlns:r="http://schemas.openxmlformats.org/officeDocument/2006/relationships" xmlns:p="http://schemas.openxmlformats.org/presentationml/2006/main">
   <p:cSld>
     <p:spTree>
@@ -15844,7 +15004,7 @@
 </p:sld>
 </file>
 
-<file path=ppt/slides/slide47.xml><?xml version="1.0" encoding="utf-8"?>
+<file path=ppt/slides/slide44.xml><?xml version="1.0" encoding="utf-8"?>
 <p:sld xmlns:a="http://schemas.openxmlformats.org/drawingml/2006/main" xmlns:r="http://schemas.openxmlformats.org/officeDocument/2006/relationships" xmlns:p="http://schemas.openxmlformats.org/presentationml/2006/main">
   <p:cSld>
     <p:spTree>
@@ -16729,7 +15889,7 @@
       </p:sp>
       <p:pic>
         <p:nvPicPr>
-          <p:cNvPr descr="03_01_lecture_powerpoint_files/figure-pptx/unnamed-chunk-15-1.png" id="0" name="Picture 1"/>
+          <p:cNvPr descr="03_01_lecture_powerpoint_files/figure-pptx/unnamed-chunk-12-1.png" id="0" name="Picture 1"/>
           <p:cNvPicPr>
             <a:picLocks noGrp="1" noChangeAspect="1"/>
           </p:cNvPicPr>
@@ -16762,7 +15922,7 @@
 </p:sld>
 </file>
 
-<file path=ppt/slides/slide48.xml><?xml version="1.0" encoding="utf-8"?>
+<file path=ppt/slides/slide45.xml><?xml version="1.0" encoding="utf-8"?>
 <p:sld xmlns:a="http://schemas.openxmlformats.org/drawingml/2006/main" xmlns:r="http://schemas.openxmlformats.org/officeDocument/2006/relationships" xmlns:p="http://schemas.openxmlformats.org/presentationml/2006/main">
   <p:cSld>
     <p:spTree>
@@ -16951,7 +16111,7 @@
 </p:sld>
 </file>
 
-<file path=ppt/slides/slide49.xml><?xml version="1.0" encoding="utf-8"?>
+<file path=ppt/slides/slide46.xml><?xml version="1.0" encoding="utf-8"?>
 <p:sld xmlns:a="http://schemas.openxmlformats.org/drawingml/2006/main" xmlns:r="http://schemas.openxmlformats.org/officeDocument/2006/relationships" xmlns:p="http://schemas.openxmlformats.org/presentationml/2006/main">
   <p:cSld>
     <p:spTree>

--- a/docs/ecostats_lectures/lecture_03/03_01_lecture_powerpoint.pptx
+++ b/docs/ecostats_lectures/lecture_03/03_01_lecture_powerpoint.pptx
@@ -51,6 +51,7 @@
     <p:sldId id="299" r:id="rId45"/>
     <p:sldId id="300" r:id="rId46"/>
     <p:sldId id="301" r:id="rId47"/>
+    <p:sldId id="302" r:id="rId48"/>
   </p:sldIdLst>
   <p:sldSz cx="9144000" cy="5143500" type="screen16x9"/>
   <p:notesSz cx="6858000" cy="9144000"/>
@@ -3422,7 +3423,7 @@
             </a:pPr>
             <a:r>
               <a:rPr/>
-              <a:t>Practice Exercise 2: Examining Grayling Data</a:t>
+              <a:t>Practice Exercise 1: Fish Data</a:t>
             </a:r>
           </a:p>
         </p:txBody>
@@ -3447,6 +3448,141 @@
             </a:pPr>
             <a:r>
               <a:rPr sz="2000" b="1"/>
+              <a:t>Practice Exercise 1: Can you open the fish data </a:t>
+            </a:r>
+            <a:r>
+              <a:rPr sz="2000" b="1">
+                <a:latin typeface="Courier"/>
+              </a:rPr>
+              <a:t>gray_I3_I8.csv</a:t>
+            </a:r>
+            <a:r>
+              <a:rPr sz="2000" b="1"/>
+              <a:t> and look at the structure and make a histogram?</a:t>
+            </a:r>
+          </a:p>
+          <a:p>
+            <a:pPr lvl="0" indent="0" marL="1270000">
+              <a:buNone/>
+            </a:pPr>
+            <a:r>
+              <a:rPr sz="2000"/>
+              <a:t>Note the variation around the mean… some could be due to measurement error</a:t>
+            </a:r>
+          </a:p>
+          <a:p>
+            <a:pPr lvl="0" indent="0" marL="1270000">
+              <a:buNone/>
+            </a:pPr>
+            <a:r>
+              <a:rPr sz="2000"/>
+              <a:t>Let’s recreate the basic histogram of fish lengths using </a:t>
+            </a:r>
+            <a:r>
+              <a:rPr sz="2000">
+                <a:latin typeface="Courier"/>
+              </a:rPr>
+              <a:t>gray_I3_I8.csv</a:t>
+            </a:r>
+          </a:p>
+          <a:p>
+            <a:pPr lvl="0" indent="0">
+              <a:buNone/>
+            </a:pPr>
+            <a:r>
+              <a:rPr>
+                <a:solidFill>
+                  <a:srgbClr val="5E5E5E"/>
+                </a:solidFill>
+                <a:latin typeface="Courier"/>
+              </a:rPr>
+              <a:t># Write your code here to read in the file</a:t>
+            </a:r>
+            <a:br/>
+            <a:r>
+              <a:rPr>
+                <a:solidFill>
+                  <a:srgbClr val="5E5E5E"/>
+                </a:solidFill>
+                <a:latin typeface="Courier"/>
+              </a:rPr>
+              <a:t># How do you examine the data - what are the ways you think and lets try it!</a:t>
+            </a:r>
+          </a:p>
+        </p:txBody>
+      </p:sp>
+    </p:spTree>
+  </p:cSld>
+</p:sld>
+</file>
+
+<file path=ppt/slides/slide11.xml><?xml version="1.0" encoding="utf-8"?>
+<p:sld xmlns:a="http://schemas.openxmlformats.org/drawingml/2006/main" xmlns:r="http://schemas.openxmlformats.org/officeDocument/2006/relationships" xmlns:p="http://schemas.openxmlformats.org/presentationml/2006/main">
+  <p:cSld>
+    <p:spTree>
+      <p:nvGrpSpPr>
+        <p:cNvPr id="1" name=""/>
+        <p:cNvGrpSpPr/>
+        <p:nvPr/>
+      </p:nvGrpSpPr>
+      <p:grpSpPr>
+        <a:xfrm>
+          <a:off x="0" y="0"/>
+          <a:ext cx="0" cy="0"/>
+          <a:chOff x="0" y="0"/>
+          <a:chExt cx="0" cy="0"/>
+        </a:xfrm>
+      </p:grpSpPr>
+      <p:sp>
+        <p:nvSpPr>
+          <p:cNvPr id="2" name="Title 1"/>
+          <p:cNvSpPr>
+            <a:spLocks noGrp="1"/>
+          </p:cNvSpPr>
+          <p:nvPr>
+            <p:ph type="title"/>
+          </p:nvPr>
+        </p:nvSpPr>
+        <p:spPr>
+          <a:xfrm>
+            <a:off x="0" y="0"/>
+            <a:ext cx="9144000" cy="582780"/>
+          </a:xfrm>
+        </p:spPr>
+        <p:txBody>
+          <a:bodyPr/>
+          <a:lstStyle/>
+          <a:p>
+            <a:pPr lvl="0" indent="0" marL="0">
+              <a:buNone/>
+            </a:pPr>
+            <a:r>
+              <a:rPr/>
+              <a:t>Practice Exercise 2: Examining Grayling Data</a:t>
+            </a:r>
+          </a:p>
+        </p:txBody>
+      </p:sp>
+      <p:sp>
+        <p:nvSpPr>
+          <p:cNvPr id="3" name="Content Placeholder 2"/>
+          <p:cNvSpPr>
+            <a:spLocks noGrp="1"/>
+          </p:cNvSpPr>
+          <p:nvPr>
+            <p:ph idx="1"/>
+          </p:nvPr>
+        </p:nvSpPr>
+        <p:spPr/>
+        <p:txBody>
+          <a:bodyPr/>
+          <a:lstStyle/>
+          <a:p>
+            <a:pPr lvl="0" indent="0" marL="1270000">
+              <a:buNone/>
+            </a:pPr>
+            <a:r>
+              <a:rPr sz="2000" b="1"/>
               <a:t>Practice Exercise 2: Can you do this for the pine data we have collected?</a:t>
             </a:r>
           </a:p>
@@ -3596,7 +3732,7 @@
 </p:sld>
 </file>
 
-<file path=ppt/slides/slide11.xml><?xml version="1.0" encoding="utf-8"?>
+<file path=ppt/slides/slide12.xml><?xml version="1.0" encoding="utf-8"?>
 <p:sld xmlns:a="http://schemas.openxmlformats.org/drawingml/2006/main" xmlns:r="http://schemas.openxmlformats.org/officeDocument/2006/relationships" xmlns:p="http://schemas.openxmlformats.org/presentationml/2006/main">
   <p:cSld>
     <p:spTree>
@@ -3799,7 +3935,7 @@
 </p:sld>
 </file>
 
-<file path=ppt/slides/slide12.xml><?xml version="1.0" encoding="utf-8"?>
+<file path=ppt/slides/slide13.xml><?xml version="1.0" encoding="utf-8"?>
 <p:sld xmlns:a="http://schemas.openxmlformats.org/drawingml/2006/main" xmlns:r="http://schemas.openxmlformats.org/officeDocument/2006/relationships" xmlns:p="http://schemas.openxmlformats.org/presentationml/2006/main">
   <p:cSld>
     <p:spTree>
@@ -3920,7 +4056,7 @@
 </p:sld>
 </file>
 
-<file path=ppt/slides/slide13.xml><?xml version="1.0" encoding="utf-8"?>
+<file path=ppt/slides/slide14.xml><?xml version="1.0" encoding="utf-8"?>
 <p:sld xmlns:a="http://schemas.openxmlformats.org/drawingml/2006/main" xmlns:r="http://schemas.openxmlformats.org/officeDocument/2006/relationships" xmlns:p="http://schemas.openxmlformats.org/presentationml/2006/main">
   <p:cSld>
     <p:spTree>
@@ -4415,7 +4551,7 @@
 </p:sld>
 </file>
 
-<file path=ppt/slides/slide14.xml><?xml version="1.0" encoding="utf-8"?>
+<file path=ppt/slides/slide15.xml><?xml version="1.0" encoding="utf-8"?>
 <p:sld xmlns:a="http://schemas.openxmlformats.org/drawingml/2006/main" xmlns:r="http://schemas.openxmlformats.org/officeDocument/2006/relationships" xmlns:p="http://schemas.openxmlformats.org/presentationml/2006/main">
   <p:cSld>
     <p:spTree>
@@ -4717,7 +4853,7 @@
 </p:sld>
 </file>
 
-<file path=ppt/slides/slide15.xml><?xml version="1.0" encoding="utf-8"?>
+<file path=ppt/slides/slide16.xml><?xml version="1.0" encoding="utf-8"?>
 <p:sld xmlns:a="http://schemas.openxmlformats.org/drawingml/2006/main" xmlns:r="http://schemas.openxmlformats.org/officeDocument/2006/relationships" xmlns:p="http://schemas.openxmlformats.org/presentationml/2006/main">
   <p:cSld>
     <p:spTree>
@@ -5425,7 +5561,7 @@
 </p:sld>
 </file>
 
-<file path=ppt/slides/slide16.xml><?xml version="1.0" encoding="utf-8"?>
+<file path=ppt/slides/slide17.xml><?xml version="1.0" encoding="utf-8"?>
 <p:sld xmlns:a="http://schemas.openxmlformats.org/drawingml/2006/main" xmlns:r="http://schemas.openxmlformats.org/officeDocument/2006/relationships" xmlns:p="http://schemas.openxmlformats.org/presentationml/2006/main">
   <p:cSld>
     <p:spTree>
@@ -5571,7 +5707,7 @@
 </p:sld>
 </file>
 
-<file path=ppt/slides/slide17.xml><?xml version="1.0" encoding="utf-8"?>
+<file path=ppt/slides/slide18.xml><?xml version="1.0" encoding="utf-8"?>
 <p:sld xmlns:a="http://schemas.openxmlformats.org/drawingml/2006/main" xmlns:r="http://schemas.openxmlformats.org/officeDocument/2006/relationships" xmlns:p="http://schemas.openxmlformats.org/presentationml/2006/main">
   <p:cSld>
     <p:spTree>
@@ -5772,7 +5908,7 @@
 </p:sld>
 </file>
 
-<file path=ppt/slides/slide18.xml><?xml version="1.0" encoding="utf-8"?>
+<file path=ppt/slides/slide19.xml><?xml version="1.0" encoding="utf-8"?>
 <p:sld xmlns:a="http://schemas.openxmlformats.org/drawingml/2006/main" xmlns:r="http://schemas.openxmlformats.org/officeDocument/2006/relationships" xmlns:p="http://schemas.openxmlformats.org/presentationml/2006/main">
   <p:cSld>
     <p:spTree>
@@ -6028,7 +6164,95 @@
 </p:sld>
 </file>
 
-<file path=ppt/slides/slide19.xml><?xml version="1.0" encoding="utf-8"?>
+<file path=ppt/slides/slide2.xml><?xml version="1.0" encoding="utf-8"?>
+<p:sld xmlns:a="http://schemas.openxmlformats.org/drawingml/2006/main" xmlns:r="http://schemas.openxmlformats.org/officeDocument/2006/relationships" xmlns:p="http://schemas.openxmlformats.org/presentationml/2006/main">
+  <p:cSld>
+    <p:spTree>
+      <p:nvGrpSpPr>
+        <p:cNvPr id="1" name=""/>
+        <p:cNvGrpSpPr/>
+        <p:nvPr/>
+      </p:nvGrpSpPr>
+      <p:grpSpPr>
+        <a:xfrm>
+          <a:off x="0" y="0"/>
+          <a:ext cx="0" cy="0"/>
+          <a:chOff x="0" y="0"/>
+          <a:chExt cx="0" cy="0"/>
+        </a:xfrm>
+      </p:grpSpPr>
+      <p:sp>
+        <p:nvSpPr>
+          <p:cNvPr id="3" name="Content Placeholder 2"/>
+          <p:cNvSpPr>
+            <a:spLocks noGrp="1"/>
+          </p:cNvSpPr>
+          <p:nvPr>
+            <p:ph idx="1"/>
+          </p:nvPr>
+        </p:nvSpPr>
+        <p:spPr/>
+        <p:txBody>
+          <a:bodyPr/>
+          <a:lstStyle/>
+          <a:p>
+            <a:pPr lvl="0" indent="0" marL="1270000">
+              <a:buNone/>
+            </a:pPr>
+            <a:r>
+              <a:rPr sz="2000" b="1"/>
+              <a:t>Download this lecture</a:t>
+            </a:r>
+          </a:p>
+          <a:p>
+            <a:pPr lvl="0" indent="0" marL="1270000">
+              <a:buNone/>
+            </a:pPr>
+            <a:r>
+              <a:rPr sz="2000">
+                <a:hlinkClick r:id="rId2"/>
+              </a:rPr>
+              <a:t>📄 Download HTML</a:t>
+            </a:r>
+            <a:r>
+              <a:rPr sz="2000"/>
+              <a:t> | </a:t>
+            </a:r>
+            <a:r>
+              <a:rPr sz="2000">
+                <a:hlinkClick r:id="rId3"/>
+              </a:rPr>
+              <a:t>📝 Download Word</a:t>
+            </a:r>
+            <a:r>
+              <a:rPr sz="2000"/>
+              <a:t> | </a:t>
+            </a:r>
+            <a:r>
+              <a:rPr sz="2000">
+                <a:hlinkClick r:id="rId4"/>
+              </a:rPr>
+              <a:t>📊 Download PowerPoint</a:t>
+            </a:r>
+            <a:r>
+              <a:rPr sz="2000"/>
+              <a:t> | </a:t>
+            </a:r>
+            <a:r>
+              <a:rPr sz="2000">
+                <a:hlinkClick r:id="rId5"/>
+              </a:rPr>
+              <a:t>📄 Download PDF</a:t>
+            </a:r>
+          </a:p>
+        </p:txBody>
+      </p:sp>
+    </p:spTree>
+  </p:cSld>
+</p:sld>
+</file>
+
+<file path=ppt/slides/slide20.xml><?xml version="1.0" encoding="utf-8"?>
 <p:sld xmlns:a="http://schemas.openxmlformats.org/drawingml/2006/main" xmlns:r="http://schemas.openxmlformats.org/officeDocument/2006/relationships" xmlns:p="http://schemas.openxmlformats.org/presentationml/2006/main">
   <p:cSld>
     <p:spTree>
@@ -6108,207 +6332,7 @@
 </p:sld>
 </file>
 
-<file path=ppt/slides/slide2.xml><?xml version="1.0" encoding="utf-8"?>
-<p:sld xmlns:a="http://schemas.openxmlformats.org/drawingml/2006/main" xmlns:r="http://schemas.openxmlformats.org/officeDocument/2006/relationships" xmlns:p="http://schemas.openxmlformats.org/presentationml/2006/main">
-  <p:cSld>
-    <p:spTree>
-      <p:nvGrpSpPr>
-        <p:cNvPr id="1" name=""/>
-        <p:cNvGrpSpPr/>
-        <p:nvPr/>
-      </p:nvGrpSpPr>
-      <p:grpSpPr>
-        <a:xfrm>
-          <a:off x="0" y="0"/>
-          <a:ext cx="0" cy="0"/>
-          <a:chOff x="0" y="0"/>
-          <a:chExt cx="0" cy="0"/>
-        </a:xfrm>
-      </p:grpSpPr>
-      <p:sp>
-        <p:nvSpPr>
-          <p:cNvPr id="2" name="Title 1"/>
-          <p:cNvSpPr>
-            <a:spLocks noGrp="1"/>
-          </p:cNvSpPr>
-          <p:nvPr>
-            <p:ph type="title"/>
-          </p:nvPr>
-        </p:nvSpPr>
-        <p:spPr>
-          <a:xfrm>
-            <a:off x="139485" y="78119"/>
-            <a:ext cx="8229600" cy="607682"/>
-          </a:xfrm>
-        </p:spPr>
-        <p:txBody>
-          <a:bodyPr/>
-          <a:lstStyle/>
-          <a:p>
-            <a:pPr lvl="0" indent="0" marL="0">
-              <a:buNone/>
-            </a:pPr>
-            <a:r>
-              <a:rPr b="1"/>
-              <a:t>Lecture 2: Review of data and graphing</a:t>
-            </a:r>
-          </a:p>
-        </p:txBody>
-      </p:sp>
-      <p:sp>
-        <p:nvSpPr>
-          <p:cNvPr id="3" name="Text Placeholder 2"/>
-          <p:cNvSpPr>
-            <a:spLocks noGrp="1"/>
-          </p:cNvSpPr>
-          <p:nvPr>
-            <p:ph idx="1" type="body"/>
-          </p:nvPr>
-        </p:nvSpPr>
-        <p:spPr/>
-        <p:txBody>
-          <a:bodyPr/>
-          <a:lstStyle/>
-          <a:p>
-            <a:pPr lvl="0"/>
-            <a:r>
-              <a:rPr/>
-              <a:t>We covered</a:t>
-            </a:r>
-          </a:p>
-          <a:p>
-            <a:pPr lvl="1"/>
-            <a:r>
-              <a:rPr/>
-              <a:t>How to design a well-organized project structure</a:t>
-            </a:r>
-          </a:p>
-          <a:p>
-            <a:pPr lvl="1"/>
-            <a:r>
-              <a:rPr/>
-              <a:t>How to implement good naming conventions</a:t>
-            </a:r>
-          </a:p>
-          <a:p>
-            <a:pPr lvl="2"/>
-            <a:r>
-              <a:rPr/>
-              <a:t>Controlled vocabulary</a:t>
-            </a:r>
-          </a:p>
-          <a:p>
-            <a:pPr lvl="2"/>
-            <a:r>
-              <a:rPr/>
-              <a:t>Including units in names</a:t>
-            </a:r>
-          </a:p>
-          <a:p>
-            <a:pPr lvl="1"/>
-            <a:r>
-              <a:rPr/>
-              <a:t>Create and use metadata effectively</a:t>
-            </a:r>
-          </a:p>
-          <a:p>
-            <a:pPr lvl="1"/>
-            <a:r>
-              <a:rPr/>
-              <a:t>Build tidy, well-structured spreadsheets</a:t>
-            </a:r>
-          </a:p>
-          <a:p>
-            <a:pPr lvl="1"/>
-            <a:r>
-              <a:rPr/>
-              <a:t>Create visualizations with ggplot2</a:t>
-            </a:r>
-          </a:p>
-        </p:txBody>
-      </p:sp>
-      <p:sp>
-        <p:nvSpPr>
-          <p:cNvPr id="5" name="Text Placeholder 4"/>
-          <p:cNvSpPr>
-            <a:spLocks noGrp="1"/>
-          </p:cNvSpPr>
-          <p:nvPr>
-            <p:ph idx="3" sz="quarter" type="body"/>
-          </p:nvPr>
-        </p:nvSpPr>
-        <p:spPr/>
-        <p:txBody>
-          <a:bodyPr/>
-          <a:lstStyle/>
-          <a:p>
-            <a:pPr lvl="0" indent="0" marL="0">
-              <a:buNone/>
-            </a:pPr>
-            <a:r>
-              <a:rPr/>
-              <a:t>These are variables - do you know what they mean?</a:t>
-            </a:r>
-          </a:p>
-          <a:p>
-            <a:pPr lvl="0"/>
-            <a:r>
-              <a:rPr/>
-              <a:t>TGW - yep its a thing</a:t>
-            </a:r>
-          </a:p>
-          <a:p>
-            <a:pPr lvl="0"/>
-            <a:r>
-              <a:rPr/>
-              <a:t>ODO - what do you think it is?</a:t>
-            </a:r>
-          </a:p>
-          <a:p>
-            <a:pPr lvl="0"/>
-            <a:r>
-              <a:rPr/>
-              <a:t>NO3 - what is it? Are you sure? Why might you get in legal trouble if you used this?</a:t>
-            </a:r>
-          </a:p>
-        </p:txBody>
-      </p:sp>
-      <p:pic>
-        <p:nvPicPr>
-          <p:cNvPr descr="images/clipboard-3544614084.png" id="0" name="Picture 1"/>
-          <p:cNvPicPr>
-            <a:picLocks noGrp="1" noChangeAspect="1"/>
-          </p:cNvPicPr>
-          <p:nvPr/>
-        </p:nvPicPr>
-        <p:blipFill>
-          <a:blip r:embed="rId2"/>
-          <a:stretch>
-            <a:fillRect/>
-          </a:stretch>
-        </p:blipFill>
-        <p:spPr bwMode="auto">
-          <a:xfrm>
-            <a:off x="4749800" y="1587500"/>
-            <a:ext cx="4038600" cy="2692400"/>
-          </a:xfrm>
-          <a:prstGeom prst="rect">
-            <a:avLst/>
-          </a:prstGeom>
-          <a:noFill/>
-          <a:ln w="9525">
-            <a:noFill/>
-            <a:headEnd/>
-            <a:tailEnd/>
-          </a:ln>
-        </p:spPr>
-      </p:pic>
-    </p:spTree>
-  </p:cSld>
-</p:sld>
-</file>
-
-<file path=ppt/slides/slide20.xml><?xml version="1.0" encoding="utf-8"?>
+<file path=ppt/slides/slide21.xml><?xml version="1.0" encoding="utf-8"?>
 <p:sld xmlns:a="http://schemas.openxmlformats.org/drawingml/2006/main" xmlns:r="http://schemas.openxmlformats.org/officeDocument/2006/relationships" xmlns:p="http://schemas.openxmlformats.org/presentationml/2006/main">
   <p:cSld>
     <p:spTree>
@@ -6586,152 +6610,6 @@
                 <a:latin typeface="Courier"/>
               </a:rPr>
               <a:t>))</a:t>
-            </a:r>
-          </a:p>
-        </p:txBody>
-      </p:sp>
-    </p:spTree>
-  </p:cSld>
-</p:sld>
-</file>
-
-<file path=ppt/slides/slide21.xml><?xml version="1.0" encoding="utf-8"?>
-<p:sld xmlns:a="http://schemas.openxmlformats.org/drawingml/2006/main" xmlns:r="http://schemas.openxmlformats.org/officeDocument/2006/relationships" xmlns:p="http://schemas.openxmlformats.org/presentationml/2006/main">
-  <p:cSld>
-    <p:spTree>
-      <p:nvGrpSpPr>
-        <p:cNvPr id="1" name=""/>
-        <p:cNvGrpSpPr/>
-        <p:nvPr/>
-      </p:nvGrpSpPr>
-      <p:grpSpPr>
-        <a:xfrm>
-          <a:off x="0" y="0"/>
-          <a:ext cx="0" cy="0"/>
-          <a:chOff x="0" y="0"/>
-          <a:chExt cx="0" cy="0"/>
-        </a:xfrm>
-      </p:grpSpPr>
-      <p:sp>
-        <p:nvSpPr>
-          <p:cNvPr id="2" name="Title 1"/>
-          <p:cNvSpPr>
-            <a:spLocks noGrp="1"/>
-          </p:cNvSpPr>
-          <p:nvPr>
-            <p:ph type="title"/>
-          </p:nvPr>
-        </p:nvSpPr>
-        <p:spPr>
-          <a:xfrm>
-            <a:off x="0" y="0"/>
-            <a:ext cx="9144000" cy="602780"/>
-          </a:xfrm>
-          <a:solidFill>
-            <a:srgbClr val="70121D"/>
-          </a:solidFill>
-        </p:spPr>
-        <p:txBody>
-          <a:bodyPr/>
-          <a:lstStyle/>
-          <a:p>
-            <a:pPr lvl="0" indent="0" marL="0">
-              <a:buNone/>
-            </a:pPr>
-            <a:r>
-              <a:rPr/>
-              <a:t>Lecture 3: Standard Deviation vs. Interquartile Range</a:t>
-            </a:r>
-          </a:p>
-        </p:txBody>
-      </p:sp>
-      <p:sp>
-        <p:nvSpPr>
-          <p:cNvPr id="3" name="Content Placeholder 2"/>
-          <p:cNvSpPr>
-            <a:spLocks noGrp="1"/>
-          </p:cNvSpPr>
-          <p:nvPr>
-            <p:ph idx="1" sz="half"/>
-          </p:nvPr>
-        </p:nvSpPr>
-        <p:spPr/>
-        <p:txBody>
-          <a:bodyPr/>
-          <a:lstStyle/>
-          <a:p>
-            <a:pPr lvl="0" indent="0" marL="0">
-              <a:buNone/>
-            </a:pPr>
-            <a:r>
-              <a:rPr/>
-              <a:t>The standard deviation and interquartile range both measure spread, but:</a:t>
-            </a:r>
-          </a:p>
-          <a:p>
-            <a:pPr lvl="0" indent="0" marL="0">
-              <a:buNone/>
-            </a:pPr>
-            <a:r>
-              <a:rPr b="1"/>
-              <a:t>Standard deviation</a:t>
-            </a:r>
-            <a:r>
-              <a:rPr/>
-              <a:t>: Sensitive to outliers</a:t>
-            </a:r>
-          </a:p>
-          <a:p>
-            <a:pPr lvl="0" indent="0" marL="0">
-              <a:buNone/>
-            </a:pPr>
-            <a:r>
-              <a:rPr b="1"/>
-              <a:t>Interquartile range</a:t>
-            </a:r>
-            <a:r>
-              <a:rPr/>
-              <a:t>: Robust against outliers</a:t>
-            </a:r>
-          </a:p>
-          <a:p>
-            <a:pPr lvl="0" indent="0" marL="0">
-              <a:buNone/>
-            </a:pPr>
-            <a:r>
-              <a:rPr/>
-              <a:t>When the data is approximately normal, the IQR ≈ 1.35 × standard deviation.</a:t>
-            </a:r>
-          </a:p>
-        </p:txBody>
-      </p:sp>
-      <p:sp>
-        <p:nvSpPr>
-          <p:cNvPr id="4" name="Content Placeholder 3"/>
-          <p:cNvSpPr>
-            <a:spLocks noGrp="1"/>
-          </p:cNvSpPr>
-          <p:nvPr>
-            <p:ph idx="2" sz="half"/>
-          </p:nvPr>
-        </p:nvSpPr>
-        <p:spPr/>
-        <p:txBody>
-          <a:bodyPr/>
-          <a:lstStyle/>
-          <a:p>
-            <a:pPr lvl="0" indent="0">
-              <a:buNone/>
-            </a:pPr>
-            <a:r>
-              <a:rPr>
-                <a:latin typeface="Courier"/>
-              </a:rPr>
-              <a:t># A tibble: 2 × 4
-  lake     sd   iqr ratio_iqr_sd
-  &lt;chr&gt; &lt;dbl&gt; &lt;dbl&gt;        &lt;dbl&gt;
-1 I3     28.3    24        0.848
-2 I8     52.3    61        1.17 </a:t>
             </a:r>
           </a:p>
         </p:txBody>
@@ -6786,7 +6664,7 @@
             </a:pPr>
             <a:r>
               <a:rPr/>
-              <a:t>Lecture 3: Data Transformations for Skewed Distributions</a:t>
+              <a:t>Lecture 3: Standard Deviation vs. Interquartile Range</a:t>
             </a:r>
           </a:p>
         </p:txBody>
@@ -6811,19 +6689,20 @@
             </a:pPr>
             <a:r>
               <a:rPr/>
-              <a:t>Biological data are often skewed (asymmetrical), which can make the arithmetic mean less representative of central tendency. Data transformations can help address this issue.</a:t>
+              <a:t>The standard deviation and interquartile range both measure spread, but:</a:t>
             </a:r>
           </a:p>
           <a:p>
             <a:pPr lvl="0" indent="0" marL="0">
-              <a:spcBef>
-                <a:spcPts val="3000"/>
-              </a:spcBef>
               <a:buNone/>
             </a:pPr>
             <a:r>
               <a:rPr b="1"/>
-              <a:t>Logarithmic Transformation</a:t>
+              <a:t>Standard deviation</a:t>
+            </a:r>
+            <a:r>
+              <a:rPr/>
+              <a:t>: Sensitive to outliers</a:t>
             </a:r>
           </a:p>
           <a:p>
@@ -6831,8 +6710,12 @@
               <a:buNone/>
             </a:pPr>
             <a:r>
-              <a:rPr/>
-              <a:t>The logarithmic transformation is one of the most common for right-skewed biological data:</a:t>
+              <a:rPr b="1"/>
+              <a:t>Interquartile range</a:t>
+            </a:r>
+            <a:r>
+              <a:rPr/>
+              <a:t>: Robust against outliers</a:t>
             </a:r>
           </a:p>
           <a:p>
@@ -6841,82 +6724,42 @@
             </a:pPr>
             <a:r>
               <a:rPr/>
-              <a:t>When data are log-normally distributed, the geometric mean often provides a better measure of central tendency than the arithmetic mean.</a:t>
-            </a:r>
-          </a:p>
-          <a:p>
-            <a:pPr lvl="0"/>
-            <a:r>
-              <a:rPr/>
-              <a:t>But there are issues and it might not be good…</a:t>
-            </a:r>
-          </a:p>
-          <a:p>
-            <a:pPr lvl="1"/>
-            <a:r>
-              <a:rPr/>
-              <a:t>detecting differences in geometric means, not arithmetic means</a:t>
-            </a:r>
-          </a:p>
-          <a:p>
-            <a:pPr lvl="2"/>
-            <a:r>
-              <a:rPr/>
-              <a:t>geometric is all values multiplied taken to the nth root</a:t>
-            </a:r>
-          </a:p>
-          <a:p>
-            <a:pPr lvl="1"/>
-            <a:r>
-              <a:rPr/>
-              <a:t>Can’t handle zeros without adding arbitrary constants (log(x+1) transformations), which can bias results</a:t>
-            </a:r>
-            <a:br/>
-          </a:p>
-          <a:p>
-            <a:pPr lvl="0" indent="0">
-              <a:buNone/>
-            </a:pPr>
-            <a:r>
-              <a:rPr>
-                <a:latin typeface="Courier"/>
-              </a:rPr>
-              <a:t>Arithmetic mean of original data: 265.6 mm
- Geometric mean (back-transformed mean of logs): NA mm</a:t>
+              <a:t>When the data is approximately normal, the IQR ≈ 1.35 × standard deviation.</a:t>
             </a:r>
           </a:p>
         </p:txBody>
       </p:sp>
-      <p:pic>
-        <p:nvPicPr>
-          <p:cNvPr descr="03_01_lecture_powerpoint_files/figure-pptx/log-transform-1.png" id="0" name="Picture 1"/>
-          <p:cNvPicPr>
-            <a:picLocks noGrp="1" noChangeAspect="1"/>
-          </p:cNvPicPr>
-          <p:nvPr/>
-        </p:nvPicPr>
-        <p:blipFill>
-          <a:blip r:embed="rId2"/>
-          <a:stretch>
-            <a:fillRect/>
-          </a:stretch>
-        </p:blipFill>
-        <p:spPr bwMode="auto">
-          <a:xfrm>
-            <a:off x="6121400" y="2044700"/>
-            <a:ext cx="2781300" cy="1714500"/>
-          </a:xfrm>
-          <a:prstGeom prst="rect">
-            <a:avLst/>
-          </a:prstGeom>
-          <a:noFill/>
-          <a:ln w="9525">
-            <a:noFill/>
-            <a:headEnd/>
-            <a:tailEnd/>
-          </a:ln>
-        </p:spPr>
-      </p:pic>
+      <p:sp>
+        <p:nvSpPr>
+          <p:cNvPr id="4" name="Content Placeholder 3"/>
+          <p:cNvSpPr>
+            <a:spLocks noGrp="1"/>
+          </p:cNvSpPr>
+          <p:nvPr>
+            <p:ph idx="2" sz="half"/>
+          </p:nvPr>
+        </p:nvSpPr>
+        <p:spPr/>
+        <p:txBody>
+          <a:bodyPr/>
+          <a:lstStyle/>
+          <a:p>
+            <a:pPr lvl="0" indent="0">
+              <a:buNone/>
+            </a:pPr>
+            <a:r>
+              <a:rPr>
+                <a:latin typeface="Courier"/>
+              </a:rPr>
+              <a:t># A tibble: 2 × 4
+  lake     sd   iqr ratio_iqr_sd
+  &lt;chr&gt; &lt;dbl&gt; &lt;dbl&gt;        &lt;dbl&gt;
+1 I3     28.3    24        0.848
+2 I8     52.3    61        1.17 </a:t>
+            </a:r>
+          </a:p>
+        </p:txBody>
+      </p:sp>
     </p:spTree>
   </p:cSld>
 </p:sld>
@@ -6967,7 +6810,7 @@
             </a:pPr>
             <a:r>
               <a:rPr/>
-              <a:t>Lecture 3: When to Use Transformations</a:t>
+              <a:t>Lecture 3: Data Transformations for Skewed Distributions</a:t>
             </a:r>
           </a:p>
         </p:txBody>
@@ -6992,75 +6835,85 @@
             </a:pPr>
             <a:r>
               <a:rPr/>
-              <a:t>To tranform data to a “normal” distribution we can use the following transformations…</a:t>
+              <a:t>Biological data are often skewed (asymmetrical), which can make the arithmetic mean less representative of central tendency. Data transformations can help address this issue.</a:t>
+            </a:r>
+          </a:p>
+          <a:p>
+            <a:pPr lvl="0" indent="0" marL="0">
+              <a:spcBef>
+                <a:spcPts val="3000"/>
+              </a:spcBef>
+              <a:buNone/>
+            </a:pPr>
+            <a:r>
+              <a:rPr b="1"/>
+              <a:t>Logarithmic Transformation</a:t>
+            </a:r>
+          </a:p>
+          <a:p>
+            <a:pPr lvl="0" indent="0" marL="0">
+              <a:buNone/>
+            </a:pPr>
+            <a:r>
+              <a:rPr/>
+              <a:t>The logarithmic transformation is one of the most common for right-skewed biological data:</a:t>
+            </a:r>
+          </a:p>
+          <a:p>
+            <a:pPr lvl="0" indent="0" marL="0">
+              <a:buNone/>
+            </a:pPr>
+            <a:r>
+              <a:rPr/>
+              <a:t>When data are log-normally distributed, the geometric mean often provides a better measure of central tendency than the arithmetic mean.</a:t>
             </a:r>
           </a:p>
           <a:p>
             <a:pPr lvl="0"/>
             <a:r>
-              <a:rPr b="1"/>
-              <a:t>Log transformation</a:t>
-            </a:r>
-            <a:r>
-              <a:rPr/>
-              <a:t>: When data are right-skewed or follow multiplicative rather than additive processes</a:t>
-            </a:r>
-          </a:p>
-          <a:p>
-            <a:pPr lvl="0"/>
-            <a:r>
-              <a:rPr b="1"/>
-              <a:t>Square root transformation</a:t>
-            </a:r>
-            <a:r>
-              <a:rPr/>
-              <a:t>: For count data or data where variance increases with the mean</a:t>
-            </a:r>
-          </a:p>
-          <a:p>
-            <a:pPr lvl="0"/>
-            <a:r>
-              <a:rPr b="1"/>
-              <a:t>Inverse transformation</a:t>
-            </a:r>
-            <a:r>
-              <a:rPr/>
-              <a:t>: For strongly right-skewed data</a:t>
-            </a:r>
-          </a:p>
-          <a:p>
-            <a:pPr lvl="0"/>
-            <a:r>
-              <a:rPr b="1"/>
-              <a:t>Arcsine square root transformation</a:t>
-            </a:r>
-            <a:r>
-              <a:rPr/>
-              <a:t>: For proportions or percentages (though logistic regression is often preferred now)</a:t>
-            </a:r>
-          </a:p>
-          <a:p>
-            <a:pPr lvl="0" indent="0" marL="0">
+              <a:rPr/>
+              <a:t>But there are issues and it might not be good…</a:t>
+            </a:r>
+          </a:p>
+          <a:p>
+            <a:pPr lvl="1"/>
+            <a:r>
+              <a:rPr/>
+              <a:t>detecting differences in geometric means, not arithmetic means</a:t>
+            </a:r>
+          </a:p>
+          <a:p>
+            <a:pPr lvl="2"/>
+            <a:r>
+              <a:rPr/>
+              <a:t>geometric is all values multiplied taken to the nth root</a:t>
+            </a:r>
+          </a:p>
+          <a:p>
+            <a:pPr lvl="1"/>
+            <a:r>
+              <a:rPr/>
+              <a:t>Can’t handle zeros without adding arbitrary constants (log(x+1) transformations), which can bias results</a:t>
+            </a:r>
+            <a:br/>
+          </a:p>
+          <a:p>
+            <a:pPr lvl="0" indent="0">
               <a:buNone/>
             </a:pPr>
             <a:r>
-              <a:rPr/>
-              <a:t>In a reflection the parameter </a:t>
-            </a:r>
-            <a:r>
-              <a:rPr b="1"/>
-              <a:t>k</a:t>
-            </a:r>
-            <a:r>
-              <a:rPr/>
-              <a:t> is typically chosen to be a value that’s larger than the maximum value</a:t>
+              <a:rPr>
+                <a:latin typeface="Courier"/>
+              </a:rPr>
+              <a:t>Arithmetic mean of original data: 265.6 mm
+ Geometric mean (back-transformed mean of logs): NA mm</a:t>
             </a:r>
           </a:p>
         </p:txBody>
       </p:sp>
       <p:pic>
         <p:nvPicPr>
-          <p:cNvPr descr="images/clipboard-2483693250.png" id="0" name="Picture 1"/>
+          <p:cNvPr descr="03_01_lecture_powerpoint_files/figure-pptx/log-transform-1.png" id="0" name="Picture 1"/>
           <p:cNvPicPr>
             <a:picLocks noGrp="1" noChangeAspect="1"/>
           </p:cNvPicPr>
@@ -7074,8 +6927,8 @@
         </p:blipFill>
         <p:spPr bwMode="auto">
           <a:xfrm>
-            <a:off x="6121400" y="2159000"/>
-            <a:ext cx="2781300" cy="1473200"/>
+            <a:off x="6121400" y="2044700"/>
+            <a:ext cx="2781300" cy="1714500"/>
           </a:xfrm>
           <a:prstGeom prst="rect">
             <a:avLst/>
@@ -7138,7 +6991,7 @@
             </a:pPr>
             <a:r>
               <a:rPr/>
-              <a:t>Lecture 3: Visualizing Distributions - Histograms</a:t>
+              <a:t>Lecture 3: When to Use Transformations</a:t>
             </a:r>
           </a:p>
         </p:txBody>
@@ -7163,7 +7016,51 @@
             </a:pPr>
             <a:r>
               <a:rPr/>
-              <a:t>Histograms</a:t>
+              <a:t>To tranform data to a “normal” distribution we can use the following transformations…</a:t>
+            </a:r>
+          </a:p>
+          <a:p>
+            <a:pPr lvl="0"/>
+            <a:r>
+              <a:rPr b="1"/>
+              <a:t>Log transformation</a:t>
+            </a:r>
+            <a:r>
+              <a:rPr/>
+              <a:t>: When data are right-skewed or follow multiplicative rather than additive processes</a:t>
+            </a:r>
+          </a:p>
+          <a:p>
+            <a:pPr lvl="0"/>
+            <a:r>
+              <a:rPr b="1"/>
+              <a:t>Square root transformation</a:t>
+            </a:r>
+            <a:r>
+              <a:rPr/>
+              <a:t>: For count data or data where variance increases with the mean</a:t>
+            </a:r>
+          </a:p>
+          <a:p>
+            <a:pPr lvl="0"/>
+            <a:r>
+              <a:rPr b="1"/>
+              <a:t>Inverse transformation</a:t>
+            </a:r>
+            <a:r>
+              <a:rPr/>
+              <a:t>: For strongly right-skewed data</a:t>
+            </a:r>
+          </a:p>
+          <a:p>
+            <a:pPr lvl="0"/>
+            <a:r>
+              <a:rPr b="1"/>
+              <a:t>Arcsine square root transformation</a:t>
+            </a:r>
+            <a:r>
+              <a:rPr/>
+              <a:t>: For proportions or percentages (though logistic regression is often preferred now)</a:t>
             </a:r>
           </a:p>
           <a:p>
@@ -7172,14 +7069,22 @@
             </a:pPr>
             <a:r>
               <a:rPr/>
-              <a:t>Histograms show the frequency distribution of our data.</a:t>
+              <a:t>In a reflection the parameter </a:t>
+            </a:r>
+            <a:r>
+              <a:rPr b="1"/>
+              <a:t>k</a:t>
+            </a:r>
+            <a:r>
+              <a:rPr/>
+              <a:t> is typically chosen to be a value that’s larger than the maximum value</a:t>
             </a:r>
           </a:p>
         </p:txBody>
       </p:sp>
       <p:pic>
         <p:nvPicPr>
-          <p:cNvPr descr="03_01_lecture_powerpoint_files/figure-pptx/histogram-1.png" id="0" name="Picture 1"/>
+          <p:cNvPr descr="images/clipboard-2483693250.png" id="0" name="Picture 1"/>
           <p:cNvPicPr>
             <a:picLocks noGrp="1" noChangeAspect="1"/>
           </p:cNvPicPr>
@@ -7193,8 +7098,8 @@
         </p:blipFill>
         <p:spPr bwMode="auto">
           <a:xfrm>
-            <a:off x="6121400" y="2032000"/>
-            <a:ext cx="2781300" cy="1739900"/>
+            <a:off x="6121400" y="2159000"/>
+            <a:ext cx="2781300" cy="1473200"/>
           </a:xfrm>
           <a:prstGeom prst="rect">
             <a:avLst/>
@@ -7257,7 +7162,7 @@
             </a:pPr>
             <a:r>
               <a:rPr/>
-              <a:t>Lecture 3: Visualizing Distributions - Box Plots</a:t>
+              <a:t>Lecture 3: Visualizing Distributions - Histograms</a:t>
             </a:r>
           </a:p>
         </p:txBody>
@@ -7282,7 +7187,7 @@
             </a:pPr>
             <a:r>
               <a:rPr/>
-              <a:t>Box Plots</a:t>
+              <a:t>Histograms</a:t>
             </a:r>
           </a:p>
           <a:p>
@@ -7291,14 +7196,14 @@
             </a:pPr>
             <a:r>
               <a:rPr/>
-              <a:t>Box plots show the median, quartiles, and potential outliers.</a:t>
+              <a:t>Histograms show the frequency distribution of our data.</a:t>
             </a:r>
           </a:p>
         </p:txBody>
       </p:sp>
       <p:pic>
         <p:nvPicPr>
-          <p:cNvPr descr="03_01_lecture_powerpoint_files/figure-pptx/boxplot-1.png" id="0" name="Picture 1"/>
+          <p:cNvPr descr="03_01_lecture_powerpoint_files/figure-pptx/histogram-1.png" id="0" name="Picture 1"/>
           <p:cNvPicPr>
             <a:picLocks noGrp="1" noChangeAspect="1"/>
           </p:cNvPicPr>
@@ -7376,7 +7281,7 @@
             </a:pPr>
             <a:r>
               <a:rPr/>
-              <a:t>Lecture 3: Comparing Mean vs. Median</a:t>
+              <a:t>Lecture 3: Visualizing Distributions - Box Plots</a:t>
             </a:r>
           </a:p>
         </p:txBody>
@@ -7401,7 +7306,7 @@
             </a:pPr>
             <a:r>
               <a:rPr/>
-              <a:t>The mean and median measure different aspects of a distribution:</a:t>
+              <a:t>Box Plots</a:t>
             </a:r>
           </a:p>
           <a:p>
@@ -7409,69 +7314,42 @@
               <a:buNone/>
             </a:pPr>
             <a:r>
-              <a:rPr b="1"/>
-              <a:t>Mean</a:t>
-            </a:r>
-            <a:r>
-              <a:rPr/>
-              <a:t>: Center of gravity of the distribution</a:t>
-            </a:r>
-          </a:p>
-          <a:p>
-            <a:pPr lvl="0" indent="0" marL="0">
-              <a:buNone/>
-            </a:pPr>
-            <a:r>
-              <a:rPr b="1"/>
-              <a:t>Median</a:t>
-            </a:r>
-            <a:r>
-              <a:rPr/>
-              <a:t>: Middle value of the data</a:t>
-            </a:r>
-          </a:p>
-          <a:p>
-            <a:pPr lvl="0" indent="0" marL="0">
-              <a:buNone/>
-            </a:pPr>
-            <a:r>
-              <a:rPr/>
-              <a:t>When a distribution is symmetric, the mean and median are similar. When it’s skewed or has outliers, they can differ significantly.</a:t>
+              <a:rPr/>
+              <a:t>Box plots show the median, quartiles, and potential outliers.</a:t>
             </a:r>
           </a:p>
         </p:txBody>
       </p:sp>
-      <p:sp>
-        <p:nvSpPr>
-          <p:cNvPr id="4" name="Content Placeholder 3"/>
-          <p:cNvSpPr>
-            <a:spLocks noGrp="1"/>
-          </p:cNvSpPr>
-          <p:nvPr>
-            <p:ph idx="2" sz="half"/>
-          </p:nvPr>
-        </p:nvSpPr>
-        <p:spPr/>
-        <p:txBody>
-          <a:bodyPr/>
-          <a:lstStyle/>
-          <a:p>
-            <a:pPr lvl="0" indent="0">
-              <a:buNone/>
-            </a:pPr>
-            <a:r>
-              <a:rPr>
-                <a:latin typeface="Courier"/>
-              </a:rPr>
-              <a:t># A tibble: 2 × 6
-  lake   mean median    sd   iqr skewness
-  &lt;chr&gt; &lt;dbl&gt;  &lt;dbl&gt; &lt;dbl&gt; &lt;dbl&gt;    &lt;dbl&gt;
-1 I3     266.    266  28.3    24   -0.883
-2 I8     363.    373  52.3    61   -1.09 </a:t>
-            </a:r>
-          </a:p>
-        </p:txBody>
-      </p:sp>
+      <p:pic>
+        <p:nvPicPr>
+          <p:cNvPr descr="03_01_lecture_powerpoint_files/figure-pptx/boxplot-1.png" id="0" name="Picture 1"/>
+          <p:cNvPicPr>
+            <a:picLocks noGrp="1" noChangeAspect="1"/>
+          </p:cNvPicPr>
+          <p:nvPr/>
+        </p:nvPicPr>
+        <p:blipFill>
+          <a:blip r:embed="rId2"/>
+          <a:stretch>
+            <a:fillRect/>
+          </a:stretch>
+        </p:blipFill>
+        <p:spPr bwMode="auto">
+          <a:xfrm>
+            <a:off x="6121400" y="2032000"/>
+            <a:ext cx="2781300" cy="1739900"/>
+          </a:xfrm>
+          <a:prstGeom prst="rect">
+            <a:avLst/>
+          </a:prstGeom>
+          <a:noFill/>
+          <a:ln w="9525">
+            <a:noFill/>
+            <a:headEnd/>
+            <a:tailEnd/>
+          </a:ln>
+        </p:spPr>
+      </p:pic>
     </p:spTree>
   </p:cSld>
 </p:sld>
@@ -7522,7 +7400,7 @@
             </a:pPr>
             <a:r>
               <a:rPr/>
-              <a:t>Lecture 3: Histogram Plot - Mean vs. Median</a:t>
+              <a:t>Lecture 3: Comparing Mean vs. Median</a:t>
             </a:r>
           </a:p>
         </p:txBody>
@@ -7587,36 +7465,37 @@
           </a:p>
         </p:txBody>
       </p:sp>
-      <p:pic>
-        <p:nvPicPr>
-          <p:cNvPr descr="03_01_lecture_powerpoint_files/figure-pptx/mean-vs-median-plot-1.png" id="0" name="Picture 1"/>
-          <p:cNvPicPr>
-            <a:picLocks noGrp="1" noChangeAspect="1"/>
-          </p:cNvPicPr>
-          <p:nvPr/>
-        </p:nvPicPr>
-        <p:blipFill>
-          <a:blip r:embed="rId2"/>
-          <a:stretch>
-            <a:fillRect/>
-          </a:stretch>
-        </p:blipFill>
-        <p:spPr bwMode="auto">
-          <a:xfrm>
-            <a:off x="6121400" y="1739900"/>
-            <a:ext cx="2781300" cy="2311400"/>
-          </a:xfrm>
-          <a:prstGeom prst="rect">
-            <a:avLst/>
-          </a:prstGeom>
-          <a:noFill/>
-          <a:ln w="9525">
-            <a:noFill/>
-            <a:headEnd/>
-            <a:tailEnd/>
-          </a:ln>
-        </p:spPr>
-      </p:pic>
+      <p:sp>
+        <p:nvSpPr>
+          <p:cNvPr id="4" name="Content Placeholder 3"/>
+          <p:cNvSpPr>
+            <a:spLocks noGrp="1"/>
+          </p:cNvSpPr>
+          <p:nvPr>
+            <p:ph idx="2" sz="half"/>
+          </p:nvPr>
+        </p:nvSpPr>
+        <p:spPr/>
+        <p:txBody>
+          <a:bodyPr/>
+          <a:lstStyle/>
+          <a:p>
+            <a:pPr lvl="0" indent="0">
+              <a:buNone/>
+            </a:pPr>
+            <a:r>
+              <a:rPr>
+                <a:latin typeface="Courier"/>
+              </a:rPr>
+              <a:t># A tibble: 2 × 6
+  lake   mean median    sd   iqr skewness
+  &lt;chr&gt; &lt;dbl&gt;  &lt;dbl&gt; &lt;dbl&gt; &lt;dbl&gt;    &lt;dbl&gt;
+1 I3     266.    266  28.3    24   -0.883
+2 I8     363.    373  52.3    61   -1.09 </a:t>
+            </a:r>
+          </a:p>
+        </p:txBody>
+      </p:sp>
     </p:spTree>
   </p:cSld>
 </p:sld>
@@ -7652,8 +7531,11 @@
         <p:spPr>
           <a:xfrm>
             <a:off x="0" y="0"/>
-            <a:ext cx="9144000" cy="582780"/>
+            <a:ext cx="9144000" cy="602780"/>
           </a:xfrm>
+          <a:solidFill>
+            <a:srgbClr val="70121D"/>
+          </a:solidFill>
         </p:spPr>
         <p:txBody>
           <a:bodyPr/>
@@ -7664,7 +7546,7 @@
             </a:pPr>
             <a:r>
               <a:rPr/>
-              <a:t>Lecture 3: Handling Missing Values</a:t>
+              <a:t>Lecture 3: Histogram Plot - Mean vs. Median</a:t>
             </a:r>
           </a:p>
         </p:txBody>
@@ -7676,7 +7558,7 @@
             <a:spLocks noGrp="1"/>
           </p:cNvSpPr>
           <p:nvPr>
-            <p:ph idx="1"/>
+            <p:ph idx="1" sz="half"/>
           </p:nvPr>
         </p:nvSpPr>
         <p:spPr/>
@@ -7689,49 +7571,76 @@
             </a:pPr>
             <a:r>
               <a:rPr/>
-              <a:t>Let’s examine how missing values affect our descriptive statistics by looking at the mass variable, which has some missing data.</a:t>
-            </a:r>
-          </a:p>
-          <a:p>
-            <a:pPr lvl="0" indent="0">
+              <a:t>The mean and median measure different aspects of a distribution:</a:t>
+            </a:r>
+          </a:p>
+          <a:p>
+            <a:pPr lvl="0" indent="0" marL="0">
               <a:buNone/>
             </a:pPr>
             <a:r>
-              <a:rPr>
-                <a:latin typeface="Courier"/>
-              </a:rPr>
-              <a:t>[1] 2</a:t>
-            </a:r>
-          </a:p>
-          <a:p>
-            <a:pPr lvl="0" indent="0">
+              <a:rPr b="1"/>
+              <a:t>Mean</a:t>
+            </a:r>
+            <a:r>
+              <a:rPr/>
+              <a:t>: Center of gravity of the distribution</a:t>
+            </a:r>
+          </a:p>
+          <a:p>
+            <a:pPr lvl="0" indent="0" marL="0">
               <a:buNone/>
             </a:pPr>
             <a:r>
-              <a:rPr>
-                <a:latin typeface="Courier"/>
-              </a:rPr>
-              <a:t>Mean mass without handling NAs: NA g
- Mean mass with na.rm=TRUE: 351.2289 g</a:t>
-            </a:r>
-          </a:p>
-          <a:p>
-            <a:pPr lvl="0" indent="0">
+              <a:rPr b="1"/>
+              <a:t>Median</a:t>
+            </a:r>
+            <a:r>
+              <a:rPr/>
+              <a:t>: Middle value of the data</a:t>
+            </a:r>
+          </a:p>
+          <a:p>
+            <a:pPr lvl="0" indent="0" marL="0">
               <a:buNone/>
             </a:pPr>
             <a:r>
-              <a:rPr>
-                <a:latin typeface="Courier"/>
-              </a:rPr>
-              <a:t># A tibble: 2 × 5
-  lake  mean_mass median_mass sd_mass n_missing
-  &lt;chr&gt;     &lt;dbl&gt;       &lt;dbl&gt;   &lt;dbl&gt;     &lt;int&gt;
-1 I3         150.         147    42.2         0
-2 I8         484.         490   176.          2</a:t>
+              <a:rPr/>
+              <a:t>When a distribution is symmetric, the mean and median are similar. When it’s skewed or has outliers, they can differ significantly.</a:t>
             </a:r>
           </a:p>
         </p:txBody>
       </p:sp>
+      <p:pic>
+        <p:nvPicPr>
+          <p:cNvPr descr="03_01_lecture_powerpoint_files/figure-pptx/mean-vs-median-plot-1.png" id="0" name="Picture 1"/>
+          <p:cNvPicPr>
+            <a:picLocks noGrp="1" noChangeAspect="1"/>
+          </p:cNvPicPr>
+          <p:nvPr/>
+        </p:nvPicPr>
+        <p:blipFill>
+          <a:blip r:embed="rId2"/>
+          <a:stretch>
+            <a:fillRect/>
+          </a:stretch>
+        </p:blipFill>
+        <p:spPr bwMode="auto">
+          <a:xfrm>
+            <a:off x="6121400" y="1739900"/>
+            <a:ext cx="2781300" cy="2311400"/>
+          </a:xfrm>
+          <a:prstGeom prst="rect">
+            <a:avLst/>
+          </a:prstGeom>
+          <a:noFill/>
+          <a:ln w="9525">
+            <a:noFill/>
+            <a:headEnd/>
+            <a:tailEnd/>
+          </a:ln>
+        </p:spPr>
+      </p:pic>
     </p:spTree>
   </p:cSld>
 </p:sld>
@@ -7779,7 +7688,7 @@
             </a:pPr>
             <a:r>
               <a:rPr/>
-              <a:t>Lecture 3: Best Practices for Missing Values</a:t>
+              <a:t>Lecture 3: Handling Missing Values</a:t>
             </a:r>
           </a:p>
         </p:txBody>
@@ -7799,39 +7708,50 @@
           <a:bodyPr/>
           <a:lstStyle/>
           <a:p>
-            <a:pPr lvl="0" indent="-342900" marL="342900">
-              <a:buAutoNum type="arabicPeriod"/>
+            <a:pPr lvl="0" indent="0" marL="0">
+              <a:buNone/>
             </a:pPr>
             <a:r>
               <a:rPr/>
-              <a:t>Always check for missing values in your data before calculating statistics.</a:t>
-            </a:r>
-          </a:p>
-          <a:p>
-            <a:pPr lvl="0" indent="-342900" marL="342900">
-              <a:buAutoNum type="arabicPeriod"/>
+              <a:t>Let’s examine how missing values affect our descriptive statistics by looking at the mass variable, which has some missing data.</a:t>
+            </a:r>
+          </a:p>
+          <a:p>
+            <a:pPr lvl="0" indent="0">
+              <a:buNone/>
             </a:pPr>
             <a:r>
-              <a:rPr/>
-              <a:t>Use na.rm = TRUE when calculating summary statistics to handle missing values.</a:t>
-            </a:r>
-          </a:p>
-          <a:p>
-            <a:pPr lvl="0" indent="-342900" marL="342900">
-              <a:buAutoNum type="arabicPeriod"/>
+              <a:rPr>
+                <a:latin typeface="Courier"/>
+              </a:rPr>
+              <a:t>[1] 2</a:t>
+            </a:r>
+          </a:p>
+          <a:p>
+            <a:pPr lvl="0" indent="0">
+              <a:buNone/>
             </a:pPr>
             <a:r>
-              <a:rPr/>
-              <a:t>Report the number of missing values along with your statistics.</a:t>
-            </a:r>
-          </a:p>
-          <a:p>
-            <a:pPr lvl="0" indent="-342900" marL="342900">
-              <a:buAutoNum type="arabicPeriod"/>
+              <a:rPr>
+                <a:latin typeface="Courier"/>
+              </a:rPr>
+              <a:t>Mean mass without handling NAs: NA g
+ Mean mass with na.rm=TRUE: 351.2289 g</a:t>
+            </a:r>
+          </a:p>
+          <a:p>
+            <a:pPr lvl="0" indent="0">
+              <a:buNone/>
             </a:pPr>
             <a:r>
-              <a:rPr/>
-              <a:t>Consider whether the missing values are random or might introduce bias.</a:t>
+              <a:rPr>
+                <a:latin typeface="Courier"/>
+              </a:rPr>
+              <a:t># A tibble: 2 × 5
+  lake  mean_mass median_mass sd_mass n_missing
+  &lt;chr&gt;     &lt;dbl&gt;       &lt;dbl&gt;   &lt;dbl&gt;     &lt;int&gt;
+1 I3         150.         147    42.2         0
+2 I8         484.         490   176.          2</a:t>
             </a:r>
           </a:p>
         </p:txBody>
@@ -7883,11 +7803,7 @@
             </a:pPr>
             <a:r>
               <a:rPr b="1"/>
-              <a:t>Lecture 3:</a:t>
-            </a:r>
-            <a:r>
-              <a:rPr/>
-              <a:t> Descriptive Statistics and Uncertainty in R and Tidyverse</a:t>
+              <a:t>Lecture 2: Review of data and graphing</a:t>
             </a:r>
           </a:p>
         </p:txBody>
@@ -7907,83 +7823,112 @@
           <a:bodyPr/>
           <a:lstStyle/>
           <a:p>
+            <a:pPr lvl="0"/>
+            <a:r>
+              <a:rPr/>
+              <a:t>We covered</a:t>
+            </a:r>
+          </a:p>
+          <a:p>
+            <a:pPr lvl="1"/>
+            <a:r>
+              <a:rPr/>
+              <a:t>How to design a well-organized project structure</a:t>
+            </a:r>
+          </a:p>
+          <a:p>
+            <a:pPr lvl="1"/>
+            <a:r>
+              <a:rPr/>
+              <a:t>How to implement good naming conventions</a:t>
+            </a:r>
+          </a:p>
+          <a:p>
+            <a:pPr lvl="2"/>
+            <a:r>
+              <a:rPr/>
+              <a:t>Controlled vocabulary</a:t>
+            </a:r>
+          </a:p>
+          <a:p>
+            <a:pPr lvl="2"/>
+            <a:r>
+              <a:rPr/>
+              <a:t>Including units in names</a:t>
+            </a:r>
+          </a:p>
+          <a:p>
+            <a:pPr lvl="1"/>
+            <a:r>
+              <a:rPr/>
+              <a:t>Create and use metadata effectively</a:t>
+            </a:r>
+          </a:p>
+          <a:p>
+            <a:pPr lvl="1"/>
+            <a:r>
+              <a:rPr/>
+              <a:t>Build tidy, well-structured spreadsheets</a:t>
+            </a:r>
+          </a:p>
+          <a:p>
+            <a:pPr lvl="1"/>
+            <a:r>
+              <a:rPr/>
+              <a:t>Create visualizations with ggplot2</a:t>
+            </a:r>
+          </a:p>
+        </p:txBody>
+      </p:sp>
+      <p:sp>
+        <p:nvSpPr>
+          <p:cNvPr id="5" name="Text Placeholder 4"/>
+          <p:cNvSpPr>
+            <a:spLocks noGrp="1"/>
+          </p:cNvSpPr>
+          <p:nvPr>
+            <p:ph idx="3" sz="quarter" type="body"/>
+          </p:nvPr>
+        </p:nvSpPr>
+        <p:spPr/>
+        <p:txBody>
+          <a:bodyPr/>
+          <a:lstStyle/>
+          <a:p>
             <a:pPr lvl="0" indent="0" marL="0">
-              <a:spcBef>
-                <a:spcPts val="3000"/>
-              </a:spcBef>
               <a:buNone/>
             </a:pPr>
             <a:r>
-              <a:rPr b="1"/>
-              <a:t>The objectives:</a:t>
+              <a:rPr/>
+              <a:t>These are variables - do you know what they mean?</a:t>
             </a:r>
           </a:p>
           <a:p>
             <a:pPr lvl="0"/>
             <a:r>
               <a:rPr/>
-              <a:t>Understand why statistics is vital in biology</a:t>
+              <a:t>TGW - yep its a thing</a:t>
             </a:r>
           </a:p>
           <a:p>
             <a:pPr lvl="0"/>
             <a:r>
               <a:rPr/>
-              <a:t>Calculate and interpret measures of central tendency (mean, median, geometric mean)</a:t>
+              <a:t>ODO - what do you think it is?</a:t>
             </a:r>
           </a:p>
           <a:p>
             <a:pPr lvl="0"/>
             <a:r>
               <a:rPr/>
-              <a:t>Calculate and interpret measures of spread (standard deviation, variance, IQR)</a:t>
-            </a:r>
-          </a:p>
-          <a:p>
-            <a:pPr lvl="0"/>
-            <a:r>
-              <a:rPr/>
-              <a:t>Understand data transformations for skewed distributions</a:t>
-            </a:r>
-          </a:p>
-          <a:p>
-            <a:pPr lvl="0"/>
-            <a:r>
-              <a:rPr/>
-              <a:t>Visualize descriptive statistics for our data</a:t>
-            </a:r>
-          </a:p>
-          <a:p>
-            <a:pPr lvl="0"/>
-            <a:r>
-              <a:rPr/>
-              <a:t>Learn how to handle uncertainty in our data</a:t>
-            </a:r>
-          </a:p>
-          <a:p>
-            <a:pPr lvl="0" indent="0" marL="0">
-              <a:buNone/>
-            </a:pPr>
-            <a:r>
-              <a:rPr/>
-              <a:t>We’ll use a dataset on grayling - </a:t>
-            </a:r>
-            <a:r>
-              <a:rPr>
-                <a:latin typeface="Courier"/>
-              </a:rPr>
-              <a:t>gray_I3_I8.csv</a:t>
-            </a:r>
-            <a:r>
-              <a:rPr/>
-              <a:t> from two different lakes to explore these concepts.. like you did in the homework</a:t>
+              <a:t>NO3 - what is it? Are you sure? Why might you get in legal trouble if you used this?</a:t>
             </a:r>
           </a:p>
         </p:txBody>
       </p:sp>
       <p:pic>
         <p:nvPicPr>
-          <p:cNvPr descr="images/grayling.jpeg" id="0" name="Picture 1"/>
+          <p:cNvPr descr="images/clipboard-3544614084.png" id="0" name="Picture 1"/>
           <p:cNvPicPr>
             <a:picLocks noGrp="1" noChangeAspect="1"/>
           </p:cNvPicPr>
@@ -7997,38 +7942,8 @@
         </p:blipFill>
         <p:spPr bwMode="auto">
           <a:xfrm>
-            <a:off x="127000" y="2108200"/>
-            <a:ext cx="4432300" cy="1625600"/>
-          </a:xfrm>
-          <a:prstGeom prst="rect">
-            <a:avLst/>
-          </a:prstGeom>
-          <a:noFill/>
-          <a:ln w="9525">
-            <a:noFill/>
-            <a:headEnd/>
-            <a:tailEnd/>
-          </a:ln>
-        </p:spPr>
-      </p:pic>
-      <p:pic>
-        <p:nvPicPr>
-          <p:cNvPr descr="images/pop_sample_stats.png" id="0" name="Picture 1"/>
-          <p:cNvPicPr>
-            <a:picLocks noGrp="1" noChangeAspect="1"/>
-          </p:cNvPicPr>
-          <p:nvPr/>
-        </p:nvPicPr>
-        <p:blipFill>
-          <a:blip r:embed="rId3"/>
-          <a:stretch>
-            <a:fillRect/>
-          </a:stretch>
-        </p:blipFill>
-        <p:spPr bwMode="auto">
-          <a:xfrm>
-            <a:off x="5638800" y="1295400"/>
-            <a:ext cx="2273300" cy="3276600"/>
+            <a:off x="4749800" y="1587500"/>
+            <a:ext cx="4038600" cy="2692400"/>
           </a:xfrm>
           <a:prstGeom prst="rect">
             <a:avLst/>
@@ -8087,8 +8002,8 @@
               <a:buNone/>
             </a:pPr>
             <a:r>
-              <a:rPr b="1"/>
-              <a:t>Sampling from a Population</a:t>
+              <a:rPr/>
+              <a:t>Lecture 3: Best Practices for Missing Values</a:t>
             </a:r>
           </a:p>
         </p:txBody>
@@ -8108,90 +8023,39 @@
           <a:bodyPr/>
           <a:lstStyle/>
           <a:p>
-            <a:pPr lvl="0" indent="0" marL="0">
-              <a:buNone/>
+            <a:pPr lvl="0" indent="-342900" marL="342900">
+              <a:buAutoNum type="arabicPeriod"/>
             </a:pPr>
             <a:r>
               <a:rPr/>
-              <a:t>Now that we have estimates of the sample we need to relate that to the population</a:t>
-            </a:r>
-          </a:p>
-          <a:p>
-            <a:pPr lvl="0" indent="0" marL="0">
-              <a:buNone/>
+              <a:t>Always check for missing values in your data before calculating statistics.</a:t>
+            </a:r>
+          </a:p>
+          <a:p>
+            <a:pPr lvl="0" indent="-342900" marL="342900">
+              <a:buAutoNum type="arabicPeriod"/>
             </a:pPr>
             <a:r>
               <a:rPr/>
-              <a:t>In reality, we rarely know the true population parameters. When studying fish in lakes I3 and I8:</a:t>
-            </a:r>
-          </a:p>
-          <a:p>
-            <a:pPr lvl="0"/>
-            <a:r>
-              <a:rPr/>
-              <a:t>The </a:t>
-            </a:r>
-            <a:r>
-              <a:rPr b="1"/>
-              <a:t>population</a:t>
-            </a:r>
-            <a:r>
-              <a:rPr/>
-              <a:t> includes all grayling fish in each lake</a:t>
-            </a:r>
-          </a:p>
-          <a:p>
-            <a:pPr lvl="0"/>
-            <a:r>
-              <a:rPr/>
-              <a:t>The true population mean (μ) and standard deviation (σ) are unknown</a:t>
-            </a:r>
-          </a:p>
-          <a:p>
-            <a:pPr lvl="0"/>
-            <a:r>
-              <a:rPr/>
-              <a:t>Our dataset is a </a:t>
-            </a:r>
-            <a:r>
-              <a:rPr b="1"/>
-              <a:t>sample</a:t>
-            </a:r>
-            <a:r>
-              <a:rPr/>
-              <a:t> from this population</a:t>
-            </a:r>
-          </a:p>
-          <a:p>
-            <a:pPr lvl="0"/>
-            <a:r>
-              <a:rPr/>
-              <a:t>We use the sample mean (x̄) to estimate μ</a:t>
-            </a:r>
-          </a:p>
-          <a:p>
-            <a:pPr lvl="0"/>
-            <a:r>
-              <a:rPr/>
-              <a:t>Sampling introduces random variation in our estimates</a:t>
-            </a:r>
-          </a:p>
-          <a:p>
-            <a:pPr lvl="0" indent="0" marL="0">
-              <a:buNone/>
+              <a:t>Use na.rm = TRUE when calculating summary statistics to handle missing values.</a:t>
+            </a:r>
+          </a:p>
+          <a:p>
+            <a:pPr lvl="0" indent="-342900" marL="342900">
+              <a:buAutoNum type="arabicPeriod"/>
             </a:pPr>
             <a:r>
               <a:rPr/>
-              <a:t>Let’s demonstrate how different samples from the same population can give different estimates.</a:t>
-            </a:r>
-          </a:p>
-          <a:p>
-            <a:pPr lvl="0" indent="0" marL="0">
-              <a:buNone/>
+              <a:t>Report the number of missing values along with your statistics.</a:t>
+            </a:r>
+          </a:p>
+          <a:p>
+            <a:pPr lvl="0" indent="-342900" marL="342900">
+              <a:buAutoNum type="arabicPeriod"/>
             </a:pPr>
             <a:r>
               <a:rPr/>
-              <a:t>If we could sample all fish in the lake, we would know the true mean length. But that’s usually impossible in ecology!</a:t>
+              <a:t>Consider whether the missing values are random or might introduce bias.</a:t>
             </a:r>
           </a:p>
         </p:txBody>
@@ -8243,7 +8107,7 @@
             </a:pPr>
             <a:r>
               <a:rPr b="1"/>
-              <a:t>Demonstrating Sampling Variation</a:t>
+              <a:t>Sampling from a Population</a:t>
             </a:r>
           </a:p>
         </p:txBody>
@@ -8268,523 +8132,85 @@
             </a:pPr>
             <a:r>
               <a:rPr/>
-              <a:t>Let’s take several random samples from Lake I3 and see how the sample means vary:</a:t>
-            </a:r>
-          </a:p>
-          <a:p>
-            <a:pPr lvl="0" indent="0">
+              <a:t>Now that we have estimates of the sample we need to relate that to the population</a:t>
+            </a:r>
+          </a:p>
+          <a:p>
+            <a:pPr lvl="0" indent="0" marL="0">
               <a:buNone/>
             </a:pPr>
             <a:r>
-              <a:rPr>
-                <a:solidFill>
-                  <a:srgbClr val="5E5E5E"/>
-                </a:solidFill>
-                <a:latin typeface="Courier"/>
-              </a:rPr>
-              <a:t># Filter for Lake I3</a:t>
-            </a:r>
-            <a:br/>
-            <a:r>
-              <a:rPr>
-                <a:solidFill>
-                  <a:srgbClr val="003B4F"/>
-                </a:solidFill>
-                <a:latin typeface="Courier"/>
-              </a:rPr>
-              <a:t>i3_data &lt;- grayling_df </a:t>
-            </a:r>
-            <a:r>
-              <a:rPr>
-                <a:solidFill>
-                  <a:srgbClr val="5E5E5E"/>
-                </a:solidFill>
-                <a:latin typeface="Courier"/>
-              </a:rPr>
-              <a:t>%&gt;%</a:t>
-            </a:r>
-            <a:r>
-              <a:rPr>
-                <a:solidFill>
-                  <a:srgbClr val="003B4F"/>
-                </a:solidFill>
-                <a:latin typeface="Courier"/>
-              </a:rPr>
-              <a:t> </a:t>
-            </a:r>
-            <a:r>
-              <a:rPr>
-                <a:solidFill>
-                  <a:srgbClr val="4758AB"/>
-                </a:solidFill>
-                <a:latin typeface="Courier"/>
-              </a:rPr>
-              <a:t>filter</a:t>
-            </a:r>
-            <a:r>
-              <a:rPr>
-                <a:solidFill>
-                  <a:srgbClr val="003B4F"/>
-                </a:solidFill>
-                <a:latin typeface="Courier"/>
-              </a:rPr>
-              <a:t>(lake </a:t>
-            </a:r>
-            <a:r>
-              <a:rPr>
-                <a:solidFill>
-                  <a:srgbClr val="5E5E5E"/>
-                </a:solidFill>
-                <a:latin typeface="Courier"/>
-              </a:rPr>
-              <a:t>==</a:t>
-            </a:r>
-            <a:r>
-              <a:rPr>
-                <a:solidFill>
-                  <a:srgbClr val="003B4F"/>
-                </a:solidFill>
-                <a:latin typeface="Courier"/>
-              </a:rPr>
-              <a:t> </a:t>
-            </a:r>
-            <a:r>
-              <a:rPr>
-                <a:solidFill>
-                  <a:srgbClr val="20794D"/>
-                </a:solidFill>
-                <a:latin typeface="Courier"/>
-              </a:rPr>
-              <a:t>"I3"</a:t>
-            </a:r>
-            <a:r>
-              <a:rPr>
-                <a:solidFill>
-                  <a:srgbClr val="003B4F"/>
-                </a:solidFill>
-                <a:latin typeface="Courier"/>
-              </a:rPr>
-              <a:t>)</a:t>
-            </a:r>
-            <a:br/>
-            <a:r>
-              <a:rPr>
-                <a:solidFill>
-                  <a:srgbClr val="5E5E5E"/>
-                </a:solidFill>
-                <a:latin typeface="Courier"/>
-              </a:rPr>
-              <a:t># Function to take a random sample and calculate the mean</a:t>
-            </a:r>
-            <a:br/>
-            <a:r>
-              <a:rPr>
-                <a:solidFill>
-                  <a:srgbClr val="003B4F"/>
-                </a:solidFill>
-                <a:latin typeface="Courier"/>
-              </a:rPr>
-              <a:t>sample_mean &lt;- </a:t>
-            </a:r>
-            <a:r>
-              <a:rPr b="1">
-                <a:solidFill>
-                  <a:srgbClr val="003B4F"/>
-                </a:solidFill>
-                <a:latin typeface="Courier"/>
-              </a:rPr>
-              <a:t>function</a:t>
-            </a:r>
-            <a:r>
-              <a:rPr>
-                <a:solidFill>
-                  <a:srgbClr val="003B4F"/>
-                </a:solidFill>
-                <a:latin typeface="Courier"/>
-              </a:rPr>
-              <a:t>(data, sample_size) {</a:t>
-            </a:r>
-            <a:br/>
-            <a:r>
-              <a:rPr>
-                <a:solidFill>
-                  <a:srgbClr val="003B4F"/>
-                </a:solidFill>
-                <a:latin typeface="Courier"/>
-              </a:rPr>
-              <a:t>  sample_data &lt;- </a:t>
-            </a:r>
-            <a:r>
-              <a:rPr>
-                <a:solidFill>
-                  <a:srgbClr val="4758AB"/>
-                </a:solidFill>
-                <a:latin typeface="Courier"/>
-              </a:rPr>
-              <a:t>sample_n</a:t>
-            </a:r>
-            <a:r>
-              <a:rPr>
-                <a:solidFill>
-                  <a:srgbClr val="003B4F"/>
-                </a:solidFill>
-                <a:latin typeface="Courier"/>
-              </a:rPr>
-              <a:t>(data, sample_size)</a:t>
-            </a:r>
-            <a:br/>
-            <a:r>
-              <a:rPr>
-                <a:solidFill>
-                  <a:srgbClr val="003B4F"/>
-                </a:solidFill>
-                <a:latin typeface="Courier"/>
-              </a:rPr>
-              <a:t>  </a:t>
-            </a:r>
-            <a:r>
-              <a:rPr>
-                <a:solidFill>
-                  <a:srgbClr val="4758AB"/>
-                </a:solidFill>
-                <a:latin typeface="Courier"/>
-              </a:rPr>
-              <a:t>return</a:t>
-            </a:r>
-            <a:r>
-              <a:rPr>
-                <a:solidFill>
-                  <a:srgbClr val="003B4F"/>
-                </a:solidFill>
-                <a:latin typeface="Courier"/>
-              </a:rPr>
-              <a:t>(</a:t>
-            </a:r>
-            <a:r>
-              <a:rPr>
-                <a:solidFill>
-                  <a:srgbClr val="4758AB"/>
-                </a:solidFill>
-                <a:latin typeface="Courier"/>
-              </a:rPr>
-              <a:t>mean</a:t>
-            </a:r>
-            <a:r>
-              <a:rPr>
-                <a:solidFill>
-                  <a:srgbClr val="003B4F"/>
-                </a:solidFill>
-                <a:latin typeface="Courier"/>
-              </a:rPr>
-              <a:t>(sample_data</a:t>
-            </a:r>
-            <a:r>
-              <a:rPr>
-                <a:solidFill>
-                  <a:srgbClr val="5E5E5E"/>
-                </a:solidFill>
-                <a:latin typeface="Courier"/>
-              </a:rPr>
-              <a:t>$</a:t>
-            </a:r>
-            <a:r>
-              <a:rPr>
-                <a:solidFill>
-                  <a:srgbClr val="003B4F"/>
-                </a:solidFill>
-                <a:latin typeface="Courier"/>
-              </a:rPr>
-              <a:t>length_mm))</a:t>
-            </a:r>
-            <a:br/>
-            <a:r>
-              <a:rPr>
-                <a:solidFill>
-                  <a:srgbClr val="003B4F"/>
-                </a:solidFill>
-                <a:latin typeface="Courier"/>
-              </a:rPr>
-              <a:t>}</a:t>
-            </a:r>
-            <a:br/>
-            <a:br/>
-            <a:r>
-              <a:rPr>
-                <a:solidFill>
-                  <a:srgbClr val="5E5E5E"/>
-                </a:solidFill>
-                <a:latin typeface="Courier"/>
-              </a:rPr>
-              <a:t># Take 10 different samples of size 15 from Lake I3</a:t>
-            </a:r>
-            <a:br/>
-            <a:r>
-              <a:rPr>
-                <a:solidFill>
-                  <a:srgbClr val="4758AB"/>
-                </a:solidFill>
-                <a:latin typeface="Courier"/>
-              </a:rPr>
-              <a:t>set.seed</a:t>
-            </a:r>
-            <a:r>
-              <a:rPr>
-                <a:solidFill>
-                  <a:srgbClr val="003B4F"/>
-                </a:solidFill>
-                <a:latin typeface="Courier"/>
-              </a:rPr>
-              <a:t>(</a:t>
-            </a:r>
-            <a:r>
-              <a:rPr>
-                <a:solidFill>
-                  <a:srgbClr val="AD0000"/>
-                </a:solidFill>
-                <a:latin typeface="Courier"/>
-              </a:rPr>
-              <a:t>123</a:t>
-            </a:r>
-            <a:r>
-              <a:rPr>
-                <a:solidFill>
-                  <a:srgbClr val="003B4F"/>
-                </a:solidFill>
-                <a:latin typeface="Courier"/>
-              </a:rPr>
-              <a:t>) </a:t>
-            </a:r>
-            <a:r>
-              <a:rPr>
-                <a:solidFill>
-                  <a:srgbClr val="5E5E5E"/>
-                </a:solidFill>
-                <a:latin typeface="Courier"/>
-              </a:rPr>
-              <a:t># For reproducibility</a:t>
-            </a:r>
-            <a:br/>
-            <a:r>
-              <a:rPr>
-                <a:solidFill>
-                  <a:srgbClr val="003B4F"/>
-                </a:solidFill>
-                <a:latin typeface="Courier"/>
-              </a:rPr>
-              <a:t>sample_size &lt;- </a:t>
-            </a:r>
-            <a:r>
-              <a:rPr>
-                <a:solidFill>
-                  <a:srgbClr val="AD0000"/>
-                </a:solidFill>
-                <a:latin typeface="Courier"/>
-              </a:rPr>
-              <a:t>15</a:t>
-            </a:r>
-            <a:br/>
-            <a:r>
-              <a:rPr>
-                <a:solidFill>
-                  <a:srgbClr val="003B4F"/>
-                </a:solidFill>
-                <a:latin typeface="Courier"/>
-              </a:rPr>
-              <a:t>sample_means &lt;- </a:t>
-            </a:r>
-            <a:r>
-              <a:rPr>
-                <a:solidFill>
-                  <a:srgbClr val="4758AB"/>
-                </a:solidFill>
-                <a:latin typeface="Courier"/>
-              </a:rPr>
-              <a:t>replicate</a:t>
-            </a:r>
-            <a:r>
-              <a:rPr>
-                <a:solidFill>
-                  <a:srgbClr val="003B4F"/>
-                </a:solidFill>
-                <a:latin typeface="Courier"/>
-              </a:rPr>
-              <a:t>(</a:t>
-            </a:r>
-            <a:r>
-              <a:rPr>
-                <a:solidFill>
-                  <a:srgbClr val="AD0000"/>
-                </a:solidFill>
-                <a:latin typeface="Courier"/>
-              </a:rPr>
-              <a:t>50</a:t>
-            </a:r>
-            <a:r>
-              <a:rPr>
-                <a:solidFill>
-                  <a:srgbClr val="003B4F"/>
-                </a:solidFill>
-                <a:latin typeface="Courier"/>
-              </a:rPr>
-              <a:t>, </a:t>
-            </a:r>
-            <a:r>
-              <a:rPr>
-                <a:solidFill>
-                  <a:srgbClr val="4758AB"/>
-                </a:solidFill>
-                <a:latin typeface="Courier"/>
-              </a:rPr>
-              <a:t>sample_mean</a:t>
-            </a:r>
-            <a:r>
-              <a:rPr>
-                <a:solidFill>
-                  <a:srgbClr val="003B4F"/>
-                </a:solidFill>
-                <a:latin typeface="Courier"/>
-              </a:rPr>
-              <a:t>(i3_data, sample_size))</a:t>
-            </a:r>
-            <a:br/>
-            <a:r>
-              <a:rPr>
-                <a:solidFill>
-                  <a:srgbClr val="5E5E5E"/>
-                </a:solidFill>
-                <a:latin typeface="Courier"/>
-              </a:rPr>
-              <a:t># Create a data frame with sample numbers and means</a:t>
-            </a:r>
-            <a:br/>
-            <a:r>
-              <a:rPr>
-                <a:solidFill>
-                  <a:srgbClr val="003B4F"/>
-                </a:solidFill>
-                <a:latin typeface="Courier"/>
-              </a:rPr>
-              <a:t>samples_df &lt;- </a:t>
-            </a:r>
-            <a:r>
-              <a:rPr>
-                <a:solidFill>
-                  <a:srgbClr val="4758AB"/>
-                </a:solidFill>
-                <a:latin typeface="Courier"/>
-              </a:rPr>
-              <a:t>data.frame</a:t>
-            </a:r>
-            <a:r>
-              <a:rPr>
-                <a:solidFill>
-                  <a:srgbClr val="003B4F"/>
-                </a:solidFill>
-                <a:latin typeface="Courier"/>
-              </a:rPr>
-              <a:t>(</a:t>
-            </a:r>
-            <a:br/>
-            <a:r>
-              <a:rPr>
-                <a:solidFill>
-                  <a:srgbClr val="003B4F"/>
-                </a:solidFill>
-                <a:latin typeface="Courier"/>
-              </a:rPr>
-              <a:t>  </a:t>
-            </a:r>
-            <a:r>
-              <a:rPr>
-                <a:solidFill>
-                  <a:srgbClr val="657422"/>
-                </a:solidFill>
-                <a:latin typeface="Courier"/>
-              </a:rPr>
-              <a:t>sample_number =</a:t>
-            </a:r>
-            <a:r>
-              <a:rPr>
-                <a:solidFill>
-                  <a:srgbClr val="003B4F"/>
-                </a:solidFill>
-                <a:latin typeface="Courier"/>
-              </a:rPr>
-              <a:t> </a:t>
-            </a:r>
-            <a:r>
-              <a:rPr>
-                <a:solidFill>
-                  <a:srgbClr val="AD0000"/>
-                </a:solidFill>
-                <a:latin typeface="Courier"/>
-              </a:rPr>
-              <a:t>1</a:t>
-            </a:r>
-            <a:r>
-              <a:rPr>
-                <a:solidFill>
-                  <a:srgbClr val="5E5E5E"/>
-                </a:solidFill>
-                <a:latin typeface="Courier"/>
-              </a:rPr>
-              <a:t>:</a:t>
-            </a:r>
-            <a:r>
-              <a:rPr>
-                <a:solidFill>
-                  <a:srgbClr val="AD0000"/>
-                </a:solidFill>
-                <a:latin typeface="Courier"/>
-              </a:rPr>
-              <a:t>50</a:t>
-            </a:r>
-            <a:r>
-              <a:rPr>
-                <a:solidFill>
-                  <a:srgbClr val="003B4F"/>
-                </a:solidFill>
-                <a:latin typeface="Courier"/>
-              </a:rPr>
-              <a:t>,</a:t>
-            </a:r>
-            <a:br/>
-            <a:r>
-              <a:rPr>
-                <a:solidFill>
-                  <a:srgbClr val="003B4F"/>
-                </a:solidFill>
-                <a:latin typeface="Courier"/>
-              </a:rPr>
-              <a:t>  </a:t>
-            </a:r>
-            <a:r>
-              <a:rPr>
-                <a:solidFill>
-                  <a:srgbClr val="657422"/>
-                </a:solidFill>
-                <a:latin typeface="Courier"/>
-              </a:rPr>
-              <a:t>sample_mean =</a:t>
-            </a:r>
-            <a:r>
-              <a:rPr>
-                <a:solidFill>
-                  <a:srgbClr val="003B4F"/>
-                </a:solidFill>
-                <a:latin typeface="Courier"/>
-              </a:rPr>
-              <a:t> sample_means</a:t>
-            </a:r>
-            <a:br/>
-            <a:r>
-              <a:rPr>
-                <a:solidFill>
-                  <a:srgbClr val="003B4F"/>
-                </a:solidFill>
-                <a:latin typeface="Courier"/>
-              </a:rPr>
-              <a:t>)</a:t>
+              <a:rPr/>
+              <a:t>In reality, we rarely know the true population parameters. When studying fish in lakes I3 and I8:</a:t>
+            </a:r>
+          </a:p>
+          <a:p>
+            <a:pPr lvl="0"/>
+            <a:r>
+              <a:rPr/>
+              <a:t>The </a:t>
+            </a:r>
+            <a:r>
+              <a:rPr b="1"/>
+              <a:t>population</a:t>
+            </a:r>
+            <a:r>
+              <a:rPr/>
+              <a:t> includes all grayling fish in each lake</a:t>
+            </a:r>
+          </a:p>
+          <a:p>
+            <a:pPr lvl="0"/>
+            <a:r>
+              <a:rPr/>
+              <a:t>The true population mean (μ) and standard deviation (σ) are unknown</a:t>
+            </a:r>
+          </a:p>
+          <a:p>
+            <a:pPr lvl="0"/>
+            <a:r>
+              <a:rPr/>
+              <a:t>Our dataset is a </a:t>
+            </a:r>
+            <a:r>
+              <a:rPr b="1"/>
+              <a:t>sample</a:t>
+            </a:r>
+            <a:r>
+              <a:rPr/>
+              <a:t> from this population</a:t>
+            </a:r>
+          </a:p>
+          <a:p>
+            <a:pPr lvl="0"/>
+            <a:r>
+              <a:rPr/>
+              <a:t>We use the sample mean (x̄) to estimate μ</a:t>
+            </a:r>
+          </a:p>
+          <a:p>
+            <a:pPr lvl="0"/>
+            <a:r>
+              <a:rPr/>
+              <a:t>Sampling introduces random variation in our estimates</a:t>
+            </a:r>
+          </a:p>
+          <a:p>
+            <a:pPr lvl="0" indent="0" marL="0">
+              <a:buNone/>
+            </a:pPr>
+            <a:r>
+              <a:rPr/>
+              <a:t>Let’s demonstrate how different samples from the same population can give different estimates.</a:t>
+            </a:r>
+          </a:p>
+          <a:p>
+            <a:pPr lvl="0" indent="0" marL="0">
+              <a:buNone/>
+            </a:pPr>
+            <a:r>
+              <a:rPr/>
+              <a:t>If we could sample all fish in the lake, we would know the true mean length. But that’s usually impossible in ecology!</a:t>
             </a:r>
           </a:p>
         </p:txBody>
@@ -8836,6 +8262,599 @@
             </a:pPr>
             <a:r>
               <a:rPr b="1"/>
+              <a:t>Demonstrating Sampling Variation</a:t>
+            </a:r>
+          </a:p>
+        </p:txBody>
+      </p:sp>
+      <p:sp>
+        <p:nvSpPr>
+          <p:cNvPr id="3" name="Content Placeholder 2"/>
+          <p:cNvSpPr>
+            <a:spLocks noGrp="1"/>
+          </p:cNvSpPr>
+          <p:nvPr>
+            <p:ph idx="1"/>
+          </p:nvPr>
+        </p:nvSpPr>
+        <p:spPr/>
+        <p:txBody>
+          <a:bodyPr/>
+          <a:lstStyle/>
+          <a:p>
+            <a:pPr lvl="0" indent="0" marL="0">
+              <a:buNone/>
+            </a:pPr>
+            <a:r>
+              <a:rPr/>
+              <a:t>Let’s take several random samples from Lake I3 and see how the sample means vary:</a:t>
+            </a:r>
+          </a:p>
+          <a:p>
+            <a:pPr lvl="0" indent="0">
+              <a:buNone/>
+            </a:pPr>
+            <a:r>
+              <a:rPr>
+                <a:solidFill>
+                  <a:srgbClr val="5E5E5E"/>
+                </a:solidFill>
+                <a:latin typeface="Courier"/>
+              </a:rPr>
+              <a:t># Filter for Lake I3</a:t>
+            </a:r>
+            <a:br/>
+            <a:r>
+              <a:rPr>
+                <a:solidFill>
+                  <a:srgbClr val="003B4F"/>
+                </a:solidFill>
+                <a:latin typeface="Courier"/>
+              </a:rPr>
+              <a:t>i3_data &lt;- grayling_df </a:t>
+            </a:r>
+            <a:r>
+              <a:rPr>
+                <a:solidFill>
+                  <a:srgbClr val="5E5E5E"/>
+                </a:solidFill>
+                <a:latin typeface="Courier"/>
+              </a:rPr>
+              <a:t>%&gt;%</a:t>
+            </a:r>
+            <a:r>
+              <a:rPr>
+                <a:solidFill>
+                  <a:srgbClr val="003B4F"/>
+                </a:solidFill>
+                <a:latin typeface="Courier"/>
+              </a:rPr>
+              <a:t> </a:t>
+            </a:r>
+            <a:r>
+              <a:rPr>
+                <a:solidFill>
+                  <a:srgbClr val="4758AB"/>
+                </a:solidFill>
+                <a:latin typeface="Courier"/>
+              </a:rPr>
+              <a:t>filter</a:t>
+            </a:r>
+            <a:r>
+              <a:rPr>
+                <a:solidFill>
+                  <a:srgbClr val="003B4F"/>
+                </a:solidFill>
+                <a:latin typeface="Courier"/>
+              </a:rPr>
+              <a:t>(lake </a:t>
+            </a:r>
+            <a:r>
+              <a:rPr>
+                <a:solidFill>
+                  <a:srgbClr val="5E5E5E"/>
+                </a:solidFill>
+                <a:latin typeface="Courier"/>
+              </a:rPr>
+              <a:t>==</a:t>
+            </a:r>
+            <a:r>
+              <a:rPr>
+                <a:solidFill>
+                  <a:srgbClr val="003B4F"/>
+                </a:solidFill>
+                <a:latin typeface="Courier"/>
+              </a:rPr>
+              <a:t> </a:t>
+            </a:r>
+            <a:r>
+              <a:rPr>
+                <a:solidFill>
+                  <a:srgbClr val="20794D"/>
+                </a:solidFill>
+                <a:latin typeface="Courier"/>
+              </a:rPr>
+              <a:t>"I3"</a:t>
+            </a:r>
+            <a:r>
+              <a:rPr>
+                <a:solidFill>
+                  <a:srgbClr val="003B4F"/>
+                </a:solidFill>
+                <a:latin typeface="Courier"/>
+              </a:rPr>
+              <a:t>)</a:t>
+            </a:r>
+            <a:br/>
+            <a:r>
+              <a:rPr>
+                <a:solidFill>
+                  <a:srgbClr val="5E5E5E"/>
+                </a:solidFill>
+                <a:latin typeface="Courier"/>
+              </a:rPr>
+              <a:t># Function to take a random sample and calculate the mean</a:t>
+            </a:r>
+            <a:br/>
+            <a:r>
+              <a:rPr>
+                <a:solidFill>
+                  <a:srgbClr val="003B4F"/>
+                </a:solidFill>
+                <a:latin typeface="Courier"/>
+              </a:rPr>
+              <a:t>sample_mean &lt;- </a:t>
+            </a:r>
+            <a:r>
+              <a:rPr b="1">
+                <a:solidFill>
+                  <a:srgbClr val="003B4F"/>
+                </a:solidFill>
+                <a:latin typeface="Courier"/>
+              </a:rPr>
+              <a:t>function</a:t>
+            </a:r>
+            <a:r>
+              <a:rPr>
+                <a:solidFill>
+                  <a:srgbClr val="003B4F"/>
+                </a:solidFill>
+                <a:latin typeface="Courier"/>
+              </a:rPr>
+              <a:t>(data, sample_size) {</a:t>
+            </a:r>
+            <a:br/>
+            <a:r>
+              <a:rPr>
+                <a:solidFill>
+                  <a:srgbClr val="003B4F"/>
+                </a:solidFill>
+                <a:latin typeface="Courier"/>
+              </a:rPr>
+              <a:t>  sample_data &lt;- </a:t>
+            </a:r>
+            <a:r>
+              <a:rPr>
+                <a:solidFill>
+                  <a:srgbClr val="4758AB"/>
+                </a:solidFill>
+                <a:latin typeface="Courier"/>
+              </a:rPr>
+              <a:t>sample_n</a:t>
+            </a:r>
+            <a:r>
+              <a:rPr>
+                <a:solidFill>
+                  <a:srgbClr val="003B4F"/>
+                </a:solidFill>
+                <a:latin typeface="Courier"/>
+              </a:rPr>
+              <a:t>(data, sample_size)</a:t>
+            </a:r>
+            <a:br/>
+            <a:r>
+              <a:rPr>
+                <a:solidFill>
+                  <a:srgbClr val="003B4F"/>
+                </a:solidFill>
+                <a:latin typeface="Courier"/>
+              </a:rPr>
+              <a:t>  </a:t>
+            </a:r>
+            <a:r>
+              <a:rPr>
+                <a:solidFill>
+                  <a:srgbClr val="4758AB"/>
+                </a:solidFill>
+                <a:latin typeface="Courier"/>
+              </a:rPr>
+              <a:t>return</a:t>
+            </a:r>
+            <a:r>
+              <a:rPr>
+                <a:solidFill>
+                  <a:srgbClr val="003B4F"/>
+                </a:solidFill>
+                <a:latin typeface="Courier"/>
+              </a:rPr>
+              <a:t>(</a:t>
+            </a:r>
+            <a:r>
+              <a:rPr>
+                <a:solidFill>
+                  <a:srgbClr val="4758AB"/>
+                </a:solidFill>
+                <a:latin typeface="Courier"/>
+              </a:rPr>
+              <a:t>mean</a:t>
+            </a:r>
+            <a:r>
+              <a:rPr>
+                <a:solidFill>
+                  <a:srgbClr val="003B4F"/>
+                </a:solidFill>
+                <a:latin typeface="Courier"/>
+              </a:rPr>
+              <a:t>(sample_data</a:t>
+            </a:r>
+            <a:r>
+              <a:rPr>
+                <a:solidFill>
+                  <a:srgbClr val="5E5E5E"/>
+                </a:solidFill>
+                <a:latin typeface="Courier"/>
+              </a:rPr>
+              <a:t>$</a:t>
+            </a:r>
+            <a:r>
+              <a:rPr>
+                <a:solidFill>
+                  <a:srgbClr val="003B4F"/>
+                </a:solidFill>
+                <a:latin typeface="Courier"/>
+              </a:rPr>
+              <a:t>length_mm))</a:t>
+            </a:r>
+            <a:br/>
+            <a:r>
+              <a:rPr>
+                <a:solidFill>
+                  <a:srgbClr val="003B4F"/>
+                </a:solidFill>
+                <a:latin typeface="Courier"/>
+              </a:rPr>
+              <a:t>}</a:t>
+            </a:r>
+            <a:br/>
+            <a:br/>
+            <a:r>
+              <a:rPr>
+                <a:solidFill>
+                  <a:srgbClr val="5E5E5E"/>
+                </a:solidFill>
+                <a:latin typeface="Courier"/>
+              </a:rPr>
+              <a:t># Take 10 different samples of size 15 from Lake I3</a:t>
+            </a:r>
+            <a:br/>
+            <a:r>
+              <a:rPr>
+                <a:solidFill>
+                  <a:srgbClr val="4758AB"/>
+                </a:solidFill>
+                <a:latin typeface="Courier"/>
+              </a:rPr>
+              <a:t>set.seed</a:t>
+            </a:r>
+            <a:r>
+              <a:rPr>
+                <a:solidFill>
+                  <a:srgbClr val="003B4F"/>
+                </a:solidFill>
+                <a:latin typeface="Courier"/>
+              </a:rPr>
+              <a:t>(</a:t>
+            </a:r>
+            <a:r>
+              <a:rPr>
+                <a:solidFill>
+                  <a:srgbClr val="AD0000"/>
+                </a:solidFill>
+                <a:latin typeface="Courier"/>
+              </a:rPr>
+              <a:t>123</a:t>
+            </a:r>
+            <a:r>
+              <a:rPr>
+                <a:solidFill>
+                  <a:srgbClr val="003B4F"/>
+                </a:solidFill>
+                <a:latin typeface="Courier"/>
+              </a:rPr>
+              <a:t>) </a:t>
+            </a:r>
+            <a:r>
+              <a:rPr>
+                <a:solidFill>
+                  <a:srgbClr val="5E5E5E"/>
+                </a:solidFill>
+                <a:latin typeface="Courier"/>
+              </a:rPr>
+              <a:t># For reproducibility</a:t>
+            </a:r>
+            <a:br/>
+            <a:r>
+              <a:rPr>
+                <a:solidFill>
+                  <a:srgbClr val="003B4F"/>
+                </a:solidFill>
+                <a:latin typeface="Courier"/>
+              </a:rPr>
+              <a:t>sample_size &lt;- </a:t>
+            </a:r>
+            <a:r>
+              <a:rPr>
+                <a:solidFill>
+                  <a:srgbClr val="AD0000"/>
+                </a:solidFill>
+                <a:latin typeface="Courier"/>
+              </a:rPr>
+              <a:t>15</a:t>
+            </a:r>
+            <a:br/>
+            <a:r>
+              <a:rPr>
+                <a:solidFill>
+                  <a:srgbClr val="003B4F"/>
+                </a:solidFill>
+                <a:latin typeface="Courier"/>
+              </a:rPr>
+              <a:t>sample_means &lt;- </a:t>
+            </a:r>
+            <a:r>
+              <a:rPr>
+                <a:solidFill>
+                  <a:srgbClr val="4758AB"/>
+                </a:solidFill>
+                <a:latin typeface="Courier"/>
+              </a:rPr>
+              <a:t>replicate</a:t>
+            </a:r>
+            <a:r>
+              <a:rPr>
+                <a:solidFill>
+                  <a:srgbClr val="003B4F"/>
+                </a:solidFill>
+                <a:latin typeface="Courier"/>
+              </a:rPr>
+              <a:t>(</a:t>
+            </a:r>
+            <a:r>
+              <a:rPr>
+                <a:solidFill>
+                  <a:srgbClr val="AD0000"/>
+                </a:solidFill>
+                <a:latin typeface="Courier"/>
+              </a:rPr>
+              <a:t>50</a:t>
+            </a:r>
+            <a:r>
+              <a:rPr>
+                <a:solidFill>
+                  <a:srgbClr val="003B4F"/>
+                </a:solidFill>
+                <a:latin typeface="Courier"/>
+              </a:rPr>
+              <a:t>, </a:t>
+            </a:r>
+            <a:r>
+              <a:rPr>
+                <a:solidFill>
+                  <a:srgbClr val="4758AB"/>
+                </a:solidFill>
+                <a:latin typeface="Courier"/>
+              </a:rPr>
+              <a:t>sample_mean</a:t>
+            </a:r>
+            <a:r>
+              <a:rPr>
+                <a:solidFill>
+                  <a:srgbClr val="003B4F"/>
+                </a:solidFill>
+                <a:latin typeface="Courier"/>
+              </a:rPr>
+              <a:t>(i3_data, sample_size))</a:t>
+            </a:r>
+            <a:br/>
+            <a:r>
+              <a:rPr>
+                <a:solidFill>
+                  <a:srgbClr val="5E5E5E"/>
+                </a:solidFill>
+                <a:latin typeface="Courier"/>
+              </a:rPr>
+              <a:t># Create a data frame with sample numbers and means</a:t>
+            </a:r>
+            <a:br/>
+            <a:r>
+              <a:rPr>
+                <a:solidFill>
+                  <a:srgbClr val="003B4F"/>
+                </a:solidFill>
+                <a:latin typeface="Courier"/>
+              </a:rPr>
+              <a:t>samples_df &lt;- </a:t>
+            </a:r>
+            <a:r>
+              <a:rPr>
+                <a:solidFill>
+                  <a:srgbClr val="4758AB"/>
+                </a:solidFill>
+                <a:latin typeface="Courier"/>
+              </a:rPr>
+              <a:t>data.frame</a:t>
+            </a:r>
+            <a:r>
+              <a:rPr>
+                <a:solidFill>
+                  <a:srgbClr val="003B4F"/>
+                </a:solidFill>
+                <a:latin typeface="Courier"/>
+              </a:rPr>
+              <a:t>(</a:t>
+            </a:r>
+            <a:br/>
+            <a:r>
+              <a:rPr>
+                <a:solidFill>
+                  <a:srgbClr val="003B4F"/>
+                </a:solidFill>
+                <a:latin typeface="Courier"/>
+              </a:rPr>
+              <a:t>  </a:t>
+            </a:r>
+            <a:r>
+              <a:rPr>
+                <a:solidFill>
+                  <a:srgbClr val="657422"/>
+                </a:solidFill>
+                <a:latin typeface="Courier"/>
+              </a:rPr>
+              <a:t>sample_number =</a:t>
+            </a:r>
+            <a:r>
+              <a:rPr>
+                <a:solidFill>
+                  <a:srgbClr val="003B4F"/>
+                </a:solidFill>
+                <a:latin typeface="Courier"/>
+              </a:rPr>
+              <a:t> </a:t>
+            </a:r>
+            <a:r>
+              <a:rPr>
+                <a:solidFill>
+                  <a:srgbClr val="AD0000"/>
+                </a:solidFill>
+                <a:latin typeface="Courier"/>
+              </a:rPr>
+              <a:t>1</a:t>
+            </a:r>
+            <a:r>
+              <a:rPr>
+                <a:solidFill>
+                  <a:srgbClr val="5E5E5E"/>
+                </a:solidFill>
+                <a:latin typeface="Courier"/>
+              </a:rPr>
+              <a:t>:</a:t>
+            </a:r>
+            <a:r>
+              <a:rPr>
+                <a:solidFill>
+                  <a:srgbClr val="AD0000"/>
+                </a:solidFill>
+                <a:latin typeface="Courier"/>
+              </a:rPr>
+              <a:t>50</a:t>
+            </a:r>
+            <a:r>
+              <a:rPr>
+                <a:solidFill>
+                  <a:srgbClr val="003B4F"/>
+                </a:solidFill>
+                <a:latin typeface="Courier"/>
+              </a:rPr>
+              <a:t>,</a:t>
+            </a:r>
+            <a:br/>
+            <a:r>
+              <a:rPr>
+                <a:solidFill>
+                  <a:srgbClr val="003B4F"/>
+                </a:solidFill>
+                <a:latin typeface="Courier"/>
+              </a:rPr>
+              <a:t>  </a:t>
+            </a:r>
+            <a:r>
+              <a:rPr>
+                <a:solidFill>
+                  <a:srgbClr val="657422"/>
+                </a:solidFill>
+                <a:latin typeface="Courier"/>
+              </a:rPr>
+              <a:t>sample_mean =</a:t>
+            </a:r>
+            <a:r>
+              <a:rPr>
+                <a:solidFill>
+                  <a:srgbClr val="003B4F"/>
+                </a:solidFill>
+                <a:latin typeface="Courier"/>
+              </a:rPr>
+              <a:t> sample_means</a:t>
+            </a:r>
+            <a:br/>
+            <a:r>
+              <a:rPr>
+                <a:solidFill>
+                  <a:srgbClr val="003B4F"/>
+                </a:solidFill>
+                <a:latin typeface="Courier"/>
+              </a:rPr>
+              <a:t>)</a:t>
+            </a:r>
+          </a:p>
+        </p:txBody>
+      </p:sp>
+    </p:spTree>
+  </p:cSld>
+</p:sld>
+</file>
+
+<file path=ppt/slides/slide33.xml><?xml version="1.0" encoding="utf-8"?>
+<p:sld xmlns:a="http://schemas.openxmlformats.org/drawingml/2006/main" xmlns:r="http://schemas.openxmlformats.org/officeDocument/2006/relationships" xmlns:p="http://schemas.openxmlformats.org/presentationml/2006/main">
+  <p:cSld>
+    <p:spTree>
+      <p:nvGrpSpPr>
+        <p:cNvPr id="1" name=""/>
+        <p:cNvGrpSpPr/>
+        <p:nvPr/>
+      </p:nvGrpSpPr>
+      <p:grpSpPr>
+        <a:xfrm>
+          <a:off x="0" y="0"/>
+          <a:ext cx="0" cy="0"/>
+          <a:chOff x="0" y="0"/>
+          <a:chExt cx="0" cy="0"/>
+        </a:xfrm>
+      </p:grpSpPr>
+      <p:sp>
+        <p:nvSpPr>
+          <p:cNvPr id="2" name="Title 1"/>
+          <p:cNvSpPr>
+            <a:spLocks noGrp="1"/>
+          </p:cNvSpPr>
+          <p:nvPr>
+            <p:ph type="title"/>
+          </p:nvPr>
+        </p:nvSpPr>
+        <p:spPr>
+          <a:xfrm>
+            <a:off x="0" y="0"/>
+            <a:ext cx="9144000" cy="582780"/>
+          </a:xfrm>
+        </p:spPr>
+        <p:txBody>
+          <a:bodyPr/>
+          <a:lstStyle/>
+          <a:p>
+            <a:pPr lvl="0" indent="0" marL="0">
+              <a:buNone/>
+            </a:pPr>
+            <a:r>
+              <a:rPr b="1"/>
               <a:t>Plotting Sample Variation</a:t>
             </a:r>
           </a:p>
@@ -8876,7 +8895,7 @@
 </p:sld>
 </file>
 
-<file path=ppt/slides/slide33.xml><?xml version="1.0" encoding="utf-8"?>
+<file path=ppt/slides/slide34.xml><?xml version="1.0" encoding="utf-8"?>
 <p:sld xmlns:a="http://schemas.openxmlformats.org/drawingml/2006/main" xmlns:r="http://schemas.openxmlformats.org/officeDocument/2006/relationships" xmlns:p="http://schemas.openxmlformats.org/presentationml/2006/main">
   <p:cSld>
     <p:spTree>
@@ -8923,7 +8942,7 @@
 </p:sld>
 </file>
 
-<file path=ppt/slides/slide34.xml><?xml version="1.0" encoding="utf-8"?>
+<file path=ppt/slides/slide35.xml><?xml version="1.0" encoding="utf-8"?>
 <p:sld xmlns:a="http://schemas.openxmlformats.org/drawingml/2006/main" xmlns:r="http://schemas.openxmlformats.org/officeDocument/2006/relationships" xmlns:p="http://schemas.openxmlformats.org/presentationml/2006/main">
   <p:cSld>
     <p:spTree>
@@ -9551,7 +9570,7 @@
 </p:sld>
 </file>
 
-<file path=ppt/slides/slide35.xml><?xml version="1.0" encoding="utf-8"?>
+<file path=ppt/slides/slide36.xml><?xml version="1.0" encoding="utf-8"?>
 <p:sld xmlns:a="http://schemas.openxmlformats.org/drawingml/2006/main" xmlns:r="http://schemas.openxmlformats.org/officeDocument/2006/relationships" xmlns:p="http://schemas.openxmlformats.org/presentationml/2006/main">
   <p:cSld>
     <p:spTree>
@@ -9711,7 +9730,7 @@
 </p:sld>
 </file>
 
-<file path=ppt/slides/slide36.xml><?xml version="1.0" encoding="utf-8"?>
+<file path=ppt/slides/slide37.xml><?xml version="1.0" encoding="utf-8"?>
 <p:sld xmlns:a="http://schemas.openxmlformats.org/drawingml/2006/main" xmlns:r="http://schemas.openxmlformats.org/officeDocument/2006/relationships" xmlns:p="http://schemas.openxmlformats.org/presentationml/2006/main">
   <p:cSld>
     <p:spTree>
@@ -11175,7 +11194,7 @@
 </p:sld>
 </file>
 
-<file path=ppt/slides/slide37.xml><?xml version="1.0" encoding="utf-8"?>
+<file path=ppt/slides/slide38.xml><?xml version="1.0" encoding="utf-8"?>
 <p:sld xmlns:a="http://schemas.openxmlformats.org/drawingml/2006/main" xmlns:r="http://schemas.openxmlformats.org/officeDocument/2006/relationships" xmlns:p="http://schemas.openxmlformats.org/presentationml/2006/main">
   <p:cSld>
     <p:spTree>
@@ -11240,83 +11259,6 @@
             <a:r>
               <a:rPr/>
               <a:t>Has a spread that is related to the standard error</a:t>
-            </a:r>
-          </a:p>
-        </p:txBody>
-      </p:sp>
-    </p:spTree>
-  </p:cSld>
-</p:sld>
-</file>
-
-<file path=ppt/slides/slide38.xml><?xml version="1.0" encoding="utf-8"?>
-<p:sld xmlns:a="http://schemas.openxmlformats.org/drawingml/2006/main" xmlns:r="http://schemas.openxmlformats.org/officeDocument/2006/relationships" xmlns:p="http://schemas.openxmlformats.org/presentationml/2006/main">
-  <p:cSld>
-    <p:spTree>
-      <p:nvGrpSpPr>
-        <p:cNvPr id="1" name=""/>
-        <p:cNvGrpSpPr/>
-        <p:nvPr/>
-      </p:nvGrpSpPr>
-      <p:grpSpPr>
-        <a:xfrm>
-          <a:off x="0" y="0"/>
-          <a:ext cx="0" cy="0"/>
-          <a:chOff x="0" y="0"/>
-          <a:chExt cx="0" cy="0"/>
-        </a:xfrm>
-      </p:grpSpPr>
-      <p:sp>
-        <p:nvSpPr>
-          <p:cNvPr id="2" name="Title 1"/>
-          <p:cNvSpPr>
-            <a:spLocks noGrp="1"/>
-          </p:cNvSpPr>
-          <p:nvPr>
-            <p:ph type="title"/>
-          </p:nvPr>
-        </p:nvSpPr>
-        <p:spPr>
-          <a:xfrm>
-            <a:off x="0" y="0"/>
-            <a:ext cx="9144000" cy="582780"/>
-          </a:xfrm>
-        </p:spPr>
-        <p:txBody>
-          <a:bodyPr/>
-          <a:lstStyle/>
-          <a:p>
-            <a:pPr lvl="0" indent="0" marL="0">
-              <a:buNone/>
-            </a:pPr>
-            <a:r>
-              <a:rPr b="1"/>
-              <a:t>Standard Error and Sample Size</a:t>
-            </a:r>
-          </a:p>
-        </p:txBody>
-      </p:sp>
-      <p:sp>
-        <p:nvSpPr>
-          <p:cNvPr id="3" name="Content Placeholder 2"/>
-          <p:cNvSpPr>
-            <a:spLocks noGrp="1"/>
-          </p:cNvSpPr>
-          <p:nvPr>
-            <p:ph idx="1"/>
-          </p:nvPr>
-        </p:nvSpPr>
-        <p:spPr/>
-        <p:txBody>
-          <a:bodyPr/>
-          <a:lstStyle/>
-          <a:p>
-            <a:pPr lvl="0" indent="0" marL="0">
-              <a:buNone/>
-            </a:pPr>
-            <a:r>
-              <a:rPr/>
-              <a:t>Let’s see how the standard error changes with different sample sizes:</a:t>
             </a:r>
           </a:p>
         </p:txBody>
@@ -11356,6 +11298,288 @@
         <p:spPr>
           <a:xfrm>
             <a:off x="0" y="0"/>
+            <a:ext cx="9144000" cy="582780"/>
+          </a:xfrm>
+        </p:spPr>
+        <p:txBody>
+          <a:bodyPr/>
+          <a:lstStyle/>
+          <a:p>
+            <a:pPr lvl="0" indent="0" marL="0">
+              <a:buNone/>
+            </a:pPr>
+            <a:r>
+              <a:rPr b="1"/>
+              <a:t>Standard Error and Sample Size</a:t>
+            </a:r>
+          </a:p>
+        </p:txBody>
+      </p:sp>
+      <p:sp>
+        <p:nvSpPr>
+          <p:cNvPr id="3" name="Content Placeholder 2"/>
+          <p:cNvSpPr>
+            <a:spLocks noGrp="1"/>
+          </p:cNvSpPr>
+          <p:nvPr>
+            <p:ph idx="1"/>
+          </p:nvPr>
+        </p:nvSpPr>
+        <p:spPr/>
+        <p:txBody>
+          <a:bodyPr/>
+          <a:lstStyle/>
+          <a:p>
+            <a:pPr lvl="0" indent="0" marL="0">
+              <a:buNone/>
+            </a:pPr>
+            <a:r>
+              <a:rPr/>
+              <a:t>Let’s see how the standard error changes with different sample sizes:</a:t>
+            </a:r>
+          </a:p>
+        </p:txBody>
+      </p:sp>
+    </p:spTree>
+  </p:cSld>
+</p:sld>
+</file>
+
+<file path=ppt/slides/slide4.xml><?xml version="1.0" encoding="utf-8"?>
+<p:sld xmlns:a="http://schemas.openxmlformats.org/drawingml/2006/main" xmlns:r="http://schemas.openxmlformats.org/officeDocument/2006/relationships" xmlns:p="http://schemas.openxmlformats.org/presentationml/2006/main">
+  <p:cSld>
+    <p:spTree>
+      <p:nvGrpSpPr>
+        <p:cNvPr id="1" name=""/>
+        <p:cNvGrpSpPr/>
+        <p:nvPr/>
+      </p:nvGrpSpPr>
+      <p:grpSpPr>
+        <a:xfrm>
+          <a:off x="0" y="0"/>
+          <a:ext cx="0" cy="0"/>
+          <a:chOff x="0" y="0"/>
+          <a:chExt cx="0" cy="0"/>
+        </a:xfrm>
+      </p:grpSpPr>
+      <p:sp>
+        <p:nvSpPr>
+          <p:cNvPr id="2" name="Title 1"/>
+          <p:cNvSpPr>
+            <a:spLocks noGrp="1"/>
+          </p:cNvSpPr>
+          <p:nvPr>
+            <p:ph type="title"/>
+          </p:nvPr>
+        </p:nvSpPr>
+        <p:spPr>
+          <a:xfrm>
+            <a:off x="139485" y="78119"/>
+            <a:ext cx="8229600" cy="607682"/>
+          </a:xfrm>
+        </p:spPr>
+        <p:txBody>
+          <a:bodyPr/>
+          <a:lstStyle/>
+          <a:p>
+            <a:pPr lvl="0" indent="0" marL="0">
+              <a:buNone/>
+            </a:pPr>
+            <a:r>
+              <a:rPr b="1"/>
+              <a:t>Lecture 3:</a:t>
+            </a:r>
+            <a:r>
+              <a:rPr/>
+              <a:t> Descriptive Statistics and Uncertainty in R and Tidyverse</a:t>
+            </a:r>
+          </a:p>
+        </p:txBody>
+      </p:sp>
+      <p:sp>
+        <p:nvSpPr>
+          <p:cNvPr id="3" name="Text Placeholder 2"/>
+          <p:cNvSpPr>
+            <a:spLocks noGrp="1"/>
+          </p:cNvSpPr>
+          <p:nvPr>
+            <p:ph idx="1" type="body"/>
+          </p:nvPr>
+        </p:nvSpPr>
+        <p:spPr/>
+        <p:txBody>
+          <a:bodyPr/>
+          <a:lstStyle/>
+          <a:p>
+            <a:pPr lvl="0" indent="0" marL="0">
+              <a:spcBef>
+                <a:spcPts val="3000"/>
+              </a:spcBef>
+              <a:buNone/>
+            </a:pPr>
+            <a:r>
+              <a:rPr b="1"/>
+              <a:t>The objectives:</a:t>
+            </a:r>
+          </a:p>
+          <a:p>
+            <a:pPr lvl="0"/>
+            <a:r>
+              <a:rPr/>
+              <a:t>Understand why statistics is vital in biology</a:t>
+            </a:r>
+          </a:p>
+          <a:p>
+            <a:pPr lvl="0"/>
+            <a:r>
+              <a:rPr/>
+              <a:t>Calculate and interpret measures of central tendency (mean, median, geometric mean)</a:t>
+            </a:r>
+          </a:p>
+          <a:p>
+            <a:pPr lvl="0"/>
+            <a:r>
+              <a:rPr/>
+              <a:t>Calculate and interpret measures of spread (standard deviation, variance, IQR)</a:t>
+            </a:r>
+          </a:p>
+          <a:p>
+            <a:pPr lvl="0"/>
+            <a:r>
+              <a:rPr/>
+              <a:t>Understand data transformations for skewed distributions</a:t>
+            </a:r>
+          </a:p>
+          <a:p>
+            <a:pPr lvl="0"/>
+            <a:r>
+              <a:rPr/>
+              <a:t>Visualize descriptive statistics for our data</a:t>
+            </a:r>
+          </a:p>
+          <a:p>
+            <a:pPr lvl="0"/>
+            <a:r>
+              <a:rPr/>
+              <a:t>Learn how to handle uncertainty in our data</a:t>
+            </a:r>
+          </a:p>
+          <a:p>
+            <a:pPr lvl="0" indent="0" marL="0">
+              <a:buNone/>
+            </a:pPr>
+            <a:r>
+              <a:rPr/>
+              <a:t>We’ll use a dataset on grayling - </a:t>
+            </a:r>
+            <a:r>
+              <a:rPr>
+                <a:latin typeface="Courier"/>
+              </a:rPr>
+              <a:t>gray_I3_I8.csv</a:t>
+            </a:r>
+            <a:r>
+              <a:rPr/>
+              <a:t> from two different lakes to explore these concepts.. like you did in the homework</a:t>
+            </a:r>
+          </a:p>
+        </p:txBody>
+      </p:sp>
+      <p:pic>
+        <p:nvPicPr>
+          <p:cNvPr descr="images/grayling.jpeg" id="0" name="Picture 1"/>
+          <p:cNvPicPr>
+            <a:picLocks noGrp="1" noChangeAspect="1"/>
+          </p:cNvPicPr>
+          <p:nvPr/>
+        </p:nvPicPr>
+        <p:blipFill>
+          <a:blip r:embed="rId2"/>
+          <a:stretch>
+            <a:fillRect/>
+          </a:stretch>
+        </p:blipFill>
+        <p:spPr bwMode="auto">
+          <a:xfrm>
+            <a:off x="127000" y="2108200"/>
+            <a:ext cx="4432300" cy="1625600"/>
+          </a:xfrm>
+          <a:prstGeom prst="rect">
+            <a:avLst/>
+          </a:prstGeom>
+          <a:noFill/>
+          <a:ln w="9525">
+            <a:noFill/>
+            <a:headEnd/>
+            <a:tailEnd/>
+          </a:ln>
+        </p:spPr>
+      </p:pic>
+      <p:pic>
+        <p:nvPicPr>
+          <p:cNvPr descr="images/pop_sample_stats.png" id="0" name="Picture 1"/>
+          <p:cNvPicPr>
+            <a:picLocks noGrp="1" noChangeAspect="1"/>
+          </p:cNvPicPr>
+          <p:nvPr/>
+        </p:nvPicPr>
+        <p:blipFill>
+          <a:blip r:embed="rId3"/>
+          <a:stretch>
+            <a:fillRect/>
+          </a:stretch>
+        </p:blipFill>
+        <p:spPr bwMode="auto">
+          <a:xfrm>
+            <a:off x="5638800" y="1295400"/>
+            <a:ext cx="2273300" cy="3276600"/>
+          </a:xfrm>
+          <a:prstGeom prst="rect">
+            <a:avLst/>
+          </a:prstGeom>
+          <a:noFill/>
+          <a:ln w="9525">
+            <a:noFill/>
+            <a:headEnd/>
+            <a:tailEnd/>
+          </a:ln>
+        </p:spPr>
+      </p:pic>
+    </p:spTree>
+  </p:cSld>
+</p:sld>
+</file>
+
+<file path=ppt/slides/slide40.xml><?xml version="1.0" encoding="utf-8"?>
+<p:sld xmlns:a="http://schemas.openxmlformats.org/drawingml/2006/main" xmlns:r="http://schemas.openxmlformats.org/officeDocument/2006/relationships" xmlns:p="http://schemas.openxmlformats.org/presentationml/2006/main">
+  <p:cSld>
+    <p:spTree>
+      <p:nvGrpSpPr>
+        <p:cNvPr id="1" name=""/>
+        <p:cNvGrpSpPr/>
+        <p:nvPr/>
+      </p:nvGrpSpPr>
+      <p:grpSpPr>
+        <a:xfrm>
+          <a:off x="0" y="0"/>
+          <a:ext cx="0" cy="0"/>
+          <a:chOff x="0" y="0"/>
+          <a:chExt cx="0" cy="0"/>
+        </a:xfrm>
+      </p:grpSpPr>
+      <p:sp>
+        <p:nvSpPr>
+          <p:cNvPr id="2" name="Title 1"/>
+          <p:cNvSpPr>
+            <a:spLocks noGrp="1"/>
+          </p:cNvSpPr>
+          <p:nvPr>
+            <p:ph type="title"/>
+          </p:nvPr>
+        </p:nvSpPr>
+        <p:spPr>
+          <a:xfrm>
+            <a:off x="0" y="0"/>
             <a:ext cx="9144000" cy="871538"/>
           </a:xfrm>
         </p:spPr>
@@ -12165,232 +12389,7 @@
 </p:sld>
 </file>
 
-<file path=ppt/slides/slide4.xml><?xml version="1.0" encoding="utf-8"?>
-<p:sld xmlns:a="http://schemas.openxmlformats.org/drawingml/2006/main" xmlns:r="http://schemas.openxmlformats.org/officeDocument/2006/relationships" xmlns:p="http://schemas.openxmlformats.org/presentationml/2006/main">
-  <p:cSld>
-    <p:spTree>
-      <p:nvGrpSpPr>
-        <p:cNvPr id="1" name=""/>
-        <p:cNvGrpSpPr/>
-        <p:nvPr/>
-      </p:nvGrpSpPr>
-      <p:grpSpPr>
-        <a:xfrm>
-          <a:off x="0" y="0"/>
-          <a:ext cx="0" cy="0"/>
-          <a:chOff x="0" y="0"/>
-          <a:chExt cx="0" cy="0"/>
-        </a:xfrm>
-      </p:grpSpPr>
-      <p:sp>
-        <p:nvSpPr>
-          <p:cNvPr id="2" name="Title 1"/>
-          <p:cNvSpPr>
-            <a:spLocks noGrp="1"/>
-          </p:cNvSpPr>
-          <p:nvPr>
-            <p:ph type="title"/>
-          </p:nvPr>
-        </p:nvSpPr>
-        <p:spPr>
-          <a:xfrm>
-            <a:off x="0" y="0"/>
-            <a:ext cx="9144000" cy="602780"/>
-          </a:xfrm>
-          <a:solidFill>
-            <a:srgbClr val="70121D"/>
-          </a:solidFill>
-        </p:spPr>
-        <p:txBody>
-          <a:bodyPr/>
-          <a:lstStyle/>
-          <a:p>
-            <a:pPr lvl="0" indent="0" marL="0">
-              <a:buNone/>
-            </a:pPr>
-            <a:r>
-              <a:rPr/>
-              <a:t>Lecture 3: Populations and Samples</a:t>
-            </a:r>
-          </a:p>
-        </p:txBody>
-      </p:sp>
-      <p:sp>
-        <p:nvSpPr>
-          <p:cNvPr id="3" name="Content Placeholder 2"/>
-          <p:cNvSpPr>
-            <a:spLocks noGrp="1"/>
-          </p:cNvSpPr>
-          <p:nvPr>
-            <p:ph idx="1" sz="half"/>
-          </p:nvPr>
-        </p:nvSpPr>
-        <p:spPr/>
-        <p:txBody>
-          <a:bodyPr/>
-          <a:lstStyle/>
-          <a:p>
-            <a:pPr lvl="0" indent="0" marL="0">
-              <a:buNone/>
-            </a:pPr>
-            <a:r>
-              <a:rPr/>
-              <a:t>Before we dive into descriptive statistics, let’s clarify some fundamental concepts:</a:t>
-            </a:r>
-          </a:p>
-          <a:p>
-            <a:pPr lvl="0"/>
-            <a:r>
-              <a:rPr b="1"/>
-              <a:t>Population</a:t>
-            </a:r>
-            <a:r>
-              <a:rPr/>
-              <a:t>: entire group of things under consideration</a:t>
-            </a:r>
-          </a:p>
-          <a:p>
-            <a:pPr lvl="0"/>
-            <a:r>
-              <a:rPr b="1"/>
-              <a:t>Sample</a:t>
-            </a:r>
-            <a:r>
-              <a:rPr/>
-              <a:t>: A subset of the population that is actually measured</a:t>
-            </a:r>
-          </a:p>
-          <a:p>
-            <a:pPr lvl="0"/>
-            <a:r>
-              <a:rPr b="1"/>
-              <a:t>Sample unit</a:t>
-            </a:r>
-            <a:r>
-              <a:rPr/>
-              <a:t>: The individual thing drawn from the population</a:t>
-            </a:r>
-          </a:p>
-          <a:p>
-            <a:pPr lvl="0" indent="0" marL="0">
-              <a:buNone/>
-            </a:pPr>
-            <a:r>
-              <a:rPr/>
-              <a:t>Types of populations:</a:t>
-            </a:r>
-          </a:p>
-          <a:p>
-            <a:pPr lvl="0"/>
-            <a:r>
-              <a:rPr b="1"/>
-              <a:t>Observational population</a:t>
-            </a:r>
-            <a:r>
-              <a:rPr/>
-              <a:t>: </a:t>
-            </a:r>
-            <a:r>
-              <a:rPr b="1"/>
-              <a:t>group whose characteristics are studied passively</a:t>
-            </a:r>
-            <a:r>
-              <a:rPr/>
-              <a:t> (e.g., head width of all corn earworms in a field)</a:t>
-            </a:r>
-          </a:p>
-          <a:p>
-            <a:pPr lvl="0"/>
-            <a:r>
-              <a:rPr b="1"/>
-              <a:t>Experimental population</a:t>
-            </a:r>
-            <a:r>
-              <a:rPr/>
-              <a:t>: </a:t>
-            </a:r>
-            <a:r>
-              <a:rPr b="1"/>
-              <a:t>actively manipulate variables to observe effects and establish cause-and-effect relationships (e.g.,</a:t>
-            </a:r>
-            <a:r>
-              <a:rPr/>
-              <a:t> manipulate temperature and monitor head width)</a:t>
-            </a:r>
-          </a:p>
-          <a:p>
-            <a:pPr lvl="0" indent="0" marL="0">
-              <a:buNone/>
-            </a:pPr>
-            <a:r>
-              <a:rPr/>
-              <a:t>Sampling involves</a:t>
-            </a:r>
-          </a:p>
-          <a:p>
-            <a:pPr lvl="0"/>
-            <a:r>
-              <a:rPr b="1"/>
-              <a:t>inference</a:t>
-            </a:r>
-            <a:r>
-              <a:rPr/>
-              <a:t> - generalizing from what is observed in the sample to what is present in the population.</a:t>
-            </a:r>
-          </a:p>
-          <a:p>
-            <a:pPr lvl="0"/>
-            <a:r>
-              <a:rPr/>
-              <a:t>Valid inference requires </a:t>
-            </a:r>
-            <a:r>
-              <a:rPr b="1"/>
-              <a:t>random sampling</a:t>
-            </a:r>
-            <a:r>
-              <a:rPr/>
-              <a:t>.</a:t>
-            </a:r>
-          </a:p>
-        </p:txBody>
-      </p:sp>
-      <p:pic>
-        <p:nvPicPr>
-          <p:cNvPr descr="images/pop_sample_stats.png" id="0" name="Picture 1"/>
-          <p:cNvPicPr>
-            <a:picLocks noGrp="1" noChangeAspect="1"/>
-          </p:cNvPicPr>
-          <p:nvPr/>
-        </p:nvPicPr>
-        <p:blipFill>
-          <a:blip r:embed="rId2"/>
-          <a:stretch>
-            <a:fillRect/>
-          </a:stretch>
-        </p:blipFill>
-        <p:spPr bwMode="auto">
-          <a:xfrm>
-            <a:off x="6121400" y="889000"/>
-            <a:ext cx="2781300" cy="4013200"/>
-          </a:xfrm>
-          <a:prstGeom prst="rect">
-            <a:avLst/>
-          </a:prstGeom>
-          <a:noFill/>
-          <a:ln w="9525">
-            <a:noFill/>
-            <a:headEnd/>
-            <a:tailEnd/>
-          </a:ln>
-        </p:spPr>
-      </p:pic>
-    </p:spTree>
-  </p:cSld>
-</p:sld>
-</file>
-
-<file path=ppt/slides/slide40.xml><?xml version="1.0" encoding="utf-8"?>
+<file path=ppt/slides/slide41.xml><?xml version="1.0" encoding="utf-8"?>
 <p:sld xmlns:a="http://schemas.openxmlformats.org/drawingml/2006/main" xmlns:r="http://schemas.openxmlformats.org/officeDocument/2006/relationships" xmlns:p="http://schemas.openxmlformats.org/presentationml/2006/main">
   <p:cSld>
     <p:spTree>
@@ -12576,7 +12575,7 @@
 </p:sld>
 </file>
 
-<file path=ppt/slides/slide41.xml><?xml version="1.0" encoding="utf-8"?>
+<file path=ppt/slides/slide42.xml><?xml version="1.0" encoding="utf-8"?>
 <p:sld xmlns:a="http://schemas.openxmlformats.org/drawingml/2006/main" xmlns:r="http://schemas.openxmlformats.org/officeDocument/2006/relationships" xmlns:p="http://schemas.openxmlformats.org/presentationml/2006/main">
   <p:cSld>
     <p:spTree>
@@ -13163,7 +13162,7 @@
 </p:sld>
 </file>
 
-<file path=ppt/slides/slide42.xml><?xml version="1.0" encoding="utf-8"?>
+<file path=ppt/slides/slide43.xml><?xml version="1.0" encoding="utf-8"?>
 <p:sld xmlns:a="http://schemas.openxmlformats.org/drawingml/2006/main" xmlns:r="http://schemas.openxmlformats.org/officeDocument/2006/relationships" xmlns:p="http://schemas.openxmlformats.org/presentationml/2006/main">
   <p:cSld>
     <p:spTree>
@@ -13860,7 +13859,7 @@
 </p:sld>
 </file>
 
-<file path=ppt/slides/slide43.xml><?xml version="1.0" encoding="utf-8"?>
+<file path=ppt/slides/slide44.xml><?xml version="1.0" encoding="utf-8"?>
 <p:sld xmlns:a="http://schemas.openxmlformats.org/drawingml/2006/main" xmlns:r="http://schemas.openxmlformats.org/officeDocument/2006/relationships" xmlns:p="http://schemas.openxmlformats.org/presentationml/2006/main">
   <p:cSld>
     <p:spTree>
@@ -15004,7 +15003,7 @@
 </p:sld>
 </file>
 
-<file path=ppt/slides/slide44.xml><?xml version="1.0" encoding="utf-8"?>
+<file path=ppt/slides/slide45.xml><?xml version="1.0" encoding="utf-8"?>
 <p:sld xmlns:a="http://schemas.openxmlformats.org/drawingml/2006/main" xmlns:r="http://schemas.openxmlformats.org/officeDocument/2006/relationships" xmlns:p="http://schemas.openxmlformats.org/presentationml/2006/main">
   <p:cSld>
     <p:spTree>
@@ -15922,7 +15921,7 @@
 </p:sld>
 </file>
 
-<file path=ppt/slides/slide45.xml><?xml version="1.0" encoding="utf-8"?>
+<file path=ppt/slides/slide46.xml><?xml version="1.0" encoding="utf-8"?>
 <p:sld xmlns:a="http://schemas.openxmlformats.org/drawingml/2006/main" xmlns:r="http://schemas.openxmlformats.org/officeDocument/2006/relationships" xmlns:p="http://schemas.openxmlformats.org/presentationml/2006/main">
   <p:cSld>
     <p:spTree>
@@ -16111,7 +16110,7 @@
 </p:sld>
 </file>
 
-<file path=ppt/slides/slide46.xml><?xml version="1.0" encoding="utf-8"?>
+<file path=ppt/slides/slide47.xml><?xml version="1.0" encoding="utf-8"?>
 <p:sld xmlns:a="http://schemas.openxmlformats.org/drawingml/2006/main" xmlns:r="http://schemas.openxmlformats.org/officeDocument/2006/relationships" xmlns:p="http://schemas.openxmlformats.org/presentationml/2006/main">
   <p:cSld>
     <p:spTree>
@@ -16298,7 +16297,7 @@
             </a:pPr>
             <a:r>
               <a:rPr/>
-              <a:t>Lecture 3: Parameters vs. Statistics</a:t>
+              <a:t>Lecture 3: Populations and Samples</a:t>
             </a:r>
           </a:p>
         </p:txBody>
@@ -16323,29 +16322,40 @@
             </a:pPr>
             <a:r>
               <a:rPr/>
-              <a:t>It’s important to distinguish between:</a:t>
+              <a:t>Before we dive into descriptive statistics, let’s clarify some fundamental concepts:</a:t>
             </a:r>
           </a:p>
           <a:p>
             <a:pPr lvl="0"/>
             <a:r>
               <a:rPr b="1"/>
-              <a:t>Parameters</a:t>
-            </a:r>
-            <a:r>
-              <a:rPr/>
-              <a:t>: True numerical values for a population (usually denoted by Greek letters)</a:t>
+              <a:t>Population</a:t>
+            </a:r>
+            <a:r>
+              <a:rPr/>
+              <a:t>: entire group of things under consideration</a:t>
             </a:r>
           </a:p>
           <a:p>
             <a:pPr lvl="0"/>
             <a:r>
               <a:rPr b="1"/>
-              <a:t>Statistics</a:t>
-            </a:r>
-            <a:r>
-              <a:rPr/>
-              <a:t>: Estimates of parameters based on samples (usually denoted by Roman letters)</a:t>
+              <a:t>Sample</a:t>
+            </a:r>
+            <a:r>
+              <a:rPr/>
+              <a:t>: A subset of the population that is actually measured</a:t>
+            </a:r>
+          </a:p>
+          <a:p>
+            <a:pPr lvl="0"/>
+            <a:r>
+              <a:rPr b="1"/>
+              <a:t>Sample unit</a:t>
+            </a:r>
+            <a:r>
+              <a:rPr/>
+              <a:t>: The individual thing drawn from the population</a:t>
             </a:r>
           </a:p>
           <a:p>
@@ -16354,21 +16364,80 @@
             </a:pPr>
             <a:r>
               <a:rPr/>
-              <a:t>For example:</a:t>
+              <a:t>Types of populations:</a:t>
             </a:r>
           </a:p>
           <a:p>
             <a:pPr lvl="0"/>
             <a:r>
-              <a:rPr/>
-              <a:t>Population mean (μ) is estimated by sample mean (Y̅)</a:t>
+              <a:rPr b="1"/>
+              <a:t>Observational population</a:t>
+            </a:r>
+            <a:r>
+              <a:rPr/>
+              <a:t>: </a:t>
+            </a:r>
+            <a:r>
+              <a:rPr b="1"/>
+              <a:t>group whose characteristics are studied passively</a:t>
+            </a:r>
+            <a:r>
+              <a:rPr/>
+              <a:t> (e.g., head width of all corn earworms in a field)</a:t>
             </a:r>
           </a:p>
           <a:p>
             <a:pPr lvl="0"/>
             <a:r>
-              <a:rPr/>
-              <a:t>Population standard deviation (σ) is estimated by sample standard deviation (s)</a:t>
+              <a:rPr b="1"/>
+              <a:t>Experimental population</a:t>
+            </a:r>
+            <a:r>
+              <a:rPr/>
+              <a:t>: </a:t>
+            </a:r>
+            <a:r>
+              <a:rPr b="1"/>
+              <a:t>actively manipulate variables to observe effects and establish cause-and-effect relationships (e.g.,</a:t>
+            </a:r>
+            <a:r>
+              <a:rPr/>
+              <a:t> manipulate temperature and monitor head width)</a:t>
+            </a:r>
+          </a:p>
+          <a:p>
+            <a:pPr lvl="0" indent="0" marL="0">
+              <a:buNone/>
+            </a:pPr>
+            <a:r>
+              <a:rPr/>
+              <a:t>Sampling involves</a:t>
+            </a:r>
+          </a:p>
+          <a:p>
+            <a:pPr lvl="0"/>
+            <a:r>
+              <a:rPr b="1"/>
+              <a:t>inference</a:t>
+            </a:r>
+            <a:r>
+              <a:rPr/>
+              <a:t> - generalizing from what is observed in the sample to what is present in the population.</a:t>
+            </a:r>
+          </a:p>
+          <a:p>
+            <a:pPr lvl="0"/>
+            <a:r>
+              <a:rPr/>
+              <a:t>Valid inference requires </a:t>
+            </a:r>
+            <a:r>
+              <a:rPr b="1"/>
+              <a:t>random sampling</a:t>
+            </a:r>
+            <a:r>
+              <a:rPr/>
+              <a:t>.</a:t>
             </a:r>
           </a:p>
         </p:txBody>
@@ -16438,8 +16507,11 @@
         <p:spPr>
           <a:xfrm>
             <a:off x="0" y="0"/>
-            <a:ext cx="9144000" cy="582780"/>
+            <a:ext cx="9144000" cy="602780"/>
           </a:xfrm>
+          <a:solidFill>
+            <a:srgbClr val="70121D"/>
+          </a:solidFill>
         </p:spPr>
         <p:txBody>
           <a:bodyPr/>
@@ -16450,7 +16522,7 @@
             </a:pPr>
             <a:r>
               <a:rPr/>
-              <a:t>Lecture 3: Kinds of Biological Variables</a:t>
+              <a:t>Lecture 3: Parameters vs. Statistics</a:t>
             </a:r>
           </a:p>
         </p:txBody>
@@ -16462,7 +16534,7 @@
             <a:spLocks noGrp="1"/>
           </p:cNvSpPr>
           <p:nvPr>
-            <p:ph idx="1"/>
+            <p:ph idx="1" sz="half"/>
           </p:nvPr>
         </p:nvSpPr>
         <p:spPr/>
@@ -16471,104 +16543,90 @@
           <a:lstStyle/>
           <a:p>
             <a:pPr lvl="0" indent="0" marL="0">
-              <a:spcBef>
-                <a:spcPts val="3000"/>
-              </a:spcBef>
               <a:buNone/>
             </a:pPr>
             <a:r>
+              <a:rPr/>
+              <a:t>It’s important to distinguish between:</a:t>
+            </a:r>
+          </a:p>
+          <a:p>
+            <a:pPr lvl="0"/>
+            <a:r>
               <a:rPr b="1"/>
-              <a:t>Understanding the type of variable you’re working with is essential for selecting appropriate statistics:</a:t>
+              <a:t>Parameters</a:t>
+            </a:r>
+            <a:r>
+              <a:rPr/>
+              <a:t>: True numerical values for a population (usually denoted by Greek letters)</a:t>
+            </a:r>
+          </a:p>
+          <a:p>
+            <a:pPr lvl="0"/>
+            <a:r>
+              <a:rPr b="1"/>
+              <a:t>Statistics</a:t>
+            </a:r>
+            <a:r>
+              <a:rPr/>
+              <a:t>: Estimates of parameters based on samples (usually denoted by Roman letters)</a:t>
             </a:r>
           </a:p>
           <a:p>
             <a:pPr lvl="0" indent="0" marL="0">
-              <a:spcBef>
-                <a:spcPts val="3000"/>
-              </a:spcBef>
               <a:buNone/>
             </a:pPr>
             <a:r>
-              <a:rPr b="1"/>
-              <a:t>Measurement or Quantitative Variables</a:t>
+              <a:rPr/>
+              <a:t>For example:</a:t>
             </a:r>
           </a:p>
           <a:p>
             <a:pPr lvl="0"/>
             <a:r>
-              <a:rPr b="1"/>
-              <a:t>Continuous</a:t>
-            </a:r>
-            <a:r>
-              <a:rPr/>
-              <a:t>: Any value between extremes of scale is possible (e.g., mass, length)</a:t>
+              <a:rPr/>
+              <a:t>Population mean (μ) is estimated by sample mean (Y̅)</a:t>
             </a:r>
           </a:p>
           <a:p>
             <a:pPr lvl="0"/>
             <a:r>
-              <a:rPr b="1"/>
-              <a:t>Discrete (meristic)</a:t>
-            </a:r>
-            <a:r>
-              <a:rPr/>
-              <a:t>: Only fixed values (usually integers) between extremes are possible (e.g., bristle number, egg count)</a:t>
-            </a:r>
-          </a:p>
-          <a:p>
-            <a:pPr lvl="0" indent="0" marL="0">
-              <a:spcBef>
-                <a:spcPts val="3000"/>
-              </a:spcBef>
-              <a:buNone/>
-            </a:pPr>
-            <a:r>
-              <a:rPr b="1"/>
-              <a:t>Rank Variables (Ordinal)</a:t>
-            </a:r>
-          </a:p>
-          <a:p>
-            <a:pPr lvl="0"/>
-            <a:r>
-              <a:rPr/>
-              <a:t>Assign only order, not quantity - student rank - 1 2 3</a:t>
-            </a:r>
-          </a:p>
-          <a:p>
-            <a:pPr lvl="0"/>
-            <a:r>
-              <a:rPr/>
-              <a:t>Nothing implied about relative distance between values</a:t>
-            </a:r>
-          </a:p>
-          <a:p>
-            <a:pPr lvl="0" indent="0" marL="0">
-              <a:spcBef>
-                <a:spcPts val="3000"/>
-              </a:spcBef>
-              <a:buNone/>
-            </a:pPr>
-            <a:r>
-              <a:rPr b="1"/>
-              <a:t>Categorical Variables (Qualitative)</a:t>
-            </a:r>
-          </a:p>
-          <a:p>
-            <a:pPr lvl="0"/>
-            <a:r>
-              <a:rPr/>
-              <a:t>No quantitative information (e.g., male/female, living/dead)</a:t>
-            </a:r>
-          </a:p>
-          <a:p>
-            <a:pPr lvl="0"/>
-            <a:r>
-              <a:rPr/>
-              <a:t>Some are simplifications of quantitative variables (e.g., color instead of wavelength)</a:t>
+              <a:rPr/>
+              <a:t>Population standard deviation (σ) is estimated by sample standard deviation (s)</a:t>
             </a:r>
           </a:p>
         </p:txBody>
       </p:sp>
+      <p:pic>
+        <p:nvPicPr>
+          <p:cNvPr descr="images/pop_sample_stats.png" id="0" name="Picture 1"/>
+          <p:cNvPicPr>
+            <a:picLocks noGrp="1" noChangeAspect="1"/>
+          </p:cNvPicPr>
+          <p:nvPr/>
+        </p:nvPicPr>
+        <p:blipFill>
+          <a:blip r:embed="rId2"/>
+          <a:stretch>
+            <a:fillRect/>
+          </a:stretch>
+        </p:blipFill>
+        <p:spPr bwMode="auto">
+          <a:xfrm>
+            <a:off x="6121400" y="889000"/>
+            <a:ext cx="2781300" cy="4013200"/>
+          </a:xfrm>
+          <a:prstGeom prst="rect">
+            <a:avLst/>
+          </a:prstGeom>
+          <a:noFill/>
+          <a:ln w="9525">
+            <a:noFill/>
+            <a:headEnd/>
+            <a:tailEnd/>
+          </a:ln>
+        </p:spPr>
+      </p:pic>
     </p:spTree>
   </p:cSld>
 </p:sld>
@@ -16616,7 +16674,7 @@
             </a:pPr>
             <a:r>
               <a:rPr/>
-              <a:t>Lecture 3: Derived Variables</a:t>
+              <a:t>Lecture 3: Kinds of Biological Variables</a:t>
             </a:r>
           </a:p>
         </p:txBody>
@@ -16644,60 +16702,93 @@
             </a:pPr>
             <a:r>
               <a:rPr b="1"/>
-              <a:t>Derived Variables</a:t>
+              <a:t>Understanding the type of variable you’re working with is essential for selecting appropriate statistics:</a:t>
+            </a:r>
+          </a:p>
+          <a:p>
+            <a:pPr lvl="0" indent="0" marL="0">
+              <a:spcBef>
+                <a:spcPts val="3000"/>
+              </a:spcBef>
+              <a:buNone/>
+            </a:pPr>
+            <a:r>
+              <a:rPr b="1"/>
+              <a:t>Measurement or Quantitative Variables</a:t>
             </a:r>
           </a:p>
           <a:p>
             <a:pPr lvl="0"/>
             <a:r>
               <a:rPr b="1"/>
-              <a:t>Percentages, Proportions</a:t>
-            </a:r>
-            <a:r>
-              <a:rPr/>
-              <a:t>: Ratio of some component to total</a:t>
+              <a:t>Continuous</a:t>
+            </a:r>
+            <a:r>
+              <a:rPr/>
+              <a:t>: Any value between extremes of scale is possible (e.g., mass, length)</a:t>
             </a:r>
           </a:p>
           <a:p>
             <a:pPr lvl="0"/>
             <a:r>
               <a:rPr b="1"/>
-              <a:t>Ratios</a:t>
-            </a:r>
-            <a:r>
-              <a:rPr/>
-              <a:t>: Relation of two variables</a:t>
+              <a:t>Discrete (meristic)</a:t>
+            </a:r>
+            <a:r>
+              <a:rPr/>
+              <a:t>: Only fixed values (usually integers) between extremes are possible (e.g., bristle number, egg count)</a:t>
+            </a:r>
+          </a:p>
+          <a:p>
+            <a:pPr lvl="0" indent="0" marL="0">
+              <a:spcBef>
+                <a:spcPts val="3000"/>
+              </a:spcBef>
+              <a:buNone/>
+            </a:pPr>
+            <a:r>
+              <a:rPr b="1"/>
+              <a:t>Rank Variables (Ordinal)</a:t>
             </a:r>
           </a:p>
           <a:p>
             <a:pPr lvl="0"/>
             <a:r>
+              <a:rPr/>
+              <a:t>Assign only order, not quantity - student rank - 1 2 3</a:t>
+            </a:r>
+          </a:p>
+          <a:p>
+            <a:pPr lvl="0"/>
+            <a:r>
+              <a:rPr/>
+              <a:t>Nothing implied about relative distance between values</a:t>
+            </a:r>
+          </a:p>
+          <a:p>
+            <a:pPr lvl="0" indent="0" marL="0">
+              <a:spcBef>
+                <a:spcPts val="3000"/>
+              </a:spcBef>
+              <a:buNone/>
+            </a:pPr>
+            <a:r>
               <a:rPr b="1"/>
-              <a:t>Rates</a:t>
-            </a:r>
-            <a:r>
-              <a:rPr/>
-              <a:t>: Quantity per unit (time, mass, etc.)</a:t>
+              <a:t>Categorical Variables (Qualitative)</a:t>
             </a:r>
           </a:p>
           <a:p>
             <a:pPr lvl="0"/>
             <a:r>
-              <a:rPr b="1"/>
-              <a:t>Indices</a:t>
-            </a:r>
-            <a:r>
-              <a:rPr/>
-              <a:t>: More complex derived variables (e.g., condition index)</a:t>
-            </a:r>
-          </a:p>
-          <a:p>
-            <a:pPr lvl="0" indent="0" marL="0">
-              <a:buNone/>
-            </a:pPr>
-            <a:r>
-              <a:rPr/>
-              <a:t>Let’s explore our grayling dataset and identify the types of variables it contains.</a:t>
+              <a:rPr/>
+              <a:t>No quantitative information (e.g., male/female, living/dead)</a:t>
+            </a:r>
+          </a:p>
+          <a:p>
+            <a:pPr lvl="0"/>
+            <a:r>
+              <a:rPr/>
+              <a:t>Some are simplifications of quantitative variables (e.g., color instead of wavelength)</a:t>
             </a:r>
           </a:p>
         </p:txBody>
@@ -16708,6 +16799,139 @@
 </file>
 
 <file path=ppt/slides/slide8.xml><?xml version="1.0" encoding="utf-8"?>
+<p:sld xmlns:a="http://schemas.openxmlformats.org/drawingml/2006/main" xmlns:r="http://schemas.openxmlformats.org/officeDocument/2006/relationships" xmlns:p="http://schemas.openxmlformats.org/presentationml/2006/main">
+  <p:cSld>
+    <p:spTree>
+      <p:nvGrpSpPr>
+        <p:cNvPr id="1" name=""/>
+        <p:cNvGrpSpPr/>
+        <p:nvPr/>
+      </p:nvGrpSpPr>
+      <p:grpSpPr>
+        <a:xfrm>
+          <a:off x="0" y="0"/>
+          <a:ext cx="0" cy="0"/>
+          <a:chOff x="0" y="0"/>
+          <a:chExt cx="0" cy="0"/>
+        </a:xfrm>
+      </p:grpSpPr>
+      <p:sp>
+        <p:nvSpPr>
+          <p:cNvPr id="2" name="Title 1"/>
+          <p:cNvSpPr>
+            <a:spLocks noGrp="1"/>
+          </p:cNvSpPr>
+          <p:nvPr>
+            <p:ph type="title"/>
+          </p:nvPr>
+        </p:nvSpPr>
+        <p:spPr>
+          <a:xfrm>
+            <a:off x="0" y="0"/>
+            <a:ext cx="9144000" cy="582780"/>
+          </a:xfrm>
+        </p:spPr>
+        <p:txBody>
+          <a:bodyPr/>
+          <a:lstStyle/>
+          <a:p>
+            <a:pPr lvl="0" indent="0" marL="0">
+              <a:buNone/>
+            </a:pPr>
+            <a:r>
+              <a:rPr/>
+              <a:t>Lecture 3: Derived Variables</a:t>
+            </a:r>
+          </a:p>
+        </p:txBody>
+      </p:sp>
+      <p:sp>
+        <p:nvSpPr>
+          <p:cNvPr id="3" name="Content Placeholder 2"/>
+          <p:cNvSpPr>
+            <a:spLocks noGrp="1"/>
+          </p:cNvSpPr>
+          <p:nvPr>
+            <p:ph idx="1"/>
+          </p:nvPr>
+        </p:nvSpPr>
+        <p:spPr/>
+        <p:txBody>
+          <a:bodyPr/>
+          <a:lstStyle/>
+          <a:p>
+            <a:pPr lvl="0" indent="0" marL="0">
+              <a:spcBef>
+                <a:spcPts val="3000"/>
+              </a:spcBef>
+              <a:buNone/>
+            </a:pPr>
+            <a:r>
+              <a:rPr b="1"/>
+              <a:t>Derived Variables</a:t>
+            </a:r>
+          </a:p>
+          <a:p>
+            <a:pPr lvl="0"/>
+            <a:r>
+              <a:rPr b="1"/>
+              <a:t>Percentages, Proportions</a:t>
+            </a:r>
+            <a:r>
+              <a:rPr/>
+              <a:t>: Ratio of some component to total</a:t>
+            </a:r>
+          </a:p>
+          <a:p>
+            <a:pPr lvl="0"/>
+            <a:r>
+              <a:rPr b="1"/>
+              <a:t>Ratios</a:t>
+            </a:r>
+            <a:r>
+              <a:rPr/>
+              <a:t>: Relation of two variables</a:t>
+            </a:r>
+          </a:p>
+          <a:p>
+            <a:pPr lvl="0"/>
+            <a:r>
+              <a:rPr b="1"/>
+              <a:t>Rates</a:t>
+            </a:r>
+            <a:r>
+              <a:rPr/>
+              <a:t>: Quantity per unit (time, mass, etc.)</a:t>
+            </a:r>
+          </a:p>
+          <a:p>
+            <a:pPr lvl="0"/>
+            <a:r>
+              <a:rPr b="1"/>
+              <a:t>Indices</a:t>
+            </a:r>
+            <a:r>
+              <a:rPr/>
+              <a:t>: More complex derived variables (e.g., condition index)</a:t>
+            </a:r>
+          </a:p>
+          <a:p>
+            <a:pPr lvl="0" indent="0" marL="0">
+              <a:buNone/>
+            </a:pPr>
+            <a:r>
+              <a:rPr/>
+              <a:t>Let’s explore our grayling dataset and identify the types of variables it contains.</a:t>
+            </a:r>
+          </a:p>
+        </p:txBody>
+      </p:sp>
+    </p:spTree>
+  </p:cSld>
+</p:sld>
+</file>
+
+<file path=ppt/slides/slide9.xml><?xml version="1.0" encoding="utf-8"?>
 <p:sld xmlns:a="http://schemas.openxmlformats.org/drawingml/2006/main" xmlns:r="http://schemas.openxmlformats.org/officeDocument/2006/relationships" xmlns:p="http://schemas.openxmlformats.org/presentationml/2006/main">
   <p:cSld>
     <p:spTree>
@@ -16918,141 +17142,6 @@
           </a:ln>
         </p:spPr>
       </p:pic>
-    </p:spTree>
-  </p:cSld>
-</p:sld>
-</file>
-
-<file path=ppt/slides/slide9.xml><?xml version="1.0" encoding="utf-8"?>
-<p:sld xmlns:a="http://schemas.openxmlformats.org/drawingml/2006/main" xmlns:r="http://schemas.openxmlformats.org/officeDocument/2006/relationships" xmlns:p="http://schemas.openxmlformats.org/presentationml/2006/main">
-  <p:cSld>
-    <p:spTree>
-      <p:nvGrpSpPr>
-        <p:cNvPr id="1" name=""/>
-        <p:cNvGrpSpPr/>
-        <p:nvPr/>
-      </p:nvGrpSpPr>
-      <p:grpSpPr>
-        <a:xfrm>
-          <a:off x="0" y="0"/>
-          <a:ext cx="0" cy="0"/>
-          <a:chOff x="0" y="0"/>
-          <a:chExt cx="0" cy="0"/>
-        </a:xfrm>
-      </p:grpSpPr>
-      <p:sp>
-        <p:nvSpPr>
-          <p:cNvPr id="2" name="Title 1"/>
-          <p:cNvSpPr>
-            <a:spLocks noGrp="1"/>
-          </p:cNvSpPr>
-          <p:nvPr>
-            <p:ph type="title"/>
-          </p:nvPr>
-        </p:nvSpPr>
-        <p:spPr>
-          <a:xfrm>
-            <a:off x="0" y="0"/>
-            <a:ext cx="9144000" cy="582780"/>
-          </a:xfrm>
-        </p:spPr>
-        <p:txBody>
-          <a:bodyPr/>
-          <a:lstStyle/>
-          <a:p>
-            <a:pPr lvl="0" indent="0" marL="0">
-              <a:buNone/>
-            </a:pPr>
-            <a:r>
-              <a:rPr/>
-              <a:t>Practice Exercise 1: Fish Data</a:t>
-            </a:r>
-          </a:p>
-        </p:txBody>
-      </p:sp>
-      <p:sp>
-        <p:nvSpPr>
-          <p:cNvPr id="3" name="Content Placeholder 2"/>
-          <p:cNvSpPr>
-            <a:spLocks noGrp="1"/>
-          </p:cNvSpPr>
-          <p:nvPr>
-            <p:ph idx="1"/>
-          </p:nvPr>
-        </p:nvSpPr>
-        <p:spPr/>
-        <p:txBody>
-          <a:bodyPr/>
-          <a:lstStyle/>
-          <a:p>
-            <a:pPr lvl="0" indent="0" marL="1270000">
-              <a:buNone/>
-            </a:pPr>
-            <a:r>
-              <a:rPr sz="2000" b="1"/>
-              <a:t>Practice Exercise 1: Can you open the fish data </a:t>
-            </a:r>
-            <a:r>
-              <a:rPr sz="2000" b="1">
-                <a:latin typeface="Courier"/>
-              </a:rPr>
-              <a:t>gray_I3_I8.csv</a:t>
-            </a:r>
-            <a:r>
-              <a:rPr sz="2000" b="1"/>
-              <a:t> and look at the structure and make a histogram?</a:t>
-            </a:r>
-          </a:p>
-          <a:p>
-            <a:pPr lvl="0" indent="0" marL="1270000">
-              <a:buNone/>
-            </a:pPr>
-            <a:r>
-              <a:rPr sz="2000"/>
-              <a:t>Note the variation around the mean… some could be due to measurement error</a:t>
-            </a:r>
-          </a:p>
-          <a:p>
-            <a:pPr lvl="0" indent="0" marL="1270000">
-              <a:buNone/>
-            </a:pPr>
-            <a:r>
-              <a:rPr sz="2000"/>
-              <a:t>Let’s recreate the basic histogram of fish lengths using </a:t>
-            </a:r>
-            <a:r>
-              <a:rPr sz="2000">
-                <a:latin typeface="Courier"/>
-              </a:rPr>
-              <a:t>gray_I3_I8.csv</a:t>
-            </a:r>
-          </a:p>
-          <a:p>
-            <a:pPr lvl="0" indent="0">
-              <a:buNone/>
-            </a:pPr>
-            <a:r>
-              <a:rPr>
-                <a:solidFill>
-                  <a:srgbClr val="5E5E5E"/>
-                </a:solidFill>
-                <a:latin typeface="Courier"/>
-              </a:rPr>
-              <a:t># Write your code here to read in the file</a:t>
-            </a:r>
-            <a:br/>
-            <a:r>
-              <a:rPr>
-                <a:solidFill>
-                  <a:srgbClr val="5E5E5E"/>
-                </a:solidFill>
-                <a:latin typeface="Courier"/>
-              </a:rPr>
-              <a:t># How do you examine the data - what are the ways you think and lets try it!</a:t>
-            </a:r>
-          </a:p>
-        </p:txBody>
-      </p:sp>
     </p:spTree>
   </p:cSld>
 </p:sld>

--- a/docs/ecostats_lectures/lecture_03/03_01_lecture_powerpoint.pptx
+++ b/docs/ecostats_lectures/lecture_03/03_01_lecture_powerpoint.pptx
@@ -5017,8 +5017,8 @@
                                   <m:d>
                                     <m:dPr>
                                       <m:begChr m:val="("/>
+                                      <m:sepChr m:val=""/>
                                       <m:endChr m:val=")"/>
-                                      <m:sepChr m:val=""/>
                                       <m:grow/>
                                     </m:dPr>
                                     <m:e>
@@ -5162,8 +5162,8 @@
                                       <m:d>
                                         <m:dPr>
                                           <m:begChr m:val="("/>
+                                          <m:sepChr m:val=""/>
                                           <m:endChr m:val=")"/>
-                                          <m:sepChr m:val=""/>
                                           <m:grow/>
                                         </m:dPr>
                                         <m:e>
@@ -16100,6 +16100,11 @@
                   <a:rPr/>
                   <a:t>When reporting results, always include a measure of precision (SE or</a:t>
                 </a:r>
+              </a:p>
+              <a:p>
+                <a:pPr lvl="1" indent="-342900" marL="685800">
+                  <a:buAutoNum startAt="101" type="romanUcParenR"/>
+                </a:pPr>
               </a:p>
             </p:txBody>
           </p:sp>
